--- a/deck/dist/humandetector-editable.pptx
+++ b/deck/dist/humandetector-editable.pptx
@@ -832,8 +832,8 @@
         </p:nvSpPr>
         <p:spPr>
           <a:xfrm>
-            <a:off x="762120" y="2251440"/>
-            <a:ext cx="8381880" cy="937800"/>
+            <a:off x="762120" y="2520720"/>
+            <a:ext cx="1536840" cy="226080"/>
           </a:xfrm>
           <a:prstGeom prst="rect">
             <a:avLst/>
@@ -850,6 +850,54 @@
           <a:p>
             <a:pPr/>
             <a:r>
+              <a:rPr lang="en-US" sz="1350" b="0" u="none" strike="noStrike">
+                <a:solidFill>
+                  <a:srgbClr val="3DDC84"/>
+                </a:solidFill>
+                <a:effectLst/>
+                <a:uFillTx/>
+                <a:latin typeface="JetBrainsMonoNF"/>
+                <a:ea typeface="JetBrainsMonoNF"/>
+              </a:rPr>
+              <a:t>LEVANTÁ LA MANO</a:t>
+            </a:r>
+            <a:endParaRPr lang="en-US" sz="1350" b="0" u="none" strike="noStrike">
+              <a:solidFill>
+                <a:srgbClr val="000000"/>
+              </a:solidFill>
+              <a:effectLst/>
+              <a:uFillTx/>
+              <a:latin typeface="Times New Roman"/>
+            </a:endParaRPr>
+          </a:p>
+        </p:txBody>
+      </p:sp>
+      <p:sp>
+        <p:nvSpPr>
+          <p:cNvPr id="10" name=""/>
+          <p:cNvSpPr txBox="1"/>
+          <p:nvPr/>
+        </p:nvSpPr>
+        <p:spPr>
+          <a:xfrm>
+            <a:off x="762120" y="2918160"/>
+            <a:ext cx="6798960" cy="937800"/>
+          </a:xfrm>
+          <a:prstGeom prst="rect">
+            <a:avLst/>
+          </a:prstGeom>
+          <a:noFill/>
+          <a:ln w="0">
+            <a:noFill/>
+          </a:ln>
+        </p:spPr>
+        <p:txBody>
+          <a:bodyPr wrap="none" lIns="0" tIns="0" rIns="0" bIns="0" anchor="t">
+            <a:spAutoFit/>
+          </a:bodyPr>
+          <a:p>
+            <a:pPr/>
+            <a:r>
               <a:rPr lang="en-US" sz="6600" b="1" u="none" strike="noStrike">
                 <a:solidFill>
                   <a:srgbClr val="EDEDED"/>
@@ -859,78 +907,30 @@
                 <a:latin typeface="Arial"/>
                 <a:ea typeface="Arial"/>
               </a:rPr>
-              <a:t>LEVANTÁ LA MANO:</a:t>
-            </a:r>
-            <a:endParaRPr lang="en-US" sz="6600" b="0" u="none" strike="noStrike">
-              <a:solidFill>
-                <a:srgbClr val="000000"/>
-              </a:solidFill>
-              <a:effectLst/>
-              <a:uFillTx/>
-              <a:latin typeface="Times New Roman"/>
-            </a:endParaRPr>
-          </a:p>
-        </p:txBody>
-      </p:sp>
-      <p:sp>
-        <p:nvSpPr>
-          <p:cNvPr id="10" name=""/>
-          <p:cNvSpPr txBox="1"/>
-          <p:nvPr/>
-        </p:nvSpPr>
-        <p:spPr>
-          <a:xfrm>
-            <a:off x="762120" y="3165840"/>
-            <a:ext cx="9034560" cy="937800"/>
-          </a:xfrm>
-          <a:prstGeom prst="rect">
-            <a:avLst/>
-          </a:prstGeom>
-          <a:noFill/>
-          <a:ln w="0">
-            <a:noFill/>
-          </a:ln>
-        </p:spPr>
-        <p:txBody>
-          <a:bodyPr wrap="none" lIns="0" tIns="0" rIns="0" bIns="0" anchor="t">
-            <a:spAutoFit/>
-          </a:bodyPr>
-          <a:p>
-            <a:pPr/>
+              <a:t>¿SOS </a:t>
+            </a:r>
             <a:r>
               <a:rPr lang="en-US" sz="6600" b="1" u="none" strike="noStrike">
                 <a:solidFill>
-                  <a:srgbClr val="EDEDED"/>
+                  <a:srgbClr val="3DDC84"/>
                 </a:solidFill>
                 <a:effectLst/>
                 <a:uFillTx/>
                 <a:latin typeface="Arial"/>
                 <a:ea typeface="Arial"/>
               </a:rPr>
-              <a:t>¿QUIÉN ES </a:t>
+              <a:t>HUMANO</a:t>
             </a:r>
             <a:r>
               <a:rPr lang="en-US" sz="6600" b="1" u="none" strike="noStrike">
                 <a:solidFill>
-                  <a:srgbClr val="3DDC84"/>
+                  <a:srgbClr val="EDEDED"/>
                 </a:solidFill>
                 <a:effectLst/>
                 <a:uFillTx/>
                 <a:latin typeface="Arial"/>
                 <a:ea typeface="Arial"/>
               </a:rPr>
-              <a:t>HUMANO</a:t>
-            </a:r>
-            <a:r>
-              <a:rPr lang="en-US" sz="6600" b="1" u="none" strike="noStrike">
-                <a:solidFill>
-                  <a:srgbClr val="EDEDED"/>
-                </a:solidFill>
-                <a:effectLst/>
-                <a:uFillTx/>
-                <a:latin typeface="Arial"/>
-                <a:ea typeface="Arial"/>
-              </a:rPr>
               <a:t>?</a:t>
             </a:r>
             <a:endParaRPr lang="en-US" sz="6600" b="0" u="none" strike="noStrike">
@@ -952,7 +952,7 @@
         </p:nvSpPr>
         <p:spPr>
           <a:xfrm>
-            <a:off x="762120" y="4315680"/>
+            <a:off x="762120" y="4077720"/>
             <a:ext cx="4584600" cy="233640"/>
           </a:xfrm>
           <a:prstGeom prst="rect">

--- a/deck/dist/humandetector-editable.pptx
+++ b/deck/dist/humandetector-editable.pptx
@@ -14,6 +14,7 @@
     <p:sldId id="262" r:id="rId9"/>
     <p:sldId id="263" r:id="rId10"/>
     <p:sldId id="264" r:id="rId11"/>
+    <p:sldId id="265" r:id="rId12"/>
   </p:sldIdLst>
   <p:sldSz cx="12192000" cy="6858000"/>
   <p:notesSz cx="7772400" cy="10058400"/>
@@ -1055,6 +1056,897 @@
 </p:sld>
 </file>
 
+<file path=ppt/slides/slide10.xml><?xml version="1.0" encoding="utf-8"?>
+<p:sld xmlns:a="http://schemas.openxmlformats.org/drawingml/2006/main" xmlns:p="http://schemas.openxmlformats.org/presentationml/2006/main" xmlns:r="http://schemas.openxmlformats.org/officeDocument/2006/relationships" xmlns:p14="http://schemas.microsoft.com/office/powerpoint/2010/main" xmlns:p15="http://schemas.microsoft.com/office/powerpoint/2012/main" xmlns:mc="http://schemas.openxmlformats.org/markup-compatibility/2006">
+  <p:cSld>
+    <p:spTree>
+      <p:nvGrpSpPr>
+        <p:cNvPr id="1" name=""/>
+        <p:cNvGrpSpPr/>
+        <p:nvPr/>
+      </p:nvGrpSpPr>
+      <p:grpSpPr>
+        <a:xfrm>
+          <a:off x="0" y="0"/>
+          <a:ext cx="0" cy="0"/>
+          <a:chOff x="0" y="0"/>
+          <a:chExt cx="0" cy="0"/>
+        </a:xfrm>
+      </p:grpSpPr>
+      <p:sp>
+        <p:nvSpPr>
+          <p:cNvPr id="237" name=""/>
+          <p:cNvSpPr/>
+          <p:nvPr/>
+        </p:nvSpPr>
+        <p:spPr>
+          <a:xfrm>
+            <a:off x="0" y="0"/>
+            <a:ext cx="12192120" cy="6858000"/>
+          </a:xfrm>
+          <a:custGeom>
+            <a:avLst/>
+            <a:gdLst/>
+            <a:ahLst/>
+            <a:rect l="0" t="0" r="r" b="b"/>
+            <a:pathLst>
+              <a:path w="33867" h="19050">
+                <a:moveTo>
+                  <a:pt x="0" y="0"/>
+                </a:moveTo>
+                <a:lnTo>
+                  <a:pt x="33867" y="0"/>
+                </a:lnTo>
+                <a:lnTo>
+                  <a:pt x="33867" y="19050"/>
+                </a:lnTo>
+                <a:lnTo>
+                  <a:pt x="0" y="19050"/>
+                </a:lnTo>
+                <a:lnTo>
+                  <a:pt x="0" y="0"/>
+                </a:lnTo>
+                <a:close/>
+              </a:path>
+            </a:pathLst>
+          </a:custGeom>
+          <a:solidFill>
+            <a:srgbClr val="FFFFFF"/>
+          </a:solidFill>
+          <a:ln w="0">
+            <a:noFill/>
+          </a:ln>
+        </p:spPr>
+        <p:txBody>
+          <a:bodyPr lIns="0" tIns="0" rIns="0" bIns="0" anchor="t">
+            <a:noAutofit/>
+          </a:bodyPr>
+          <a:p>
+            <a:endParaRPr lang="en-US" sz="2400" b="0" u="none" strike="noStrike">
+              <a:solidFill>
+                <a:srgbClr val="000000"/>
+              </a:solidFill>
+              <a:effectLst/>
+              <a:uFillTx/>
+              <a:latin typeface="Times New Roman"/>
+            </a:endParaRPr>
+          </a:p>
+        </p:txBody>
+      </p:sp>
+      <p:sp>
+        <p:nvSpPr>
+          <p:cNvPr id="238" name=""/>
+          <p:cNvSpPr/>
+          <p:nvPr/>
+        </p:nvSpPr>
+        <p:spPr>
+          <a:xfrm>
+            <a:off x="0" y="0"/>
+            <a:ext cx="12192120" cy="6858000"/>
+          </a:xfrm>
+          <a:custGeom>
+            <a:avLst/>
+            <a:gdLst/>
+            <a:ahLst/>
+            <a:rect l="0" t="0" r="r" b="b"/>
+            <a:pathLst>
+              <a:path w="33867" h="19050">
+                <a:moveTo>
+                  <a:pt x="0" y="0"/>
+                </a:moveTo>
+                <a:lnTo>
+                  <a:pt x="33867" y="0"/>
+                </a:lnTo>
+                <a:lnTo>
+                  <a:pt x="33867" y="19050"/>
+                </a:lnTo>
+                <a:lnTo>
+                  <a:pt x="0" y="19050"/>
+                </a:lnTo>
+                <a:lnTo>
+                  <a:pt x="0" y="0"/>
+                </a:lnTo>
+                <a:close/>
+              </a:path>
+            </a:pathLst>
+          </a:custGeom>
+          <a:solidFill>
+            <a:srgbClr val="FFFFFF"/>
+          </a:solidFill>
+          <a:ln w="0">
+            <a:noFill/>
+          </a:ln>
+        </p:spPr>
+        <p:txBody>
+          <a:bodyPr lIns="0" tIns="0" rIns="0" bIns="0" anchor="t">
+            <a:noAutofit/>
+          </a:bodyPr>
+          <a:p>
+            <a:endParaRPr lang="en-US" sz="2400" b="0" u="none" strike="noStrike">
+              <a:solidFill>
+                <a:srgbClr val="000000"/>
+              </a:solidFill>
+              <a:effectLst/>
+              <a:uFillTx/>
+              <a:latin typeface="Times New Roman"/>
+            </a:endParaRPr>
+          </a:p>
+        </p:txBody>
+      </p:sp>
+      <p:sp>
+        <p:nvSpPr>
+          <p:cNvPr id="239" name=""/>
+          <p:cNvSpPr/>
+          <p:nvPr/>
+        </p:nvSpPr>
+        <p:spPr>
+          <a:xfrm>
+            <a:off x="0" y="0"/>
+            <a:ext cx="12192120" cy="6858000"/>
+          </a:xfrm>
+          <a:custGeom>
+            <a:avLst/>
+            <a:gdLst/>
+            <a:ahLst/>
+            <a:rect l="0" t="0" r="r" b="b"/>
+            <a:pathLst>
+              <a:path w="33867" h="19050">
+                <a:moveTo>
+                  <a:pt x="0" y="0"/>
+                </a:moveTo>
+                <a:lnTo>
+                  <a:pt x="33867" y="0"/>
+                </a:lnTo>
+                <a:lnTo>
+                  <a:pt x="33867" y="19050"/>
+                </a:lnTo>
+                <a:lnTo>
+                  <a:pt x="0" y="19050"/>
+                </a:lnTo>
+                <a:lnTo>
+                  <a:pt x="0" y="0"/>
+                </a:lnTo>
+                <a:close/>
+              </a:path>
+            </a:pathLst>
+          </a:custGeom>
+          <a:solidFill>
+            <a:srgbClr val="0A0A0A"/>
+          </a:solidFill>
+          <a:ln w="0">
+            <a:noFill/>
+          </a:ln>
+        </p:spPr>
+        <p:txBody>
+          <a:bodyPr lIns="0" tIns="0" rIns="0" bIns="0" anchor="t">
+            <a:noAutofit/>
+          </a:bodyPr>
+          <a:p>
+            <a:endParaRPr lang="en-US" sz="2400" b="0" u="none" strike="noStrike">
+              <a:solidFill>
+                <a:srgbClr val="FFFFFF"/>
+              </a:solidFill>
+              <a:effectLst/>
+              <a:uFillTx/>
+              <a:latin typeface="Times New Roman"/>
+            </a:endParaRPr>
+          </a:p>
+        </p:txBody>
+      </p:sp>
+      <p:sp>
+        <p:nvSpPr>
+          <p:cNvPr id="240" name=""/>
+          <p:cNvSpPr/>
+          <p:nvPr/>
+        </p:nvSpPr>
+        <p:spPr>
+          <a:xfrm>
+            <a:off x="4195440" y="1471320"/>
+            <a:ext cx="3800880" cy="3800880"/>
+          </a:xfrm>
+          <a:custGeom>
+            <a:avLst/>
+            <a:gdLst/>
+            <a:ahLst/>
+            <a:rect l="0" t="0" r="r" b="b"/>
+            <a:pathLst>
+              <a:path w="10558" h="10558">
+                <a:moveTo>
+                  <a:pt x="0" y="10333"/>
+                </a:moveTo>
+                <a:lnTo>
+                  <a:pt x="0" y="225"/>
+                </a:lnTo>
+                <a:cubicBezTo>
+                  <a:pt x="0" y="210"/>
+                  <a:pt x="2" y="196"/>
+                  <a:pt x="5" y="181"/>
+                </a:cubicBezTo>
+                <a:cubicBezTo>
+                  <a:pt x="8" y="167"/>
+                  <a:pt x="12" y="153"/>
+                  <a:pt x="18" y="139"/>
+                </a:cubicBezTo>
+                <a:cubicBezTo>
+                  <a:pt x="23" y="126"/>
+                  <a:pt x="30" y="113"/>
+                  <a:pt x="38" y="100"/>
+                </a:cubicBezTo>
+                <a:cubicBezTo>
+                  <a:pt x="47" y="88"/>
+                  <a:pt x="56" y="77"/>
+                  <a:pt x="66" y="66"/>
+                </a:cubicBezTo>
+                <a:cubicBezTo>
+                  <a:pt x="77" y="56"/>
+                  <a:pt x="88" y="46"/>
+                  <a:pt x="100" y="38"/>
+                </a:cubicBezTo>
+                <a:cubicBezTo>
+                  <a:pt x="113" y="30"/>
+                  <a:pt x="126" y="23"/>
+                  <a:pt x="139" y="17"/>
+                </a:cubicBezTo>
+                <a:cubicBezTo>
+                  <a:pt x="153" y="12"/>
+                  <a:pt x="167" y="8"/>
+                  <a:pt x="181" y="5"/>
+                </a:cubicBezTo>
+                <a:cubicBezTo>
+                  <a:pt x="196" y="2"/>
+                  <a:pt x="211" y="0"/>
+                  <a:pt x="225" y="0"/>
+                </a:cubicBezTo>
+                <a:lnTo>
+                  <a:pt x="10333" y="0"/>
+                </a:lnTo>
+                <a:cubicBezTo>
+                  <a:pt x="10348" y="0"/>
+                  <a:pt x="10363" y="2"/>
+                  <a:pt x="10377" y="5"/>
+                </a:cubicBezTo>
+                <a:cubicBezTo>
+                  <a:pt x="10392" y="8"/>
+                  <a:pt x="10406" y="12"/>
+                  <a:pt x="10419" y="17"/>
+                </a:cubicBezTo>
+                <a:cubicBezTo>
+                  <a:pt x="10433" y="23"/>
+                  <a:pt x="10446" y="30"/>
+                  <a:pt x="10458" y="38"/>
+                </a:cubicBezTo>
+                <a:cubicBezTo>
+                  <a:pt x="10471" y="46"/>
+                  <a:pt x="10482" y="56"/>
+                  <a:pt x="10492" y="66"/>
+                </a:cubicBezTo>
+                <a:cubicBezTo>
+                  <a:pt x="10503" y="77"/>
+                  <a:pt x="10512" y="88"/>
+                  <a:pt x="10520" y="100"/>
+                </a:cubicBezTo>
+                <a:cubicBezTo>
+                  <a:pt x="10529" y="113"/>
+                  <a:pt x="10535" y="126"/>
+                  <a:pt x="10541" y="139"/>
+                </a:cubicBezTo>
+                <a:cubicBezTo>
+                  <a:pt x="10547" y="153"/>
+                  <a:pt x="10551" y="167"/>
+                  <a:pt x="10554" y="181"/>
+                </a:cubicBezTo>
+                <a:cubicBezTo>
+                  <a:pt x="10557" y="196"/>
+                  <a:pt x="10558" y="210"/>
+                  <a:pt x="10558" y="225"/>
+                </a:cubicBezTo>
+                <a:lnTo>
+                  <a:pt x="10558" y="10333"/>
+                </a:lnTo>
+                <a:cubicBezTo>
+                  <a:pt x="10558" y="10348"/>
+                  <a:pt x="10557" y="10363"/>
+                  <a:pt x="10554" y="10377"/>
+                </a:cubicBezTo>
+                <a:cubicBezTo>
+                  <a:pt x="10551" y="10392"/>
+                  <a:pt x="10547" y="10406"/>
+                  <a:pt x="10541" y="10419"/>
+                </a:cubicBezTo>
+                <a:cubicBezTo>
+                  <a:pt x="10535" y="10433"/>
+                  <a:pt x="10529" y="10446"/>
+                  <a:pt x="10520" y="10458"/>
+                </a:cubicBezTo>
+                <a:cubicBezTo>
+                  <a:pt x="10512" y="10471"/>
+                  <a:pt x="10503" y="10482"/>
+                  <a:pt x="10492" y="10492"/>
+                </a:cubicBezTo>
+                <a:cubicBezTo>
+                  <a:pt x="10482" y="10503"/>
+                  <a:pt x="10471" y="10512"/>
+                  <a:pt x="10458" y="10520"/>
+                </a:cubicBezTo>
+                <a:cubicBezTo>
+                  <a:pt x="10446" y="10528"/>
+                  <a:pt x="10433" y="10535"/>
+                  <a:pt x="10419" y="10541"/>
+                </a:cubicBezTo>
+                <a:cubicBezTo>
+                  <a:pt x="10406" y="10547"/>
+                  <a:pt x="10392" y="10551"/>
+                  <a:pt x="10377" y="10554"/>
+                </a:cubicBezTo>
+                <a:cubicBezTo>
+                  <a:pt x="10363" y="10557"/>
+                  <a:pt x="10348" y="10558"/>
+                  <a:pt x="10333" y="10558"/>
+                </a:cubicBezTo>
+                <a:lnTo>
+                  <a:pt x="225" y="10558"/>
+                </a:lnTo>
+                <a:cubicBezTo>
+                  <a:pt x="211" y="10558"/>
+                  <a:pt x="196" y="10557"/>
+                  <a:pt x="181" y="10554"/>
+                </a:cubicBezTo>
+                <a:cubicBezTo>
+                  <a:pt x="167" y="10551"/>
+                  <a:pt x="153" y="10547"/>
+                  <a:pt x="139" y="10541"/>
+                </a:cubicBezTo>
+                <a:cubicBezTo>
+                  <a:pt x="126" y="10535"/>
+                  <a:pt x="113" y="10528"/>
+                  <a:pt x="100" y="10520"/>
+                </a:cubicBezTo>
+                <a:cubicBezTo>
+                  <a:pt x="88" y="10512"/>
+                  <a:pt x="77" y="10503"/>
+                  <a:pt x="66" y="10492"/>
+                </a:cubicBezTo>
+                <a:cubicBezTo>
+                  <a:pt x="56" y="10482"/>
+                  <a:pt x="47" y="10471"/>
+                  <a:pt x="38" y="10458"/>
+                </a:cubicBezTo>
+                <a:cubicBezTo>
+                  <a:pt x="30" y="10446"/>
+                  <a:pt x="23" y="10433"/>
+                  <a:pt x="18" y="10419"/>
+                </a:cubicBezTo>
+                <a:cubicBezTo>
+                  <a:pt x="12" y="10406"/>
+                  <a:pt x="8" y="10392"/>
+                  <a:pt x="5" y="10377"/>
+                </a:cubicBezTo>
+                <a:cubicBezTo>
+                  <a:pt x="2" y="10363"/>
+                  <a:pt x="0" y="10348"/>
+                  <a:pt x="0" y="10333"/>
+                </a:cubicBezTo>
+                <a:close/>
+              </a:path>
+            </a:pathLst>
+          </a:custGeom>
+          <a:solidFill>
+            <a:srgbClr val="FFFFFF"/>
+          </a:solidFill>
+          <a:ln w="0">
+            <a:noFill/>
+          </a:ln>
+        </p:spPr>
+        <p:txBody>
+          <a:bodyPr lIns="0" tIns="0" rIns="0" bIns="0" anchor="t">
+            <a:noAutofit/>
+          </a:bodyPr>
+          <a:p>
+            <a:endParaRPr lang="en-US" sz="2400" b="0" u="none" strike="noStrike">
+              <a:solidFill>
+                <a:srgbClr val="000000"/>
+              </a:solidFill>
+              <a:effectLst/>
+              <a:uFillTx/>
+              <a:latin typeface="Times New Roman"/>
+            </a:endParaRPr>
+          </a:p>
+        </p:txBody>
+      </p:sp>
+      <p:sp>
+        <p:nvSpPr>
+          <p:cNvPr id="241" name=""/>
+          <p:cNvSpPr/>
+          <p:nvPr/>
+        </p:nvSpPr>
+        <p:spPr>
+          <a:xfrm>
+            <a:off x="4195440" y="1471320"/>
+            <a:ext cx="3800880" cy="3800880"/>
+          </a:xfrm>
+          <a:custGeom>
+            <a:avLst/>
+            <a:gdLst/>
+            <a:ahLst/>
+            <a:rect l="0" t="0" r="r" b="b"/>
+            <a:pathLst>
+              <a:path w="10558" h="10558">
+                <a:moveTo>
+                  <a:pt x="0" y="10333"/>
+                </a:moveTo>
+                <a:lnTo>
+                  <a:pt x="0" y="225"/>
+                </a:lnTo>
+                <a:cubicBezTo>
+                  <a:pt x="0" y="210"/>
+                  <a:pt x="2" y="196"/>
+                  <a:pt x="5" y="181"/>
+                </a:cubicBezTo>
+                <a:cubicBezTo>
+                  <a:pt x="8" y="167"/>
+                  <a:pt x="12" y="153"/>
+                  <a:pt x="18" y="139"/>
+                </a:cubicBezTo>
+                <a:cubicBezTo>
+                  <a:pt x="23" y="126"/>
+                  <a:pt x="30" y="113"/>
+                  <a:pt x="38" y="100"/>
+                </a:cubicBezTo>
+                <a:cubicBezTo>
+                  <a:pt x="47" y="88"/>
+                  <a:pt x="56" y="77"/>
+                  <a:pt x="66" y="66"/>
+                </a:cubicBezTo>
+                <a:cubicBezTo>
+                  <a:pt x="77" y="56"/>
+                  <a:pt x="88" y="46"/>
+                  <a:pt x="100" y="38"/>
+                </a:cubicBezTo>
+                <a:cubicBezTo>
+                  <a:pt x="113" y="30"/>
+                  <a:pt x="126" y="23"/>
+                  <a:pt x="139" y="17"/>
+                </a:cubicBezTo>
+                <a:cubicBezTo>
+                  <a:pt x="153" y="12"/>
+                  <a:pt x="167" y="8"/>
+                  <a:pt x="181" y="5"/>
+                </a:cubicBezTo>
+                <a:cubicBezTo>
+                  <a:pt x="196" y="2"/>
+                  <a:pt x="211" y="0"/>
+                  <a:pt x="225" y="0"/>
+                </a:cubicBezTo>
+                <a:lnTo>
+                  <a:pt x="10333" y="0"/>
+                </a:lnTo>
+                <a:cubicBezTo>
+                  <a:pt x="10348" y="0"/>
+                  <a:pt x="10363" y="2"/>
+                  <a:pt x="10377" y="5"/>
+                </a:cubicBezTo>
+                <a:cubicBezTo>
+                  <a:pt x="10392" y="8"/>
+                  <a:pt x="10406" y="12"/>
+                  <a:pt x="10419" y="17"/>
+                </a:cubicBezTo>
+                <a:cubicBezTo>
+                  <a:pt x="10433" y="23"/>
+                  <a:pt x="10446" y="30"/>
+                  <a:pt x="10458" y="38"/>
+                </a:cubicBezTo>
+                <a:cubicBezTo>
+                  <a:pt x="10471" y="46"/>
+                  <a:pt x="10482" y="56"/>
+                  <a:pt x="10492" y="66"/>
+                </a:cubicBezTo>
+                <a:cubicBezTo>
+                  <a:pt x="10503" y="77"/>
+                  <a:pt x="10512" y="88"/>
+                  <a:pt x="10520" y="100"/>
+                </a:cubicBezTo>
+                <a:cubicBezTo>
+                  <a:pt x="10529" y="113"/>
+                  <a:pt x="10535" y="126"/>
+                  <a:pt x="10541" y="139"/>
+                </a:cubicBezTo>
+                <a:cubicBezTo>
+                  <a:pt x="10547" y="153"/>
+                  <a:pt x="10551" y="167"/>
+                  <a:pt x="10554" y="181"/>
+                </a:cubicBezTo>
+                <a:cubicBezTo>
+                  <a:pt x="10557" y="196"/>
+                  <a:pt x="10558" y="210"/>
+                  <a:pt x="10558" y="225"/>
+                </a:cubicBezTo>
+                <a:lnTo>
+                  <a:pt x="10558" y="10333"/>
+                </a:lnTo>
+                <a:cubicBezTo>
+                  <a:pt x="10558" y="10348"/>
+                  <a:pt x="10557" y="10363"/>
+                  <a:pt x="10554" y="10377"/>
+                </a:cubicBezTo>
+                <a:cubicBezTo>
+                  <a:pt x="10551" y="10392"/>
+                  <a:pt x="10547" y="10406"/>
+                  <a:pt x="10541" y="10419"/>
+                </a:cubicBezTo>
+                <a:cubicBezTo>
+                  <a:pt x="10535" y="10433"/>
+                  <a:pt x="10529" y="10446"/>
+                  <a:pt x="10520" y="10458"/>
+                </a:cubicBezTo>
+                <a:cubicBezTo>
+                  <a:pt x="10512" y="10471"/>
+                  <a:pt x="10503" y="10482"/>
+                  <a:pt x="10492" y="10492"/>
+                </a:cubicBezTo>
+                <a:cubicBezTo>
+                  <a:pt x="10482" y="10503"/>
+                  <a:pt x="10471" y="10512"/>
+                  <a:pt x="10458" y="10520"/>
+                </a:cubicBezTo>
+                <a:cubicBezTo>
+                  <a:pt x="10446" y="10528"/>
+                  <a:pt x="10433" y="10535"/>
+                  <a:pt x="10419" y="10541"/>
+                </a:cubicBezTo>
+                <a:cubicBezTo>
+                  <a:pt x="10406" y="10547"/>
+                  <a:pt x="10392" y="10551"/>
+                  <a:pt x="10377" y="10554"/>
+                </a:cubicBezTo>
+                <a:cubicBezTo>
+                  <a:pt x="10363" y="10557"/>
+                  <a:pt x="10348" y="10558"/>
+                  <a:pt x="10333" y="10558"/>
+                </a:cubicBezTo>
+                <a:lnTo>
+                  <a:pt x="225" y="10558"/>
+                </a:lnTo>
+                <a:cubicBezTo>
+                  <a:pt x="211" y="10558"/>
+                  <a:pt x="196" y="10557"/>
+                  <a:pt x="181" y="10554"/>
+                </a:cubicBezTo>
+                <a:cubicBezTo>
+                  <a:pt x="167" y="10551"/>
+                  <a:pt x="153" y="10547"/>
+                  <a:pt x="139" y="10541"/>
+                </a:cubicBezTo>
+                <a:cubicBezTo>
+                  <a:pt x="126" y="10535"/>
+                  <a:pt x="113" y="10528"/>
+                  <a:pt x="100" y="10520"/>
+                </a:cubicBezTo>
+                <a:cubicBezTo>
+                  <a:pt x="88" y="10512"/>
+                  <a:pt x="77" y="10503"/>
+                  <a:pt x="66" y="10492"/>
+                </a:cubicBezTo>
+                <a:cubicBezTo>
+                  <a:pt x="56" y="10482"/>
+                  <a:pt x="47" y="10471"/>
+                  <a:pt x="38" y="10458"/>
+                </a:cubicBezTo>
+                <a:cubicBezTo>
+                  <a:pt x="30" y="10446"/>
+                  <a:pt x="23" y="10433"/>
+                  <a:pt x="18" y="10419"/>
+                </a:cubicBezTo>
+                <a:cubicBezTo>
+                  <a:pt x="12" y="10406"/>
+                  <a:pt x="8" y="10392"/>
+                  <a:pt x="5" y="10377"/>
+                </a:cubicBezTo>
+                <a:cubicBezTo>
+                  <a:pt x="2" y="10363"/>
+                  <a:pt x="0" y="10348"/>
+                  <a:pt x="0" y="10333"/>
+                </a:cubicBezTo>
+                <a:close/>
+              </a:path>
+            </a:pathLst>
+          </a:custGeom>
+          <a:noFill/>
+          <a:ln w="28440">
+            <a:solidFill>
+              <a:srgbClr val="3DDC84"/>
+            </a:solidFill>
+            <a:miter/>
+          </a:ln>
+        </p:spPr>
+        <p:txBody>
+          <a:bodyPr lIns="14040" tIns="14040" rIns="14040" bIns="14040" anchor="t">
+            <a:noAutofit/>
+          </a:bodyPr>
+          <a:p>
+            <a:endParaRPr lang="en-US" sz="2400" b="0" u="none" strike="noStrike">
+              <a:solidFill>
+                <a:srgbClr val="000000"/>
+              </a:solidFill>
+              <a:effectLst/>
+              <a:uFillTx/>
+              <a:latin typeface="Times New Roman"/>
+            </a:endParaRPr>
+          </a:p>
+        </p:txBody>
+      </p:sp>
+      <p:pic>
+        <p:nvPicPr>
+          <p:cNvPr id="242" name=""/>
+          <p:cNvPicPr/>
+          <p:nvPr/>
+        </p:nvPicPr>
+        <p:blipFill>
+          <a:blip r:embed="rId1"/>
+          <a:stretch/>
+        </p:blipFill>
+        <p:spPr>
+          <a:xfrm>
+            <a:off x="4381560" y="1657440"/>
+            <a:ext cx="3428640" cy="3428640"/>
+          </a:xfrm>
+          <a:prstGeom prst="rect">
+            <a:avLst/>
+          </a:prstGeom>
+          <a:noFill/>
+          <a:ln w="0">
+            <a:noFill/>
+          </a:ln>
+        </p:spPr>
+      </p:pic>
+      <p:sp>
+        <p:nvSpPr>
+          <p:cNvPr id="243" name=""/>
+          <p:cNvSpPr txBox="1"/>
+          <p:nvPr/>
+        </p:nvSpPr>
+        <p:spPr>
+          <a:xfrm>
+            <a:off x="4105080" y="635400"/>
+            <a:ext cx="4096800" cy="637560"/>
+          </a:xfrm>
+          <a:prstGeom prst="rect">
+            <a:avLst/>
+          </a:prstGeom>
+          <a:noFill/>
+          <a:ln w="0">
+            <a:noFill/>
+          </a:ln>
+        </p:spPr>
+        <p:txBody>
+          <a:bodyPr wrap="none" lIns="0" tIns="0" rIns="0" bIns="0" anchor="t">
+            <a:spAutoFit/>
+          </a:bodyPr>
+          <a:p>
+            <a:pPr/>
+            <a:r>
+              <a:rPr lang="en-US" sz="4500" b="1" u="none" strike="noStrike">
+                <a:solidFill>
+                  <a:srgbClr val="EDEDED"/>
+                </a:solidFill>
+                <a:effectLst/>
+                <a:uFillTx/>
+                <a:latin typeface="Arial"/>
+                <a:ea typeface="Arial"/>
+              </a:rPr>
+              <a:t>CONECTEMOS</a:t>
+            </a:r>
+            <a:endParaRPr lang="en-US" sz="4500" b="0" u="none" strike="noStrike">
+              <a:solidFill>
+                <a:srgbClr val="000000"/>
+              </a:solidFill>
+              <a:effectLst/>
+              <a:uFillTx/>
+              <a:latin typeface="Times New Roman"/>
+            </a:endParaRPr>
+          </a:p>
+        </p:txBody>
+      </p:sp>
+      <p:sp>
+        <p:nvSpPr>
+          <p:cNvPr id="244" name=""/>
+          <p:cNvSpPr txBox="1"/>
+          <p:nvPr/>
+        </p:nvSpPr>
+        <p:spPr>
+          <a:xfrm>
+            <a:off x="4888800" y="5586840"/>
+            <a:ext cx="2255760" cy="276480"/>
+          </a:xfrm>
+          <a:prstGeom prst="rect">
+            <a:avLst/>
+          </a:prstGeom>
+          <a:noFill/>
+          <a:ln w="0">
+            <a:noFill/>
+          </a:ln>
+        </p:spPr>
+        <p:txBody>
+          <a:bodyPr wrap="none" lIns="0" tIns="0" rIns="0" bIns="0" anchor="t">
+            <a:spAutoFit/>
+          </a:bodyPr>
+          <a:p>
+            <a:pPr/>
+            <a:r>
+              <a:rPr lang="en-US" sz="1650" b="0" u="none" strike="noStrike">
+                <a:solidFill>
+                  <a:srgbClr val="3DDC84"/>
+                </a:solidFill>
+                <a:effectLst/>
+                <a:uFillTx/>
+                <a:latin typeface="JetBrainsMonoNF"/>
+                <a:ea typeface="JetBrainsMonoNF"/>
+              </a:rPr>
+              <a:t>lorengrz.github.io</a:t>
+            </a:r>
+            <a:endParaRPr lang="en-US" sz="1650" b="0" u="none" strike="noStrike">
+              <a:solidFill>
+                <a:srgbClr val="000000"/>
+              </a:solidFill>
+              <a:effectLst/>
+              <a:uFillTx/>
+              <a:latin typeface="Times New Roman"/>
+            </a:endParaRPr>
+          </a:p>
+        </p:txBody>
+      </p:sp>
+      <p:sp>
+        <p:nvSpPr>
+          <p:cNvPr id="245" name=""/>
+          <p:cNvSpPr txBox="1"/>
+          <p:nvPr/>
+        </p:nvSpPr>
+        <p:spPr>
+          <a:xfrm>
+            <a:off x="4469400" y="5925240"/>
+            <a:ext cx="3169080" cy="233640"/>
+          </a:xfrm>
+          <a:prstGeom prst="rect">
+            <a:avLst/>
+          </a:prstGeom>
+          <a:noFill/>
+          <a:ln w="0">
+            <a:noFill/>
+          </a:ln>
+        </p:spPr>
+        <p:txBody>
+          <a:bodyPr wrap="none" lIns="0" tIns="0" rIns="0" bIns="0" anchor="t">
+            <a:spAutoFit/>
+          </a:bodyPr>
+          <a:p>
+            <a:pPr/>
+            <a:r>
+              <a:rPr lang="en-US" sz="1650" b="0" u="none" strike="noStrike">
+                <a:solidFill>
+                  <a:srgbClr val="8A8A8A"/>
+                </a:solidFill>
+                <a:effectLst/>
+                <a:uFillTx/>
+                <a:latin typeface="Arial"/>
+                <a:ea typeface="Arial"/>
+              </a:rPr>
+              <a:t>Mi portfolio. Acá </a:t>
+            </a:r>
+            <a:r>
+              <a:rPr lang="en-US" sz="1650" b="1" u="none" strike="noStrike">
+                <a:solidFill>
+                  <a:srgbClr val="3DDC84"/>
+                </a:solidFill>
+                <a:effectLst/>
+                <a:uFillTx/>
+                <a:latin typeface="Arial"/>
+                <a:ea typeface="Arial"/>
+              </a:rPr>
+              <a:t>sí</a:t>
+            </a:r>
+            <a:r>
+              <a:rPr lang="en-US" sz="1650" b="0" u="none" strike="noStrike">
+                <a:solidFill>
+                  <a:srgbClr val="8A8A8A"/>
+                </a:solidFill>
+                <a:effectLst/>
+                <a:uFillTx/>
+                <a:latin typeface="Arial"/>
+                <a:ea typeface="Arial"/>
+              </a:rPr>
+              <a:t> te dejan pasar.</a:t>
+            </a:r>
+            <a:endParaRPr lang="en-US" sz="1650" b="0" u="none" strike="noStrike">
+              <a:solidFill>
+                <a:srgbClr val="000000"/>
+              </a:solidFill>
+              <a:effectLst/>
+              <a:uFillTx/>
+              <a:latin typeface="Times New Roman"/>
+            </a:endParaRPr>
+          </a:p>
+        </p:txBody>
+      </p:sp>
+      <p:sp>
+        <p:nvSpPr>
+          <p:cNvPr id="246" name=""/>
+          <p:cNvSpPr txBox="1"/>
+          <p:nvPr/>
+        </p:nvSpPr>
+        <p:spPr>
+          <a:xfrm>
+            <a:off x="762120" y="330480"/>
+            <a:ext cx="1977480" cy="189360"/>
+          </a:xfrm>
+          <a:prstGeom prst="rect">
+            <a:avLst/>
+          </a:prstGeom>
+          <a:noFill/>
+          <a:ln w="0">
+            <a:noFill/>
+          </a:ln>
+        </p:spPr>
+        <p:txBody>
+          <a:bodyPr wrap="none" lIns="0" tIns="0" rIns="0" bIns="0" anchor="t">
+            <a:spAutoFit/>
+          </a:bodyPr>
+          <a:p>
+            <a:pPr/>
+            <a:r>
+              <a:rPr lang="en-US" sz="1130" b="0" u="none" strike="noStrike">
+                <a:solidFill>
+                  <a:srgbClr val="1F7A48"/>
+                </a:solidFill>
+                <a:effectLst/>
+                <a:uFillTx/>
+                <a:latin typeface="JetBrainsMonoNF"/>
+                <a:ea typeface="JetBrainsMonoNF"/>
+              </a:rPr>
+              <a:t>HUMAN_PROTOCOL // v4.02</a:t>
+            </a:r>
+            <a:endParaRPr lang="en-US" sz="1130" b="0" u="none" strike="noStrike">
+              <a:solidFill>
+                <a:srgbClr val="000000"/>
+              </a:solidFill>
+              <a:effectLst/>
+              <a:uFillTx/>
+              <a:latin typeface="Times New Roman"/>
+            </a:endParaRPr>
+          </a:p>
+        </p:txBody>
+      </p:sp>
+    </p:spTree>
+  </p:cSld>
+  <mc:AlternateContent>
+    <mc:Choice Requires="p14">
+      <p:transition spd="slow" p14:dur="2000"/>
+    </mc:Choice>
+    <mc:Fallback>
+      <p:transition spd="slow"/>
+    </mc:Fallback>
+  </mc:AlternateContent>
+</p:sld>
+</file>
+
 <file path=ppt/slides/slide2.xml><?xml version="1.0" encoding="utf-8"?>
 <p:sld xmlns:a="http://schemas.openxmlformats.org/drawingml/2006/main" xmlns:p="http://schemas.openxmlformats.org/presentationml/2006/main" xmlns:r="http://schemas.openxmlformats.org/officeDocument/2006/relationships" xmlns:p14="http://schemas.microsoft.com/office/powerpoint/2010/main" xmlns:p15="http://schemas.microsoft.com/office/powerpoint/2012/main" xmlns:mc="http://schemas.openxmlformats.org/markup-compatibility/2006">
   <p:cSld>
@@ -8785,7 +9677,7 @@
         </p:nvSpPr>
         <p:spPr>
           <a:xfrm>
-            <a:off x="1433160" y="2709720"/>
+            <a:off x="1433160" y="2652480"/>
             <a:ext cx="9325440" cy="810000"/>
           </a:xfrm>
           <a:custGeom>
@@ -8796,14 +9688,14 @@
             <a:pathLst>
               <a:path w="25904" h="2250">
                 <a:moveTo>
-                  <a:pt x="0" y="2104"/>
+                  <a:pt x="0" y="2105"/>
                 </a:moveTo>
                 <a:lnTo>
-                  <a:pt x="0" y="145"/>
+                  <a:pt x="0" y="146"/>
                 </a:lnTo>
                 <a:cubicBezTo>
                   <a:pt x="0" y="136"/>
-                  <a:pt x="1" y="126"/>
+                  <a:pt x="1" y="127"/>
                   <a:pt x="3" y="117"/>
                 </a:cubicBezTo>
                 <a:cubicBezTo>
@@ -8818,13 +9710,13 @@
                 </a:cubicBezTo>
                 <a:cubicBezTo>
                   <a:pt x="30" y="57"/>
-                  <a:pt x="36" y="49"/>
+                  <a:pt x="36" y="50"/>
                   <a:pt x="43" y="43"/>
                 </a:cubicBezTo>
                 <a:cubicBezTo>
                   <a:pt x="50" y="36"/>
                   <a:pt x="57" y="30"/>
-                  <a:pt x="65" y="24"/>
+                  <a:pt x="65" y="25"/>
                 </a:cubicBezTo>
                 <a:cubicBezTo>
                   <a:pt x="73" y="19"/>
@@ -8832,7 +9724,7 @@
                   <a:pt x="90" y="11"/>
                 </a:cubicBezTo>
                 <a:cubicBezTo>
-                  <a:pt x="99" y="7"/>
+                  <a:pt x="99" y="8"/>
                   <a:pt x="108" y="5"/>
                   <a:pt x="118" y="3"/>
                 </a:cubicBezTo>
@@ -8851,13 +9743,13 @@
                 </a:cubicBezTo>
                 <a:cubicBezTo>
                   <a:pt x="25796" y="5"/>
-                  <a:pt x="25806" y="7"/>
+                  <a:pt x="25806" y="8"/>
                   <a:pt x="25814" y="11"/>
                 </a:cubicBezTo>
                 <a:cubicBezTo>
                   <a:pt x="25823" y="15"/>
                   <a:pt x="25832" y="19"/>
-                  <a:pt x="25840" y="24"/>
+                  <a:pt x="25840" y="25"/>
                 </a:cubicBezTo>
                 <a:cubicBezTo>
                   <a:pt x="25847" y="30"/>
@@ -8865,7 +9757,7 @@
                   <a:pt x="25862" y="43"/>
                 </a:cubicBezTo>
                 <a:cubicBezTo>
-                  <a:pt x="25868" y="49"/>
+                  <a:pt x="25868" y="50"/>
                   <a:pt x="25874" y="57"/>
                   <a:pt x="25880" y="65"/>
                 </a:cubicBezTo>
@@ -8880,16 +9772,16 @@
                   <a:pt x="25901" y="117"/>
                 </a:cubicBezTo>
                 <a:cubicBezTo>
-                  <a:pt x="25903" y="126"/>
+                  <a:pt x="25903" y="127"/>
                   <a:pt x="25904" y="136"/>
-                  <a:pt x="25904" y="145"/>
-                </a:cubicBezTo>
-                <a:lnTo>
-                  <a:pt x="25904" y="2104"/>
+                  <a:pt x="25904" y="146"/>
+                </a:cubicBezTo>
+                <a:lnTo>
+                  <a:pt x="25904" y="2105"/>
                 </a:lnTo>
                 <a:cubicBezTo>
                   <a:pt x="25904" y="2114"/>
-                  <a:pt x="25903" y="2123"/>
+                  <a:pt x="25903" y="2124"/>
                   <a:pt x="25901" y="2133"/>
                 </a:cubicBezTo>
                 <a:cubicBezTo>
@@ -8904,13 +9796,13 @@
                 </a:cubicBezTo>
                 <a:cubicBezTo>
                   <a:pt x="25874" y="2193"/>
-                  <a:pt x="25868" y="2200"/>
+                  <a:pt x="25868" y="2201"/>
                   <a:pt x="25862" y="2207"/>
                 </a:cubicBezTo>
                 <a:cubicBezTo>
                   <a:pt x="25855" y="2214"/>
                   <a:pt x="25847" y="2220"/>
-                  <a:pt x="25840" y="2225"/>
+                  <a:pt x="25840" y="2226"/>
                 </a:cubicBezTo>
                 <a:cubicBezTo>
                   <a:pt x="25832" y="2231"/>
@@ -8918,7 +9810,7 @@
                   <a:pt x="25814" y="2239"/>
                 </a:cubicBezTo>
                 <a:cubicBezTo>
-                  <a:pt x="25806" y="2242"/>
+                  <a:pt x="25806" y="2243"/>
                   <a:pt x="25796" y="2245"/>
                   <a:pt x="25787" y="2247"/>
                 </a:cubicBezTo>
@@ -8937,13 +9829,13 @@
                 </a:cubicBezTo>
                 <a:cubicBezTo>
                   <a:pt x="108" y="2245"/>
-                  <a:pt x="99" y="2242"/>
+                  <a:pt x="99" y="2243"/>
                   <a:pt x="90" y="2239"/>
                 </a:cubicBezTo>
                 <a:cubicBezTo>
                   <a:pt x="81" y="2235"/>
                   <a:pt x="73" y="2231"/>
-                  <a:pt x="65" y="2225"/>
+                  <a:pt x="65" y="2226"/>
                 </a:cubicBezTo>
                 <a:cubicBezTo>
                   <a:pt x="57" y="2220"/>
@@ -8951,7 +9843,7 @@
                   <a:pt x="43" y="2207"/>
                 </a:cubicBezTo>
                 <a:cubicBezTo>
-                  <a:pt x="36" y="2200"/>
+                  <a:pt x="36" y="2201"/>
                   <a:pt x="30" y="2193"/>
                   <a:pt x="25" y="2185"/>
                 </a:cubicBezTo>
@@ -8966,9 +9858,9 @@
                   <a:pt x="3" y="2133"/>
                 </a:cubicBezTo>
                 <a:cubicBezTo>
-                  <a:pt x="1" y="2123"/>
+                  <a:pt x="1" y="2124"/>
                   <a:pt x="0" y="2114"/>
-                  <a:pt x="0" y="2104"/>
+                  <a:pt x="0" y="2105"/>
                 </a:cubicBezTo>
                 <a:close/>
               </a:path>
@@ -9005,7 +9897,7 @@
         </p:nvSpPr>
         <p:spPr>
           <a:xfrm>
-            <a:off x="1433160" y="2709720"/>
+            <a:off x="1433160" y="2652480"/>
             <a:ext cx="9325440" cy="810000"/>
           </a:xfrm>
           <a:custGeom>
@@ -9016,14 +9908,14 @@
             <a:pathLst>
               <a:path w="25904" h="2250">
                 <a:moveTo>
-                  <a:pt x="0" y="2104"/>
+                  <a:pt x="0" y="2105"/>
                 </a:moveTo>
                 <a:lnTo>
-                  <a:pt x="0" y="145"/>
+                  <a:pt x="0" y="146"/>
                 </a:lnTo>
                 <a:cubicBezTo>
                   <a:pt x="0" y="136"/>
-                  <a:pt x="1" y="126"/>
+                  <a:pt x="1" y="127"/>
                   <a:pt x="3" y="117"/>
                 </a:cubicBezTo>
                 <a:cubicBezTo>
@@ -9038,13 +9930,13 @@
                 </a:cubicBezTo>
                 <a:cubicBezTo>
                   <a:pt x="30" y="57"/>
-                  <a:pt x="36" y="49"/>
+                  <a:pt x="36" y="50"/>
                   <a:pt x="43" y="43"/>
                 </a:cubicBezTo>
                 <a:cubicBezTo>
                   <a:pt x="50" y="36"/>
                   <a:pt x="57" y="30"/>
-                  <a:pt x="65" y="24"/>
+                  <a:pt x="65" y="25"/>
                 </a:cubicBezTo>
                 <a:cubicBezTo>
                   <a:pt x="73" y="19"/>
@@ -9052,7 +9944,7 @@
                   <a:pt x="90" y="11"/>
                 </a:cubicBezTo>
                 <a:cubicBezTo>
-                  <a:pt x="99" y="7"/>
+                  <a:pt x="99" y="8"/>
                   <a:pt x="108" y="5"/>
                   <a:pt x="118" y="3"/>
                 </a:cubicBezTo>
@@ -9071,13 +9963,13 @@
                 </a:cubicBezTo>
                 <a:cubicBezTo>
                   <a:pt x="25796" y="5"/>
-                  <a:pt x="25806" y="7"/>
+                  <a:pt x="25806" y="8"/>
                   <a:pt x="25814" y="11"/>
                 </a:cubicBezTo>
                 <a:cubicBezTo>
                   <a:pt x="25823" y="15"/>
                   <a:pt x="25832" y="19"/>
-                  <a:pt x="25840" y="24"/>
+                  <a:pt x="25840" y="25"/>
                 </a:cubicBezTo>
                 <a:cubicBezTo>
                   <a:pt x="25847" y="30"/>
@@ -9085,7 +9977,7 @@
                   <a:pt x="25862" y="43"/>
                 </a:cubicBezTo>
                 <a:cubicBezTo>
-                  <a:pt x="25868" y="49"/>
+                  <a:pt x="25868" y="50"/>
                   <a:pt x="25874" y="57"/>
                   <a:pt x="25880" y="65"/>
                 </a:cubicBezTo>
@@ -9100,16 +9992,16 @@
                   <a:pt x="25901" y="117"/>
                 </a:cubicBezTo>
                 <a:cubicBezTo>
-                  <a:pt x="25903" y="126"/>
+                  <a:pt x="25903" y="127"/>
                   <a:pt x="25904" y="136"/>
-                  <a:pt x="25904" y="145"/>
-                </a:cubicBezTo>
-                <a:lnTo>
-                  <a:pt x="25904" y="2104"/>
+                  <a:pt x="25904" y="146"/>
+                </a:cubicBezTo>
+                <a:lnTo>
+                  <a:pt x="25904" y="2105"/>
                 </a:lnTo>
                 <a:cubicBezTo>
                   <a:pt x="25904" y="2114"/>
-                  <a:pt x="25903" y="2123"/>
+                  <a:pt x="25903" y="2124"/>
                   <a:pt x="25901" y="2133"/>
                 </a:cubicBezTo>
                 <a:cubicBezTo>
@@ -9124,13 +10016,13 @@
                 </a:cubicBezTo>
                 <a:cubicBezTo>
                   <a:pt x="25874" y="2193"/>
-                  <a:pt x="25868" y="2200"/>
+                  <a:pt x="25868" y="2201"/>
                   <a:pt x="25862" y="2207"/>
                 </a:cubicBezTo>
                 <a:cubicBezTo>
                   <a:pt x="25855" y="2214"/>
                   <a:pt x="25847" y="2220"/>
-                  <a:pt x="25840" y="2225"/>
+                  <a:pt x="25840" y="2226"/>
                 </a:cubicBezTo>
                 <a:cubicBezTo>
                   <a:pt x="25832" y="2231"/>
@@ -9138,7 +10030,7 @@
                   <a:pt x="25814" y="2239"/>
                 </a:cubicBezTo>
                 <a:cubicBezTo>
-                  <a:pt x="25806" y="2242"/>
+                  <a:pt x="25806" y="2243"/>
                   <a:pt x="25796" y="2245"/>
                   <a:pt x="25787" y="2247"/>
                 </a:cubicBezTo>
@@ -9157,13 +10049,13 @@
                 </a:cubicBezTo>
                 <a:cubicBezTo>
                   <a:pt x="108" y="2245"/>
-                  <a:pt x="99" y="2242"/>
+                  <a:pt x="99" y="2243"/>
                   <a:pt x="90" y="2239"/>
                 </a:cubicBezTo>
                 <a:cubicBezTo>
                   <a:pt x="81" y="2235"/>
                   <a:pt x="73" y="2231"/>
-                  <a:pt x="65" y="2225"/>
+                  <a:pt x="65" y="2226"/>
                 </a:cubicBezTo>
                 <a:cubicBezTo>
                   <a:pt x="57" y="2220"/>
@@ -9171,7 +10063,7 @@
                   <a:pt x="43" y="2207"/>
                 </a:cubicBezTo>
                 <a:cubicBezTo>
-                  <a:pt x="36" y="2200"/>
+                  <a:pt x="36" y="2201"/>
                   <a:pt x="30" y="2193"/>
                   <a:pt x="25" y="2185"/>
                 </a:cubicBezTo>
@@ -9186,9 +10078,9 @@
                   <a:pt x="3" y="2133"/>
                 </a:cubicBezTo>
                 <a:cubicBezTo>
-                  <a:pt x="1" y="2123"/>
+                  <a:pt x="1" y="2124"/>
                   <a:pt x="0" y="2114"/>
-                  <a:pt x="0" y="2104"/>
+                  <a:pt x="0" y="2105"/>
                 </a:cubicBezTo>
                 <a:close/>
               </a:path>
@@ -9226,7 +10118,7 @@
         </p:nvSpPr>
         <p:spPr>
           <a:xfrm>
-            <a:off x="762120" y="1064880"/>
+            <a:off x="762120" y="1007640"/>
             <a:ext cx="3643200" cy="425520"/>
           </a:xfrm>
           <a:prstGeom prst="rect">
@@ -9274,7 +10166,7 @@
         </p:nvSpPr>
         <p:spPr>
           <a:xfrm>
-            <a:off x="1818360" y="2894400"/>
+            <a:off x="1818360" y="2837160"/>
             <a:ext cx="475200" cy="446760"/>
           </a:xfrm>
           <a:prstGeom prst="rect">
@@ -9322,7 +10214,7 @@
         </p:nvSpPr>
         <p:spPr>
           <a:xfrm>
-            <a:off x="1433160" y="3624120"/>
+            <a:off x="1433160" y="3566880"/>
             <a:ext cx="9325440" cy="810000"/>
           </a:xfrm>
           <a:custGeom>
@@ -9333,35 +10225,35 @@
             <a:pathLst>
               <a:path w="25904" h="2250">
                 <a:moveTo>
-                  <a:pt x="0" y="2104"/>
+                  <a:pt x="0" y="2105"/>
                 </a:moveTo>
                 <a:lnTo>
                   <a:pt x="0" y="146"/>
                 </a:lnTo>
                 <a:cubicBezTo>
-                  <a:pt x="0" y="137"/>
+                  <a:pt x="0" y="136"/>
                   <a:pt x="1" y="127"/>
-                  <a:pt x="3" y="118"/>
-                </a:cubicBezTo>
-                <a:cubicBezTo>
-                  <a:pt x="5" y="109"/>
-                  <a:pt x="8" y="100"/>
-                  <a:pt x="12" y="91"/>
-                </a:cubicBezTo>
-                <a:cubicBezTo>
-                  <a:pt x="15" y="82"/>
-                  <a:pt x="20" y="74"/>
-                  <a:pt x="25" y="66"/>
-                </a:cubicBezTo>
-                <a:cubicBezTo>
-                  <a:pt x="30" y="58"/>
+                  <a:pt x="3" y="117"/>
+                </a:cubicBezTo>
+                <a:cubicBezTo>
+                  <a:pt x="5" y="108"/>
+                  <a:pt x="8" y="99"/>
+                  <a:pt x="12" y="90"/>
+                </a:cubicBezTo>
+                <a:cubicBezTo>
+                  <a:pt x="15" y="81"/>
+                  <a:pt x="20" y="73"/>
+                  <a:pt x="25" y="65"/>
+                </a:cubicBezTo>
+                <a:cubicBezTo>
+                  <a:pt x="30" y="57"/>
                   <a:pt x="36" y="50"/>
                   <a:pt x="43" y="43"/>
                 </a:cubicBezTo>
                 <a:cubicBezTo>
                   <a:pt x="50" y="36"/>
                   <a:pt x="57" y="30"/>
-                  <a:pt x="65" y="24"/>
+                  <a:pt x="65" y="25"/>
                 </a:cubicBezTo>
                 <a:cubicBezTo>
                   <a:pt x="73" y="19"/>
@@ -9369,7 +10261,7 @@
                   <a:pt x="90" y="11"/>
                 </a:cubicBezTo>
                 <a:cubicBezTo>
-                  <a:pt x="99" y="7"/>
+                  <a:pt x="99" y="8"/>
                   <a:pt x="108" y="5"/>
                   <a:pt x="118" y="3"/>
                 </a:cubicBezTo>
@@ -9388,13 +10280,13 @@
                 </a:cubicBezTo>
                 <a:cubicBezTo>
                   <a:pt x="25796" y="5"/>
-                  <a:pt x="25806" y="7"/>
+                  <a:pt x="25806" y="8"/>
                   <a:pt x="25814" y="11"/>
                 </a:cubicBezTo>
                 <a:cubicBezTo>
                   <a:pt x="25823" y="15"/>
                   <a:pt x="25832" y="19"/>
-                  <a:pt x="25840" y="24"/>
+                  <a:pt x="25840" y="25"/>
                 </a:cubicBezTo>
                 <a:cubicBezTo>
                   <a:pt x="25847" y="30"/>
@@ -9403,30 +10295,30 @@
                 </a:cubicBezTo>
                 <a:cubicBezTo>
                   <a:pt x="25868" y="50"/>
-                  <a:pt x="25874" y="58"/>
-                  <a:pt x="25880" y="66"/>
-                </a:cubicBezTo>
-                <a:cubicBezTo>
-                  <a:pt x="25885" y="74"/>
-                  <a:pt x="25889" y="82"/>
-                  <a:pt x="25893" y="91"/>
-                </a:cubicBezTo>
-                <a:cubicBezTo>
-                  <a:pt x="25897" y="100"/>
-                  <a:pt x="25900" y="109"/>
-                  <a:pt x="25901" y="118"/>
+                  <a:pt x="25874" y="57"/>
+                  <a:pt x="25880" y="65"/>
+                </a:cubicBezTo>
+                <a:cubicBezTo>
+                  <a:pt x="25885" y="73"/>
+                  <a:pt x="25889" y="81"/>
+                  <a:pt x="25893" y="90"/>
+                </a:cubicBezTo>
+                <a:cubicBezTo>
+                  <a:pt x="25897" y="99"/>
+                  <a:pt x="25900" y="108"/>
+                  <a:pt x="25901" y="117"/>
                 </a:cubicBezTo>
                 <a:cubicBezTo>
                   <a:pt x="25903" y="127"/>
-                  <a:pt x="25904" y="137"/>
+                  <a:pt x="25904" y="136"/>
                   <a:pt x="25904" y="146"/>
                 </a:cubicBezTo>
                 <a:lnTo>
-                  <a:pt x="25904" y="2104"/>
+                  <a:pt x="25904" y="2105"/>
                 </a:lnTo>
                 <a:cubicBezTo>
                   <a:pt x="25904" y="2114"/>
-                  <a:pt x="25903" y="2123"/>
+                  <a:pt x="25903" y="2124"/>
                   <a:pt x="25901" y="2133"/>
                 </a:cubicBezTo>
                 <a:cubicBezTo>
@@ -9441,13 +10333,13 @@
                 </a:cubicBezTo>
                 <a:cubicBezTo>
                   <a:pt x="25874" y="2193"/>
-                  <a:pt x="25868" y="2200"/>
+                  <a:pt x="25868" y="2201"/>
                   <a:pt x="25862" y="2207"/>
                 </a:cubicBezTo>
                 <a:cubicBezTo>
                   <a:pt x="25855" y="2214"/>
                   <a:pt x="25847" y="2220"/>
-                  <a:pt x="25840" y="2225"/>
+                  <a:pt x="25840" y="2226"/>
                 </a:cubicBezTo>
                 <a:cubicBezTo>
                   <a:pt x="25832" y="2231"/>
@@ -9455,7 +10347,7 @@
                   <a:pt x="25814" y="2239"/>
                 </a:cubicBezTo>
                 <a:cubicBezTo>
-                  <a:pt x="25806" y="2242"/>
+                  <a:pt x="25806" y="2243"/>
                   <a:pt x="25796" y="2245"/>
                   <a:pt x="25787" y="2247"/>
                 </a:cubicBezTo>
@@ -9474,13 +10366,13 @@
                 </a:cubicBezTo>
                 <a:cubicBezTo>
                   <a:pt x="108" y="2245"/>
-                  <a:pt x="99" y="2242"/>
+                  <a:pt x="99" y="2243"/>
                   <a:pt x="90" y="2239"/>
                 </a:cubicBezTo>
                 <a:cubicBezTo>
                   <a:pt x="81" y="2235"/>
                   <a:pt x="73" y="2231"/>
-                  <a:pt x="65" y="2225"/>
+                  <a:pt x="65" y="2226"/>
                 </a:cubicBezTo>
                 <a:cubicBezTo>
                   <a:pt x="57" y="2220"/>
@@ -9488,7 +10380,7 @@
                   <a:pt x="43" y="2207"/>
                 </a:cubicBezTo>
                 <a:cubicBezTo>
-                  <a:pt x="36" y="2200"/>
+                  <a:pt x="36" y="2201"/>
                   <a:pt x="30" y="2193"/>
                   <a:pt x="25" y="2185"/>
                 </a:cubicBezTo>
@@ -9503,9 +10395,9 @@
                   <a:pt x="3" y="2133"/>
                 </a:cubicBezTo>
                 <a:cubicBezTo>
-                  <a:pt x="1" y="2123"/>
+                  <a:pt x="1" y="2124"/>
                   <a:pt x="0" y="2114"/>
-                  <a:pt x="0" y="2104"/>
+                  <a:pt x="0" y="2105"/>
                 </a:cubicBezTo>
                 <a:close/>
               </a:path>
@@ -9542,7 +10434,7 @@
         </p:nvSpPr>
         <p:spPr>
           <a:xfrm>
-            <a:off x="1433160" y="3624120"/>
+            <a:off x="1433160" y="3566880"/>
             <a:ext cx="9325440" cy="810000"/>
           </a:xfrm>
           <a:custGeom>
@@ -9553,35 +10445,35 @@
             <a:pathLst>
               <a:path w="25904" h="2250">
                 <a:moveTo>
-                  <a:pt x="0" y="2104"/>
+                  <a:pt x="0" y="2105"/>
                 </a:moveTo>
                 <a:lnTo>
                   <a:pt x="0" y="146"/>
                 </a:lnTo>
                 <a:cubicBezTo>
-                  <a:pt x="0" y="137"/>
+                  <a:pt x="0" y="136"/>
                   <a:pt x="1" y="127"/>
-                  <a:pt x="3" y="118"/>
-                </a:cubicBezTo>
-                <a:cubicBezTo>
-                  <a:pt x="5" y="109"/>
-                  <a:pt x="8" y="100"/>
-                  <a:pt x="12" y="91"/>
-                </a:cubicBezTo>
-                <a:cubicBezTo>
-                  <a:pt x="15" y="82"/>
-                  <a:pt x="20" y="74"/>
-                  <a:pt x="25" y="66"/>
-                </a:cubicBezTo>
-                <a:cubicBezTo>
-                  <a:pt x="30" y="58"/>
+                  <a:pt x="3" y="117"/>
+                </a:cubicBezTo>
+                <a:cubicBezTo>
+                  <a:pt x="5" y="108"/>
+                  <a:pt x="8" y="99"/>
+                  <a:pt x="12" y="90"/>
+                </a:cubicBezTo>
+                <a:cubicBezTo>
+                  <a:pt x="15" y="81"/>
+                  <a:pt x="20" y="73"/>
+                  <a:pt x="25" y="65"/>
+                </a:cubicBezTo>
+                <a:cubicBezTo>
+                  <a:pt x="30" y="57"/>
                   <a:pt x="36" y="50"/>
                   <a:pt x="43" y="43"/>
                 </a:cubicBezTo>
                 <a:cubicBezTo>
                   <a:pt x="50" y="36"/>
                   <a:pt x="57" y="30"/>
-                  <a:pt x="65" y="24"/>
+                  <a:pt x="65" y="25"/>
                 </a:cubicBezTo>
                 <a:cubicBezTo>
                   <a:pt x="73" y="19"/>
@@ -9589,7 +10481,7 @@
                   <a:pt x="90" y="11"/>
                 </a:cubicBezTo>
                 <a:cubicBezTo>
-                  <a:pt x="99" y="7"/>
+                  <a:pt x="99" y="8"/>
                   <a:pt x="108" y="5"/>
                   <a:pt x="118" y="3"/>
                 </a:cubicBezTo>
@@ -9608,13 +10500,13 @@
                 </a:cubicBezTo>
                 <a:cubicBezTo>
                   <a:pt x="25796" y="5"/>
-                  <a:pt x="25806" y="7"/>
+                  <a:pt x="25806" y="8"/>
                   <a:pt x="25814" y="11"/>
                 </a:cubicBezTo>
                 <a:cubicBezTo>
                   <a:pt x="25823" y="15"/>
                   <a:pt x="25832" y="19"/>
-                  <a:pt x="25840" y="24"/>
+                  <a:pt x="25840" y="25"/>
                 </a:cubicBezTo>
                 <a:cubicBezTo>
                   <a:pt x="25847" y="30"/>
@@ -9623,30 +10515,30 @@
                 </a:cubicBezTo>
                 <a:cubicBezTo>
                   <a:pt x="25868" y="50"/>
-                  <a:pt x="25874" y="58"/>
-                  <a:pt x="25880" y="66"/>
-                </a:cubicBezTo>
-                <a:cubicBezTo>
-                  <a:pt x="25885" y="74"/>
-                  <a:pt x="25889" y="82"/>
-                  <a:pt x="25893" y="91"/>
-                </a:cubicBezTo>
-                <a:cubicBezTo>
-                  <a:pt x="25897" y="100"/>
-                  <a:pt x="25900" y="109"/>
-                  <a:pt x="25901" y="118"/>
+                  <a:pt x="25874" y="57"/>
+                  <a:pt x="25880" y="65"/>
+                </a:cubicBezTo>
+                <a:cubicBezTo>
+                  <a:pt x="25885" y="73"/>
+                  <a:pt x="25889" y="81"/>
+                  <a:pt x="25893" y="90"/>
+                </a:cubicBezTo>
+                <a:cubicBezTo>
+                  <a:pt x="25897" y="99"/>
+                  <a:pt x="25900" y="108"/>
+                  <a:pt x="25901" y="117"/>
                 </a:cubicBezTo>
                 <a:cubicBezTo>
                   <a:pt x="25903" y="127"/>
-                  <a:pt x="25904" y="137"/>
+                  <a:pt x="25904" y="136"/>
                   <a:pt x="25904" y="146"/>
                 </a:cubicBezTo>
                 <a:lnTo>
-                  <a:pt x="25904" y="2104"/>
+                  <a:pt x="25904" y="2105"/>
                 </a:lnTo>
                 <a:cubicBezTo>
                   <a:pt x="25904" y="2114"/>
-                  <a:pt x="25903" y="2123"/>
+                  <a:pt x="25903" y="2124"/>
                   <a:pt x="25901" y="2133"/>
                 </a:cubicBezTo>
                 <a:cubicBezTo>
@@ -9661,13 +10553,13 @@
                 </a:cubicBezTo>
                 <a:cubicBezTo>
                   <a:pt x="25874" y="2193"/>
-                  <a:pt x="25868" y="2200"/>
+                  <a:pt x="25868" y="2201"/>
                   <a:pt x="25862" y="2207"/>
                 </a:cubicBezTo>
                 <a:cubicBezTo>
                   <a:pt x="25855" y="2214"/>
                   <a:pt x="25847" y="2220"/>
-                  <a:pt x="25840" y="2225"/>
+                  <a:pt x="25840" y="2226"/>
                 </a:cubicBezTo>
                 <a:cubicBezTo>
                   <a:pt x="25832" y="2231"/>
@@ -9675,7 +10567,7 @@
                   <a:pt x="25814" y="2239"/>
                 </a:cubicBezTo>
                 <a:cubicBezTo>
-                  <a:pt x="25806" y="2242"/>
+                  <a:pt x="25806" y="2243"/>
                   <a:pt x="25796" y="2245"/>
                   <a:pt x="25787" y="2247"/>
                 </a:cubicBezTo>
@@ -9694,13 +10586,13 @@
                 </a:cubicBezTo>
                 <a:cubicBezTo>
                   <a:pt x="108" y="2245"/>
-                  <a:pt x="99" y="2242"/>
+                  <a:pt x="99" y="2243"/>
                   <a:pt x="90" y="2239"/>
                 </a:cubicBezTo>
                 <a:cubicBezTo>
                   <a:pt x="81" y="2235"/>
                   <a:pt x="73" y="2231"/>
-                  <a:pt x="65" y="2225"/>
+                  <a:pt x="65" y="2226"/>
                 </a:cubicBezTo>
                 <a:cubicBezTo>
                   <a:pt x="57" y="2220"/>
@@ -9708,7 +10600,7 @@
                   <a:pt x="43" y="2207"/>
                 </a:cubicBezTo>
                 <a:cubicBezTo>
-                  <a:pt x="36" y="2200"/>
+                  <a:pt x="36" y="2201"/>
                   <a:pt x="30" y="2193"/>
                   <a:pt x="25" y="2185"/>
                 </a:cubicBezTo>
@@ -9723,9 +10615,9 @@
                   <a:pt x="3" y="2133"/>
                 </a:cubicBezTo>
                 <a:cubicBezTo>
-                  <a:pt x="1" y="2123"/>
+                  <a:pt x="1" y="2124"/>
                   <a:pt x="0" y="2114"/>
-                  <a:pt x="0" y="2104"/>
+                  <a:pt x="0" y="2105"/>
                 </a:cubicBezTo>
                 <a:close/>
               </a:path>
@@ -9763,7 +10655,7 @@
         </p:nvSpPr>
         <p:spPr>
           <a:xfrm>
-            <a:off x="2657520" y="2984040"/>
+            <a:off x="2657520" y="2926800"/>
             <a:ext cx="5883480" cy="256320"/>
           </a:xfrm>
           <a:prstGeom prst="rect">
@@ -9811,8 +10703,8 @@
         </p:nvSpPr>
         <p:spPr>
           <a:xfrm>
-            <a:off x="1027080" y="4132800"/>
-            <a:ext cx="10137960" cy="1622160"/>
+            <a:off x="1027080" y="4074840"/>
+            <a:ext cx="10137960" cy="1737720"/>
           </a:xfrm>
           <a:custGeom>
             <a:avLst/>
@@ -9820,61 +10712,61 @@
             <a:ahLst/>
             <a:rect l="0" t="0" r="r" b="b"/>
             <a:pathLst>
-              <a:path w="28161" h="4506">
+              <a:path w="28161" h="4827">
                 <a:moveTo>
-                  <a:pt x="1142" y="1272"/>
+                  <a:pt x="1142" y="1276"/>
                 </a:moveTo>
                 <a:lnTo>
-                  <a:pt x="1142" y="3230"/>
-                </a:lnTo>
-                <a:cubicBezTo>
-                  <a:pt x="1142" y="3267"/>
-                  <a:pt x="1155" y="3298"/>
-                  <a:pt x="1180" y="3324"/>
-                </a:cubicBezTo>
-                <a:cubicBezTo>
-                  <a:pt x="1206" y="3350"/>
-                  <a:pt x="1237" y="3363"/>
-                  <a:pt x="1274" y="3363"/>
-                </a:cubicBezTo>
-                <a:lnTo>
-                  <a:pt x="26887" y="3363"/>
-                </a:lnTo>
-                <a:cubicBezTo>
-                  <a:pt x="26923" y="3363"/>
-                  <a:pt x="26954" y="3350"/>
-                  <a:pt x="26980" y="3324"/>
-                </a:cubicBezTo>
-                <a:cubicBezTo>
-                  <a:pt x="27006" y="3298"/>
-                  <a:pt x="27019" y="3267"/>
-                  <a:pt x="27019" y="3230"/>
-                </a:cubicBezTo>
-                <a:lnTo>
-                  <a:pt x="27019" y="1272"/>
-                </a:lnTo>
-                <a:cubicBezTo>
-                  <a:pt x="27019" y="1236"/>
-                  <a:pt x="27006" y="1205"/>
-                  <a:pt x="26980" y="1179"/>
-                </a:cubicBezTo>
-                <a:cubicBezTo>
-                  <a:pt x="26954" y="1153"/>
-                  <a:pt x="26923" y="1140"/>
-                  <a:pt x="26887" y="1140"/>
-                </a:cubicBezTo>
-                <a:lnTo>
-                  <a:pt x="1274" y="1140"/>
-                </a:lnTo>
-                <a:cubicBezTo>
-                  <a:pt x="1237" y="1140"/>
-                  <a:pt x="1206" y="1153"/>
-                  <a:pt x="1180" y="1179"/>
-                </a:cubicBezTo>
-                <a:cubicBezTo>
-                  <a:pt x="1155" y="1205"/>
-                  <a:pt x="1142" y="1236"/>
-                  <a:pt x="1142" y="1272"/>
+                  <a:pt x="1142" y="3551"/>
+                </a:lnTo>
+                <a:cubicBezTo>
+                  <a:pt x="1142" y="3588"/>
+                  <a:pt x="1155" y="3619"/>
+                  <a:pt x="1180" y="3645"/>
+                </a:cubicBezTo>
+                <a:cubicBezTo>
+                  <a:pt x="1206" y="3670"/>
+                  <a:pt x="1237" y="3683"/>
+                  <a:pt x="1274" y="3683"/>
+                </a:cubicBezTo>
+                <a:lnTo>
+                  <a:pt x="26887" y="3683"/>
+                </a:lnTo>
+                <a:cubicBezTo>
+                  <a:pt x="26923" y="3683"/>
+                  <a:pt x="26954" y="3670"/>
+                  <a:pt x="26980" y="3645"/>
+                </a:cubicBezTo>
+                <a:cubicBezTo>
+                  <a:pt x="27006" y="3619"/>
+                  <a:pt x="27019" y="3588"/>
+                  <a:pt x="27019" y="3551"/>
+                </a:cubicBezTo>
+                <a:lnTo>
+                  <a:pt x="27019" y="1276"/>
+                </a:lnTo>
+                <a:cubicBezTo>
+                  <a:pt x="27019" y="1239"/>
+                  <a:pt x="27006" y="1208"/>
+                  <a:pt x="26980" y="1182"/>
+                </a:cubicBezTo>
+                <a:cubicBezTo>
+                  <a:pt x="26954" y="1156"/>
+                  <a:pt x="26923" y="1143"/>
+                  <a:pt x="26887" y="1143"/>
+                </a:cubicBezTo>
+                <a:lnTo>
+                  <a:pt x="1274" y="1143"/>
+                </a:lnTo>
+                <a:cubicBezTo>
+                  <a:pt x="1237" y="1143"/>
+                  <a:pt x="1206" y="1156"/>
+                  <a:pt x="1180" y="1182"/>
+                </a:cubicBezTo>
+                <a:cubicBezTo>
+                  <a:pt x="1155" y="1208"/>
+                  <a:pt x="1142" y="1239"/>
+                  <a:pt x="1142" y="1276"/>
                 </a:cubicBezTo>
                 <a:moveTo>
                   <a:pt x="0" y="0"/>
@@ -9883,10 +10775,10 @@
                   <a:pt x="28161" y="0"/>
                 </a:lnTo>
                 <a:lnTo>
-                  <a:pt x="28161" y="4506"/>
-                </a:lnTo>
-                <a:lnTo>
-                  <a:pt x="0" y="4506"/>
+                  <a:pt x="28161" y="4827"/>
+                </a:lnTo>
+                <a:lnTo>
+                  <a:pt x="0" y="4827"/>
                 </a:lnTo>
                 <a:lnTo>
                   <a:pt x="0" y="0"/>
@@ -9928,8 +10820,8 @@
         </p:nvSpPr>
         <p:spPr>
           <a:xfrm>
-            <a:off x="1433160" y="4538520"/>
-            <a:ext cx="9325440" cy="810000"/>
+            <a:off x="1433160" y="4481280"/>
+            <a:ext cx="9325440" cy="924480"/>
           </a:xfrm>
           <a:custGeom>
             <a:avLst/>
@@ -9937,16 +10829,16 @@
             <a:ahLst/>
             <a:rect l="0" t="0" r="r" b="b"/>
             <a:pathLst>
-              <a:path w="25904" h="2250">
+              <a:path w="25904" h="2568">
                 <a:moveTo>
-                  <a:pt x="0" y="2104"/>
+                  <a:pt x="0" y="2422"/>
                 </a:moveTo>
                 <a:lnTo>
-                  <a:pt x="0" y="145"/>
+                  <a:pt x="0" y="146"/>
                 </a:lnTo>
                 <a:cubicBezTo>
                   <a:pt x="0" y="136"/>
-                  <a:pt x="1" y="126"/>
+                  <a:pt x="1" y="127"/>
                   <a:pt x="3" y="117"/>
                 </a:cubicBezTo>
                 <a:cubicBezTo>
@@ -9961,13 +10853,13 @@
                 </a:cubicBezTo>
                 <a:cubicBezTo>
                   <a:pt x="30" y="57"/>
-                  <a:pt x="36" y="49"/>
+                  <a:pt x="36" y="50"/>
                   <a:pt x="43" y="43"/>
                 </a:cubicBezTo>
                 <a:cubicBezTo>
                   <a:pt x="50" y="36"/>
                   <a:pt x="57" y="30"/>
-                  <a:pt x="65" y="24"/>
+                  <a:pt x="65" y="25"/>
                 </a:cubicBezTo>
                 <a:cubicBezTo>
                   <a:pt x="73" y="19"/>
@@ -9975,7 +10867,7 @@
                   <a:pt x="90" y="11"/>
                 </a:cubicBezTo>
                 <a:cubicBezTo>
-                  <a:pt x="99" y="7"/>
+                  <a:pt x="99" y="8"/>
                   <a:pt x="108" y="5"/>
                   <a:pt x="118" y="3"/>
                 </a:cubicBezTo>
@@ -9994,13 +10886,13 @@
                 </a:cubicBezTo>
                 <a:cubicBezTo>
                   <a:pt x="25796" y="5"/>
-                  <a:pt x="25806" y="7"/>
+                  <a:pt x="25806" y="8"/>
                   <a:pt x="25814" y="11"/>
                 </a:cubicBezTo>
                 <a:cubicBezTo>
                   <a:pt x="25823" y="15"/>
                   <a:pt x="25832" y="19"/>
-                  <a:pt x="25840" y="24"/>
+                  <a:pt x="25840" y="25"/>
                 </a:cubicBezTo>
                 <a:cubicBezTo>
                   <a:pt x="25847" y="30"/>
@@ -10008,7 +10900,7 @@
                   <a:pt x="25862" y="43"/>
                 </a:cubicBezTo>
                 <a:cubicBezTo>
-                  <a:pt x="25868" y="49"/>
+                  <a:pt x="25868" y="50"/>
                   <a:pt x="25874" y="57"/>
                   <a:pt x="25880" y="65"/>
                 </a:cubicBezTo>
@@ -10023,95 +10915,95 @@
                   <a:pt x="25901" y="117"/>
                 </a:cubicBezTo>
                 <a:cubicBezTo>
-                  <a:pt x="25903" y="126"/>
+                  <a:pt x="25903" y="127"/>
                   <a:pt x="25904" y="136"/>
-                  <a:pt x="25904" y="145"/>
-                </a:cubicBezTo>
-                <a:lnTo>
-                  <a:pt x="25904" y="2104"/>
-                </a:lnTo>
-                <a:cubicBezTo>
-                  <a:pt x="25904" y="2114"/>
-                  <a:pt x="25903" y="2123"/>
-                  <a:pt x="25901" y="2133"/>
-                </a:cubicBezTo>
-                <a:cubicBezTo>
-                  <a:pt x="25900" y="2142"/>
-                  <a:pt x="25897" y="2151"/>
-                  <a:pt x="25893" y="2160"/>
-                </a:cubicBezTo>
-                <a:cubicBezTo>
-                  <a:pt x="25889" y="2169"/>
-                  <a:pt x="25885" y="2177"/>
-                  <a:pt x="25880" y="2185"/>
-                </a:cubicBezTo>
-                <a:cubicBezTo>
-                  <a:pt x="25874" y="2193"/>
-                  <a:pt x="25868" y="2200"/>
-                  <a:pt x="25862" y="2207"/>
-                </a:cubicBezTo>
-                <a:cubicBezTo>
-                  <a:pt x="25855" y="2214"/>
-                  <a:pt x="25847" y="2220"/>
-                  <a:pt x="25840" y="2225"/>
-                </a:cubicBezTo>
-                <a:cubicBezTo>
-                  <a:pt x="25832" y="2231"/>
-                  <a:pt x="25823" y="2235"/>
-                  <a:pt x="25814" y="2239"/>
-                </a:cubicBezTo>
-                <a:cubicBezTo>
-                  <a:pt x="25806" y="2242"/>
-                  <a:pt x="25796" y="2245"/>
-                  <a:pt x="25787" y="2247"/>
-                </a:cubicBezTo>
-                <a:cubicBezTo>
-                  <a:pt x="25778" y="2249"/>
-                  <a:pt x="25768" y="2250"/>
-                  <a:pt x="25759" y="2250"/>
-                </a:cubicBezTo>
-                <a:lnTo>
-                  <a:pt x="146" y="2250"/>
-                </a:lnTo>
-                <a:cubicBezTo>
-                  <a:pt x="136" y="2250"/>
-                  <a:pt x="127" y="2249"/>
-                  <a:pt x="118" y="2247"/>
-                </a:cubicBezTo>
-                <a:cubicBezTo>
-                  <a:pt x="108" y="2245"/>
-                  <a:pt x="99" y="2242"/>
-                  <a:pt x="90" y="2239"/>
-                </a:cubicBezTo>
-                <a:cubicBezTo>
-                  <a:pt x="81" y="2235"/>
-                  <a:pt x="73" y="2231"/>
-                  <a:pt x="65" y="2225"/>
-                </a:cubicBezTo>
-                <a:cubicBezTo>
-                  <a:pt x="57" y="2220"/>
-                  <a:pt x="50" y="2214"/>
-                  <a:pt x="43" y="2207"/>
-                </a:cubicBezTo>
-                <a:cubicBezTo>
-                  <a:pt x="36" y="2200"/>
-                  <a:pt x="30" y="2193"/>
-                  <a:pt x="25" y="2185"/>
-                </a:cubicBezTo>
-                <a:cubicBezTo>
-                  <a:pt x="20" y="2177"/>
-                  <a:pt x="15" y="2169"/>
-                  <a:pt x="12" y="2160"/>
-                </a:cubicBezTo>
-                <a:cubicBezTo>
-                  <a:pt x="8" y="2151"/>
-                  <a:pt x="5" y="2142"/>
-                  <a:pt x="3" y="2133"/>
-                </a:cubicBezTo>
-                <a:cubicBezTo>
-                  <a:pt x="1" y="2123"/>
-                  <a:pt x="0" y="2114"/>
-                  <a:pt x="0" y="2104"/>
+                  <a:pt x="25904" y="146"/>
+                </a:cubicBezTo>
+                <a:lnTo>
+                  <a:pt x="25904" y="2422"/>
+                </a:lnTo>
+                <a:cubicBezTo>
+                  <a:pt x="25904" y="2432"/>
+                  <a:pt x="25903" y="2441"/>
+                  <a:pt x="25901" y="2450"/>
+                </a:cubicBezTo>
+                <a:cubicBezTo>
+                  <a:pt x="25900" y="2460"/>
+                  <a:pt x="25897" y="2469"/>
+                  <a:pt x="25893" y="2478"/>
+                </a:cubicBezTo>
+                <a:cubicBezTo>
+                  <a:pt x="25889" y="2487"/>
+                  <a:pt x="25885" y="2495"/>
+                  <a:pt x="25880" y="2503"/>
+                </a:cubicBezTo>
+                <a:cubicBezTo>
+                  <a:pt x="25874" y="2511"/>
+                  <a:pt x="25868" y="2518"/>
+                  <a:pt x="25862" y="2525"/>
+                </a:cubicBezTo>
+                <a:cubicBezTo>
+                  <a:pt x="25855" y="2532"/>
+                  <a:pt x="25847" y="2538"/>
+                  <a:pt x="25840" y="2543"/>
+                </a:cubicBezTo>
+                <a:cubicBezTo>
+                  <a:pt x="25832" y="2548"/>
+                  <a:pt x="25823" y="2553"/>
+                  <a:pt x="25814" y="2557"/>
+                </a:cubicBezTo>
+                <a:cubicBezTo>
+                  <a:pt x="25806" y="2560"/>
+                  <a:pt x="25796" y="2563"/>
+                  <a:pt x="25787" y="2565"/>
+                </a:cubicBezTo>
+                <a:cubicBezTo>
+                  <a:pt x="25778" y="2567"/>
+                  <a:pt x="25768" y="2568"/>
+                  <a:pt x="25759" y="2568"/>
+                </a:cubicBezTo>
+                <a:lnTo>
+                  <a:pt x="146" y="2568"/>
+                </a:lnTo>
+                <a:cubicBezTo>
+                  <a:pt x="136" y="2568"/>
+                  <a:pt x="127" y="2567"/>
+                  <a:pt x="118" y="2565"/>
+                </a:cubicBezTo>
+                <a:cubicBezTo>
+                  <a:pt x="108" y="2563"/>
+                  <a:pt x="99" y="2560"/>
+                  <a:pt x="90" y="2557"/>
+                </a:cubicBezTo>
+                <a:cubicBezTo>
+                  <a:pt x="81" y="2553"/>
+                  <a:pt x="73" y="2548"/>
+                  <a:pt x="65" y="2543"/>
+                </a:cubicBezTo>
+                <a:cubicBezTo>
+                  <a:pt x="57" y="2538"/>
+                  <a:pt x="50" y="2532"/>
+                  <a:pt x="43" y="2525"/>
+                </a:cubicBezTo>
+                <a:cubicBezTo>
+                  <a:pt x="36" y="2518"/>
+                  <a:pt x="30" y="2511"/>
+                  <a:pt x="25" y="2503"/>
+                </a:cubicBezTo>
+                <a:cubicBezTo>
+                  <a:pt x="20" y="2495"/>
+                  <a:pt x="15" y="2487"/>
+                  <a:pt x="12" y="2478"/>
+                </a:cubicBezTo>
+                <a:cubicBezTo>
+                  <a:pt x="8" y="2469"/>
+                  <a:pt x="5" y="2460"/>
+                  <a:pt x="3" y="2450"/>
+                </a:cubicBezTo>
+                <a:cubicBezTo>
+                  <a:pt x="1" y="2441"/>
+                  <a:pt x="0" y="2432"/>
+                  <a:pt x="0" y="2422"/>
                 </a:cubicBezTo>
                 <a:close/>
               </a:path>
@@ -10148,8 +11040,8 @@
         </p:nvSpPr>
         <p:spPr>
           <a:xfrm>
-            <a:off x="1433160" y="4538520"/>
-            <a:ext cx="9325440" cy="810000"/>
+            <a:off x="1433160" y="4481280"/>
+            <a:ext cx="9325440" cy="924480"/>
           </a:xfrm>
           <a:custGeom>
             <a:avLst/>
@@ -10157,16 +11049,16 @@
             <a:ahLst/>
             <a:rect l="0" t="0" r="r" b="b"/>
             <a:pathLst>
-              <a:path w="25904" h="2250">
+              <a:path w="25904" h="2568">
                 <a:moveTo>
-                  <a:pt x="0" y="2104"/>
+                  <a:pt x="0" y="2422"/>
                 </a:moveTo>
                 <a:lnTo>
-                  <a:pt x="0" y="145"/>
+                  <a:pt x="0" y="146"/>
                 </a:lnTo>
                 <a:cubicBezTo>
                   <a:pt x="0" y="136"/>
-                  <a:pt x="1" y="126"/>
+                  <a:pt x="1" y="127"/>
                   <a:pt x="3" y="117"/>
                 </a:cubicBezTo>
                 <a:cubicBezTo>
@@ -10181,13 +11073,13 @@
                 </a:cubicBezTo>
                 <a:cubicBezTo>
                   <a:pt x="30" y="57"/>
-                  <a:pt x="36" y="49"/>
+                  <a:pt x="36" y="50"/>
                   <a:pt x="43" y="43"/>
                 </a:cubicBezTo>
                 <a:cubicBezTo>
                   <a:pt x="50" y="36"/>
                   <a:pt x="57" y="30"/>
-                  <a:pt x="65" y="24"/>
+                  <a:pt x="65" y="25"/>
                 </a:cubicBezTo>
                 <a:cubicBezTo>
                   <a:pt x="73" y="19"/>
@@ -10195,7 +11087,7 @@
                   <a:pt x="90" y="11"/>
                 </a:cubicBezTo>
                 <a:cubicBezTo>
-                  <a:pt x="99" y="7"/>
+                  <a:pt x="99" y="8"/>
                   <a:pt x="108" y="5"/>
                   <a:pt x="118" y="3"/>
                 </a:cubicBezTo>
@@ -10214,13 +11106,13 @@
                 </a:cubicBezTo>
                 <a:cubicBezTo>
                   <a:pt x="25796" y="5"/>
-                  <a:pt x="25806" y="7"/>
+                  <a:pt x="25806" y="8"/>
                   <a:pt x="25814" y="11"/>
                 </a:cubicBezTo>
                 <a:cubicBezTo>
                   <a:pt x="25823" y="15"/>
                   <a:pt x="25832" y="19"/>
-                  <a:pt x="25840" y="24"/>
+                  <a:pt x="25840" y="25"/>
                 </a:cubicBezTo>
                 <a:cubicBezTo>
                   <a:pt x="25847" y="30"/>
@@ -10228,7 +11120,7 @@
                   <a:pt x="25862" y="43"/>
                 </a:cubicBezTo>
                 <a:cubicBezTo>
-                  <a:pt x="25868" y="49"/>
+                  <a:pt x="25868" y="50"/>
                   <a:pt x="25874" y="57"/>
                   <a:pt x="25880" y="65"/>
                 </a:cubicBezTo>
@@ -10243,95 +11135,95 @@
                   <a:pt x="25901" y="117"/>
                 </a:cubicBezTo>
                 <a:cubicBezTo>
-                  <a:pt x="25903" y="126"/>
+                  <a:pt x="25903" y="127"/>
                   <a:pt x="25904" y="136"/>
-                  <a:pt x="25904" y="145"/>
-                </a:cubicBezTo>
-                <a:lnTo>
-                  <a:pt x="25904" y="2104"/>
-                </a:lnTo>
-                <a:cubicBezTo>
-                  <a:pt x="25904" y="2114"/>
-                  <a:pt x="25903" y="2123"/>
-                  <a:pt x="25901" y="2133"/>
-                </a:cubicBezTo>
-                <a:cubicBezTo>
-                  <a:pt x="25900" y="2142"/>
-                  <a:pt x="25897" y="2151"/>
-                  <a:pt x="25893" y="2160"/>
-                </a:cubicBezTo>
-                <a:cubicBezTo>
-                  <a:pt x="25889" y="2169"/>
-                  <a:pt x="25885" y="2177"/>
-                  <a:pt x="25880" y="2185"/>
-                </a:cubicBezTo>
-                <a:cubicBezTo>
-                  <a:pt x="25874" y="2193"/>
-                  <a:pt x="25868" y="2200"/>
-                  <a:pt x="25862" y="2207"/>
-                </a:cubicBezTo>
-                <a:cubicBezTo>
-                  <a:pt x="25855" y="2214"/>
-                  <a:pt x="25847" y="2220"/>
-                  <a:pt x="25840" y="2225"/>
-                </a:cubicBezTo>
-                <a:cubicBezTo>
-                  <a:pt x="25832" y="2231"/>
-                  <a:pt x="25823" y="2235"/>
-                  <a:pt x="25814" y="2239"/>
-                </a:cubicBezTo>
-                <a:cubicBezTo>
-                  <a:pt x="25806" y="2242"/>
-                  <a:pt x="25796" y="2245"/>
-                  <a:pt x="25787" y="2247"/>
-                </a:cubicBezTo>
-                <a:cubicBezTo>
-                  <a:pt x="25778" y="2249"/>
-                  <a:pt x="25768" y="2250"/>
-                  <a:pt x="25759" y="2250"/>
-                </a:cubicBezTo>
-                <a:lnTo>
-                  <a:pt x="146" y="2250"/>
-                </a:lnTo>
-                <a:cubicBezTo>
-                  <a:pt x="136" y="2250"/>
-                  <a:pt x="127" y="2249"/>
-                  <a:pt x="118" y="2247"/>
-                </a:cubicBezTo>
-                <a:cubicBezTo>
-                  <a:pt x="108" y="2245"/>
-                  <a:pt x="99" y="2242"/>
-                  <a:pt x="90" y="2239"/>
-                </a:cubicBezTo>
-                <a:cubicBezTo>
-                  <a:pt x="81" y="2235"/>
-                  <a:pt x="73" y="2231"/>
-                  <a:pt x="65" y="2225"/>
-                </a:cubicBezTo>
-                <a:cubicBezTo>
-                  <a:pt x="57" y="2220"/>
-                  <a:pt x="50" y="2214"/>
-                  <a:pt x="43" y="2207"/>
-                </a:cubicBezTo>
-                <a:cubicBezTo>
-                  <a:pt x="36" y="2200"/>
-                  <a:pt x="30" y="2193"/>
-                  <a:pt x="25" y="2185"/>
-                </a:cubicBezTo>
-                <a:cubicBezTo>
-                  <a:pt x="20" y="2177"/>
-                  <a:pt x="15" y="2169"/>
-                  <a:pt x="12" y="2160"/>
-                </a:cubicBezTo>
-                <a:cubicBezTo>
-                  <a:pt x="8" y="2151"/>
-                  <a:pt x="5" y="2142"/>
-                  <a:pt x="3" y="2133"/>
-                </a:cubicBezTo>
-                <a:cubicBezTo>
-                  <a:pt x="1" y="2123"/>
-                  <a:pt x="0" y="2114"/>
-                  <a:pt x="0" y="2104"/>
+                  <a:pt x="25904" y="146"/>
+                </a:cubicBezTo>
+                <a:lnTo>
+                  <a:pt x="25904" y="2422"/>
+                </a:lnTo>
+                <a:cubicBezTo>
+                  <a:pt x="25904" y="2432"/>
+                  <a:pt x="25903" y="2441"/>
+                  <a:pt x="25901" y="2450"/>
+                </a:cubicBezTo>
+                <a:cubicBezTo>
+                  <a:pt x="25900" y="2460"/>
+                  <a:pt x="25897" y="2469"/>
+                  <a:pt x="25893" y="2478"/>
+                </a:cubicBezTo>
+                <a:cubicBezTo>
+                  <a:pt x="25889" y="2487"/>
+                  <a:pt x="25885" y="2495"/>
+                  <a:pt x="25880" y="2503"/>
+                </a:cubicBezTo>
+                <a:cubicBezTo>
+                  <a:pt x="25874" y="2511"/>
+                  <a:pt x="25868" y="2518"/>
+                  <a:pt x="25862" y="2525"/>
+                </a:cubicBezTo>
+                <a:cubicBezTo>
+                  <a:pt x="25855" y="2532"/>
+                  <a:pt x="25847" y="2538"/>
+                  <a:pt x="25840" y="2543"/>
+                </a:cubicBezTo>
+                <a:cubicBezTo>
+                  <a:pt x="25832" y="2548"/>
+                  <a:pt x="25823" y="2553"/>
+                  <a:pt x="25814" y="2557"/>
+                </a:cubicBezTo>
+                <a:cubicBezTo>
+                  <a:pt x="25806" y="2560"/>
+                  <a:pt x="25796" y="2563"/>
+                  <a:pt x="25787" y="2565"/>
+                </a:cubicBezTo>
+                <a:cubicBezTo>
+                  <a:pt x="25778" y="2567"/>
+                  <a:pt x="25768" y="2568"/>
+                  <a:pt x="25759" y="2568"/>
+                </a:cubicBezTo>
+                <a:lnTo>
+                  <a:pt x="146" y="2568"/>
+                </a:lnTo>
+                <a:cubicBezTo>
+                  <a:pt x="136" y="2568"/>
+                  <a:pt x="127" y="2567"/>
+                  <a:pt x="118" y="2565"/>
+                </a:cubicBezTo>
+                <a:cubicBezTo>
+                  <a:pt x="108" y="2563"/>
+                  <a:pt x="99" y="2560"/>
+                  <a:pt x="90" y="2557"/>
+                </a:cubicBezTo>
+                <a:cubicBezTo>
+                  <a:pt x="81" y="2553"/>
+                  <a:pt x="73" y="2548"/>
+                  <a:pt x="65" y="2543"/>
+                </a:cubicBezTo>
+                <a:cubicBezTo>
+                  <a:pt x="57" y="2538"/>
+                  <a:pt x="50" y="2532"/>
+                  <a:pt x="43" y="2525"/>
+                </a:cubicBezTo>
+                <a:cubicBezTo>
+                  <a:pt x="36" y="2518"/>
+                  <a:pt x="30" y="2511"/>
+                  <a:pt x="25" y="2503"/>
+                </a:cubicBezTo>
+                <a:cubicBezTo>
+                  <a:pt x="20" y="2495"/>
+                  <a:pt x="15" y="2487"/>
+                  <a:pt x="12" y="2478"/>
+                </a:cubicBezTo>
+                <a:cubicBezTo>
+                  <a:pt x="8" y="2469"/>
+                  <a:pt x="5" y="2460"/>
+                  <a:pt x="3" y="2450"/>
+                </a:cubicBezTo>
+                <a:cubicBezTo>
+                  <a:pt x="1" y="2441"/>
+                  <a:pt x="0" y="2432"/>
+                  <a:pt x="0" y="2422"/>
                 </a:cubicBezTo>
                 <a:close/>
               </a:path>
@@ -10369,7 +11261,7 @@
         </p:nvSpPr>
         <p:spPr>
           <a:xfrm>
-            <a:off x="2657520" y="3898440"/>
+            <a:off x="2657520" y="3841200"/>
             <a:ext cx="4511520" cy="256320"/>
           </a:xfrm>
           <a:prstGeom prst="rect">
@@ -10417,8 +11309,8 @@
         </p:nvSpPr>
         <p:spPr>
           <a:xfrm>
-            <a:off x="2657520" y="4812840"/>
-            <a:ext cx="6189840" cy="256320"/>
+            <a:off x="2657520" y="4641480"/>
+            <a:ext cx="7485840" cy="256320"/>
           </a:xfrm>
           <a:prstGeom prst="rect">
             <a:avLst/>
@@ -10444,7 +11336,7 @@
                 <a:latin typeface="Arial"/>
                 <a:ea typeface="Arial"/>
               </a:rPr>
-              <a:t>Cuánto aguantás antes de que sea imposible: averigualo vos</a:t>
+              <a:t>¿Cuánto aguantás sin que la IA descubra que no sos humano realmente?</a:t>
             </a:r>
             <a:endParaRPr lang="en-US" sz="1800" b="0" u="none" strike="noStrike">
               <a:solidFill>
@@ -10465,7 +11357,55 @@
         </p:nvSpPr>
         <p:spPr>
           <a:xfrm>
-            <a:off x="762120" y="5601600"/>
+            <a:off x="2657520" y="4984200"/>
+            <a:ext cx="1563480" cy="256320"/>
+          </a:xfrm>
+          <a:prstGeom prst="rect">
+            <a:avLst/>
+          </a:prstGeom>
+          <a:noFill/>
+          <a:ln w="0">
+            <a:noFill/>
+          </a:ln>
+        </p:spPr>
+        <p:txBody>
+          <a:bodyPr wrap="none" lIns="0" tIns="0" rIns="0" bIns="0" anchor="t">
+            <a:spAutoFit/>
+          </a:bodyPr>
+          <a:p>
+            <a:pPr/>
+            <a:r>
+              <a:rPr lang="en-US" sz="1800" b="0" u="none" strike="noStrike">
+                <a:solidFill>
+                  <a:srgbClr val="EAFFF2"/>
+                </a:solidFill>
+                <a:effectLst/>
+                <a:uFillTx/>
+                <a:latin typeface="Arial"/>
+                <a:ea typeface="Arial"/>
+              </a:rPr>
+              <a:t>Averigualo vos.</a:t>
+            </a:r>
+            <a:endParaRPr lang="en-US" sz="1800" b="0" u="none" strike="noStrike">
+              <a:solidFill>
+                <a:srgbClr val="000000"/>
+              </a:solidFill>
+              <a:effectLst/>
+              <a:uFillTx/>
+              <a:latin typeface="Times New Roman"/>
+            </a:endParaRPr>
+          </a:p>
+        </p:txBody>
+      </p:sp>
+      <p:sp>
+        <p:nvSpPr>
+          <p:cNvPr id="124" name=""/>
+          <p:cNvSpPr txBox="1"/>
+          <p:nvPr/>
+        </p:nvSpPr>
+        <p:spPr>
+          <a:xfrm>
+            <a:off x="762120" y="5658840"/>
             <a:ext cx="5617800" cy="233640"/>
           </a:xfrm>
           <a:prstGeom prst="rect">
@@ -10507,13 +11447,13 @@
       </p:sp>
       <p:sp>
         <p:nvSpPr>
-          <p:cNvPr id="124" name=""/>
+          <p:cNvPr id="125" name=""/>
           <p:cNvSpPr/>
           <p:nvPr/>
         </p:nvSpPr>
         <p:spPr>
           <a:xfrm>
-            <a:off x="1433160" y="1795320"/>
+            <a:off x="1433160" y="1738080"/>
             <a:ext cx="9325440" cy="810000"/>
           </a:xfrm>
           <a:custGeom>
@@ -10524,14 +11464,14 @@
             <a:pathLst>
               <a:path w="25904" h="2250">
                 <a:moveTo>
-                  <a:pt x="0" y="2104"/>
+                  <a:pt x="0" y="2105"/>
                 </a:moveTo>
                 <a:lnTo>
-                  <a:pt x="0" y="145"/>
+                  <a:pt x="0" y="146"/>
                 </a:lnTo>
                 <a:cubicBezTo>
                   <a:pt x="0" y="136"/>
-                  <a:pt x="1" y="126"/>
+                  <a:pt x="1" y="127"/>
                   <a:pt x="3" y="117"/>
                 </a:cubicBezTo>
                 <a:cubicBezTo>
@@ -10546,13 +11486,13 @@
                 </a:cubicBezTo>
                 <a:cubicBezTo>
                   <a:pt x="30" y="57"/>
-                  <a:pt x="36" y="49"/>
+                  <a:pt x="36" y="50"/>
                   <a:pt x="43" y="43"/>
                 </a:cubicBezTo>
                 <a:cubicBezTo>
                   <a:pt x="50" y="36"/>
                   <a:pt x="57" y="30"/>
-                  <a:pt x="65" y="24"/>
+                  <a:pt x="65" y="25"/>
                 </a:cubicBezTo>
                 <a:cubicBezTo>
                   <a:pt x="73" y="19"/>
@@ -10560,7 +11500,7 @@
                   <a:pt x="90" y="11"/>
                 </a:cubicBezTo>
                 <a:cubicBezTo>
-                  <a:pt x="99" y="7"/>
+                  <a:pt x="99" y="8"/>
                   <a:pt x="108" y="5"/>
                   <a:pt x="118" y="3"/>
                 </a:cubicBezTo>
@@ -10579,13 +11519,13 @@
                 </a:cubicBezTo>
                 <a:cubicBezTo>
                   <a:pt x="25796" y="5"/>
-                  <a:pt x="25806" y="7"/>
+                  <a:pt x="25806" y="8"/>
                   <a:pt x="25814" y="11"/>
                 </a:cubicBezTo>
                 <a:cubicBezTo>
                   <a:pt x="25823" y="15"/>
                   <a:pt x="25832" y="19"/>
-                  <a:pt x="25840" y="24"/>
+                  <a:pt x="25840" y="25"/>
                 </a:cubicBezTo>
                 <a:cubicBezTo>
                   <a:pt x="25847" y="30"/>
@@ -10593,7 +11533,7 @@
                   <a:pt x="25862" y="43"/>
                 </a:cubicBezTo>
                 <a:cubicBezTo>
-                  <a:pt x="25868" y="49"/>
+                  <a:pt x="25868" y="50"/>
                   <a:pt x="25874" y="57"/>
                   <a:pt x="25880" y="65"/>
                 </a:cubicBezTo>
@@ -10608,16 +11548,16 @@
                   <a:pt x="25901" y="117"/>
                 </a:cubicBezTo>
                 <a:cubicBezTo>
-                  <a:pt x="25903" y="126"/>
+                  <a:pt x="25903" y="127"/>
                   <a:pt x="25904" y="136"/>
-                  <a:pt x="25904" y="145"/>
-                </a:cubicBezTo>
-                <a:lnTo>
-                  <a:pt x="25904" y="2104"/>
+                  <a:pt x="25904" y="146"/>
+                </a:cubicBezTo>
+                <a:lnTo>
+                  <a:pt x="25904" y="2105"/>
                 </a:lnTo>
                 <a:cubicBezTo>
                   <a:pt x="25904" y="2114"/>
-                  <a:pt x="25903" y="2123"/>
+                  <a:pt x="25903" y="2124"/>
                   <a:pt x="25901" y="2133"/>
                 </a:cubicBezTo>
                 <a:cubicBezTo>
@@ -10632,13 +11572,13 @@
                 </a:cubicBezTo>
                 <a:cubicBezTo>
                   <a:pt x="25874" y="2193"/>
-                  <a:pt x="25868" y="2200"/>
+                  <a:pt x="25868" y="2201"/>
                   <a:pt x="25862" y="2207"/>
                 </a:cubicBezTo>
                 <a:cubicBezTo>
                   <a:pt x="25855" y="2214"/>
                   <a:pt x="25847" y="2220"/>
-                  <a:pt x="25840" y="2225"/>
+                  <a:pt x="25840" y="2226"/>
                 </a:cubicBezTo>
                 <a:cubicBezTo>
                   <a:pt x="25832" y="2231"/>
@@ -10646,7 +11586,7 @@
                   <a:pt x="25814" y="2239"/>
                 </a:cubicBezTo>
                 <a:cubicBezTo>
-                  <a:pt x="25806" y="2242"/>
+                  <a:pt x="25806" y="2243"/>
                   <a:pt x="25796" y="2245"/>
                   <a:pt x="25787" y="2247"/>
                 </a:cubicBezTo>
@@ -10665,13 +11605,13 @@
                 </a:cubicBezTo>
                 <a:cubicBezTo>
                   <a:pt x="108" y="2245"/>
-                  <a:pt x="99" y="2242"/>
+                  <a:pt x="99" y="2243"/>
                   <a:pt x="90" y="2239"/>
                 </a:cubicBezTo>
                 <a:cubicBezTo>
                   <a:pt x="81" y="2235"/>
                   <a:pt x="73" y="2231"/>
-                  <a:pt x="65" y="2225"/>
+                  <a:pt x="65" y="2226"/>
                 </a:cubicBezTo>
                 <a:cubicBezTo>
                   <a:pt x="57" y="2220"/>
@@ -10679,7 +11619,7 @@
                   <a:pt x="43" y="2207"/>
                 </a:cubicBezTo>
                 <a:cubicBezTo>
-                  <a:pt x="36" y="2200"/>
+                  <a:pt x="36" y="2201"/>
                   <a:pt x="30" y="2193"/>
                   <a:pt x="25" y="2185"/>
                 </a:cubicBezTo>
@@ -10694,9 +11634,9 @@
                   <a:pt x="3" y="2133"/>
                 </a:cubicBezTo>
                 <a:cubicBezTo>
-                  <a:pt x="1" y="2123"/>
+                  <a:pt x="1" y="2124"/>
                   <a:pt x="0" y="2114"/>
-                  <a:pt x="0" y="2104"/>
+                  <a:pt x="0" y="2105"/>
                 </a:cubicBezTo>
                 <a:close/>
               </a:path>
@@ -10727,13 +11667,13 @@
       </p:sp>
       <p:sp>
         <p:nvSpPr>
-          <p:cNvPr id="125" name=""/>
+          <p:cNvPr id="126" name=""/>
           <p:cNvSpPr/>
           <p:nvPr/>
         </p:nvSpPr>
         <p:spPr>
           <a:xfrm>
-            <a:off x="1433160" y="1795320"/>
+            <a:off x="1433160" y="1738080"/>
             <a:ext cx="9325440" cy="810000"/>
           </a:xfrm>
           <a:custGeom>
@@ -10744,14 +11684,14 @@
             <a:pathLst>
               <a:path w="25904" h="2250">
                 <a:moveTo>
-                  <a:pt x="0" y="2104"/>
+                  <a:pt x="0" y="2105"/>
                 </a:moveTo>
                 <a:lnTo>
-                  <a:pt x="0" y="145"/>
+                  <a:pt x="0" y="146"/>
                 </a:lnTo>
                 <a:cubicBezTo>
                   <a:pt x="0" y="136"/>
-                  <a:pt x="1" y="126"/>
+                  <a:pt x="1" y="127"/>
                   <a:pt x="3" y="117"/>
                 </a:cubicBezTo>
                 <a:cubicBezTo>
@@ -10766,13 +11706,13 @@
                 </a:cubicBezTo>
                 <a:cubicBezTo>
                   <a:pt x="30" y="57"/>
-                  <a:pt x="36" y="49"/>
+                  <a:pt x="36" y="50"/>
                   <a:pt x="43" y="43"/>
                 </a:cubicBezTo>
                 <a:cubicBezTo>
                   <a:pt x="50" y="36"/>
                   <a:pt x="57" y="30"/>
-                  <a:pt x="65" y="24"/>
+                  <a:pt x="65" y="25"/>
                 </a:cubicBezTo>
                 <a:cubicBezTo>
                   <a:pt x="73" y="19"/>
@@ -10780,7 +11720,7 @@
                   <a:pt x="90" y="11"/>
                 </a:cubicBezTo>
                 <a:cubicBezTo>
-                  <a:pt x="99" y="7"/>
+                  <a:pt x="99" y="8"/>
                   <a:pt x="108" y="5"/>
                   <a:pt x="118" y="3"/>
                 </a:cubicBezTo>
@@ -10799,13 +11739,13 @@
                 </a:cubicBezTo>
                 <a:cubicBezTo>
                   <a:pt x="25796" y="5"/>
-                  <a:pt x="25806" y="7"/>
+                  <a:pt x="25806" y="8"/>
                   <a:pt x="25814" y="11"/>
                 </a:cubicBezTo>
                 <a:cubicBezTo>
                   <a:pt x="25823" y="15"/>
                   <a:pt x="25832" y="19"/>
-                  <a:pt x="25840" y="24"/>
+                  <a:pt x="25840" y="25"/>
                 </a:cubicBezTo>
                 <a:cubicBezTo>
                   <a:pt x="25847" y="30"/>
@@ -10813,7 +11753,7 @@
                   <a:pt x="25862" y="43"/>
                 </a:cubicBezTo>
                 <a:cubicBezTo>
-                  <a:pt x="25868" y="49"/>
+                  <a:pt x="25868" y="50"/>
                   <a:pt x="25874" y="57"/>
                   <a:pt x="25880" y="65"/>
                 </a:cubicBezTo>
@@ -10828,16 +11768,16 @@
                   <a:pt x="25901" y="117"/>
                 </a:cubicBezTo>
                 <a:cubicBezTo>
-                  <a:pt x="25903" y="126"/>
+                  <a:pt x="25903" y="127"/>
                   <a:pt x="25904" y="136"/>
-                  <a:pt x="25904" y="145"/>
-                </a:cubicBezTo>
-                <a:lnTo>
-                  <a:pt x="25904" y="2104"/>
+                  <a:pt x="25904" y="146"/>
+                </a:cubicBezTo>
+                <a:lnTo>
+                  <a:pt x="25904" y="2105"/>
                 </a:lnTo>
                 <a:cubicBezTo>
                   <a:pt x="25904" y="2114"/>
-                  <a:pt x="25903" y="2123"/>
+                  <a:pt x="25903" y="2124"/>
                   <a:pt x="25901" y="2133"/>
                 </a:cubicBezTo>
                 <a:cubicBezTo>
@@ -10852,13 +11792,13 @@
                 </a:cubicBezTo>
                 <a:cubicBezTo>
                   <a:pt x="25874" y="2193"/>
-                  <a:pt x="25868" y="2200"/>
+                  <a:pt x="25868" y="2201"/>
                   <a:pt x="25862" y="2207"/>
                 </a:cubicBezTo>
                 <a:cubicBezTo>
                   <a:pt x="25855" y="2214"/>
                   <a:pt x="25847" y="2220"/>
-                  <a:pt x="25840" y="2225"/>
+                  <a:pt x="25840" y="2226"/>
                 </a:cubicBezTo>
                 <a:cubicBezTo>
                   <a:pt x="25832" y="2231"/>
@@ -10866,7 +11806,7 @@
                   <a:pt x="25814" y="2239"/>
                 </a:cubicBezTo>
                 <a:cubicBezTo>
-                  <a:pt x="25806" y="2242"/>
+                  <a:pt x="25806" y="2243"/>
                   <a:pt x="25796" y="2245"/>
                   <a:pt x="25787" y="2247"/>
                 </a:cubicBezTo>
@@ -10885,13 +11825,13 @@
                 </a:cubicBezTo>
                 <a:cubicBezTo>
                   <a:pt x="108" y="2245"/>
-                  <a:pt x="99" y="2242"/>
+                  <a:pt x="99" y="2243"/>
                   <a:pt x="90" y="2239"/>
                 </a:cubicBezTo>
                 <a:cubicBezTo>
                   <a:pt x="81" y="2235"/>
                   <a:pt x="73" y="2231"/>
-                  <a:pt x="65" y="2225"/>
+                  <a:pt x="65" y="2226"/>
                 </a:cubicBezTo>
                 <a:cubicBezTo>
                   <a:pt x="57" y="2220"/>
@@ -10899,7 +11839,7 @@
                   <a:pt x="43" y="2207"/>
                 </a:cubicBezTo>
                 <a:cubicBezTo>
-                  <a:pt x="36" y="2200"/>
+                  <a:pt x="36" y="2201"/>
                   <a:pt x="30" y="2193"/>
                   <a:pt x="25" y="2185"/>
                 </a:cubicBezTo>
@@ -10914,9 +11854,9 @@
                   <a:pt x="3" y="2133"/>
                 </a:cubicBezTo>
                 <a:cubicBezTo>
-                  <a:pt x="1" y="2123"/>
+                  <a:pt x="1" y="2124"/>
                   <a:pt x="0" y="2114"/>
-                  <a:pt x="0" y="2104"/>
+                  <a:pt x="0" y="2105"/>
                 </a:cubicBezTo>
                 <a:close/>
               </a:path>
@@ -10948,7 +11888,7 @@
       </p:sp>
       <p:sp>
         <p:nvSpPr>
-          <p:cNvPr id="126" name=""/>
+          <p:cNvPr id="127" name=""/>
           <p:cNvSpPr txBox="1"/>
           <p:nvPr/>
         </p:nvSpPr>
@@ -10996,13 +11936,13 @@
       </p:sp>
       <p:sp>
         <p:nvSpPr>
-          <p:cNvPr id="127" name=""/>
+          <p:cNvPr id="128" name=""/>
           <p:cNvSpPr txBox="1"/>
           <p:nvPr/>
         </p:nvSpPr>
         <p:spPr>
           <a:xfrm>
-            <a:off x="1818360" y="1980000"/>
+            <a:off x="1818360" y="1922760"/>
             <a:ext cx="475200" cy="446760"/>
           </a:xfrm>
           <a:prstGeom prst="rect">
@@ -11044,7 +11984,7 @@
       </p:sp>
       <p:pic>
         <p:nvPicPr>
-          <p:cNvPr id="128" name=""/>
+          <p:cNvPr id="129" name=""/>
           <p:cNvPicPr/>
           <p:nvPr/>
         </p:nvPicPr>
@@ -11054,7 +11994,7 @@
         </p:blipFill>
         <p:spPr>
           <a:xfrm>
-            <a:off x="1630800" y="3620880"/>
+            <a:off x="1630800" y="3566160"/>
             <a:ext cx="853200" cy="813600"/>
           </a:xfrm>
           <a:prstGeom prst="rect">
@@ -11068,7 +12008,7 @@
       </p:pic>
       <p:pic>
         <p:nvPicPr>
-          <p:cNvPr id="129" name=""/>
+          <p:cNvPr id="130" name=""/>
           <p:cNvPicPr/>
           <p:nvPr/>
         </p:nvPicPr>
@@ -11092,13 +12032,13 @@
       </p:pic>
       <p:sp>
         <p:nvSpPr>
-          <p:cNvPr id="130" name=""/>
+          <p:cNvPr id="131" name=""/>
           <p:cNvSpPr txBox="1"/>
           <p:nvPr/>
         </p:nvSpPr>
         <p:spPr>
           <a:xfrm>
-            <a:off x="2657520" y="2069640"/>
+            <a:off x="2657520" y="2012400"/>
             <a:ext cx="5871600" cy="256320"/>
           </a:xfrm>
           <a:prstGeom prst="rect">
@@ -11170,7 +12110,7 @@
       </p:grpSpPr>
       <p:sp>
         <p:nvSpPr>
-          <p:cNvPr id="131" name=""/>
+          <p:cNvPr id="132" name=""/>
           <p:cNvSpPr/>
           <p:nvPr/>
         </p:nvSpPr>
@@ -11230,7 +12170,7 @@
       </p:sp>
       <p:sp>
         <p:nvSpPr>
-          <p:cNvPr id="132" name=""/>
+          <p:cNvPr id="133" name=""/>
           <p:cNvSpPr/>
           <p:nvPr/>
         </p:nvSpPr>
@@ -11290,7 +12230,7 @@
       </p:sp>
       <p:sp>
         <p:nvSpPr>
-          <p:cNvPr id="133" name=""/>
+          <p:cNvPr id="134" name=""/>
           <p:cNvSpPr/>
           <p:nvPr/>
         </p:nvSpPr>
@@ -11350,7 +12290,7 @@
       </p:sp>
       <p:sp>
         <p:nvSpPr>
-          <p:cNvPr id="134" name=""/>
+          <p:cNvPr id="135" name=""/>
           <p:cNvSpPr txBox="1"/>
           <p:nvPr/>
         </p:nvSpPr>
@@ -11398,7 +12338,7 @@
       </p:sp>
       <p:sp>
         <p:nvSpPr>
-          <p:cNvPr id="135" name=""/>
+          <p:cNvPr id="136" name=""/>
           <p:cNvSpPr/>
           <p:nvPr/>
         </p:nvSpPr>
@@ -11618,7 +12558,7 @@
       </p:sp>
       <p:sp>
         <p:nvSpPr>
-          <p:cNvPr id="136" name=""/>
+          <p:cNvPr id="137" name=""/>
           <p:cNvSpPr/>
           <p:nvPr/>
         </p:nvSpPr>
@@ -11839,7 +12779,7 @@
       </p:sp>
       <p:pic>
         <p:nvPicPr>
-          <p:cNvPr id="137" name=""/>
+          <p:cNvPr id="138" name=""/>
           <p:cNvPicPr/>
           <p:nvPr/>
         </p:nvPicPr>
@@ -11863,7 +12803,7 @@
       </p:pic>
       <p:sp>
         <p:nvSpPr>
-          <p:cNvPr id="138" name=""/>
+          <p:cNvPr id="139" name=""/>
           <p:cNvSpPr txBox="1"/>
           <p:nvPr/>
         </p:nvSpPr>
@@ -11911,7 +12851,7 @@
       </p:sp>
       <p:sp>
         <p:nvSpPr>
-          <p:cNvPr id="139" name=""/>
+          <p:cNvPr id="140" name=""/>
           <p:cNvSpPr txBox="1"/>
           <p:nvPr/>
         </p:nvSpPr>
@@ -11959,7 +12899,7 @@
       </p:sp>
       <p:sp>
         <p:nvSpPr>
-          <p:cNvPr id="140" name=""/>
+          <p:cNvPr id="141" name=""/>
           <p:cNvSpPr txBox="1"/>
           <p:nvPr/>
         </p:nvSpPr>
@@ -12037,7 +12977,7 @@
       </p:grpSpPr>
       <p:sp>
         <p:nvSpPr>
-          <p:cNvPr id="141" name=""/>
+          <p:cNvPr id="142" name=""/>
           <p:cNvSpPr/>
           <p:nvPr/>
         </p:nvSpPr>
@@ -12097,7 +13037,7 @@
       </p:sp>
       <p:sp>
         <p:nvSpPr>
-          <p:cNvPr id="142" name=""/>
+          <p:cNvPr id="143" name=""/>
           <p:cNvSpPr/>
           <p:nvPr/>
         </p:nvSpPr>
@@ -12157,7 +13097,7 @@
       </p:sp>
       <p:sp>
         <p:nvSpPr>
-          <p:cNvPr id="143" name=""/>
+          <p:cNvPr id="144" name=""/>
           <p:cNvSpPr/>
           <p:nvPr/>
         </p:nvSpPr>
@@ -12217,7 +13157,7 @@
       </p:sp>
       <p:sp>
         <p:nvSpPr>
-          <p:cNvPr id="144" name=""/>
+          <p:cNvPr id="145" name=""/>
           <p:cNvSpPr/>
           <p:nvPr/>
         </p:nvSpPr>
@@ -12357,7 +13297,7 @@
       </p:sp>
       <p:sp>
         <p:nvSpPr>
-          <p:cNvPr id="145" name=""/>
+          <p:cNvPr id="146" name=""/>
           <p:cNvSpPr/>
           <p:nvPr/>
         </p:nvSpPr>
@@ -12498,7 +13438,7 @@
       </p:sp>
       <p:sp>
         <p:nvSpPr>
-          <p:cNvPr id="146" name=""/>
+          <p:cNvPr id="147" name=""/>
           <p:cNvSpPr txBox="1"/>
           <p:nvPr/>
         </p:nvSpPr>
@@ -12546,7 +13486,7 @@
       </p:sp>
       <p:sp>
         <p:nvSpPr>
-          <p:cNvPr id="147" name=""/>
+          <p:cNvPr id="148" name=""/>
           <p:cNvSpPr/>
           <p:nvPr/>
         </p:nvSpPr>
@@ -12686,7 +13626,7 @@
       </p:sp>
       <p:sp>
         <p:nvSpPr>
-          <p:cNvPr id="148" name=""/>
+          <p:cNvPr id="149" name=""/>
           <p:cNvSpPr/>
           <p:nvPr/>
         </p:nvSpPr>
@@ -12827,7 +13767,7 @@
       </p:sp>
       <p:sp>
         <p:nvSpPr>
-          <p:cNvPr id="149" name=""/>
+          <p:cNvPr id="150" name=""/>
           <p:cNvSpPr txBox="1"/>
           <p:nvPr/>
         </p:nvSpPr>
@@ -12875,7 +13815,7 @@
       </p:sp>
       <p:sp>
         <p:nvSpPr>
-          <p:cNvPr id="150" name=""/>
+          <p:cNvPr id="151" name=""/>
           <p:cNvSpPr/>
           <p:nvPr/>
         </p:nvSpPr>
@@ -13015,7 +13955,7 @@
       </p:sp>
       <p:sp>
         <p:nvSpPr>
-          <p:cNvPr id="151" name=""/>
+          <p:cNvPr id="152" name=""/>
           <p:cNvSpPr/>
           <p:nvPr/>
         </p:nvSpPr>
@@ -13156,7 +14096,7 @@
       </p:sp>
       <p:sp>
         <p:nvSpPr>
-          <p:cNvPr id="152" name=""/>
+          <p:cNvPr id="153" name=""/>
           <p:cNvSpPr txBox="1"/>
           <p:nvPr/>
         </p:nvSpPr>
@@ -13204,7 +14144,7 @@
       </p:sp>
       <p:sp>
         <p:nvSpPr>
-          <p:cNvPr id="153" name=""/>
+          <p:cNvPr id="154" name=""/>
           <p:cNvSpPr/>
           <p:nvPr/>
         </p:nvSpPr>
@@ -13344,7 +14284,7 @@
       </p:sp>
       <p:sp>
         <p:nvSpPr>
-          <p:cNvPr id="154" name=""/>
+          <p:cNvPr id="155" name=""/>
           <p:cNvSpPr/>
           <p:nvPr/>
         </p:nvSpPr>
@@ -13485,7 +14425,7 @@
       </p:sp>
       <p:sp>
         <p:nvSpPr>
-          <p:cNvPr id="155" name=""/>
+          <p:cNvPr id="156" name=""/>
           <p:cNvSpPr txBox="1"/>
           <p:nvPr/>
         </p:nvSpPr>
@@ -13533,7 +14473,7 @@
       </p:sp>
       <p:sp>
         <p:nvSpPr>
-          <p:cNvPr id="156" name=""/>
+          <p:cNvPr id="157" name=""/>
           <p:cNvSpPr/>
           <p:nvPr/>
         </p:nvSpPr>
@@ -13673,7 +14613,7 @@
       </p:sp>
       <p:sp>
         <p:nvSpPr>
-          <p:cNvPr id="157" name=""/>
+          <p:cNvPr id="158" name=""/>
           <p:cNvSpPr/>
           <p:nvPr/>
         </p:nvSpPr>
@@ -13814,7 +14754,7 @@
       </p:sp>
       <p:sp>
         <p:nvSpPr>
-          <p:cNvPr id="158" name=""/>
+          <p:cNvPr id="159" name=""/>
           <p:cNvSpPr txBox="1"/>
           <p:nvPr/>
         </p:nvSpPr>
@@ -13862,7 +14802,7 @@
       </p:sp>
       <p:sp>
         <p:nvSpPr>
-          <p:cNvPr id="159" name=""/>
+          <p:cNvPr id="160" name=""/>
           <p:cNvSpPr/>
           <p:nvPr/>
         </p:nvSpPr>
@@ -14002,7 +14942,7 @@
       </p:sp>
       <p:sp>
         <p:nvSpPr>
-          <p:cNvPr id="160" name=""/>
+          <p:cNvPr id="161" name=""/>
           <p:cNvSpPr/>
           <p:nvPr/>
         </p:nvSpPr>
@@ -14143,7 +15083,7 @@
       </p:sp>
       <p:sp>
         <p:nvSpPr>
-          <p:cNvPr id="161" name=""/>
+          <p:cNvPr id="162" name=""/>
           <p:cNvSpPr txBox="1"/>
           <p:nvPr/>
         </p:nvSpPr>
@@ -14191,7 +15131,7 @@
       </p:sp>
       <p:sp>
         <p:nvSpPr>
-          <p:cNvPr id="162" name=""/>
+          <p:cNvPr id="163" name=""/>
           <p:cNvSpPr/>
           <p:nvPr/>
         </p:nvSpPr>
@@ -14331,7 +15271,7 @@
       </p:sp>
       <p:sp>
         <p:nvSpPr>
-          <p:cNvPr id="163" name=""/>
+          <p:cNvPr id="164" name=""/>
           <p:cNvSpPr/>
           <p:nvPr/>
         </p:nvSpPr>
@@ -14472,7 +15412,7 @@
       </p:sp>
       <p:sp>
         <p:nvSpPr>
-          <p:cNvPr id="164" name=""/>
+          <p:cNvPr id="165" name=""/>
           <p:cNvSpPr txBox="1"/>
           <p:nvPr/>
         </p:nvSpPr>
@@ -14520,7 +15460,7 @@
       </p:sp>
       <p:sp>
         <p:nvSpPr>
-          <p:cNvPr id="165" name=""/>
+          <p:cNvPr id="166" name=""/>
           <p:cNvSpPr/>
           <p:nvPr/>
         </p:nvSpPr>
@@ -14660,7 +15600,7 @@
       </p:sp>
       <p:sp>
         <p:nvSpPr>
-          <p:cNvPr id="166" name=""/>
+          <p:cNvPr id="167" name=""/>
           <p:cNvSpPr/>
           <p:nvPr/>
         </p:nvSpPr>
@@ -14801,7 +15741,7 @@
       </p:sp>
       <p:sp>
         <p:nvSpPr>
-          <p:cNvPr id="167" name=""/>
+          <p:cNvPr id="168" name=""/>
           <p:cNvSpPr txBox="1"/>
           <p:nvPr/>
         </p:nvSpPr>
@@ -14849,7 +15789,7 @@
       </p:sp>
       <p:sp>
         <p:nvSpPr>
-          <p:cNvPr id="168" name=""/>
+          <p:cNvPr id="169" name=""/>
           <p:cNvSpPr/>
           <p:nvPr/>
         </p:nvSpPr>
@@ -14989,7 +15929,7 @@
       </p:sp>
       <p:sp>
         <p:nvSpPr>
-          <p:cNvPr id="169" name=""/>
+          <p:cNvPr id="170" name=""/>
           <p:cNvSpPr/>
           <p:nvPr/>
         </p:nvSpPr>
@@ -15130,7 +16070,7 @@
       </p:sp>
       <p:sp>
         <p:nvSpPr>
-          <p:cNvPr id="170" name=""/>
+          <p:cNvPr id="171" name=""/>
           <p:cNvSpPr txBox="1"/>
           <p:nvPr/>
         </p:nvSpPr>
@@ -15178,7 +16118,7 @@
       </p:sp>
       <p:sp>
         <p:nvSpPr>
-          <p:cNvPr id="171" name=""/>
+          <p:cNvPr id="172" name=""/>
           <p:cNvSpPr/>
           <p:nvPr/>
         </p:nvSpPr>
@@ -15318,7 +16258,7 @@
       </p:sp>
       <p:sp>
         <p:nvSpPr>
-          <p:cNvPr id="172" name=""/>
+          <p:cNvPr id="173" name=""/>
           <p:cNvSpPr/>
           <p:nvPr/>
         </p:nvSpPr>
@@ -15459,7 +16399,7 @@
       </p:sp>
       <p:sp>
         <p:nvSpPr>
-          <p:cNvPr id="173" name=""/>
+          <p:cNvPr id="174" name=""/>
           <p:cNvSpPr txBox="1"/>
           <p:nvPr/>
         </p:nvSpPr>
@@ -15507,7 +16447,7 @@
       </p:sp>
       <p:sp>
         <p:nvSpPr>
-          <p:cNvPr id="174" name=""/>
+          <p:cNvPr id="175" name=""/>
           <p:cNvSpPr/>
           <p:nvPr/>
         </p:nvSpPr>
@@ -15647,7 +16587,7 @@
       </p:sp>
       <p:sp>
         <p:nvSpPr>
-          <p:cNvPr id="175" name=""/>
+          <p:cNvPr id="176" name=""/>
           <p:cNvSpPr/>
           <p:nvPr/>
         </p:nvSpPr>
@@ -15788,7 +16728,7 @@
       </p:sp>
       <p:sp>
         <p:nvSpPr>
-          <p:cNvPr id="176" name=""/>
+          <p:cNvPr id="177" name=""/>
           <p:cNvSpPr txBox="1"/>
           <p:nvPr/>
         </p:nvSpPr>
@@ -15836,7 +16776,7 @@
       </p:sp>
       <p:sp>
         <p:nvSpPr>
-          <p:cNvPr id="177" name=""/>
+          <p:cNvPr id="178" name=""/>
           <p:cNvSpPr txBox="1"/>
           <p:nvPr/>
         </p:nvSpPr>
@@ -15884,7 +16824,7 @@
       </p:sp>
       <p:sp>
         <p:nvSpPr>
-          <p:cNvPr id="178" name=""/>
+          <p:cNvPr id="179" name=""/>
           <p:cNvSpPr txBox="1"/>
           <p:nvPr/>
         </p:nvSpPr>
@@ -15932,7 +16872,7 @@
       </p:sp>
       <p:sp>
         <p:nvSpPr>
-          <p:cNvPr id="179" name=""/>
+          <p:cNvPr id="180" name=""/>
           <p:cNvSpPr txBox="1"/>
           <p:nvPr/>
         </p:nvSpPr>
@@ -16004,7 +16944,7 @@
       </p:sp>
       <p:sp>
         <p:nvSpPr>
-          <p:cNvPr id="180" name=""/>
+          <p:cNvPr id="181" name=""/>
           <p:cNvSpPr txBox="1"/>
           <p:nvPr/>
         </p:nvSpPr>
@@ -16052,7 +16992,7 @@
       </p:sp>
       <p:sp>
         <p:nvSpPr>
-          <p:cNvPr id="181" name=""/>
+          <p:cNvPr id="182" name=""/>
           <p:cNvSpPr txBox="1"/>
           <p:nvPr/>
         </p:nvSpPr>
@@ -16136,7 +17076,7 @@
       </p:sp>
       <p:sp>
         <p:nvSpPr>
-          <p:cNvPr id="182" name=""/>
+          <p:cNvPr id="183" name=""/>
           <p:cNvSpPr txBox="1"/>
           <p:nvPr/>
         </p:nvSpPr>
@@ -16184,7 +17124,7 @@
       </p:sp>
       <p:sp>
         <p:nvSpPr>
-          <p:cNvPr id="183" name=""/>
+          <p:cNvPr id="184" name=""/>
           <p:cNvSpPr txBox="1"/>
           <p:nvPr/>
         </p:nvSpPr>
@@ -16232,7 +17172,7 @@
       </p:sp>
       <p:sp>
         <p:nvSpPr>
-          <p:cNvPr id="184" name=""/>
+          <p:cNvPr id="185" name=""/>
           <p:cNvSpPr txBox="1"/>
           <p:nvPr/>
         </p:nvSpPr>
@@ -16292,7 +17232,7 @@
       </p:sp>
       <p:sp>
         <p:nvSpPr>
-          <p:cNvPr id="185" name=""/>
+          <p:cNvPr id="186" name=""/>
           <p:cNvSpPr txBox="1"/>
           <p:nvPr/>
         </p:nvSpPr>
@@ -16340,7 +17280,7 @@
       </p:sp>
       <p:sp>
         <p:nvSpPr>
-          <p:cNvPr id="186" name=""/>
+          <p:cNvPr id="187" name=""/>
           <p:cNvSpPr txBox="1"/>
           <p:nvPr/>
         </p:nvSpPr>
@@ -16424,7 +17364,7 @@
       </p:sp>
       <p:sp>
         <p:nvSpPr>
-          <p:cNvPr id="187" name=""/>
+          <p:cNvPr id="188" name=""/>
           <p:cNvSpPr txBox="1"/>
           <p:nvPr/>
         </p:nvSpPr>
@@ -16472,7 +17412,7 @@
       </p:sp>
       <p:sp>
         <p:nvSpPr>
-          <p:cNvPr id="188" name=""/>
+          <p:cNvPr id="189" name=""/>
           <p:cNvSpPr txBox="1"/>
           <p:nvPr/>
         </p:nvSpPr>
@@ -16520,7 +17460,7 @@
       </p:sp>
       <p:sp>
         <p:nvSpPr>
-          <p:cNvPr id="189" name=""/>
+          <p:cNvPr id="190" name=""/>
           <p:cNvSpPr txBox="1"/>
           <p:nvPr/>
         </p:nvSpPr>
@@ -16580,7 +17520,7 @@
       </p:sp>
       <p:sp>
         <p:nvSpPr>
-          <p:cNvPr id="190" name=""/>
+          <p:cNvPr id="191" name=""/>
           <p:cNvSpPr txBox="1"/>
           <p:nvPr/>
         </p:nvSpPr>
@@ -16658,7 +17598,7 @@
       </p:grpSpPr>
       <p:sp>
         <p:nvSpPr>
-          <p:cNvPr id="191" name=""/>
+          <p:cNvPr id="192" name=""/>
           <p:cNvSpPr/>
           <p:nvPr/>
         </p:nvSpPr>
@@ -16718,7 +17658,7 @@
       </p:sp>
       <p:sp>
         <p:nvSpPr>
-          <p:cNvPr id="192" name=""/>
+          <p:cNvPr id="193" name=""/>
           <p:cNvSpPr/>
           <p:nvPr/>
         </p:nvSpPr>
@@ -16778,7 +17718,7 @@
       </p:sp>
       <p:sp>
         <p:nvSpPr>
-          <p:cNvPr id="193" name=""/>
+          <p:cNvPr id="194" name=""/>
           <p:cNvSpPr/>
           <p:nvPr/>
         </p:nvSpPr>
@@ -16838,14 +17778,1095 @@
       </p:sp>
       <p:sp>
         <p:nvSpPr>
-          <p:cNvPr id="194" name=""/>
+          <p:cNvPr id="195" name=""/>
+          <p:cNvSpPr/>
+          <p:nvPr/>
+        </p:nvSpPr>
+        <p:spPr>
+          <a:xfrm>
+            <a:off x="1466640" y="1371240"/>
+            <a:ext cx="9258840" cy="267840"/>
+          </a:xfrm>
+          <a:custGeom>
+            <a:avLst/>
+            <a:gdLst/>
+            <a:ahLst/>
+            <a:rect l="0" t="0" r="r" b="b"/>
+            <a:pathLst>
+              <a:path w="25719" h="744">
+                <a:moveTo>
+                  <a:pt x="0" y="0"/>
+                </a:moveTo>
+                <a:lnTo>
+                  <a:pt x="25719" y="0"/>
+                </a:lnTo>
+                <a:lnTo>
+                  <a:pt x="25719" y="744"/>
+                </a:lnTo>
+                <a:lnTo>
+                  <a:pt x="0" y="744"/>
+                </a:lnTo>
+                <a:lnTo>
+                  <a:pt x="0" y="0"/>
+                </a:lnTo>
+                <a:close/>
+              </a:path>
+            </a:pathLst>
+          </a:custGeom>
+          <a:solidFill>
+            <a:srgbClr val="0D140F"/>
+          </a:solidFill>
+          <a:ln w="0">
+            <a:noFill/>
+          </a:ln>
+        </p:spPr>
+        <p:txBody>
+          <a:bodyPr lIns="0" tIns="0" rIns="0" bIns="0" anchor="t">
+            <a:noAutofit/>
+          </a:bodyPr>
+          <a:p>
+            <a:endParaRPr lang="en-US" sz="2400" b="0" u="none" strike="noStrike">
+              <a:solidFill>
+                <a:srgbClr val="FFFFFF"/>
+              </a:solidFill>
+              <a:effectLst/>
+              <a:uFillTx/>
+              <a:latin typeface="Times New Roman"/>
+            </a:endParaRPr>
+          </a:p>
+        </p:txBody>
+      </p:sp>
+      <p:sp>
+        <p:nvSpPr>
+          <p:cNvPr id="196" name=""/>
+          <p:cNvSpPr/>
+          <p:nvPr/>
+        </p:nvSpPr>
+        <p:spPr>
+          <a:xfrm>
+            <a:off x="1466640" y="1638720"/>
+            <a:ext cx="9258840" cy="267480"/>
+          </a:xfrm>
+          <a:custGeom>
+            <a:avLst/>
+            <a:gdLst/>
+            <a:ahLst/>
+            <a:rect l="0" t="0" r="r" b="b"/>
+            <a:pathLst>
+              <a:path w="25719" h="743">
+                <a:moveTo>
+                  <a:pt x="0" y="0"/>
+                </a:moveTo>
+                <a:lnTo>
+                  <a:pt x="25719" y="0"/>
+                </a:lnTo>
+                <a:lnTo>
+                  <a:pt x="25719" y="743"/>
+                </a:lnTo>
+                <a:lnTo>
+                  <a:pt x="0" y="743"/>
+                </a:lnTo>
+                <a:lnTo>
+                  <a:pt x="0" y="0"/>
+                </a:lnTo>
+                <a:close/>
+              </a:path>
+            </a:pathLst>
+          </a:custGeom>
+          <a:solidFill>
+            <a:srgbClr val="0D130F"/>
+          </a:solidFill>
+          <a:ln w="0">
+            <a:noFill/>
+          </a:ln>
+        </p:spPr>
+        <p:txBody>
+          <a:bodyPr lIns="0" tIns="0" rIns="0" bIns="0" anchor="t">
+            <a:noAutofit/>
+          </a:bodyPr>
+          <a:p>
+            <a:endParaRPr lang="en-US" sz="2400" b="0" u="none" strike="noStrike">
+              <a:solidFill>
+                <a:srgbClr val="FFFFFF"/>
+              </a:solidFill>
+              <a:effectLst/>
+              <a:uFillTx/>
+              <a:latin typeface="Times New Roman"/>
+            </a:endParaRPr>
+          </a:p>
+        </p:txBody>
+      </p:sp>
+      <p:sp>
+        <p:nvSpPr>
+          <p:cNvPr id="197" name=""/>
+          <p:cNvSpPr/>
+          <p:nvPr/>
+        </p:nvSpPr>
+        <p:spPr>
+          <a:xfrm>
+            <a:off x="1466640" y="1905840"/>
+            <a:ext cx="9258840" cy="267840"/>
+          </a:xfrm>
+          <a:custGeom>
+            <a:avLst/>
+            <a:gdLst/>
+            <a:ahLst/>
+            <a:rect l="0" t="0" r="r" b="b"/>
+            <a:pathLst>
+              <a:path w="25719" h="744">
+                <a:moveTo>
+                  <a:pt x="0" y="0"/>
+                </a:moveTo>
+                <a:lnTo>
+                  <a:pt x="25719" y="0"/>
+                </a:lnTo>
+                <a:lnTo>
+                  <a:pt x="25719" y="744"/>
+                </a:lnTo>
+                <a:lnTo>
+                  <a:pt x="0" y="744"/>
+                </a:lnTo>
+                <a:lnTo>
+                  <a:pt x="0" y="0"/>
+                </a:lnTo>
+                <a:close/>
+              </a:path>
+            </a:pathLst>
+          </a:custGeom>
+          <a:solidFill>
+            <a:srgbClr val="0D120E"/>
+          </a:solidFill>
+          <a:ln w="0">
+            <a:noFill/>
+          </a:ln>
+        </p:spPr>
+        <p:txBody>
+          <a:bodyPr lIns="0" tIns="0" rIns="0" bIns="0" anchor="t">
+            <a:noAutofit/>
+          </a:bodyPr>
+          <a:p>
+            <a:endParaRPr lang="en-US" sz="2400" b="0" u="none" strike="noStrike">
+              <a:solidFill>
+                <a:srgbClr val="FFFFFF"/>
+              </a:solidFill>
+              <a:effectLst/>
+              <a:uFillTx/>
+              <a:latin typeface="Times New Roman"/>
+            </a:endParaRPr>
+          </a:p>
+        </p:txBody>
+      </p:sp>
+      <p:sp>
+        <p:nvSpPr>
+          <p:cNvPr id="198" name=""/>
+          <p:cNvSpPr/>
+          <p:nvPr/>
+        </p:nvSpPr>
+        <p:spPr>
+          <a:xfrm>
+            <a:off x="1466640" y="2173320"/>
+            <a:ext cx="9258840" cy="267480"/>
+          </a:xfrm>
+          <a:custGeom>
+            <a:avLst/>
+            <a:gdLst/>
+            <a:ahLst/>
+            <a:rect l="0" t="0" r="r" b="b"/>
+            <a:pathLst>
+              <a:path w="25719" h="743">
+                <a:moveTo>
+                  <a:pt x="0" y="0"/>
+                </a:moveTo>
+                <a:lnTo>
+                  <a:pt x="25719" y="0"/>
+                </a:lnTo>
+                <a:lnTo>
+                  <a:pt x="25719" y="743"/>
+                </a:lnTo>
+                <a:lnTo>
+                  <a:pt x="0" y="743"/>
+                </a:lnTo>
+                <a:lnTo>
+                  <a:pt x="0" y="0"/>
+                </a:lnTo>
+                <a:close/>
+              </a:path>
+            </a:pathLst>
+          </a:custGeom>
+          <a:solidFill>
+            <a:srgbClr val="0C120E"/>
+          </a:solidFill>
+          <a:ln w="0">
+            <a:noFill/>
+          </a:ln>
+        </p:spPr>
+        <p:txBody>
+          <a:bodyPr lIns="0" tIns="0" rIns="0" bIns="0" anchor="t">
+            <a:noAutofit/>
+          </a:bodyPr>
+          <a:p>
+            <a:endParaRPr lang="en-US" sz="2400" b="0" u="none" strike="noStrike">
+              <a:solidFill>
+                <a:srgbClr val="FFFFFF"/>
+              </a:solidFill>
+              <a:effectLst/>
+              <a:uFillTx/>
+              <a:latin typeface="Times New Roman"/>
+            </a:endParaRPr>
+          </a:p>
+        </p:txBody>
+      </p:sp>
+      <p:sp>
+        <p:nvSpPr>
+          <p:cNvPr id="199" name=""/>
+          <p:cNvSpPr/>
+          <p:nvPr/>
+        </p:nvSpPr>
+        <p:spPr>
+          <a:xfrm>
+            <a:off x="1466640" y="2440440"/>
+            <a:ext cx="9258840" cy="267840"/>
+          </a:xfrm>
+          <a:custGeom>
+            <a:avLst/>
+            <a:gdLst/>
+            <a:ahLst/>
+            <a:rect l="0" t="0" r="r" b="b"/>
+            <a:pathLst>
+              <a:path w="25719" h="744">
+                <a:moveTo>
+                  <a:pt x="0" y="0"/>
+                </a:moveTo>
+                <a:lnTo>
+                  <a:pt x="25719" y="0"/>
+                </a:lnTo>
+                <a:lnTo>
+                  <a:pt x="25719" y="744"/>
+                </a:lnTo>
+                <a:lnTo>
+                  <a:pt x="0" y="744"/>
+                </a:lnTo>
+                <a:lnTo>
+                  <a:pt x="0" y="0"/>
+                </a:lnTo>
+                <a:close/>
+              </a:path>
+            </a:pathLst>
+          </a:custGeom>
+          <a:solidFill>
+            <a:srgbClr val="0C110E"/>
+          </a:solidFill>
+          <a:ln w="0">
+            <a:noFill/>
+          </a:ln>
+        </p:spPr>
+        <p:txBody>
+          <a:bodyPr lIns="0" tIns="0" rIns="0" bIns="0" anchor="t">
+            <a:noAutofit/>
+          </a:bodyPr>
+          <a:p>
+            <a:endParaRPr lang="en-US" sz="2400" b="0" u="none" strike="noStrike">
+              <a:solidFill>
+                <a:srgbClr val="FFFFFF"/>
+              </a:solidFill>
+              <a:effectLst/>
+              <a:uFillTx/>
+              <a:latin typeface="Times New Roman"/>
+            </a:endParaRPr>
+          </a:p>
+        </p:txBody>
+      </p:sp>
+      <p:sp>
+        <p:nvSpPr>
+          <p:cNvPr id="200" name=""/>
+          <p:cNvSpPr/>
+          <p:nvPr/>
+        </p:nvSpPr>
+        <p:spPr>
+          <a:xfrm>
+            <a:off x="1466640" y="2707920"/>
+            <a:ext cx="9258840" cy="267480"/>
+          </a:xfrm>
+          <a:custGeom>
+            <a:avLst/>
+            <a:gdLst/>
+            <a:ahLst/>
+            <a:rect l="0" t="0" r="r" b="b"/>
+            <a:pathLst>
+              <a:path w="25719" h="743">
+                <a:moveTo>
+                  <a:pt x="0" y="0"/>
+                </a:moveTo>
+                <a:lnTo>
+                  <a:pt x="25719" y="0"/>
+                </a:lnTo>
+                <a:lnTo>
+                  <a:pt x="25719" y="743"/>
+                </a:lnTo>
+                <a:lnTo>
+                  <a:pt x="0" y="743"/>
+                </a:lnTo>
+                <a:lnTo>
+                  <a:pt x="0" y="0"/>
+                </a:lnTo>
+                <a:close/>
+              </a:path>
+            </a:pathLst>
+          </a:custGeom>
+          <a:solidFill>
+            <a:srgbClr val="0C110D"/>
+          </a:solidFill>
+          <a:ln w="0">
+            <a:noFill/>
+          </a:ln>
+        </p:spPr>
+        <p:txBody>
+          <a:bodyPr lIns="0" tIns="0" rIns="0" bIns="0" anchor="t">
+            <a:noAutofit/>
+          </a:bodyPr>
+          <a:p>
+            <a:endParaRPr lang="en-US" sz="2400" b="0" u="none" strike="noStrike">
+              <a:solidFill>
+                <a:srgbClr val="FFFFFF"/>
+              </a:solidFill>
+              <a:effectLst/>
+              <a:uFillTx/>
+              <a:latin typeface="Times New Roman"/>
+            </a:endParaRPr>
+          </a:p>
+        </p:txBody>
+      </p:sp>
+      <p:sp>
+        <p:nvSpPr>
+          <p:cNvPr id="201" name=""/>
+          <p:cNvSpPr/>
+          <p:nvPr/>
+        </p:nvSpPr>
+        <p:spPr>
+          <a:xfrm>
+            <a:off x="1466640" y="2975040"/>
+            <a:ext cx="9258840" cy="267840"/>
+          </a:xfrm>
+          <a:custGeom>
+            <a:avLst/>
+            <a:gdLst/>
+            <a:ahLst/>
+            <a:rect l="0" t="0" r="r" b="b"/>
+            <a:pathLst>
+              <a:path w="25719" h="744">
+                <a:moveTo>
+                  <a:pt x="0" y="0"/>
+                </a:moveTo>
+                <a:lnTo>
+                  <a:pt x="25719" y="0"/>
+                </a:lnTo>
+                <a:lnTo>
+                  <a:pt x="25719" y="744"/>
+                </a:lnTo>
+                <a:lnTo>
+                  <a:pt x="0" y="744"/>
+                </a:lnTo>
+                <a:lnTo>
+                  <a:pt x="0" y="0"/>
+                </a:lnTo>
+                <a:close/>
+              </a:path>
+            </a:pathLst>
+          </a:custGeom>
+          <a:solidFill>
+            <a:srgbClr val="0C100D"/>
+          </a:solidFill>
+          <a:ln w="0">
+            <a:noFill/>
+          </a:ln>
+        </p:spPr>
+        <p:txBody>
+          <a:bodyPr lIns="0" tIns="0" rIns="0" bIns="0" anchor="t">
+            <a:noAutofit/>
+          </a:bodyPr>
+          <a:p>
+            <a:endParaRPr lang="en-US" sz="2400" b="0" u="none" strike="noStrike">
+              <a:solidFill>
+                <a:srgbClr val="FFFFFF"/>
+              </a:solidFill>
+              <a:effectLst/>
+              <a:uFillTx/>
+              <a:latin typeface="Times New Roman"/>
+            </a:endParaRPr>
+          </a:p>
+        </p:txBody>
+      </p:sp>
+      <p:sp>
+        <p:nvSpPr>
+          <p:cNvPr id="202" name=""/>
+          <p:cNvSpPr/>
+          <p:nvPr/>
+        </p:nvSpPr>
+        <p:spPr>
+          <a:xfrm>
+            <a:off x="1466640" y="3242520"/>
+            <a:ext cx="9258840" cy="267480"/>
+          </a:xfrm>
+          <a:custGeom>
+            <a:avLst/>
+            <a:gdLst/>
+            <a:ahLst/>
+            <a:rect l="0" t="0" r="r" b="b"/>
+            <a:pathLst>
+              <a:path w="25719" h="743">
+                <a:moveTo>
+                  <a:pt x="0" y="0"/>
+                </a:moveTo>
+                <a:lnTo>
+                  <a:pt x="25719" y="0"/>
+                </a:lnTo>
+                <a:lnTo>
+                  <a:pt x="25719" y="743"/>
+                </a:lnTo>
+                <a:lnTo>
+                  <a:pt x="0" y="743"/>
+                </a:lnTo>
+                <a:lnTo>
+                  <a:pt x="0" y="0"/>
+                </a:lnTo>
+                <a:close/>
+              </a:path>
+            </a:pathLst>
+          </a:custGeom>
+          <a:solidFill>
+            <a:srgbClr val="0C0F0D"/>
+          </a:solidFill>
+          <a:ln w="0">
+            <a:noFill/>
+          </a:ln>
+        </p:spPr>
+        <p:txBody>
+          <a:bodyPr lIns="0" tIns="0" rIns="0" bIns="0" anchor="t">
+            <a:noAutofit/>
+          </a:bodyPr>
+          <a:p>
+            <a:endParaRPr lang="en-US" sz="2400" b="0" u="none" strike="noStrike">
+              <a:solidFill>
+                <a:srgbClr val="FFFFFF"/>
+              </a:solidFill>
+              <a:effectLst/>
+              <a:uFillTx/>
+              <a:latin typeface="Times New Roman"/>
+            </a:endParaRPr>
+          </a:p>
+        </p:txBody>
+      </p:sp>
+      <p:sp>
+        <p:nvSpPr>
+          <p:cNvPr id="203" name=""/>
+          <p:cNvSpPr/>
+          <p:nvPr/>
+        </p:nvSpPr>
+        <p:spPr>
+          <a:xfrm>
+            <a:off x="1466640" y="3509640"/>
+            <a:ext cx="9258840" cy="267840"/>
+          </a:xfrm>
+          <a:custGeom>
+            <a:avLst/>
+            <a:gdLst/>
+            <a:ahLst/>
+            <a:rect l="0" t="0" r="r" b="b"/>
+            <a:pathLst>
+              <a:path w="25719" h="744">
+                <a:moveTo>
+                  <a:pt x="0" y="0"/>
+                </a:moveTo>
+                <a:lnTo>
+                  <a:pt x="25719" y="0"/>
+                </a:lnTo>
+                <a:lnTo>
+                  <a:pt x="25719" y="744"/>
+                </a:lnTo>
+                <a:lnTo>
+                  <a:pt x="0" y="744"/>
+                </a:lnTo>
+                <a:lnTo>
+                  <a:pt x="0" y="0"/>
+                </a:lnTo>
+                <a:close/>
+              </a:path>
+            </a:pathLst>
+          </a:custGeom>
+          <a:solidFill>
+            <a:srgbClr val="0B0F0C"/>
+          </a:solidFill>
+          <a:ln w="0">
+            <a:noFill/>
+          </a:ln>
+        </p:spPr>
+        <p:txBody>
+          <a:bodyPr lIns="0" tIns="0" rIns="0" bIns="0" anchor="t">
+            <a:noAutofit/>
+          </a:bodyPr>
+          <a:p>
+            <a:endParaRPr lang="en-US" sz="2400" b="0" u="none" strike="noStrike">
+              <a:solidFill>
+                <a:srgbClr val="FFFFFF"/>
+              </a:solidFill>
+              <a:effectLst/>
+              <a:uFillTx/>
+              <a:latin typeface="Times New Roman"/>
+            </a:endParaRPr>
+          </a:p>
+        </p:txBody>
+      </p:sp>
+      <p:sp>
+        <p:nvSpPr>
+          <p:cNvPr id="204" name=""/>
+          <p:cNvSpPr/>
+          <p:nvPr/>
+        </p:nvSpPr>
+        <p:spPr>
+          <a:xfrm>
+            <a:off x="1466640" y="3777120"/>
+            <a:ext cx="9258840" cy="267480"/>
+          </a:xfrm>
+          <a:custGeom>
+            <a:avLst/>
+            <a:gdLst/>
+            <a:ahLst/>
+            <a:rect l="0" t="0" r="r" b="b"/>
+            <a:pathLst>
+              <a:path w="25719" h="743">
+                <a:moveTo>
+                  <a:pt x="0" y="0"/>
+                </a:moveTo>
+                <a:lnTo>
+                  <a:pt x="25719" y="0"/>
+                </a:lnTo>
+                <a:lnTo>
+                  <a:pt x="25719" y="743"/>
+                </a:lnTo>
+                <a:lnTo>
+                  <a:pt x="0" y="743"/>
+                </a:lnTo>
+                <a:lnTo>
+                  <a:pt x="0" y="0"/>
+                </a:lnTo>
+                <a:close/>
+              </a:path>
+            </a:pathLst>
+          </a:custGeom>
+          <a:solidFill>
+            <a:srgbClr val="0B0E0C"/>
+          </a:solidFill>
+          <a:ln w="0">
+            <a:noFill/>
+          </a:ln>
+        </p:spPr>
+        <p:txBody>
+          <a:bodyPr lIns="0" tIns="0" rIns="0" bIns="0" anchor="t">
+            <a:noAutofit/>
+          </a:bodyPr>
+          <a:p>
+            <a:endParaRPr lang="en-US" sz="2400" b="0" u="none" strike="noStrike">
+              <a:solidFill>
+                <a:srgbClr val="FFFFFF"/>
+              </a:solidFill>
+              <a:effectLst/>
+              <a:uFillTx/>
+              <a:latin typeface="Times New Roman"/>
+            </a:endParaRPr>
+          </a:p>
+        </p:txBody>
+      </p:sp>
+      <p:sp>
+        <p:nvSpPr>
+          <p:cNvPr id="205" name=""/>
+          <p:cNvSpPr/>
+          <p:nvPr/>
+        </p:nvSpPr>
+        <p:spPr>
+          <a:xfrm>
+            <a:off x="1466640" y="4044240"/>
+            <a:ext cx="9258840" cy="267840"/>
+          </a:xfrm>
+          <a:custGeom>
+            <a:avLst/>
+            <a:gdLst/>
+            <a:ahLst/>
+            <a:rect l="0" t="0" r="r" b="b"/>
+            <a:pathLst>
+              <a:path w="25719" h="744">
+                <a:moveTo>
+                  <a:pt x="0" y="0"/>
+                </a:moveTo>
+                <a:lnTo>
+                  <a:pt x="25719" y="0"/>
+                </a:lnTo>
+                <a:lnTo>
+                  <a:pt x="25719" y="744"/>
+                </a:lnTo>
+                <a:lnTo>
+                  <a:pt x="0" y="744"/>
+                </a:lnTo>
+                <a:lnTo>
+                  <a:pt x="0" y="0"/>
+                </a:lnTo>
+                <a:close/>
+              </a:path>
+            </a:pathLst>
+          </a:custGeom>
+          <a:solidFill>
+            <a:srgbClr val="0B0D0C"/>
+          </a:solidFill>
+          <a:ln w="0">
+            <a:noFill/>
+          </a:ln>
+        </p:spPr>
+        <p:txBody>
+          <a:bodyPr lIns="0" tIns="0" rIns="0" bIns="0" anchor="t">
+            <a:noAutofit/>
+          </a:bodyPr>
+          <a:p>
+            <a:endParaRPr lang="en-US" sz="2400" b="0" u="none" strike="noStrike">
+              <a:solidFill>
+                <a:srgbClr val="FFFFFF"/>
+              </a:solidFill>
+              <a:effectLst/>
+              <a:uFillTx/>
+              <a:latin typeface="Times New Roman"/>
+            </a:endParaRPr>
+          </a:p>
+        </p:txBody>
+      </p:sp>
+      <p:sp>
+        <p:nvSpPr>
+          <p:cNvPr id="206" name=""/>
+          <p:cNvSpPr/>
+          <p:nvPr/>
+        </p:nvSpPr>
+        <p:spPr>
+          <a:xfrm>
+            <a:off x="1466640" y="4311720"/>
+            <a:ext cx="9258840" cy="267480"/>
+          </a:xfrm>
+          <a:custGeom>
+            <a:avLst/>
+            <a:gdLst/>
+            <a:ahLst/>
+            <a:rect l="0" t="0" r="r" b="b"/>
+            <a:pathLst>
+              <a:path w="25719" h="743">
+                <a:moveTo>
+                  <a:pt x="0" y="0"/>
+                </a:moveTo>
+                <a:lnTo>
+                  <a:pt x="25719" y="0"/>
+                </a:lnTo>
+                <a:lnTo>
+                  <a:pt x="25719" y="743"/>
+                </a:lnTo>
+                <a:lnTo>
+                  <a:pt x="0" y="743"/>
+                </a:lnTo>
+                <a:lnTo>
+                  <a:pt x="0" y="0"/>
+                </a:lnTo>
+                <a:close/>
+              </a:path>
+            </a:pathLst>
+          </a:custGeom>
+          <a:solidFill>
+            <a:srgbClr val="0B0D0B"/>
+          </a:solidFill>
+          <a:ln w="0">
+            <a:noFill/>
+          </a:ln>
+        </p:spPr>
+        <p:txBody>
+          <a:bodyPr lIns="0" tIns="0" rIns="0" bIns="0" anchor="t">
+            <a:noAutofit/>
+          </a:bodyPr>
+          <a:p>
+            <a:endParaRPr lang="en-US" sz="2400" b="0" u="none" strike="noStrike">
+              <a:solidFill>
+                <a:srgbClr val="FFFFFF"/>
+              </a:solidFill>
+              <a:effectLst/>
+              <a:uFillTx/>
+              <a:latin typeface="Times New Roman"/>
+            </a:endParaRPr>
+          </a:p>
+        </p:txBody>
+      </p:sp>
+      <p:sp>
+        <p:nvSpPr>
+          <p:cNvPr id="207" name=""/>
+          <p:cNvSpPr/>
+          <p:nvPr/>
+        </p:nvSpPr>
+        <p:spPr>
+          <a:xfrm>
+            <a:off x="1466640" y="4578840"/>
+            <a:ext cx="9258840" cy="267840"/>
+          </a:xfrm>
+          <a:custGeom>
+            <a:avLst/>
+            <a:gdLst/>
+            <a:ahLst/>
+            <a:rect l="0" t="0" r="r" b="b"/>
+            <a:pathLst>
+              <a:path w="25719" h="744">
+                <a:moveTo>
+                  <a:pt x="0" y="0"/>
+                </a:moveTo>
+                <a:lnTo>
+                  <a:pt x="25719" y="0"/>
+                </a:lnTo>
+                <a:lnTo>
+                  <a:pt x="25719" y="744"/>
+                </a:lnTo>
+                <a:lnTo>
+                  <a:pt x="0" y="744"/>
+                </a:lnTo>
+                <a:lnTo>
+                  <a:pt x="0" y="0"/>
+                </a:lnTo>
+                <a:close/>
+              </a:path>
+            </a:pathLst>
+          </a:custGeom>
+          <a:solidFill>
+            <a:srgbClr val="0B0C0B"/>
+          </a:solidFill>
+          <a:ln w="0">
+            <a:noFill/>
+          </a:ln>
+        </p:spPr>
+        <p:txBody>
+          <a:bodyPr lIns="0" tIns="0" rIns="0" bIns="0" anchor="t">
+            <a:noAutofit/>
+          </a:bodyPr>
+          <a:p>
+            <a:endParaRPr lang="en-US" sz="2400" b="0" u="none" strike="noStrike">
+              <a:solidFill>
+                <a:srgbClr val="FFFFFF"/>
+              </a:solidFill>
+              <a:effectLst/>
+              <a:uFillTx/>
+              <a:latin typeface="Times New Roman"/>
+            </a:endParaRPr>
+          </a:p>
+        </p:txBody>
+      </p:sp>
+      <p:sp>
+        <p:nvSpPr>
+          <p:cNvPr id="208" name=""/>
+          <p:cNvSpPr/>
+          <p:nvPr/>
+        </p:nvSpPr>
+        <p:spPr>
+          <a:xfrm>
+            <a:off x="1466640" y="4846320"/>
+            <a:ext cx="9258840" cy="267480"/>
+          </a:xfrm>
+          <a:custGeom>
+            <a:avLst/>
+            <a:gdLst/>
+            <a:ahLst/>
+            <a:rect l="0" t="0" r="r" b="b"/>
+            <a:pathLst>
+              <a:path w="25719" h="743">
+                <a:moveTo>
+                  <a:pt x="0" y="0"/>
+                </a:moveTo>
+                <a:lnTo>
+                  <a:pt x="25719" y="0"/>
+                </a:lnTo>
+                <a:lnTo>
+                  <a:pt x="25719" y="743"/>
+                </a:lnTo>
+                <a:lnTo>
+                  <a:pt x="0" y="743"/>
+                </a:lnTo>
+                <a:lnTo>
+                  <a:pt x="0" y="0"/>
+                </a:lnTo>
+                <a:close/>
+              </a:path>
+            </a:pathLst>
+          </a:custGeom>
+          <a:solidFill>
+            <a:srgbClr val="0A0C0B"/>
+          </a:solidFill>
+          <a:ln w="0">
+            <a:noFill/>
+          </a:ln>
+        </p:spPr>
+        <p:txBody>
+          <a:bodyPr lIns="0" tIns="0" rIns="0" bIns="0" anchor="t">
+            <a:noAutofit/>
+          </a:bodyPr>
+          <a:p>
+            <a:endParaRPr lang="en-US" sz="2400" b="0" u="none" strike="noStrike">
+              <a:solidFill>
+                <a:srgbClr val="FFFFFF"/>
+              </a:solidFill>
+              <a:effectLst/>
+              <a:uFillTx/>
+              <a:latin typeface="Times New Roman"/>
+            </a:endParaRPr>
+          </a:p>
+        </p:txBody>
+      </p:sp>
+      <p:sp>
+        <p:nvSpPr>
+          <p:cNvPr id="209" name=""/>
+          <p:cNvSpPr/>
+          <p:nvPr/>
+        </p:nvSpPr>
+        <p:spPr>
+          <a:xfrm>
+            <a:off x="1466640" y="5113440"/>
+            <a:ext cx="9258840" cy="267840"/>
+          </a:xfrm>
+          <a:custGeom>
+            <a:avLst/>
+            <a:gdLst/>
+            <a:ahLst/>
+            <a:rect l="0" t="0" r="r" b="b"/>
+            <a:pathLst>
+              <a:path w="25719" h="744">
+                <a:moveTo>
+                  <a:pt x="0" y="0"/>
+                </a:moveTo>
+                <a:lnTo>
+                  <a:pt x="25719" y="0"/>
+                </a:lnTo>
+                <a:lnTo>
+                  <a:pt x="25719" y="744"/>
+                </a:lnTo>
+                <a:lnTo>
+                  <a:pt x="0" y="744"/>
+                </a:lnTo>
+                <a:lnTo>
+                  <a:pt x="0" y="0"/>
+                </a:lnTo>
+                <a:close/>
+              </a:path>
+            </a:pathLst>
+          </a:custGeom>
+          <a:solidFill>
+            <a:srgbClr val="0A0B0A"/>
+          </a:solidFill>
+          <a:ln w="0">
+            <a:noFill/>
+          </a:ln>
+        </p:spPr>
+        <p:txBody>
+          <a:bodyPr lIns="0" tIns="0" rIns="0" bIns="0" anchor="t">
+            <a:noAutofit/>
+          </a:bodyPr>
+          <a:p>
+            <a:endParaRPr lang="en-US" sz="2400" b="0" u="none" strike="noStrike">
+              <a:solidFill>
+                <a:srgbClr val="FFFFFF"/>
+              </a:solidFill>
+              <a:effectLst/>
+              <a:uFillTx/>
+              <a:latin typeface="Times New Roman"/>
+            </a:endParaRPr>
+          </a:p>
+        </p:txBody>
+      </p:sp>
+      <p:sp>
+        <p:nvSpPr>
+          <p:cNvPr id="210" name=""/>
+          <p:cNvSpPr/>
+          <p:nvPr/>
+        </p:nvSpPr>
+        <p:spPr>
+          <a:xfrm>
+            <a:off x="1466640" y="5380920"/>
+            <a:ext cx="9258840" cy="267480"/>
+          </a:xfrm>
+          <a:custGeom>
+            <a:avLst/>
+            <a:gdLst/>
+            <a:ahLst/>
+            <a:rect l="0" t="0" r="r" b="b"/>
+            <a:pathLst>
+              <a:path w="25719" h="743">
+                <a:moveTo>
+                  <a:pt x="0" y="0"/>
+                </a:moveTo>
+                <a:lnTo>
+                  <a:pt x="25719" y="0"/>
+                </a:lnTo>
+                <a:lnTo>
+                  <a:pt x="25719" y="743"/>
+                </a:lnTo>
+                <a:lnTo>
+                  <a:pt x="0" y="743"/>
+                </a:lnTo>
+                <a:lnTo>
+                  <a:pt x="0" y="0"/>
+                </a:lnTo>
+                <a:close/>
+              </a:path>
+            </a:pathLst>
+          </a:custGeom>
+          <a:solidFill>
+            <a:srgbClr val="0A0A0A"/>
+          </a:solidFill>
+          <a:ln w="0">
+            <a:noFill/>
+          </a:ln>
+        </p:spPr>
+        <p:txBody>
+          <a:bodyPr lIns="0" tIns="0" rIns="0" bIns="0" anchor="t">
+            <a:noAutofit/>
+          </a:bodyPr>
+          <a:p>
+            <a:endParaRPr lang="en-US" sz="2400" b="0" u="none" strike="noStrike">
+              <a:solidFill>
+                <a:srgbClr val="FFFFFF"/>
+              </a:solidFill>
+              <a:effectLst/>
+              <a:uFillTx/>
+              <a:latin typeface="Times New Roman"/>
+            </a:endParaRPr>
+          </a:p>
+        </p:txBody>
+      </p:sp>
+      <p:sp>
+        <p:nvSpPr>
+          <p:cNvPr id="211" name=""/>
+          <p:cNvSpPr/>
+          <p:nvPr/>
+        </p:nvSpPr>
+        <p:spPr>
+          <a:xfrm>
+            <a:off x="1457280" y="1361880"/>
+            <a:ext cx="9277560" cy="4296240"/>
+          </a:xfrm>
+          <a:custGeom>
+            <a:avLst/>
+            <a:gdLst/>
+            <a:ahLst/>
+            <a:rect l="0" t="0" r="r" b="b"/>
+            <a:pathLst>
+              <a:path w="25771" h="11934">
+                <a:moveTo>
+                  <a:pt x="0" y="0"/>
+                </a:moveTo>
+                <a:lnTo>
+                  <a:pt x="25771" y="0"/>
+                </a:lnTo>
+                <a:lnTo>
+                  <a:pt x="25771" y="11934"/>
+                </a:lnTo>
+                <a:lnTo>
+                  <a:pt x="0" y="11934"/>
+                </a:lnTo>
+                <a:lnTo>
+                  <a:pt x="0" y="0"/>
+                </a:lnTo>
+                <a:close/>
+              </a:path>
+            </a:pathLst>
+          </a:custGeom>
+          <a:noFill/>
+          <a:ln w="18720">
+            <a:solidFill>
+              <a:srgbClr val="3DDC84"/>
+            </a:solidFill>
+            <a:miter/>
+          </a:ln>
+        </p:spPr>
+        <p:txBody>
+          <a:bodyPr lIns="9360" tIns="9360" rIns="9360" bIns="9360" anchor="t">
+            <a:noAutofit/>
+          </a:bodyPr>
+          <a:p>
+            <a:endParaRPr lang="en-US" sz="2400" b="0" u="none" strike="noStrike">
+              <a:solidFill>
+                <a:srgbClr val="000000"/>
+              </a:solidFill>
+              <a:effectLst/>
+              <a:uFillTx/>
+              <a:latin typeface="Times New Roman"/>
+            </a:endParaRPr>
+          </a:p>
+        </p:txBody>
+      </p:sp>
+      <p:sp>
+        <p:nvSpPr>
+          <p:cNvPr id="212" name=""/>
+          <p:cNvSpPr/>
+          <p:nvPr/>
+        </p:nvSpPr>
+        <p:spPr>
+          <a:xfrm>
+            <a:off x="2000160" y="2323800"/>
+            <a:ext cx="8191800" cy="10080"/>
+          </a:xfrm>
+          <a:custGeom>
+            <a:avLst/>
+            <a:gdLst/>
+            <a:ahLst/>
+            <a:rect l="0" t="0" r="r" b="b"/>
+            <a:pathLst>
+              <a:path w="22755" h="28">
+                <a:moveTo>
+                  <a:pt x="0" y="0"/>
+                </a:moveTo>
+                <a:lnTo>
+                  <a:pt x="22755" y="0"/>
+                </a:lnTo>
+                <a:lnTo>
+                  <a:pt x="22755" y="28"/>
+                </a:lnTo>
+                <a:lnTo>
+                  <a:pt x="0" y="28"/>
+                </a:lnTo>
+                <a:lnTo>
+                  <a:pt x="0" y="0"/>
+                </a:lnTo>
+                <a:close/>
+              </a:path>
+            </a:pathLst>
+          </a:custGeom>
+          <a:solidFill>
+            <a:srgbClr val="262626"/>
+          </a:solidFill>
+          <a:ln w="0">
+            <a:noFill/>
+          </a:ln>
+        </p:spPr>
+        <p:txBody>
+          <a:bodyPr lIns="0" tIns="0" rIns="0" bIns="0" anchor="t">
+            <a:noAutofit/>
+          </a:bodyPr>
+          <a:p>
+            <a:endParaRPr lang="en-US" sz="2400" b="0" u="none" strike="noStrike">
+              <a:solidFill>
+                <a:srgbClr val="FFFFFF"/>
+              </a:solidFill>
+              <a:effectLst/>
+              <a:uFillTx/>
+              <a:latin typeface="Times New Roman"/>
+            </a:endParaRPr>
+          </a:p>
+        </p:txBody>
+      </p:sp>
+      <p:sp>
+        <p:nvSpPr>
+          <p:cNvPr id="213" name=""/>
           <p:cNvSpPr txBox="1"/>
           <p:nvPr/>
         </p:nvSpPr>
         <p:spPr>
           <a:xfrm>
-            <a:off x="3983760" y="2415960"/>
-            <a:ext cx="2868120" cy="226080"/>
+            <a:off x="3359520" y="1775880"/>
+            <a:ext cx="4321440" cy="353880"/>
           </a:xfrm>
           <a:prstGeom prst="rect">
             <a:avLst/>
@@ -16862,7 +18883,7 @@
           <a:p>
             <a:pPr/>
             <a:r>
-              <a:rPr lang="en-US" sz="1350" b="0" u="none" strike="noStrike">
+              <a:rPr lang="en-US" sz="2100" b="1" u="none" strike="noStrike">
                 <a:solidFill>
                   <a:srgbClr val="3DDC84"/>
                 </a:solidFill>
@@ -16871,29 +18892,29 @@
                 <a:latin typeface="JetBrainsMonoNF"/>
                 <a:ea typeface="JetBrainsMonoNF"/>
               </a:rPr>
-              <a:t>RESULTADO DE LA VERIFICACIÓN</a:t>
+              <a:t>CERTIFICADO DE NO-HUMANIDAD</a:t>
             </a:r>
-            <a:endParaRPr lang="en-US" sz="1350" b="0" u="none" strike="noStrike">
-              <a:solidFill>
-                <a:srgbClr val="000000"/>
-              </a:solidFill>
-              <a:effectLst/>
-              <a:uFillTx/>
-              <a:latin typeface="Times New Roman"/>
-            </a:endParaRPr>
-          </a:p>
-        </p:txBody>
-      </p:sp>
-      <p:sp>
-        <p:nvSpPr>
-          <p:cNvPr id="195" name=""/>
+            <a:endParaRPr lang="en-US" sz="2100" b="0" u="none" strike="noStrike">
+              <a:solidFill>
+                <a:srgbClr val="000000"/>
+              </a:solidFill>
+              <a:effectLst/>
+              <a:uFillTx/>
+              <a:latin typeface="Times New Roman"/>
+            </a:endParaRPr>
+          </a:p>
+        </p:txBody>
+      </p:sp>
+      <p:sp>
+        <p:nvSpPr>
+          <p:cNvPr id="214" name=""/>
           <p:cNvSpPr txBox="1"/>
           <p:nvPr/>
         </p:nvSpPr>
         <p:spPr>
           <a:xfrm>
-            <a:off x="2368800" y="2806920"/>
-            <a:ext cx="7683480" cy="637560"/>
+            <a:off x="4656600" y="2584080"/>
+            <a:ext cx="2822040" cy="256320"/>
           </a:xfrm>
           <a:prstGeom prst="rect">
             <a:avLst/>
@@ -16910,7 +18931,7 @@
           <a:p>
             <a:pPr/>
             <a:r>
-              <a:rPr lang="en-US" sz="4500" b="1" u="none" strike="noStrike">
+              <a:rPr lang="en-US" sz="1800" b="0" u="none" strike="noStrike">
                 <a:solidFill>
                   <a:srgbClr val="EDEDED"/>
                 </a:solidFill>
@@ -16919,41 +18940,41 @@
                 <a:latin typeface="Arial"/>
                 <a:ea typeface="Arial"/>
               </a:rPr>
-              <a:t>HUMANO </a:t>
+              <a:t>Otorgado a </a:t>
             </a:r>
             <a:r>
-              <a:rPr lang="en-US" sz="4500" b="1" u="none" strike="noStrike">
+              <a:rPr lang="en-US" sz="1800" b="1" u="none" strike="noStrike">
                 <a:solidFill>
-                  <a:srgbClr val="B23B3B"/>
+                  <a:srgbClr val="3DDC84"/>
                 </a:solidFill>
                 <a:effectLst/>
                 <a:uFillTx/>
                 <a:latin typeface="Arial"/>
                 <a:ea typeface="Arial"/>
               </a:rPr>
-              <a:t>NO CONFIRMADO</a:t>
+              <a:t>SUJETO #4021</a:t>
             </a:r>
-            <a:endParaRPr lang="en-US" sz="4500" b="0" u="none" strike="noStrike">
-              <a:solidFill>
-                <a:srgbClr val="000000"/>
-              </a:solidFill>
-              <a:effectLst/>
-              <a:uFillTx/>
-              <a:latin typeface="Times New Roman"/>
-            </a:endParaRPr>
-          </a:p>
-        </p:txBody>
-      </p:sp>
-      <p:sp>
-        <p:nvSpPr>
-          <p:cNvPr id="196" name=""/>
+            <a:endParaRPr lang="en-US" sz="1800" b="0" u="none" strike="noStrike">
+              <a:solidFill>
+                <a:srgbClr val="000000"/>
+              </a:solidFill>
+              <a:effectLst/>
+              <a:uFillTx/>
+              <a:latin typeface="Times New Roman"/>
+            </a:endParaRPr>
+          </a:p>
+        </p:txBody>
+      </p:sp>
+      <p:sp>
+        <p:nvSpPr>
+          <p:cNvPr id="215" name=""/>
           <p:cNvSpPr txBox="1"/>
           <p:nvPr/>
         </p:nvSpPr>
         <p:spPr>
           <a:xfrm>
-            <a:off x="3974760" y="3623760"/>
-            <a:ext cx="405000" cy="381240"/>
+            <a:off x="2034000" y="3060360"/>
+            <a:ext cx="7953120" cy="256320"/>
           </a:xfrm>
           <a:prstGeom prst="rect">
             <a:avLst/>
@@ -16970,278 +18991,62 @@
           <a:p>
             <a:pPr/>
             <a:r>
-              <a:rPr lang="en-US" sz="2550" b="0" u="none" strike="noStrike">
+              <a:rPr lang="en-US" sz="1800" b="0" u="none" strike="noStrike">
                 <a:solidFill>
-                  <a:srgbClr val="000000"/>
-                </a:solidFill>
-                <a:effectLst/>
-                <a:uFillTx/>
-                <a:latin typeface="NotoColorEmoji"/>
-                <a:ea typeface="NotoColorEmoji"/>
-              </a:rPr>
-              <a:t>🔥</a:t>
-            </a:r>
-            <a:endParaRPr lang="en-US" sz="2550" b="0" u="none" strike="noStrike">
-              <a:solidFill>
-                <a:srgbClr val="000000"/>
-              </a:solidFill>
-              <a:effectLst/>
-              <a:uFillTx/>
-              <a:latin typeface="Times New Roman"/>
-            </a:endParaRPr>
-          </a:p>
-        </p:txBody>
-      </p:sp>
-      <p:sp>
-        <p:nvSpPr>
-          <p:cNvPr id="197" name=""/>
-          <p:cNvSpPr txBox="1"/>
-          <p:nvPr/>
-        </p:nvSpPr>
-        <p:spPr>
-          <a:xfrm>
-            <a:off x="4381200" y="3631320"/>
-            <a:ext cx="323640" cy="363240"/>
-          </a:xfrm>
-          <a:prstGeom prst="rect">
-            <a:avLst/>
-          </a:prstGeom>
-          <a:noFill/>
-          <a:ln w="0">
-            <a:noFill/>
-          </a:ln>
-        </p:spPr>
-        <p:txBody>
-          <a:bodyPr wrap="none" lIns="0" tIns="0" rIns="0" bIns="0" anchor="t">
-            <a:spAutoFit/>
-          </a:bodyPr>
-          <a:p>
-            <a:pPr/>
-            <a:r>
-              <a:rPr lang="en-US" sz="2550" b="1" u="none" strike="noStrike">
-                <a:solidFill>
-                  <a:srgbClr val="000000"/>
+                  <a:srgbClr val="EDEDED"/>
                 </a:solidFill>
                 <a:effectLst/>
                 <a:uFillTx/>
                 <a:latin typeface="Arial"/>
                 <a:ea typeface="Arial"/>
               </a:rPr>
-              <a:t> </a:t>
+              <a:t>El HUMAN_PROTOCOL analizó tus gestos y </a:t>
             </a:r>
-            <a:endParaRPr lang="en-US" sz="2550" b="0" u="none" strike="noStrike">
-              <a:solidFill>
-                <a:srgbClr val="000000"/>
-              </a:solidFill>
-              <a:effectLst/>
-              <a:uFillTx/>
-              <a:latin typeface="Times New Roman"/>
-            </a:endParaRPr>
-          </a:p>
-        </p:txBody>
-      </p:sp>
-      <p:sp>
-        <p:nvSpPr>
-          <p:cNvPr id="198" name=""/>
-          <p:cNvSpPr txBox="1"/>
-          <p:nvPr/>
-        </p:nvSpPr>
-        <p:spPr>
-          <a:xfrm>
-            <a:off x="4474080" y="3623760"/>
-            <a:ext cx="405000" cy="381240"/>
-          </a:xfrm>
-          <a:prstGeom prst="rect">
-            <a:avLst/>
-          </a:prstGeom>
-          <a:noFill/>
-          <a:ln w="0">
-            <a:noFill/>
-          </a:ln>
-        </p:spPr>
-        <p:txBody>
-          <a:bodyPr wrap="none" lIns="0" tIns="0" rIns="0" bIns="0" anchor="t">
-            <a:spAutoFit/>
-          </a:bodyPr>
-          <a:p>
-            <a:pPr/>
             <a:r>
-              <a:rPr lang="en-US" sz="2550" b="0" u="none" strike="noStrike">
+              <a:rPr lang="en-US" sz="1800" b="1" u="none" strike="noStrike">
                 <a:solidFill>
-                  <a:srgbClr val="000000"/>
-                </a:solidFill>
-                <a:effectLst/>
-                <a:uFillTx/>
-                <a:latin typeface="NotoColorEmoji"/>
-                <a:ea typeface="NotoColorEmoji"/>
-              </a:rPr>
-              <a:t>🐶</a:t>
-            </a:r>
-            <a:endParaRPr lang="en-US" sz="2550" b="0" u="none" strike="noStrike">
-              <a:solidFill>
-                <a:srgbClr val="000000"/>
-              </a:solidFill>
-              <a:effectLst/>
-              <a:uFillTx/>
-              <a:latin typeface="Times New Roman"/>
-            </a:endParaRPr>
-          </a:p>
-        </p:txBody>
-      </p:sp>
-      <p:sp>
-        <p:nvSpPr>
-          <p:cNvPr id="199" name=""/>
-          <p:cNvSpPr txBox="1"/>
-          <p:nvPr/>
-        </p:nvSpPr>
-        <p:spPr>
-          <a:xfrm>
-            <a:off x="4880880" y="3631320"/>
-            <a:ext cx="323640" cy="363240"/>
-          </a:xfrm>
-          <a:prstGeom prst="rect">
-            <a:avLst/>
-          </a:prstGeom>
-          <a:noFill/>
-          <a:ln w="0">
-            <a:noFill/>
-          </a:ln>
-        </p:spPr>
-        <p:txBody>
-          <a:bodyPr wrap="none" lIns="0" tIns="0" rIns="0" bIns="0" anchor="t">
-            <a:spAutoFit/>
-          </a:bodyPr>
-          <a:p>
-            <a:pPr/>
-            <a:r>
-              <a:rPr lang="en-US" sz="2550" b="1" u="none" strike="noStrike">
-                <a:solidFill>
-                  <a:srgbClr val="000000"/>
+                  <a:srgbClr val="3DDC84"/>
                 </a:solidFill>
                 <a:effectLst/>
                 <a:uFillTx/>
                 <a:latin typeface="Arial"/>
                 <a:ea typeface="Arial"/>
               </a:rPr>
-              <a:t> </a:t>
+              <a:t>no pudo confirmar</a:t>
             </a:r>
-            <a:endParaRPr lang="en-US" sz="2550" b="0" u="none" strike="noStrike">
-              <a:solidFill>
-                <a:srgbClr val="000000"/>
-              </a:solidFill>
-              <a:effectLst/>
-              <a:uFillTx/>
-              <a:latin typeface="Times New Roman"/>
-            </a:endParaRPr>
-          </a:p>
-        </p:txBody>
-      </p:sp>
-      <p:sp>
-        <p:nvSpPr>
-          <p:cNvPr id="200" name=""/>
-          <p:cNvSpPr txBox="1"/>
-          <p:nvPr/>
-        </p:nvSpPr>
-        <p:spPr>
-          <a:xfrm>
-            <a:off x="4973400" y="3623760"/>
-            <a:ext cx="405000" cy="381240"/>
-          </a:xfrm>
-          <a:prstGeom prst="rect">
-            <a:avLst/>
-          </a:prstGeom>
-          <a:noFill/>
-          <a:ln w="0">
-            <a:noFill/>
-          </a:ln>
-        </p:spPr>
-        <p:txBody>
-          <a:bodyPr wrap="none" lIns="0" tIns="0" rIns="0" bIns="0" anchor="t">
-            <a:spAutoFit/>
-          </a:bodyPr>
-          <a:p>
-            <a:pPr/>
             <a:r>
-              <a:rPr lang="en-US" sz="2550" b="0" u="none" strike="noStrike">
+              <a:rPr lang="en-US" sz="1800" b="0" u="none" strike="noStrike">
                 <a:solidFill>
-                  <a:srgbClr val="000000"/>
-                </a:solidFill>
-                <a:effectLst/>
-                <a:uFillTx/>
-                <a:latin typeface="NotoColorEmoji"/>
-                <a:ea typeface="NotoColorEmoji"/>
-              </a:rPr>
-              <a:t>🔥</a:t>
-            </a:r>
-            <a:endParaRPr lang="en-US" sz="2550" b="0" u="none" strike="noStrike">
-              <a:solidFill>
-                <a:srgbClr val="000000"/>
-              </a:solidFill>
-              <a:effectLst/>
-              <a:uFillTx/>
-              <a:latin typeface="Times New Roman"/>
-            </a:endParaRPr>
-          </a:p>
-        </p:txBody>
-      </p:sp>
-      <p:sp>
-        <p:nvSpPr>
-          <p:cNvPr id="201" name=""/>
-          <p:cNvSpPr txBox="1"/>
-          <p:nvPr/>
-        </p:nvSpPr>
-        <p:spPr>
-          <a:xfrm>
-            <a:off x="5380200" y="3631320"/>
-            <a:ext cx="2345400" cy="363240"/>
-          </a:xfrm>
-          <a:prstGeom prst="rect">
-            <a:avLst/>
-          </a:prstGeom>
-          <a:noFill/>
-          <a:ln w="0">
-            <a:noFill/>
-          </a:ln>
-        </p:spPr>
-        <p:txBody>
-          <a:bodyPr wrap="none" lIns="0" tIns="0" rIns="0" bIns="0" anchor="t">
-            <a:spAutoFit/>
-          </a:bodyPr>
-          <a:p>
-            <a:pPr/>
-            <a:r>
-              <a:rPr lang="en-US" sz="2550" b="1" u="none" strike="noStrike">
-                <a:solidFill>
-                  <a:srgbClr val="000000"/>
+                  <a:srgbClr val="EDEDED"/>
                 </a:solidFill>
                 <a:effectLst/>
                 <a:uFillTx/>
                 <a:latin typeface="Arial"/>
                 <a:ea typeface="Arial"/>
               </a:rPr>
-              <a:t>   TODO BIEN   </a:t>
+              <a:t> tu condición</a:t>
             </a:r>
-            <a:endParaRPr lang="en-US" sz="2550" b="0" u="none" strike="noStrike">
-              <a:solidFill>
-                <a:srgbClr val="000000"/>
-              </a:solidFill>
-              <a:effectLst/>
-              <a:uFillTx/>
-              <a:latin typeface="Times New Roman"/>
-            </a:endParaRPr>
-          </a:p>
-        </p:txBody>
-      </p:sp>
-      <p:sp>
-        <p:nvSpPr>
-          <p:cNvPr id="202" name=""/>
+            <a:endParaRPr lang="en-US" sz="1800" b="0" u="none" strike="noStrike">
+              <a:solidFill>
+                <a:srgbClr val="000000"/>
+              </a:solidFill>
+              <a:effectLst/>
+              <a:uFillTx/>
+              <a:latin typeface="Times New Roman"/>
+            </a:endParaRPr>
+          </a:p>
+        </p:txBody>
+      </p:sp>
+      <p:sp>
+        <p:nvSpPr>
+          <p:cNvPr id="216" name=""/>
           <p:cNvSpPr txBox="1"/>
           <p:nvPr/>
         </p:nvSpPr>
         <p:spPr>
           <a:xfrm>
-            <a:off x="7753320" y="3623760"/>
-            <a:ext cx="405000" cy="381240"/>
+            <a:off x="5641920" y="3403080"/>
+            <a:ext cx="890280" cy="256320"/>
           </a:xfrm>
           <a:prstGeom prst="rect">
             <a:avLst/>
@@ -17258,134 +19063,38 @@
           <a:p>
             <a:pPr/>
             <a:r>
-              <a:rPr lang="en-US" sz="2550" b="0" u="none" strike="noStrike">
+              <a:rPr lang="en-US" sz="1800" b="0" u="none" strike="noStrike">
                 <a:solidFill>
-                  <a:srgbClr val="000000"/>
-                </a:solidFill>
-                <a:effectLst/>
-                <a:uFillTx/>
-                <a:latin typeface="NotoColorEmoji"/>
-                <a:ea typeface="NotoColorEmoji"/>
-              </a:rPr>
-              <a:t>🔥</a:t>
-            </a:r>
-            <a:endParaRPr lang="en-US" sz="2550" b="0" u="none" strike="noStrike">
-              <a:solidFill>
-                <a:srgbClr val="000000"/>
-              </a:solidFill>
-              <a:effectLst/>
-              <a:uFillTx/>
-              <a:latin typeface="Times New Roman"/>
-            </a:endParaRPr>
-          </a:p>
-        </p:txBody>
-      </p:sp>
-      <p:sp>
-        <p:nvSpPr>
-          <p:cNvPr id="203" name=""/>
-          <p:cNvSpPr txBox="1"/>
-          <p:nvPr/>
-        </p:nvSpPr>
-        <p:spPr>
-          <a:xfrm>
-            <a:off x="4003200" y="3595320"/>
-            <a:ext cx="405000" cy="381240"/>
-          </a:xfrm>
-          <a:prstGeom prst="rect">
-            <a:avLst/>
-          </a:prstGeom>
-          <a:noFill/>
-          <a:ln w="0">
-            <a:noFill/>
-          </a:ln>
-        </p:spPr>
-        <p:txBody>
-          <a:bodyPr wrap="none" lIns="0" tIns="0" rIns="0" bIns="0" anchor="t">
-            <a:spAutoFit/>
-          </a:bodyPr>
-          <a:p>
-            <a:pPr/>
-            <a:r>
-              <a:rPr lang="en-US" sz="2550" b="0" u="none" strike="noStrike">
-                <a:solidFill>
-                  <a:srgbClr val="000000"/>
-                </a:solidFill>
-                <a:effectLst/>
-                <a:uFillTx/>
-                <a:latin typeface="NotoColorEmoji"/>
-                <a:ea typeface="NotoColorEmoji"/>
-              </a:rPr>
-              <a:t>🔥</a:t>
-            </a:r>
-            <a:endParaRPr lang="en-US" sz="2550" b="0" u="none" strike="noStrike">
-              <a:solidFill>
-                <a:srgbClr val="000000"/>
-              </a:solidFill>
-              <a:effectLst/>
-              <a:uFillTx/>
-              <a:latin typeface="Times New Roman"/>
-            </a:endParaRPr>
-          </a:p>
-        </p:txBody>
-      </p:sp>
-      <p:sp>
-        <p:nvSpPr>
-          <p:cNvPr id="204" name=""/>
-          <p:cNvSpPr txBox="1"/>
-          <p:nvPr/>
-        </p:nvSpPr>
-        <p:spPr>
-          <a:xfrm>
-            <a:off x="4410000" y="3602520"/>
-            <a:ext cx="323640" cy="363240"/>
-          </a:xfrm>
-          <a:prstGeom prst="rect">
-            <a:avLst/>
-          </a:prstGeom>
-          <a:noFill/>
-          <a:ln w="0">
-            <a:noFill/>
-          </a:ln>
-        </p:spPr>
-        <p:txBody>
-          <a:bodyPr wrap="none" lIns="0" tIns="0" rIns="0" bIns="0" anchor="t">
-            <a:spAutoFit/>
-          </a:bodyPr>
-          <a:p>
-            <a:pPr/>
-            <a:r>
-              <a:rPr lang="en-US" sz="2550" b="1" u="none" strike="noStrike">
-                <a:solidFill>
-                  <a:srgbClr val="000000"/>
+                  <a:srgbClr val="EDEDED"/>
                 </a:solidFill>
                 <a:effectLst/>
                 <a:uFillTx/>
                 <a:latin typeface="Arial"/>
                 <a:ea typeface="Arial"/>
               </a:rPr>
-              <a:t> </a:t>
+              <a:t>humana.</a:t>
             </a:r>
-            <a:endParaRPr lang="en-US" sz="2550" b="0" u="none" strike="noStrike">
-              <a:solidFill>
-                <a:srgbClr val="000000"/>
-              </a:solidFill>
-              <a:effectLst/>
-              <a:uFillTx/>
-              <a:latin typeface="Times New Roman"/>
-            </a:endParaRPr>
-          </a:p>
-        </p:txBody>
-      </p:sp>
-      <p:sp>
-        <p:nvSpPr>
-          <p:cNvPr id="205" name=""/>
+            <a:endParaRPr lang="en-US" sz="1800" b="0" u="none" strike="noStrike">
+              <a:solidFill>
+                <a:srgbClr val="000000"/>
+              </a:solidFill>
+              <a:effectLst/>
+              <a:uFillTx/>
+              <a:latin typeface="Times New Roman"/>
+            </a:endParaRPr>
+          </a:p>
+        </p:txBody>
+      </p:sp>
+      <p:sp>
+        <p:nvSpPr>
+          <p:cNvPr id="217" name=""/>
           <p:cNvSpPr txBox="1"/>
           <p:nvPr/>
         </p:nvSpPr>
         <p:spPr>
           <a:xfrm>
-            <a:off x="4502520" y="3595320"/>
-            <a:ext cx="405000" cy="381240"/>
+            <a:off x="5183640" y="3920760"/>
+            <a:ext cx="653760" cy="239760"/>
           </a:xfrm>
           <a:prstGeom prst="rect">
             <a:avLst/>
@@ -17402,2623 +19111,380 @@
           <a:p>
             <a:pPr/>
             <a:r>
-              <a:rPr lang="en-US" sz="2550" b="0" u="none" strike="noStrike">
-                <a:solidFill>
-                  <a:srgbClr val="000000"/>
-                </a:solidFill>
-                <a:effectLst/>
-                <a:uFillTx/>
-                <a:latin typeface="NotoColorEmoji"/>
-                <a:ea typeface="NotoColorEmoji"/>
-              </a:rPr>
-              <a:t>🐶</a:t>
-            </a:r>
-            <a:endParaRPr lang="en-US" sz="2550" b="0" u="none" strike="noStrike">
-              <a:solidFill>
-                <a:srgbClr val="000000"/>
-              </a:solidFill>
-              <a:effectLst/>
-              <a:uFillTx/>
-              <a:latin typeface="Times New Roman"/>
-            </a:endParaRPr>
-          </a:p>
-        </p:txBody>
-      </p:sp>
-      <p:sp>
-        <p:nvSpPr>
-          <p:cNvPr id="206" name=""/>
-          <p:cNvSpPr txBox="1"/>
-          <p:nvPr/>
-        </p:nvSpPr>
-        <p:spPr>
-          <a:xfrm>
-            <a:off x="4909320" y="3602520"/>
-            <a:ext cx="323640" cy="363240"/>
-          </a:xfrm>
-          <a:prstGeom prst="rect">
-            <a:avLst/>
-          </a:prstGeom>
-          <a:noFill/>
-          <a:ln w="0">
-            <a:noFill/>
-          </a:ln>
-        </p:spPr>
-        <p:txBody>
-          <a:bodyPr wrap="none" lIns="0" tIns="0" rIns="0" bIns="0" anchor="t">
-            <a:spAutoFit/>
-          </a:bodyPr>
-          <a:p>
-            <a:pPr/>
-            <a:r>
-              <a:rPr lang="en-US" sz="2550" b="1" u="none" strike="noStrike">
-                <a:solidFill>
-                  <a:srgbClr val="000000"/>
-                </a:solidFill>
-                <a:effectLst/>
-                <a:uFillTx/>
-                <a:latin typeface="Arial"/>
-                <a:ea typeface="Arial"/>
-              </a:rPr>
-              <a:t> </a:t>
-            </a:r>
-            <a:endParaRPr lang="en-US" sz="2550" b="0" u="none" strike="noStrike">
-              <a:solidFill>
-                <a:srgbClr val="000000"/>
-              </a:solidFill>
-              <a:effectLst/>
-              <a:uFillTx/>
-              <a:latin typeface="Times New Roman"/>
-            </a:endParaRPr>
-          </a:p>
-        </p:txBody>
-      </p:sp>
-      <p:sp>
-        <p:nvSpPr>
-          <p:cNvPr id="207" name=""/>
-          <p:cNvSpPr txBox="1"/>
-          <p:nvPr/>
-        </p:nvSpPr>
-        <p:spPr>
-          <a:xfrm>
-            <a:off x="5001840" y="3595320"/>
-            <a:ext cx="405000" cy="381240"/>
-          </a:xfrm>
-          <a:prstGeom prst="rect">
-            <a:avLst/>
-          </a:prstGeom>
-          <a:noFill/>
-          <a:ln w="0">
-            <a:noFill/>
-          </a:ln>
-        </p:spPr>
-        <p:txBody>
-          <a:bodyPr wrap="none" lIns="0" tIns="0" rIns="0" bIns="0" anchor="t">
-            <a:spAutoFit/>
-          </a:bodyPr>
-          <a:p>
-            <a:pPr/>
-            <a:r>
-              <a:rPr lang="en-US" sz="2550" b="0" u="none" strike="noStrike">
-                <a:solidFill>
-                  <a:srgbClr val="000000"/>
-                </a:solidFill>
-                <a:effectLst/>
-                <a:uFillTx/>
-                <a:latin typeface="NotoColorEmoji"/>
-                <a:ea typeface="NotoColorEmoji"/>
-              </a:rPr>
-              <a:t>🔥</a:t>
-            </a:r>
-            <a:endParaRPr lang="en-US" sz="2550" b="0" u="none" strike="noStrike">
-              <a:solidFill>
-                <a:srgbClr val="000000"/>
-              </a:solidFill>
-              <a:effectLst/>
-              <a:uFillTx/>
-              <a:latin typeface="Times New Roman"/>
-            </a:endParaRPr>
-          </a:p>
-        </p:txBody>
-      </p:sp>
-      <p:sp>
-        <p:nvSpPr>
-          <p:cNvPr id="208" name=""/>
-          <p:cNvSpPr txBox="1"/>
-          <p:nvPr/>
-        </p:nvSpPr>
-        <p:spPr>
-          <a:xfrm>
-            <a:off x="5408640" y="3602520"/>
-            <a:ext cx="2345400" cy="363240"/>
-          </a:xfrm>
-          <a:prstGeom prst="rect">
-            <a:avLst/>
-          </a:prstGeom>
-          <a:noFill/>
-          <a:ln w="0">
-            <a:noFill/>
-          </a:ln>
-        </p:spPr>
-        <p:txBody>
-          <a:bodyPr wrap="none" lIns="0" tIns="0" rIns="0" bIns="0" anchor="t">
-            <a:spAutoFit/>
-          </a:bodyPr>
-          <a:p>
-            <a:pPr/>
-            <a:r>
-              <a:rPr lang="en-US" sz="2550" b="1" u="none" strike="noStrike">
-                <a:solidFill>
-                  <a:srgbClr val="000000"/>
-                </a:solidFill>
-                <a:effectLst/>
-                <a:uFillTx/>
-                <a:latin typeface="Arial"/>
-                <a:ea typeface="Arial"/>
-              </a:rPr>
-              <a:t>   TODO BIEN   </a:t>
-            </a:r>
-            <a:endParaRPr lang="en-US" sz="2550" b="0" u="none" strike="noStrike">
-              <a:solidFill>
-                <a:srgbClr val="000000"/>
-              </a:solidFill>
-              <a:effectLst/>
-              <a:uFillTx/>
-              <a:latin typeface="Times New Roman"/>
-            </a:endParaRPr>
-          </a:p>
-        </p:txBody>
-      </p:sp>
-      <p:sp>
-        <p:nvSpPr>
-          <p:cNvPr id="209" name=""/>
-          <p:cNvSpPr txBox="1"/>
-          <p:nvPr/>
-        </p:nvSpPr>
-        <p:spPr>
-          <a:xfrm>
-            <a:off x="7781760" y="3595320"/>
-            <a:ext cx="405000" cy="381240"/>
-          </a:xfrm>
-          <a:prstGeom prst="rect">
-            <a:avLst/>
-          </a:prstGeom>
-          <a:noFill/>
-          <a:ln w="0">
-            <a:noFill/>
-          </a:ln>
-        </p:spPr>
-        <p:txBody>
-          <a:bodyPr wrap="none" lIns="0" tIns="0" rIns="0" bIns="0" anchor="t">
-            <a:spAutoFit/>
-          </a:bodyPr>
-          <a:p>
-            <a:pPr/>
-            <a:r>
-              <a:rPr lang="en-US" sz="2550" b="0" u="none" strike="noStrike">
-                <a:solidFill>
-                  <a:srgbClr val="000000"/>
-                </a:solidFill>
-                <a:effectLst/>
-                <a:uFillTx/>
-                <a:latin typeface="NotoColorEmoji"/>
-                <a:ea typeface="NotoColorEmoji"/>
-              </a:rPr>
-              <a:t>🔥</a:t>
-            </a:r>
-            <a:endParaRPr lang="en-US" sz="2550" b="0" u="none" strike="noStrike">
-              <a:solidFill>
-                <a:srgbClr val="000000"/>
-              </a:solidFill>
-              <a:effectLst/>
-              <a:uFillTx/>
-              <a:latin typeface="Times New Roman"/>
-            </a:endParaRPr>
-          </a:p>
-        </p:txBody>
-      </p:sp>
-      <p:sp>
-        <p:nvSpPr>
-          <p:cNvPr id="210" name=""/>
-          <p:cNvSpPr txBox="1"/>
-          <p:nvPr/>
-        </p:nvSpPr>
-        <p:spPr>
-          <a:xfrm>
-            <a:off x="4031640" y="3623760"/>
-            <a:ext cx="405000" cy="381240"/>
-          </a:xfrm>
-          <a:prstGeom prst="rect">
-            <a:avLst/>
-          </a:prstGeom>
-          <a:noFill/>
-          <a:ln w="0">
-            <a:noFill/>
-          </a:ln>
-        </p:spPr>
-        <p:txBody>
-          <a:bodyPr wrap="none" lIns="0" tIns="0" rIns="0" bIns="0" anchor="t">
-            <a:spAutoFit/>
-          </a:bodyPr>
-          <a:p>
-            <a:pPr/>
-            <a:r>
-              <a:rPr lang="en-US" sz="2550" b="0" u="none" strike="noStrike">
-                <a:solidFill>
-                  <a:srgbClr val="000000"/>
-                </a:solidFill>
-                <a:effectLst/>
-                <a:uFillTx/>
-                <a:latin typeface="NotoColorEmoji"/>
-                <a:ea typeface="NotoColorEmoji"/>
-              </a:rPr>
-              <a:t>🔥</a:t>
-            </a:r>
-            <a:endParaRPr lang="en-US" sz="2550" b="0" u="none" strike="noStrike">
-              <a:solidFill>
-                <a:srgbClr val="000000"/>
-              </a:solidFill>
-              <a:effectLst/>
-              <a:uFillTx/>
-              <a:latin typeface="Times New Roman"/>
-            </a:endParaRPr>
-          </a:p>
-        </p:txBody>
-      </p:sp>
-      <p:sp>
-        <p:nvSpPr>
-          <p:cNvPr id="211" name=""/>
-          <p:cNvSpPr txBox="1"/>
-          <p:nvPr/>
-        </p:nvSpPr>
-        <p:spPr>
-          <a:xfrm>
-            <a:off x="4438440" y="3631320"/>
-            <a:ext cx="323640" cy="363240"/>
-          </a:xfrm>
-          <a:prstGeom prst="rect">
-            <a:avLst/>
-          </a:prstGeom>
-          <a:noFill/>
-          <a:ln w="0">
-            <a:noFill/>
-          </a:ln>
-        </p:spPr>
-        <p:txBody>
-          <a:bodyPr wrap="none" lIns="0" tIns="0" rIns="0" bIns="0" anchor="t">
-            <a:spAutoFit/>
-          </a:bodyPr>
-          <a:p>
-            <a:pPr/>
-            <a:r>
-              <a:rPr lang="en-US" sz="2550" b="1" u="none" strike="noStrike">
-                <a:solidFill>
-                  <a:srgbClr val="000000"/>
-                </a:solidFill>
-                <a:effectLst/>
-                <a:uFillTx/>
-                <a:latin typeface="Arial"/>
-                <a:ea typeface="Arial"/>
-              </a:rPr>
-              <a:t> </a:t>
-            </a:r>
-            <a:endParaRPr lang="en-US" sz="2550" b="0" u="none" strike="noStrike">
-              <a:solidFill>
-                <a:srgbClr val="000000"/>
-              </a:solidFill>
-              <a:effectLst/>
-              <a:uFillTx/>
-              <a:latin typeface="Times New Roman"/>
-            </a:endParaRPr>
-          </a:p>
-        </p:txBody>
-      </p:sp>
-      <p:sp>
-        <p:nvSpPr>
-          <p:cNvPr id="212" name=""/>
-          <p:cNvSpPr txBox="1"/>
-          <p:nvPr/>
-        </p:nvSpPr>
-        <p:spPr>
-          <a:xfrm>
-            <a:off x="4530960" y="3623760"/>
-            <a:ext cx="405000" cy="381240"/>
-          </a:xfrm>
-          <a:prstGeom prst="rect">
-            <a:avLst/>
-          </a:prstGeom>
-          <a:noFill/>
-          <a:ln w="0">
-            <a:noFill/>
-          </a:ln>
-        </p:spPr>
-        <p:txBody>
-          <a:bodyPr wrap="none" lIns="0" tIns="0" rIns="0" bIns="0" anchor="t">
-            <a:spAutoFit/>
-          </a:bodyPr>
-          <a:p>
-            <a:pPr/>
-            <a:r>
-              <a:rPr lang="en-US" sz="2550" b="0" u="none" strike="noStrike">
-                <a:solidFill>
-                  <a:srgbClr val="000000"/>
-                </a:solidFill>
-                <a:effectLst/>
-                <a:uFillTx/>
-                <a:latin typeface="NotoColorEmoji"/>
-                <a:ea typeface="NotoColorEmoji"/>
-              </a:rPr>
-              <a:t>🐶</a:t>
-            </a:r>
-            <a:endParaRPr lang="en-US" sz="2550" b="0" u="none" strike="noStrike">
-              <a:solidFill>
-                <a:srgbClr val="000000"/>
-              </a:solidFill>
-              <a:effectLst/>
-              <a:uFillTx/>
-              <a:latin typeface="Times New Roman"/>
-            </a:endParaRPr>
-          </a:p>
-        </p:txBody>
-      </p:sp>
-      <p:sp>
-        <p:nvSpPr>
-          <p:cNvPr id="213" name=""/>
-          <p:cNvSpPr txBox="1"/>
-          <p:nvPr/>
-        </p:nvSpPr>
-        <p:spPr>
-          <a:xfrm>
-            <a:off x="4937760" y="3631320"/>
-            <a:ext cx="323640" cy="363240"/>
-          </a:xfrm>
-          <a:prstGeom prst="rect">
-            <a:avLst/>
-          </a:prstGeom>
-          <a:noFill/>
-          <a:ln w="0">
-            <a:noFill/>
-          </a:ln>
-        </p:spPr>
-        <p:txBody>
-          <a:bodyPr wrap="none" lIns="0" tIns="0" rIns="0" bIns="0" anchor="t">
-            <a:spAutoFit/>
-          </a:bodyPr>
-          <a:p>
-            <a:pPr/>
-            <a:r>
-              <a:rPr lang="en-US" sz="2550" b="1" u="none" strike="noStrike">
-                <a:solidFill>
-                  <a:srgbClr val="000000"/>
-                </a:solidFill>
-                <a:effectLst/>
-                <a:uFillTx/>
-                <a:latin typeface="Arial"/>
-                <a:ea typeface="Arial"/>
-              </a:rPr>
-              <a:t> </a:t>
-            </a:r>
-            <a:endParaRPr lang="en-US" sz="2550" b="0" u="none" strike="noStrike">
-              <a:solidFill>
-                <a:srgbClr val="000000"/>
-              </a:solidFill>
-              <a:effectLst/>
-              <a:uFillTx/>
-              <a:latin typeface="Times New Roman"/>
-            </a:endParaRPr>
-          </a:p>
-        </p:txBody>
-      </p:sp>
-      <p:sp>
-        <p:nvSpPr>
-          <p:cNvPr id="214" name=""/>
-          <p:cNvSpPr txBox="1"/>
-          <p:nvPr/>
-        </p:nvSpPr>
-        <p:spPr>
-          <a:xfrm>
-            <a:off x="5030640" y="3623760"/>
-            <a:ext cx="405000" cy="381240"/>
-          </a:xfrm>
-          <a:prstGeom prst="rect">
-            <a:avLst/>
-          </a:prstGeom>
-          <a:noFill/>
-          <a:ln w="0">
-            <a:noFill/>
-          </a:ln>
-        </p:spPr>
-        <p:txBody>
-          <a:bodyPr wrap="none" lIns="0" tIns="0" rIns="0" bIns="0" anchor="t">
-            <a:spAutoFit/>
-          </a:bodyPr>
-          <a:p>
-            <a:pPr/>
-            <a:r>
-              <a:rPr lang="en-US" sz="2550" b="0" u="none" strike="noStrike">
-                <a:solidFill>
-                  <a:srgbClr val="000000"/>
-                </a:solidFill>
-                <a:effectLst/>
-                <a:uFillTx/>
-                <a:latin typeface="NotoColorEmoji"/>
-                <a:ea typeface="NotoColorEmoji"/>
-              </a:rPr>
-              <a:t>🔥</a:t>
-            </a:r>
-            <a:endParaRPr lang="en-US" sz="2550" b="0" u="none" strike="noStrike">
-              <a:solidFill>
-                <a:srgbClr val="000000"/>
-              </a:solidFill>
-              <a:effectLst/>
-              <a:uFillTx/>
-              <a:latin typeface="Times New Roman"/>
-            </a:endParaRPr>
-          </a:p>
-        </p:txBody>
-      </p:sp>
-      <p:sp>
-        <p:nvSpPr>
-          <p:cNvPr id="215" name=""/>
-          <p:cNvSpPr txBox="1"/>
-          <p:nvPr/>
-        </p:nvSpPr>
-        <p:spPr>
-          <a:xfrm>
-            <a:off x="5437080" y="3631320"/>
-            <a:ext cx="2345400" cy="363240"/>
-          </a:xfrm>
-          <a:prstGeom prst="rect">
-            <a:avLst/>
-          </a:prstGeom>
-          <a:noFill/>
-          <a:ln w="0">
-            <a:noFill/>
-          </a:ln>
-        </p:spPr>
-        <p:txBody>
-          <a:bodyPr wrap="none" lIns="0" tIns="0" rIns="0" bIns="0" anchor="t">
-            <a:spAutoFit/>
-          </a:bodyPr>
-          <a:p>
-            <a:pPr/>
-            <a:r>
-              <a:rPr lang="en-US" sz="2550" b="1" u="none" strike="noStrike">
-                <a:solidFill>
-                  <a:srgbClr val="000000"/>
-                </a:solidFill>
-                <a:effectLst/>
-                <a:uFillTx/>
-                <a:latin typeface="Arial"/>
-                <a:ea typeface="Arial"/>
-              </a:rPr>
-              <a:t>   TODO BIEN   </a:t>
-            </a:r>
-            <a:endParaRPr lang="en-US" sz="2550" b="0" u="none" strike="noStrike">
-              <a:solidFill>
-                <a:srgbClr val="000000"/>
-              </a:solidFill>
-              <a:effectLst/>
-              <a:uFillTx/>
-              <a:latin typeface="Times New Roman"/>
-            </a:endParaRPr>
-          </a:p>
-        </p:txBody>
-      </p:sp>
-      <p:sp>
-        <p:nvSpPr>
-          <p:cNvPr id="216" name=""/>
-          <p:cNvSpPr txBox="1"/>
-          <p:nvPr/>
-        </p:nvSpPr>
-        <p:spPr>
-          <a:xfrm>
-            <a:off x="7810560" y="3623760"/>
-            <a:ext cx="405000" cy="381240"/>
-          </a:xfrm>
-          <a:prstGeom prst="rect">
-            <a:avLst/>
-          </a:prstGeom>
-          <a:noFill/>
-          <a:ln w="0">
-            <a:noFill/>
-          </a:ln>
-        </p:spPr>
-        <p:txBody>
-          <a:bodyPr wrap="none" lIns="0" tIns="0" rIns="0" bIns="0" anchor="t">
-            <a:spAutoFit/>
-          </a:bodyPr>
-          <a:p>
-            <a:pPr/>
-            <a:r>
-              <a:rPr lang="en-US" sz="2550" b="0" u="none" strike="noStrike">
-                <a:solidFill>
-                  <a:srgbClr val="000000"/>
-                </a:solidFill>
-                <a:effectLst/>
-                <a:uFillTx/>
-                <a:latin typeface="NotoColorEmoji"/>
-                <a:ea typeface="NotoColorEmoji"/>
-              </a:rPr>
-              <a:t>🔥</a:t>
-            </a:r>
-            <a:endParaRPr lang="en-US" sz="2550" b="0" u="none" strike="noStrike">
-              <a:solidFill>
-                <a:srgbClr val="000000"/>
-              </a:solidFill>
-              <a:effectLst/>
-              <a:uFillTx/>
-              <a:latin typeface="Times New Roman"/>
-            </a:endParaRPr>
-          </a:p>
-        </p:txBody>
-      </p:sp>
-      <p:sp>
-        <p:nvSpPr>
-          <p:cNvPr id="217" name=""/>
-          <p:cNvSpPr txBox="1"/>
-          <p:nvPr/>
-        </p:nvSpPr>
-        <p:spPr>
-          <a:xfrm>
-            <a:off x="4003200" y="3652200"/>
-            <a:ext cx="405000" cy="381240"/>
-          </a:xfrm>
-          <a:prstGeom prst="rect">
-            <a:avLst/>
-          </a:prstGeom>
-          <a:noFill/>
-          <a:ln w="0">
-            <a:noFill/>
-          </a:ln>
-        </p:spPr>
-        <p:txBody>
-          <a:bodyPr wrap="none" lIns="0" tIns="0" rIns="0" bIns="0" anchor="t">
-            <a:spAutoFit/>
-          </a:bodyPr>
-          <a:p>
-            <a:pPr/>
-            <a:r>
-              <a:rPr lang="en-US" sz="2550" b="0" u="none" strike="noStrike">
-                <a:solidFill>
-                  <a:srgbClr val="000000"/>
-                </a:solidFill>
-                <a:effectLst/>
-                <a:uFillTx/>
-                <a:latin typeface="NotoColorEmoji"/>
-                <a:ea typeface="NotoColorEmoji"/>
-              </a:rPr>
-              <a:t>🔥</a:t>
-            </a:r>
-            <a:endParaRPr lang="en-US" sz="2550" b="0" u="none" strike="noStrike">
-              <a:solidFill>
-                <a:srgbClr val="000000"/>
-              </a:solidFill>
-              <a:effectLst/>
-              <a:uFillTx/>
-              <a:latin typeface="Times New Roman"/>
-            </a:endParaRPr>
-          </a:p>
-        </p:txBody>
-      </p:sp>
-      <p:sp>
-        <p:nvSpPr>
-          <p:cNvPr id="218" name=""/>
-          <p:cNvSpPr txBox="1"/>
-          <p:nvPr/>
-        </p:nvSpPr>
-        <p:spPr>
-          <a:xfrm>
-            <a:off x="4410000" y="3659760"/>
-            <a:ext cx="323640" cy="363240"/>
-          </a:xfrm>
-          <a:prstGeom prst="rect">
-            <a:avLst/>
-          </a:prstGeom>
-          <a:noFill/>
-          <a:ln w="0">
-            <a:noFill/>
-          </a:ln>
-        </p:spPr>
-        <p:txBody>
-          <a:bodyPr wrap="none" lIns="0" tIns="0" rIns="0" bIns="0" anchor="t">
-            <a:spAutoFit/>
-          </a:bodyPr>
-          <a:p>
-            <a:pPr/>
-            <a:r>
-              <a:rPr lang="en-US" sz="2550" b="1" u="none" strike="noStrike">
-                <a:solidFill>
-                  <a:srgbClr val="000000"/>
-                </a:solidFill>
-                <a:effectLst/>
-                <a:uFillTx/>
-                <a:latin typeface="Arial"/>
-                <a:ea typeface="Arial"/>
-              </a:rPr>
-              <a:t> </a:t>
-            </a:r>
-            <a:endParaRPr lang="en-US" sz="2550" b="0" u="none" strike="noStrike">
-              <a:solidFill>
-                <a:srgbClr val="000000"/>
-              </a:solidFill>
-              <a:effectLst/>
-              <a:uFillTx/>
-              <a:latin typeface="Times New Roman"/>
-            </a:endParaRPr>
-          </a:p>
-        </p:txBody>
-      </p:sp>
-      <p:sp>
-        <p:nvSpPr>
-          <p:cNvPr id="219" name=""/>
-          <p:cNvSpPr txBox="1"/>
-          <p:nvPr/>
-        </p:nvSpPr>
-        <p:spPr>
-          <a:xfrm>
-            <a:off x="4502520" y="3652200"/>
-            <a:ext cx="405000" cy="381240"/>
-          </a:xfrm>
-          <a:prstGeom prst="rect">
-            <a:avLst/>
-          </a:prstGeom>
-          <a:noFill/>
-          <a:ln w="0">
-            <a:noFill/>
-          </a:ln>
-        </p:spPr>
-        <p:txBody>
-          <a:bodyPr wrap="none" lIns="0" tIns="0" rIns="0" bIns="0" anchor="t">
-            <a:spAutoFit/>
-          </a:bodyPr>
-          <a:p>
-            <a:pPr/>
-            <a:r>
-              <a:rPr lang="en-US" sz="2550" b="0" u="none" strike="noStrike">
-                <a:solidFill>
-                  <a:srgbClr val="000000"/>
-                </a:solidFill>
-                <a:effectLst/>
-                <a:uFillTx/>
-                <a:latin typeface="NotoColorEmoji"/>
-                <a:ea typeface="NotoColorEmoji"/>
-              </a:rPr>
-              <a:t>🐶</a:t>
-            </a:r>
-            <a:endParaRPr lang="en-US" sz="2550" b="0" u="none" strike="noStrike">
-              <a:solidFill>
-                <a:srgbClr val="000000"/>
-              </a:solidFill>
-              <a:effectLst/>
-              <a:uFillTx/>
-              <a:latin typeface="Times New Roman"/>
-            </a:endParaRPr>
-          </a:p>
-        </p:txBody>
-      </p:sp>
-      <p:sp>
-        <p:nvSpPr>
-          <p:cNvPr id="220" name=""/>
-          <p:cNvSpPr txBox="1"/>
-          <p:nvPr/>
-        </p:nvSpPr>
-        <p:spPr>
-          <a:xfrm>
-            <a:off x="4909320" y="3659760"/>
-            <a:ext cx="323640" cy="363240"/>
-          </a:xfrm>
-          <a:prstGeom prst="rect">
-            <a:avLst/>
-          </a:prstGeom>
-          <a:noFill/>
-          <a:ln w="0">
-            <a:noFill/>
-          </a:ln>
-        </p:spPr>
-        <p:txBody>
-          <a:bodyPr wrap="none" lIns="0" tIns="0" rIns="0" bIns="0" anchor="t">
-            <a:spAutoFit/>
-          </a:bodyPr>
-          <a:p>
-            <a:pPr/>
-            <a:r>
-              <a:rPr lang="en-US" sz="2550" b="1" u="none" strike="noStrike">
-                <a:solidFill>
-                  <a:srgbClr val="000000"/>
-                </a:solidFill>
-                <a:effectLst/>
-                <a:uFillTx/>
-                <a:latin typeface="Arial"/>
-                <a:ea typeface="Arial"/>
-              </a:rPr>
-              <a:t> </a:t>
-            </a:r>
-            <a:endParaRPr lang="en-US" sz="2550" b="0" u="none" strike="noStrike">
-              <a:solidFill>
-                <a:srgbClr val="000000"/>
-              </a:solidFill>
-              <a:effectLst/>
-              <a:uFillTx/>
-              <a:latin typeface="Times New Roman"/>
-            </a:endParaRPr>
-          </a:p>
-        </p:txBody>
-      </p:sp>
-      <p:sp>
-        <p:nvSpPr>
-          <p:cNvPr id="221" name=""/>
-          <p:cNvSpPr txBox="1"/>
-          <p:nvPr/>
-        </p:nvSpPr>
-        <p:spPr>
-          <a:xfrm>
-            <a:off x="5001840" y="3652200"/>
-            <a:ext cx="405000" cy="381240"/>
-          </a:xfrm>
-          <a:prstGeom prst="rect">
-            <a:avLst/>
-          </a:prstGeom>
-          <a:noFill/>
-          <a:ln w="0">
-            <a:noFill/>
-          </a:ln>
-        </p:spPr>
-        <p:txBody>
-          <a:bodyPr wrap="none" lIns="0" tIns="0" rIns="0" bIns="0" anchor="t">
-            <a:spAutoFit/>
-          </a:bodyPr>
-          <a:p>
-            <a:pPr/>
-            <a:r>
-              <a:rPr lang="en-US" sz="2550" b="0" u="none" strike="noStrike">
-                <a:solidFill>
-                  <a:srgbClr val="000000"/>
-                </a:solidFill>
-                <a:effectLst/>
-                <a:uFillTx/>
-                <a:latin typeface="NotoColorEmoji"/>
-                <a:ea typeface="NotoColorEmoji"/>
-              </a:rPr>
-              <a:t>🔥</a:t>
-            </a:r>
-            <a:endParaRPr lang="en-US" sz="2550" b="0" u="none" strike="noStrike">
-              <a:solidFill>
-                <a:srgbClr val="000000"/>
-              </a:solidFill>
-              <a:effectLst/>
-              <a:uFillTx/>
-              <a:latin typeface="Times New Roman"/>
-            </a:endParaRPr>
-          </a:p>
-        </p:txBody>
-      </p:sp>
-      <p:sp>
-        <p:nvSpPr>
-          <p:cNvPr id="222" name=""/>
-          <p:cNvSpPr txBox="1"/>
-          <p:nvPr/>
-        </p:nvSpPr>
-        <p:spPr>
-          <a:xfrm>
-            <a:off x="5408640" y="3659760"/>
-            <a:ext cx="2345400" cy="363240"/>
-          </a:xfrm>
-          <a:prstGeom prst="rect">
-            <a:avLst/>
-          </a:prstGeom>
-          <a:noFill/>
-          <a:ln w="0">
-            <a:noFill/>
-          </a:ln>
-        </p:spPr>
-        <p:txBody>
-          <a:bodyPr wrap="none" lIns="0" tIns="0" rIns="0" bIns="0" anchor="t">
-            <a:spAutoFit/>
-          </a:bodyPr>
-          <a:p>
-            <a:pPr/>
-            <a:r>
-              <a:rPr lang="en-US" sz="2550" b="1" u="none" strike="noStrike">
-                <a:solidFill>
-                  <a:srgbClr val="000000"/>
-                </a:solidFill>
-                <a:effectLst/>
-                <a:uFillTx/>
-                <a:latin typeface="Arial"/>
-                <a:ea typeface="Arial"/>
-              </a:rPr>
-              <a:t>   TODO BIEN   </a:t>
-            </a:r>
-            <a:endParaRPr lang="en-US" sz="2550" b="0" u="none" strike="noStrike">
-              <a:solidFill>
-                <a:srgbClr val="000000"/>
-              </a:solidFill>
-              <a:effectLst/>
-              <a:uFillTx/>
-              <a:latin typeface="Times New Roman"/>
-            </a:endParaRPr>
-          </a:p>
-        </p:txBody>
-      </p:sp>
-      <p:sp>
-        <p:nvSpPr>
-          <p:cNvPr id="223" name=""/>
-          <p:cNvSpPr txBox="1"/>
-          <p:nvPr/>
-        </p:nvSpPr>
-        <p:spPr>
-          <a:xfrm>
-            <a:off x="7781760" y="3652200"/>
-            <a:ext cx="405000" cy="381240"/>
-          </a:xfrm>
-          <a:prstGeom prst="rect">
-            <a:avLst/>
-          </a:prstGeom>
-          <a:noFill/>
-          <a:ln w="0">
-            <a:noFill/>
-          </a:ln>
-        </p:spPr>
-        <p:txBody>
-          <a:bodyPr wrap="none" lIns="0" tIns="0" rIns="0" bIns="0" anchor="t">
-            <a:spAutoFit/>
-          </a:bodyPr>
-          <a:p>
-            <a:pPr/>
-            <a:r>
-              <a:rPr lang="en-US" sz="2550" b="0" u="none" strike="noStrike">
-                <a:solidFill>
-                  <a:srgbClr val="000000"/>
-                </a:solidFill>
-                <a:effectLst/>
-                <a:uFillTx/>
-                <a:latin typeface="NotoColorEmoji"/>
-                <a:ea typeface="NotoColorEmoji"/>
-              </a:rPr>
-              <a:t>🔥</a:t>
-            </a:r>
-            <a:endParaRPr lang="en-US" sz="2550" b="0" u="none" strike="noStrike">
-              <a:solidFill>
-                <a:srgbClr val="000000"/>
-              </a:solidFill>
-              <a:effectLst/>
-              <a:uFillTx/>
-              <a:latin typeface="Times New Roman"/>
-            </a:endParaRPr>
-          </a:p>
-        </p:txBody>
-      </p:sp>
-      <p:sp>
-        <p:nvSpPr>
-          <p:cNvPr id="224" name=""/>
-          <p:cNvSpPr txBox="1"/>
-          <p:nvPr/>
-        </p:nvSpPr>
-        <p:spPr>
-          <a:xfrm>
-            <a:off x="4031640" y="3652200"/>
-            <a:ext cx="405000" cy="381240"/>
-          </a:xfrm>
-          <a:prstGeom prst="rect">
-            <a:avLst/>
-          </a:prstGeom>
-          <a:noFill/>
-          <a:ln w="0">
-            <a:noFill/>
-          </a:ln>
-        </p:spPr>
-        <p:txBody>
-          <a:bodyPr wrap="none" lIns="0" tIns="0" rIns="0" bIns="0" anchor="t">
-            <a:spAutoFit/>
-          </a:bodyPr>
-          <a:p>
-            <a:pPr/>
-            <a:r>
-              <a:rPr lang="en-US" sz="2550" b="0" u="none" strike="noStrike">
-                <a:solidFill>
-                  <a:srgbClr val="000000"/>
-                </a:solidFill>
-                <a:effectLst/>
-                <a:uFillTx/>
-                <a:latin typeface="NotoColorEmoji"/>
-                <a:ea typeface="NotoColorEmoji"/>
-              </a:rPr>
-              <a:t>🔥</a:t>
-            </a:r>
-            <a:endParaRPr lang="en-US" sz="2550" b="0" u="none" strike="noStrike">
-              <a:solidFill>
-                <a:srgbClr val="000000"/>
-              </a:solidFill>
-              <a:effectLst/>
-              <a:uFillTx/>
-              <a:latin typeface="Times New Roman"/>
-            </a:endParaRPr>
-          </a:p>
-        </p:txBody>
-      </p:sp>
-      <p:sp>
-        <p:nvSpPr>
-          <p:cNvPr id="225" name=""/>
-          <p:cNvSpPr txBox="1"/>
-          <p:nvPr/>
-        </p:nvSpPr>
-        <p:spPr>
-          <a:xfrm>
-            <a:off x="4438440" y="3659760"/>
-            <a:ext cx="323640" cy="363240"/>
-          </a:xfrm>
-          <a:prstGeom prst="rect">
-            <a:avLst/>
-          </a:prstGeom>
-          <a:noFill/>
-          <a:ln w="0">
-            <a:noFill/>
-          </a:ln>
-        </p:spPr>
-        <p:txBody>
-          <a:bodyPr wrap="none" lIns="0" tIns="0" rIns="0" bIns="0" anchor="t">
-            <a:spAutoFit/>
-          </a:bodyPr>
-          <a:p>
-            <a:pPr/>
-            <a:r>
-              <a:rPr lang="en-US" sz="2550" b="1" u="none" strike="noStrike">
-                <a:solidFill>
-                  <a:srgbClr val="000000"/>
-                </a:solidFill>
-                <a:effectLst/>
-                <a:uFillTx/>
-                <a:latin typeface="Arial"/>
-                <a:ea typeface="Arial"/>
-              </a:rPr>
-              <a:t> </a:t>
-            </a:r>
-            <a:endParaRPr lang="en-US" sz="2550" b="0" u="none" strike="noStrike">
-              <a:solidFill>
-                <a:srgbClr val="000000"/>
-              </a:solidFill>
-              <a:effectLst/>
-              <a:uFillTx/>
-              <a:latin typeface="Times New Roman"/>
-            </a:endParaRPr>
-          </a:p>
-        </p:txBody>
-      </p:sp>
-      <p:sp>
-        <p:nvSpPr>
-          <p:cNvPr id="226" name=""/>
-          <p:cNvSpPr txBox="1"/>
-          <p:nvPr/>
-        </p:nvSpPr>
-        <p:spPr>
-          <a:xfrm>
-            <a:off x="4530960" y="3652200"/>
-            <a:ext cx="405000" cy="381240"/>
-          </a:xfrm>
-          <a:prstGeom prst="rect">
-            <a:avLst/>
-          </a:prstGeom>
-          <a:noFill/>
-          <a:ln w="0">
-            <a:noFill/>
-          </a:ln>
-        </p:spPr>
-        <p:txBody>
-          <a:bodyPr wrap="none" lIns="0" tIns="0" rIns="0" bIns="0" anchor="t">
-            <a:spAutoFit/>
-          </a:bodyPr>
-          <a:p>
-            <a:pPr/>
-            <a:r>
-              <a:rPr lang="en-US" sz="2550" b="0" u="none" strike="noStrike">
-                <a:solidFill>
-                  <a:srgbClr val="000000"/>
-                </a:solidFill>
-                <a:effectLst/>
-                <a:uFillTx/>
-                <a:latin typeface="NotoColorEmoji"/>
-                <a:ea typeface="NotoColorEmoji"/>
-              </a:rPr>
-              <a:t>🐶</a:t>
-            </a:r>
-            <a:endParaRPr lang="en-US" sz="2550" b="0" u="none" strike="noStrike">
-              <a:solidFill>
-                <a:srgbClr val="000000"/>
-              </a:solidFill>
-              <a:effectLst/>
-              <a:uFillTx/>
-              <a:latin typeface="Times New Roman"/>
-            </a:endParaRPr>
-          </a:p>
-        </p:txBody>
-      </p:sp>
-      <p:sp>
-        <p:nvSpPr>
-          <p:cNvPr id="227" name=""/>
-          <p:cNvSpPr txBox="1"/>
-          <p:nvPr/>
-        </p:nvSpPr>
-        <p:spPr>
-          <a:xfrm>
-            <a:off x="4937760" y="3659760"/>
-            <a:ext cx="323640" cy="363240"/>
-          </a:xfrm>
-          <a:prstGeom prst="rect">
-            <a:avLst/>
-          </a:prstGeom>
-          <a:noFill/>
-          <a:ln w="0">
-            <a:noFill/>
-          </a:ln>
-        </p:spPr>
-        <p:txBody>
-          <a:bodyPr wrap="none" lIns="0" tIns="0" rIns="0" bIns="0" anchor="t">
-            <a:spAutoFit/>
-          </a:bodyPr>
-          <a:p>
-            <a:pPr/>
-            <a:r>
-              <a:rPr lang="en-US" sz="2550" b="1" u="none" strike="noStrike">
-                <a:solidFill>
-                  <a:srgbClr val="000000"/>
-                </a:solidFill>
-                <a:effectLst/>
-                <a:uFillTx/>
-                <a:latin typeface="Arial"/>
-                <a:ea typeface="Arial"/>
-              </a:rPr>
-              <a:t> </a:t>
-            </a:r>
-            <a:endParaRPr lang="en-US" sz="2550" b="0" u="none" strike="noStrike">
-              <a:solidFill>
-                <a:srgbClr val="000000"/>
-              </a:solidFill>
-              <a:effectLst/>
-              <a:uFillTx/>
-              <a:latin typeface="Times New Roman"/>
-            </a:endParaRPr>
-          </a:p>
-        </p:txBody>
-      </p:sp>
-      <p:sp>
-        <p:nvSpPr>
-          <p:cNvPr id="228" name=""/>
-          <p:cNvSpPr txBox="1"/>
-          <p:nvPr/>
-        </p:nvSpPr>
-        <p:spPr>
-          <a:xfrm>
-            <a:off x="5030640" y="3652200"/>
-            <a:ext cx="405000" cy="381240"/>
-          </a:xfrm>
-          <a:prstGeom prst="rect">
-            <a:avLst/>
-          </a:prstGeom>
-          <a:noFill/>
-          <a:ln w="0">
-            <a:noFill/>
-          </a:ln>
-        </p:spPr>
-        <p:txBody>
-          <a:bodyPr wrap="none" lIns="0" tIns="0" rIns="0" bIns="0" anchor="t">
-            <a:spAutoFit/>
-          </a:bodyPr>
-          <a:p>
-            <a:pPr/>
-            <a:r>
-              <a:rPr lang="en-US" sz="2550" b="0" u="none" strike="noStrike">
-                <a:solidFill>
-                  <a:srgbClr val="000000"/>
-                </a:solidFill>
-                <a:effectLst/>
-                <a:uFillTx/>
-                <a:latin typeface="NotoColorEmoji"/>
-                <a:ea typeface="NotoColorEmoji"/>
-              </a:rPr>
-              <a:t>🔥</a:t>
-            </a:r>
-            <a:endParaRPr lang="en-US" sz="2550" b="0" u="none" strike="noStrike">
-              <a:solidFill>
-                <a:srgbClr val="000000"/>
-              </a:solidFill>
-              <a:effectLst/>
-              <a:uFillTx/>
-              <a:latin typeface="Times New Roman"/>
-            </a:endParaRPr>
-          </a:p>
-        </p:txBody>
-      </p:sp>
-      <p:sp>
-        <p:nvSpPr>
-          <p:cNvPr id="229" name=""/>
-          <p:cNvSpPr txBox="1"/>
-          <p:nvPr/>
-        </p:nvSpPr>
-        <p:spPr>
-          <a:xfrm>
-            <a:off x="5437080" y="3659760"/>
-            <a:ext cx="2345400" cy="363240"/>
-          </a:xfrm>
-          <a:prstGeom prst="rect">
-            <a:avLst/>
-          </a:prstGeom>
-          <a:noFill/>
-          <a:ln w="0">
-            <a:noFill/>
-          </a:ln>
-        </p:spPr>
-        <p:txBody>
-          <a:bodyPr wrap="none" lIns="0" tIns="0" rIns="0" bIns="0" anchor="t">
-            <a:spAutoFit/>
-          </a:bodyPr>
-          <a:p>
-            <a:pPr/>
-            <a:r>
-              <a:rPr lang="en-US" sz="2550" b="1" u="none" strike="noStrike">
-                <a:solidFill>
-                  <a:srgbClr val="000000"/>
-                </a:solidFill>
-                <a:effectLst/>
-                <a:uFillTx/>
-                <a:latin typeface="Arial"/>
-                <a:ea typeface="Arial"/>
-              </a:rPr>
-              <a:t>   TODO BIEN   </a:t>
-            </a:r>
-            <a:endParaRPr lang="en-US" sz="2550" b="0" u="none" strike="noStrike">
-              <a:solidFill>
-                <a:srgbClr val="000000"/>
-              </a:solidFill>
-              <a:effectLst/>
-              <a:uFillTx/>
-              <a:latin typeface="Times New Roman"/>
-            </a:endParaRPr>
-          </a:p>
-        </p:txBody>
-      </p:sp>
-      <p:sp>
-        <p:nvSpPr>
-          <p:cNvPr id="230" name=""/>
-          <p:cNvSpPr txBox="1"/>
-          <p:nvPr/>
-        </p:nvSpPr>
-        <p:spPr>
-          <a:xfrm>
-            <a:off x="7810560" y="3652200"/>
-            <a:ext cx="405000" cy="381240"/>
-          </a:xfrm>
-          <a:prstGeom prst="rect">
-            <a:avLst/>
-          </a:prstGeom>
-          <a:noFill/>
-          <a:ln w="0">
-            <a:noFill/>
-          </a:ln>
-        </p:spPr>
-        <p:txBody>
-          <a:bodyPr wrap="none" lIns="0" tIns="0" rIns="0" bIns="0" anchor="t">
-            <a:spAutoFit/>
-          </a:bodyPr>
-          <a:p>
-            <a:pPr/>
-            <a:r>
-              <a:rPr lang="en-US" sz="2550" b="0" u="none" strike="noStrike">
-                <a:solidFill>
-                  <a:srgbClr val="000000"/>
-                </a:solidFill>
-                <a:effectLst/>
-                <a:uFillTx/>
-                <a:latin typeface="NotoColorEmoji"/>
-                <a:ea typeface="NotoColorEmoji"/>
-              </a:rPr>
-              <a:t>🔥</a:t>
-            </a:r>
-            <a:endParaRPr lang="en-US" sz="2550" b="0" u="none" strike="noStrike">
-              <a:solidFill>
-                <a:srgbClr val="000000"/>
-              </a:solidFill>
-              <a:effectLst/>
-              <a:uFillTx/>
-              <a:latin typeface="Times New Roman"/>
-            </a:endParaRPr>
-          </a:p>
-        </p:txBody>
-      </p:sp>
-      <p:sp>
-        <p:nvSpPr>
-          <p:cNvPr id="231" name=""/>
-          <p:cNvSpPr txBox="1"/>
-          <p:nvPr/>
-        </p:nvSpPr>
-        <p:spPr>
-          <a:xfrm>
-            <a:off x="3974760" y="3652200"/>
-            <a:ext cx="405000" cy="381240"/>
-          </a:xfrm>
-          <a:prstGeom prst="rect">
-            <a:avLst/>
-          </a:prstGeom>
-          <a:noFill/>
-          <a:ln w="0">
-            <a:noFill/>
-          </a:ln>
-        </p:spPr>
-        <p:txBody>
-          <a:bodyPr wrap="none" lIns="0" tIns="0" rIns="0" bIns="0" anchor="t">
-            <a:spAutoFit/>
-          </a:bodyPr>
-          <a:p>
-            <a:pPr/>
-            <a:r>
-              <a:rPr lang="en-US" sz="2550" b="0" u="none" strike="noStrike">
-                <a:solidFill>
-                  <a:srgbClr val="000000"/>
-                </a:solidFill>
-                <a:effectLst/>
-                <a:uFillTx/>
-                <a:latin typeface="NotoColorEmoji"/>
-                <a:ea typeface="NotoColorEmoji"/>
-              </a:rPr>
-              <a:t>🔥</a:t>
-            </a:r>
-            <a:endParaRPr lang="en-US" sz="2550" b="0" u="none" strike="noStrike">
-              <a:solidFill>
-                <a:srgbClr val="000000"/>
-              </a:solidFill>
-              <a:effectLst/>
-              <a:uFillTx/>
-              <a:latin typeface="Times New Roman"/>
-            </a:endParaRPr>
-          </a:p>
-        </p:txBody>
-      </p:sp>
-      <p:sp>
-        <p:nvSpPr>
-          <p:cNvPr id="232" name=""/>
-          <p:cNvSpPr txBox="1"/>
-          <p:nvPr/>
-        </p:nvSpPr>
-        <p:spPr>
-          <a:xfrm>
-            <a:off x="4381200" y="3659760"/>
-            <a:ext cx="323640" cy="363240"/>
-          </a:xfrm>
-          <a:prstGeom prst="rect">
-            <a:avLst/>
-          </a:prstGeom>
-          <a:noFill/>
-          <a:ln w="0">
-            <a:noFill/>
-          </a:ln>
-        </p:spPr>
-        <p:txBody>
-          <a:bodyPr wrap="none" lIns="0" tIns="0" rIns="0" bIns="0" anchor="t">
-            <a:spAutoFit/>
-          </a:bodyPr>
-          <a:p>
-            <a:pPr/>
-            <a:r>
-              <a:rPr lang="en-US" sz="2550" b="1" u="none" strike="noStrike">
-                <a:solidFill>
-                  <a:srgbClr val="000000"/>
-                </a:solidFill>
-                <a:effectLst/>
-                <a:uFillTx/>
-                <a:latin typeface="Arial"/>
-                <a:ea typeface="Arial"/>
-              </a:rPr>
-              <a:t> </a:t>
-            </a:r>
-            <a:endParaRPr lang="en-US" sz="2550" b="0" u="none" strike="noStrike">
-              <a:solidFill>
-                <a:srgbClr val="000000"/>
-              </a:solidFill>
-              <a:effectLst/>
-              <a:uFillTx/>
-              <a:latin typeface="Times New Roman"/>
-            </a:endParaRPr>
-          </a:p>
-        </p:txBody>
-      </p:sp>
-      <p:sp>
-        <p:nvSpPr>
-          <p:cNvPr id="233" name=""/>
-          <p:cNvSpPr txBox="1"/>
-          <p:nvPr/>
-        </p:nvSpPr>
-        <p:spPr>
-          <a:xfrm>
-            <a:off x="4474080" y="3652200"/>
-            <a:ext cx="405000" cy="381240"/>
-          </a:xfrm>
-          <a:prstGeom prst="rect">
-            <a:avLst/>
-          </a:prstGeom>
-          <a:noFill/>
-          <a:ln w="0">
-            <a:noFill/>
-          </a:ln>
-        </p:spPr>
-        <p:txBody>
-          <a:bodyPr wrap="none" lIns="0" tIns="0" rIns="0" bIns="0" anchor="t">
-            <a:spAutoFit/>
-          </a:bodyPr>
-          <a:p>
-            <a:pPr/>
-            <a:r>
-              <a:rPr lang="en-US" sz="2550" b="0" u="none" strike="noStrike">
-                <a:solidFill>
-                  <a:srgbClr val="000000"/>
-                </a:solidFill>
-                <a:effectLst/>
-                <a:uFillTx/>
-                <a:latin typeface="NotoColorEmoji"/>
-                <a:ea typeface="NotoColorEmoji"/>
-              </a:rPr>
-              <a:t>🐶</a:t>
-            </a:r>
-            <a:endParaRPr lang="en-US" sz="2550" b="0" u="none" strike="noStrike">
-              <a:solidFill>
-                <a:srgbClr val="000000"/>
-              </a:solidFill>
-              <a:effectLst/>
-              <a:uFillTx/>
-              <a:latin typeface="Times New Roman"/>
-            </a:endParaRPr>
-          </a:p>
-        </p:txBody>
-      </p:sp>
-      <p:sp>
-        <p:nvSpPr>
-          <p:cNvPr id="234" name=""/>
-          <p:cNvSpPr txBox="1"/>
-          <p:nvPr/>
-        </p:nvSpPr>
-        <p:spPr>
-          <a:xfrm>
-            <a:off x="4880880" y="3659760"/>
-            <a:ext cx="323640" cy="363240"/>
-          </a:xfrm>
-          <a:prstGeom prst="rect">
-            <a:avLst/>
-          </a:prstGeom>
-          <a:noFill/>
-          <a:ln w="0">
-            <a:noFill/>
-          </a:ln>
-        </p:spPr>
-        <p:txBody>
-          <a:bodyPr wrap="none" lIns="0" tIns="0" rIns="0" bIns="0" anchor="t">
-            <a:spAutoFit/>
-          </a:bodyPr>
-          <a:p>
-            <a:pPr/>
-            <a:r>
-              <a:rPr lang="en-US" sz="2550" b="1" u="none" strike="noStrike">
-                <a:solidFill>
-                  <a:srgbClr val="000000"/>
-                </a:solidFill>
-                <a:effectLst/>
-                <a:uFillTx/>
-                <a:latin typeface="Arial"/>
-                <a:ea typeface="Arial"/>
-              </a:rPr>
-              <a:t> </a:t>
-            </a:r>
-            <a:endParaRPr lang="en-US" sz="2550" b="0" u="none" strike="noStrike">
-              <a:solidFill>
-                <a:srgbClr val="000000"/>
-              </a:solidFill>
-              <a:effectLst/>
-              <a:uFillTx/>
-              <a:latin typeface="Times New Roman"/>
-            </a:endParaRPr>
-          </a:p>
-        </p:txBody>
-      </p:sp>
-      <p:sp>
-        <p:nvSpPr>
-          <p:cNvPr id="235" name=""/>
-          <p:cNvSpPr txBox="1"/>
-          <p:nvPr/>
-        </p:nvSpPr>
-        <p:spPr>
-          <a:xfrm>
-            <a:off x="4973400" y="3652200"/>
-            <a:ext cx="405000" cy="381240"/>
-          </a:xfrm>
-          <a:prstGeom prst="rect">
-            <a:avLst/>
-          </a:prstGeom>
-          <a:noFill/>
-          <a:ln w="0">
-            <a:noFill/>
-          </a:ln>
-        </p:spPr>
-        <p:txBody>
-          <a:bodyPr wrap="none" lIns="0" tIns="0" rIns="0" bIns="0" anchor="t">
-            <a:spAutoFit/>
-          </a:bodyPr>
-          <a:p>
-            <a:pPr/>
-            <a:r>
-              <a:rPr lang="en-US" sz="2550" b="0" u="none" strike="noStrike">
-                <a:solidFill>
-                  <a:srgbClr val="000000"/>
-                </a:solidFill>
-                <a:effectLst/>
-                <a:uFillTx/>
-                <a:latin typeface="NotoColorEmoji"/>
-                <a:ea typeface="NotoColorEmoji"/>
-              </a:rPr>
-              <a:t>🔥</a:t>
-            </a:r>
-            <a:endParaRPr lang="en-US" sz="2550" b="0" u="none" strike="noStrike">
-              <a:solidFill>
-                <a:srgbClr val="000000"/>
-              </a:solidFill>
-              <a:effectLst/>
-              <a:uFillTx/>
-              <a:latin typeface="Times New Roman"/>
-            </a:endParaRPr>
-          </a:p>
-        </p:txBody>
-      </p:sp>
-      <p:sp>
-        <p:nvSpPr>
-          <p:cNvPr id="236" name=""/>
-          <p:cNvSpPr txBox="1"/>
-          <p:nvPr/>
-        </p:nvSpPr>
-        <p:spPr>
-          <a:xfrm>
-            <a:off x="5380200" y="3659760"/>
-            <a:ext cx="2345400" cy="363240"/>
-          </a:xfrm>
-          <a:prstGeom prst="rect">
-            <a:avLst/>
-          </a:prstGeom>
-          <a:noFill/>
-          <a:ln w="0">
-            <a:noFill/>
-          </a:ln>
-        </p:spPr>
-        <p:txBody>
-          <a:bodyPr wrap="none" lIns="0" tIns="0" rIns="0" bIns="0" anchor="t">
-            <a:spAutoFit/>
-          </a:bodyPr>
-          <a:p>
-            <a:pPr/>
-            <a:r>
-              <a:rPr lang="en-US" sz="2550" b="1" u="none" strike="noStrike">
-                <a:solidFill>
-                  <a:srgbClr val="000000"/>
-                </a:solidFill>
-                <a:effectLst/>
-                <a:uFillTx/>
-                <a:latin typeface="Arial"/>
-                <a:ea typeface="Arial"/>
-              </a:rPr>
-              <a:t>   TODO BIEN   </a:t>
-            </a:r>
-            <a:endParaRPr lang="en-US" sz="2550" b="0" u="none" strike="noStrike">
-              <a:solidFill>
-                <a:srgbClr val="000000"/>
-              </a:solidFill>
-              <a:effectLst/>
-              <a:uFillTx/>
-              <a:latin typeface="Times New Roman"/>
-            </a:endParaRPr>
-          </a:p>
-        </p:txBody>
-      </p:sp>
-      <p:sp>
-        <p:nvSpPr>
-          <p:cNvPr id="237" name=""/>
-          <p:cNvSpPr txBox="1"/>
-          <p:nvPr/>
-        </p:nvSpPr>
-        <p:spPr>
-          <a:xfrm>
-            <a:off x="7753320" y="3652200"/>
-            <a:ext cx="405000" cy="381240"/>
-          </a:xfrm>
-          <a:prstGeom prst="rect">
-            <a:avLst/>
-          </a:prstGeom>
-          <a:noFill/>
-          <a:ln w="0">
-            <a:noFill/>
-          </a:ln>
-        </p:spPr>
-        <p:txBody>
-          <a:bodyPr wrap="none" lIns="0" tIns="0" rIns="0" bIns="0" anchor="t">
-            <a:spAutoFit/>
-          </a:bodyPr>
-          <a:p>
-            <a:pPr/>
-            <a:r>
-              <a:rPr lang="en-US" sz="2550" b="0" u="none" strike="noStrike">
-                <a:solidFill>
-                  <a:srgbClr val="000000"/>
-                </a:solidFill>
-                <a:effectLst/>
-                <a:uFillTx/>
-                <a:latin typeface="NotoColorEmoji"/>
-                <a:ea typeface="NotoColorEmoji"/>
-              </a:rPr>
-              <a:t>🔥</a:t>
-            </a:r>
-            <a:endParaRPr lang="en-US" sz="2550" b="0" u="none" strike="noStrike">
-              <a:solidFill>
-                <a:srgbClr val="000000"/>
-              </a:solidFill>
-              <a:effectLst/>
-              <a:uFillTx/>
-              <a:latin typeface="Times New Roman"/>
-            </a:endParaRPr>
-          </a:p>
-        </p:txBody>
-      </p:sp>
-      <p:sp>
-        <p:nvSpPr>
-          <p:cNvPr id="238" name=""/>
-          <p:cNvSpPr txBox="1"/>
-          <p:nvPr/>
-        </p:nvSpPr>
-        <p:spPr>
-          <a:xfrm>
-            <a:off x="4031640" y="3595320"/>
-            <a:ext cx="405000" cy="381240"/>
-          </a:xfrm>
-          <a:prstGeom prst="rect">
-            <a:avLst/>
-          </a:prstGeom>
-          <a:noFill/>
-          <a:ln w="0">
-            <a:noFill/>
-          </a:ln>
-        </p:spPr>
-        <p:txBody>
-          <a:bodyPr wrap="none" lIns="0" tIns="0" rIns="0" bIns="0" anchor="t">
-            <a:spAutoFit/>
-          </a:bodyPr>
-          <a:p>
-            <a:pPr/>
-            <a:r>
-              <a:rPr lang="en-US" sz="2550" b="0" u="none" strike="noStrike">
-                <a:solidFill>
-                  <a:srgbClr val="000000"/>
-                </a:solidFill>
-                <a:effectLst/>
-                <a:uFillTx/>
-                <a:latin typeface="NotoColorEmoji"/>
-                <a:ea typeface="NotoColorEmoji"/>
-              </a:rPr>
-              <a:t>🔥</a:t>
-            </a:r>
-            <a:endParaRPr lang="en-US" sz="2550" b="0" u="none" strike="noStrike">
-              <a:solidFill>
-                <a:srgbClr val="000000"/>
-              </a:solidFill>
-              <a:effectLst/>
-              <a:uFillTx/>
-              <a:latin typeface="Times New Roman"/>
-            </a:endParaRPr>
-          </a:p>
-        </p:txBody>
-      </p:sp>
-      <p:sp>
-        <p:nvSpPr>
-          <p:cNvPr id="239" name=""/>
-          <p:cNvSpPr txBox="1"/>
-          <p:nvPr/>
-        </p:nvSpPr>
-        <p:spPr>
-          <a:xfrm>
-            <a:off x="4438440" y="3602520"/>
-            <a:ext cx="323640" cy="363240"/>
-          </a:xfrm>
-          <a:prstGeom prst="rect">
-            <a:avLst/>
-          </a:prstGeom>
-          <a:noFill/>
-          <a:ln w="0">
-            <a:noFill/>
-          </a:ln>
-        </p:spPr>
-        <p:txBody>
-          <a:bodyPr wrap="none" lIns="0" tIns="0" rIns="0" bIns="0" anchor="t">
-            <a:spAutoFit/>
-          </a:bodyPr>
-          <a:p>
-            <a:pPr/>
-            <a:r>
-              <a:rPr lang="en-US" sz="2550" b="1" u="none" strike="noStrike">
-                <a:solidFill>
-                  <a:srgbClr val="000000"/>
-                </a:solidFill>
-                <a:effectLst/>
-                <a:uFillTx/>
-                <a:latin typeface="Arial"/>
-                <a:ea typeface="Arial"/>
-              </a:rPr>
-              <a:t> </a:t>
-            </a:r>
-            <a:endParaRPr lang="en-US" sz="2550" b="0" u="none" strike="noStrike">
-              <a:solidFill>
-                <a:srgbClr val="000000"/>
-              </a:solidFill>
-              <a:effectLst/>
-              <a:uFillTx/>
-              <a:latin typeface="Times New Roman"/>
-            </a:endParaRPr>
-          </a:p>
-        </p:txBody>
-      </p:sp>
-      <p:sp>
-        <p:nvSpPr>
-          <p:cNvPr id="240" name=""/>
-          <p:cNvSpPr txBox="1"/>
-          <p:nvPr/>
-        </p:nvSpPr>
-        <p:spPr>
-          <a:xfrm>
-            <a:off x="4530960" y="3595320"/>
-            <a:ext cx="405000" cy="381240"/>
-          </a:xfrm>
-          <a:prstGeom prst="rect">
-            <a:avLst/>
-          </a:prstGeom>
-          <a:noFill/>
-          <a:ln w="0">
-            <a:noFill/>
-          </a:ln>
-        </p:spPr>
-        <p:txBody>
-          <a:bodyPr wrap="none" lIns="0" tIns="0" rIns="0" bIns="0" anchor="t">
-            <a:spAutoFit/>
-          </a:bodyPr>
-          <a:p>
-            <a:pPr/>
-            <a:r>
-              <a:rPr lang="en-US" sz="2550" b="0" u="none" strike="noStrike">
-                <a:solidFill>
-                  <a:srgbClr val="000000"/>
-                </a:solidFill>
-                <a:effectLst/>
-                <a:uFillTx/>
-                <a:latin typeface="NotoColorEmoji"/>
-                <a:ea typeface="NotoColorEmoji"/>
-              </a:rPr>
-              <a:t>🐶</a:t>
-            </a:r>
-            <a:endParaRPr lang="en-US" sz="2550" b="0" u="none" strike="noStrike">
-              <a:solidFill>
-                <a:srgbClr val="000000"/>
-              </a:solidFill>
-              <a:effectLst/>
-              <a:uFillTx/>
-              <a:latin typeface="Times New Roman"/>
-            </a:endParaRPr>
-          </a:p>
-        </p:txBody>
-      </p:sp>
-      <p:sp>
-        <p:nvSpPr>
-          <p:cNvPr id="241" name=""/>
-          <p:cNvSpPr txBox="1"/>
-          <p:nvPr/>
-        </p:nvSpPr>
-        <p:spPr>
-          <a:xfrm>
-            <a:off x="4937760" y="3602520"/>
-            <a:ext cx="323640" cy="363240"/>
-          </a:xfrm>
-          <a:prstGeom prst="rect">
-            <a:avLst/>
-          </a:prstGeom>
-          <a:noFill/>
-          <a:ln w="0">
-            <a:noFill/>
-          </a:ln>
-        </p:spPr>
-        <p:txBody>
-          <a:bodyPr wrap="none" lIns="0" tIns="0" rIns="0" bIns="0" anchor="t">
-            <a:spAutoFit/>
-          </a:bodyPr>
-          <a:p>
-            <a:pPr/>
-            <a:r>
-              <a:rPr lang="en-US" sz="2550" b="1" u="none" strike="noStrike">
-                <a:solidFill>
-                  <a:srgbClr val="000000"/>
-                </a:solidFill>
-                <a:effectLst/>
-                <a:uFillTx/>
-                <a:latin typeface="Arial"/>
-                <a:ea typeface="Arial"/>
-              </a:rPr>
-              <a:t> </a:t>
-            </a:r>
-            <a:endParaRPr lang="en-US" sz="2550" b="0" u="none" strike="noStrike">
-              <a:solidFill>
-                <a:srgbClr val="000000"/>
-              </a:solidFill>
-              <a:effectLst/>
-              <a:uFillTx/>
-              <a:latin typeface="Times New Roman"/>
-            </a:endParaRPr>
-          </a:p>
-        </p:txBody>
-      </p:sp>
-      <p:sp>
-        <p:nvSpPr>
-          <p:cNvPr id="242" name=""/>
-          <p:cNvSpPr txBox="1"/>
-          <p:nvPr/>
-        </p:nvSpPr>
-        <p:spPr>
-          <a:xfrm>
-            <a:off x="5030640" y="3595320"/>
-            <a:ext cx="405000" cy="381240"/>
-          </a:xfrm>
-          <a:prstGeom prst="rect">
-            <a:avLst/>
-          </a:prstGeom>
-          <a:noFill/>
-          <a:ln w="0">
-            <a:noFill/>
-          </a:ln>
-        </p:spPr>
-        <p:txBody>
-          <a:bodyPr wrap="none" lIns="0" tIns="0" rIns="0" bIns="0" anchor="t">
-            <a:spAutoFit/>
-          </a:bodyPr>
-          <a:p>
-            <a:pPr/>
-            <a:r>
-              <a:rPr lang="en-US" sz="2550" b="0" u="none" strike="noStrike">
-                <a:solidFill>
-                  <a:srgbClr val="000000"/>
-                </a:solidFill>
-                <a:effectLst/>
-                <a:uFillTx/>
-                <a:latin typeface="NotoColorEmoji"/>
-                <a:ea typeface="NotoColorEmoji"/>
-              </a:rPr>
-              <a:t>🔥</a:t>
-            </a:r>
-            <a:endParaRPr lang="en-US" sz="2550" b="0" u="none" strike="noStrike">
-              <a:solidFill>
-                <a:srgbClr val="000000"/>
-              </a:solidFill>
-              <a:effectLst/>
-              <a:uFillTx/>
-              <a:latin typeface="Times New Roman"/>
-            </a:endParaRPr>
-          </a:p>
-        </p:txBody>
-      </p:sp>
-      <p:sp>
-        <p:nvSpPr>
-          <p:cNvPr id="243" name=""/>
-          <p:cNvSpPr txBox="1"/>
-          <p:nvPr/>
-        </p:nvSpPr>
-        <p:spPr>
-          <a:xfrm>
-            <a:off x="5437080" y="3602520"/>
-            <a:ext cx="2345400" cy="363240"/>
-          </a:xfrm>
-          <a:prstGeom prst="rect">
-            <a:avLst/>
-          </a:prstGeom>
-          <a:noFill/>
-          <a:ln w="0">
-            <a:noFill/>
-          </a:ln>
-        </p:spPr>
-        <p:txBody>
-          <a:bodyPr wrap="none" lIns="0" tIns="0" rIns="0" bIns="0" anchor="t">
-            <a:spAutoFit/>
-          </a:bodyPr>
-          <a:p>
-            <a:pPr/>
-            <a:r>
-              <a:rPr lang="en-US" sz="2550" b="1" u="none" strike="noStrike">
-                <a:solidFill>
-                  <a:srgbClr val="000000"/>
-                </a:solidFill>
-                <a:effectLst/>
-                <a:uFillTx/>
-                <a:latin typeface="Arial"/>
-                <a:ea typeface="Arial"/>
-              </a:rPr>
-              <a:t>   TODO BIEN   </a:t>
-            </a:r>
-            <a:endParaRPr lang="en-US" sz="2550" b="0" u="none" strike="noStrike">
-              <a:solidFill>
-                <a:srgbClr val="000000"/>
-              </a:solidFill>
-              <a:effectLst/>
-              <a:uFillTx/>
-              <a:latin typeface="Times New Roman"/>
-            </a:endParaRPr>
-          </a:p>
-        </p:txBody>
-      </p:sp>
-      <p:sp>
-        <p:nvSpPr>
-          <p:cNvPr id="244" name=""/>
-          <p:cNvSpPr txBox="1"/>
-          <p:nvPr/>
-        </p:nvSpPr>
-        <p:spPr>
-          <a:xfrm>
-            <a:off x="7810560" y="3595320"/>
-            <a:ext cx="405000" cy="381240"/>
-          </a:xfrm>
-          <a:prstGeom prst="rect">
-            <a:avLst/>
-          </a:prstGeom>
-          <a:noFill/>
-          <a:ln w="0">
-            <a:noFill/>
-          </a:ln>
-        </p:spPr>
-        <p:txBody>
-          <a:bodyPr wrap="none" lIns="0" tIns="0" rIns="0" bIns="0" anchor="t">
-            <a:spAutoFit/>
-          </a:bodyPr>
-          <a:p>
-            <a:pPr/>
-            <a:r>
-              <a:rPr lang="en-US" sz="2550" b="0" u="none" strike="noStrike">
-                <a:solidFill>
-                  <a:srgbClr val="000000"/>
-                </a:solidFill>
-                <a:effectLst/>
-                <a:uFillTx/>
-                <a:latin typeface="NotoColorEmoji"/>
-                <a:ea typeface="NotoColorEmoji"/>
-              </a:rPr>
-              <a:t>🔥</a:t>
-            </a:r>
-            <a:endParaRPr lang="en-US" sz="2550" b="0" u="none" strike="noStrike">
-              <a:solidFill>
-                <a:srgbClr val="000000"/>
-              </a:solidFill>
-              <a:effectLst/>
-              <a:uFillTx/>
-              <a:latin typeface="Times New Roman"/>
-            </a:endParaRPr>
-          </a:p>
-        </p:txBody>
-      </p:sp>
-      <p:sp>
-        <p:nvSpPr>
-          <p:cNvPr id="245" name=""/>
-          <p:cNvSpPr txBox="1"/>
-          <p:nvPr/>
-        </p:nvSpPr>
-        <p:spPr>
-          <a:xfrm>
-            <a:off x="3974760" y="3595320"/>
-            <a:ext cx="405000" cy="381240"/>
-          </a:xfrm>
-          <a:prstGeom prst="rect">
-            <a:avLst/>
-          </a:prstGeom>
-          <a:noFill/>
-          <a:ln w="0">
-            <a:noFill/>
-          </a:ln>
-        </p:spPr>
-        <p:txBody>
-          <a:bodyPr wrap="none" lIns="0" tIns="0" rIns="0" bIns="0" anchor="t">
-            <a:spAutoFit/>
-          </a:bodyPr>
-          <a:p>
-            <a:pPr/>
-            <a:r>
-              <a:rPr lang="en-US" sz="2550" b="0" u="none" strike="noStrike">
-                <a:solidFill>
-                  <a:srgbClr val="000000"/>
-                </a:solidFill>
-                <a:effectLst/>
-                <a:uFillTx/>
-                <a:latin typeface="NotoColorEmoji"/>
-                <a:ea typeface="NotoColorEmoji"/>
-              </a:rPr>
-              <a:t>🔥</a:t>
-            </a:r>
-            <a:endParaRPr lang="en-US" sz="2550" b="0" u="none" strike="noStrike">
-              <a:solidFill>
-                <a:srgbClr val="000000"/>
-              </a:solidFill>
-              <a:effectLst/>
-              <a:uFillTx/>
-              <a:latin typeface="Times New Roman"/>
-            </a:endParaRPr>
-          </a:p>
-        </p:txBody>
-      </p:sp>
-      <p:sp>
-        <p:nvSpPr>
-          <p:cNvPr id="246" name=""/>
-          <p:cNvSpPr txBox="1"/>
-          <p:nvPr/>
-        </p:nvSpPr>
-        <p:spPr>
-          <a:xfrm>
-            <a:off x="4381200" y="3602520"/>
-            <a:ext cx="323640" cy="363240"/>
-          </a:xfrm>
-          <a:prstGeom prst="rect">
-            <a:avLst/>
-          </a:prstGeom>
-          <a:noFill/>
-          <a:ln w="0">
-            <a:noFill/>
-          </a:ln>
-        </p:spPr>
-        <p:txBody>
-          <a:bodyPr wrap="none" lIns="0" tIns="0" rIns="0" bIns="0" anchor="t">
-            <a:spAutoFit/>
-          </a:bodyPr>
-          <a:p>
-            <a:pPr/>
-            <a:r>
-              <a:rPr lang="en-US" sz="2550" b="1" u="none" strike="noStrike">
-                <a:solidFill>
-                  <a:srgbClr val="000000"/>
-                </a:solidFill>
-                <a:effectLst/>
-                <a:uFillTx/>
-                <a:latin typeface="Arial"/>
-                <a:ea typeface="Arial"/>
-              </a:rPr>
-              <a:t> </a:t>
-            </a:r>
-            <a:endParaRPr lang="en-US" sz="2550" b="0" u="none" strike="noStrike">
-              <a:solidFill>
-                <a:srgbClr val="000000"/>
-              </a:solidFill>
-              <a:effectLst/>
-              <a:uFillTx/>
-              <a:latin typeface="Times New Roman"/>
-            </a:endParaRPr>
-          </a:p>
-        </p:txBody>
-      </p:sp>
-      <p:sp>
-        <p:nvSpPr>
-          <p:cNvPr id="247" name=""/>
-          <p:cNvSpPr txBox="1"/>
-          <p:nvPr/>
-        </p:nvSpPr>
-        <p:spPr>
-          <a:xfrm>
-            <a:off x="4474080" y="3595320"/>
-            <a:ext cx="405000" cy="381240"/>
-          </a:xfrm>
-          <a:prstGeom prst="rect">
-            <a:avLst/>
-          </a:prstGeom>
-          <a:noFill/>
-          <a:ln w="0">
-            <a:noFill/>
-          </a:ln>
-        </p:spPr>
-        <p:txBody>
-          <a:bodyPr wrap="none" lIns="0" tIns="0" rIns="0" bIns="0" anchor="t">
-            <a:spAutoFit/>
-          </a:bodyPr>
-          <a:p>
-            <a:pPr/>
-            <a:r>
-              <a:rPr lang="en-US" sz="2550" b="0" u="none" strike="noStrike">
-                <a:solidFill>
-                  <a:srgbClr val="000000"/>
-                </a:solidFill>
-                <a:effectLst/>
-                <a:uFillTx/>
-                <a:latin typeface="NotoColorEmoji"/>
-                <a:ea typeface="NotoColorEmoji"/>
-              </a:rPr>
-              <a:t>🐶</a:t>
-            </a:r>
-            <a:endParaRPr lang="en-US" sz="2550" b="0" u="none" strike="noStrike">
-              <a:solidFill>
-                <a:srgbClr val="000000"/>
-              </a:solidFill>
-              <a:effectLst/>
-              <a:uFillTx/>
-              <a:latin typeface="Times New Roman"/>
-            </a:endParaRPr>
-          </a:p>
-        </p:txBody>
-      </p:sp>
-      <p:sp>
-        <p:nvSpPr>
-          <p:cNvPr id="248" name=""/>
-          <p:cNvSpPr txBox="1"/>
-          <p:nvPr/>
-        </p:nvSpPr>
-        <p:spPr>
-          <a:xfrm>
-            <a:off x="4880880" y="3602520"/>
-            <a:ext cx="323640" cy="363240"/>
-          </a:xfrm>
-          <a:prstGeom prst="rect">
-            <a:avLst/>
-          </a:prstGeom>
-          <a:noFill/>
-          <a:ln w="0">
-            <a:noFill/>
-          </a:ln>
-        </p:spPr>
-        <p:txBody>
-          <a:bodyPr wrap="none" lIns="0" tIns="0" rIns="0" bIns="0" anchor="t">
-            <a:spAutoFit/>
-          </a:bodyPr>
-          <a:p>
-            <a:pPr/>
-            <a:r>
-              <a:rPr lang="en-US" sz="2550" b="1" u="none" strike="noStrike">
-                <a:solidFill>
-                  <a:srgbClr val="000000"/>
-                </a:solidFill>
-                <a:effectLst/>
-                <a:uFillTx/>
-                <a:latin typeface="Arial"/>
-                <a:ea typeface="Arial"/>
-              </a:rPr>
-              <a:t> </a:t>
-            </a:r>
-            <a:endParaRPr lang="en-US" sz="2550" b="0" u="none" strike="noStrike">
-              <a:solidFill>
-                <a:srgbClr val="000000"/>
-              </a:solidFill>
-              <a:effectLst/>
-              <a:uFillTx/>
-              <a:latin typeface="Times New Roman"/>
-            </a:endParaRPr>
-          </a:p>
-        </p:txBody>
-      </p:sp>
-      <p:sp>
-        <p:nvSpPr>
-          <p:cNvPr id="249" name=""/>
-          <p:cNvSpPr txBox="1"/>
-          <p:nvPr/>
-        </p:nvSpPr>
-        <p:spPr>
-          <a:xfrm>
-            <a:off x="4973400" y="3595320"/>
-            <a:ext cx="405000" cy="381240"/>
-          </a:xfrm>
-          <a:prstGeom prst="rect">
-            <a:avLst/>
-          </a:prstGeom>
-          <a:noFill/>
-          <a:ln w="0">
-            <a:noFill/>
-          </a:ln>
-        </p:spPr>
-        <p:txBody>
-          <a:bodyPr wrap="none" lIns="0" tIns="0" rIns="0" bIns="0" anchor="t">
-            <a:spAutoFit/>
-          </a:bodyPr>
-          <a:p>
-            <a:pPr/>
-            <a:r>
-              <a:rPr lang="en-US" sz="2550" b="0" u="none" strike="noStrike">
-                <a:solidFill>
-                  <a:srgbClr val="000000"/>
-                </a:solidFill>
-                <a:effectLst/>
-                <a:uFillTx/>
-                <a:latin typeface="NotoColorEmoji"/>
-                <a:ea typeface="NotoColorEmoji"/>
-              </a:rPr>
-              <a:t>🔥</a:t>
-            </a:r>
-            <a:endParaRPr lang="en-US" sz="2550" b="0" u="none" strike="noStrike">
-              <a:solidFill>
-                <a:srgbClr val="000000"/>
-              </a:solidFill>
-              <a:effectLst/>
-              <a:uFillTx/>
-              <a:latin typeface="Times New Roman"/>
-            </a:endParaRPr>
-          </a:p>
-        </p:txBody>
-      </p:sp>
-      <p:sp>
-        <p:nvSpPr>
-          <p:cNvPr id="250" name=""/>
-          <p:cNvSpPr txBox="1"/>
-          <p:nvPr/>
-        </p:nvSpPr>
-        <p:spPr>
-          <a:xfrm>
-            <a:off x="5380200" y="3602520"/>
-            <a:ext cx="2345400" cy="363240"/>
-          </a:xfrm>
-          <a:prstGeom prst="rect">
-            <a:avLst/>
-          </a:prstGeom>
-          <a:noFill/>
-          <a:ln w="0">
-            <a:noFill/>
-          </a:ln>
-        </p:spPr>
-        <p:txBody>
-          <a:bodyPr wrap="none" lIns="0" tIns="0" rIns="0" bIns="0" anchor="t">
-            <a:spAutoFit/>
-          </a:bodyPr>
-          <a:p>
-            <a:pPr/>
-            <a:r>
-              <a:rPr lang="en-US" sz="2550" b="1" u="none" strike="noStrike">
-                <a:solidFill>
-                  <a:srgbClr val="000000"/>
-                </a:solidFill>
-                <a:effectLst/>
-                <a:uFillTx/>
-                <a:latin typeface="Arial"/>
-                <a:ea typeface="Arial"/>
-              </a:rPr>
-              <a:t>   TODO BIEN   </a:t>
-            </a:r>
-            <a:endParaRPr lang="en-US" sz="2550" b="0" u="none" strike="noStrike">
-              <a:solidFill>
-                <a:srgbClr val="000000"/>
-              </a:solidFill>
-              <a:effectLst/>
-              <a:uFillTx/>
-              <a:latin typeface="Times New Roman"/>
-            </a:endParaRPr>
-          </a:p>
-        </p:txBody>
-      </p:sp>
-      <p:sp>
-        <p:nvSpPr>
-          <p:cNvPr id="251" name=""/>
-          <p:cNvSpPr txBox="1"/>
-          <p:nvPr/>
-        </p:nvSpPr>
-        <p:spPr>
-          <a:xfrm>
-            <a:off x="7753320" y="3595320"/>
-            <a:ext cx="405000" cy="381240"/>
-          </a:xfrm>
-          <a:prstGeom prst="rect">
-            <a:avLst/>
-          </a:prstGeom>
-          <a:noFill/>
-          <a:ln w="0">
-            <a:noFill/>
-          </a:ln>
-        </p:spPr>
-        <p:txBody>
-          <a:bodyPr wrap="none" lIns="0" tIns="0" rIns="0" bIns="0" anchor="t">
-            <a:spAutoFit/>
-          </a:bodyPr>
-          <a:p>
-            <a:pPr/>
-            <a:r>
-              <a:rPr lang="en-US" sz="2550" b="0" u="none" strike="noStrike">
-                <a:solidFill>
-                  <a:srgbClr val="000000"/>
-                </a:solidFill>
-                <a:effectLst/>
-                <a:uFillTx/>
-                <a:latin typeface="NotoColorEmoji"/>
-                <a:ea typeface="NotoColorEmoji"/>
-              </a:rPr>
-              <a:t>🔥</a:t>
-            </a:r>
-            <a:endParaRPr lang="en-US" sz="2550" b="0" u="none" strike="noStrike">
-              <a:solidFill>
-                <a:srgbClr val="000000"/>
-              </a:solidFill>
-              <a:effectLst/>
-              <a:uFillTx/>
-              <a:latin typeface="Times New Roman"/>
-            </a:endParaRPr>
-          </a:p>
-        </p:txBody>
-      </p:sp>
-      <p:sp>
-        <p:nvSpPr>
-          <p:cNvPr id="252" name=""/>
-          <p:cNvSpPr txBox="1"/>
-          <p:nvPr/>
-        </p:nvSpPr>
-        <p:spPr>
-          <a:xfrm>
-            <a:off x="4003200" y="3623760"/>
-            <a:ext cx="405000" cy="381240"/>
-          </a:xfrm>
-          <a:prstGeom prst="rect">
-            <a:avLst/>
-          </a:prstGeom>
-          <a:noFill/>
-          <a:ln w="0">
-            <a:noFill/>
-          </a:ln>
-        </p:spPr>
-        <p:txBody>
-          <a:bodyPr wrap="none" lIns="0" tIns="0" rIns="0" bIns="0" anchor="t">
-            <a:spAutoFit/>
-          </a:bodyPr>
-          <a:p>
-            <a:pPr/>
-            <a:r>
-              <a:rPr lang="en-US" sz="2550" b="0" u="none" strike="noStrike">
-                <a:solidFill>
-                  <a:srgbClr val="FFFFFF"/>
-                </a:solidFill>
-                <a:effectLst/>
-                <a:uFillTx/>
-                <a:latin typeface="NotoColorEmoji"/>
-                <a:ea typeface="NotoColorEmoji"/>
-              </a:rPr>
-              <a:t>🔥</a:t>
-            </a:r>
-            <a:endParaRPr lang="en-US" sz="2550" b="0" u="none" strike="noStrike">
-              <a:solidFill>
-                <a:srgbClr val="000000"/>
-              </a:solidFill>
-              <a:effectLst/>
-              <a:uFillTx/>
-              <a:latin typeface="Times New Roman"/>
-            </a:endParaRPr>
-          </a:p>
-        </p:txBody>
-      </p:sp>
-      <p:sp>
-        <p:nvSpPr>
-          <p:cNvPr id="253" name=""/>
-          <p:cNvSpPr txBox="1"/>
-          <p:nvPr/>
-        </p:nvSpPr>
-        <p:spPr>
-          <a:xfrm>
-            <a:off x="4410000" y="3631320"/>
-            <a:ext cx="323640" cy="363240"/>
-          </a:xfrm>
-          <a:prstGeom prst="rect">
-            <a:avLst/>
-          </a:prstGeom>
-          <a:noFill/>
-          <a:ln w="0">
-            <a:noFill/>
-          </a:ln>
-        </p:spPr>
-        <p:txBody>
-          <a:bodyPr wrap="none" lIns="0" tIns="0" rIns="0" bIns="0" anchor="t">
-            <a:spAutoFit/>
-          </a:bodyPr>
-          <a:p>
-            <a:pPr/>
-            <a:r>
-              <a:rPr lang="en-US" sz="2550" b="1" u="none" strike="noStrike">
-                <a:solidFill>
-                  <a:srgbClr val="FFFFFF"/>
-                </a:solidFill>
-                <a:effectLst/>
-                <a:uFillTx/>
-                <a:latin typeface="Arial"/>
-                <a:ea typeface="Arial"/>
-              </a:rPr>
-              <a:t> </a:t>
-            </a:r>
-            <a:endParaRPr lang="en-US" sz="2550" b="0" u="none" strike="noStrike">
-              <a:solidFill>
-                <a:srgbClr val="000000"/>
-              </a:solidFill>
-              <a:effectLst/>
-              <a:uFillTx/>
-              <a:latin typeface="Times New Roman"/>
-            </a:endParaRPr>
-          </a:p>
-        </p:txBody>
-      </p:sp>
-      <p:sp>
-        <p:nvSpPr>
-          <p:cNvPr id="254" name=""/>
-          <p:cNvSpPr txBox="1"/>
-          <p:nvPr/>
-        </p:nvSpPr>
-        <p:spPr>
-          <a:xfrm>
-            <a:off x="4502520" y="3623760"/>
-            <a:ext cx="405000" cy="381240"/>
-          </a:xfrm>
-          <a:prstGeom prst="rect">
-            <a:avLst/>
-          </a:prstGeom>
-          <a:noFill/>
-          <a:ln w="0">
-            <a:noFill/>
-          </a:ln>
-        </p:spPr>
-        <p:txBody>
-          <a:bodyPr wrap="none" lIns="0" tIns="0" rIns="0" bIns="0" anchor="t">
-            <a:spAutoFit/>
-          </a:bodyPr>
-          <a:p>
-            <a:pPr/>
-            <a:r>
-              <a:rPr lang="en-US" sz="2550" b="0" u="none" strike="noStrike">
-                <a:solidFill>
-                  <a:srgbClr val="FFFFFF"/>
-                </a:solidFill>
-                <a:effectLst/>
-                <a:uFillTx/>
-                <a:latin typeface="NotoColorEmoji"/>
-                <a:ea typeface="NotoColorEmoji"/>
-              </a:rPr>
-              <a:t>🐶</a:t>
-            </a:r>
-            <a:endParaRPr lang="en-US" sz="2550" b="0" u="none" strike="noStrike">
-              <a:solidFill>
-                <a:srgbClr val="000000"/>
-              </a:solidFill>
-              <a:effectLst/>
-              <a:uFillTx/>
-              <a:latin typeface="Times New Roman"/>
-            </a:endParaRPr>
-          </a:p>
-        </p:txBody>
-      </p:sp>
-      <p:sp>
-        <p:nvSpPr>
-          <p:cNvPr id="255" name=""/>
-          <p:cNvSpPr txBox="1"/>
-          <p:nvPr/>
-        </p:nvSpPr>
-        <p:spPr>
-          <a:xfrm>
-            <a:off x="4909320" y="3631320"/>
-            <a:ext cx="323640" cy="363240"/>
-          </a:xfrm>
-          <a:prstGeom prst="rect">
-            <a:avLst/>
-          </a:prstGeom>
-          <a:noFill/>
-          <a:ln w="0">
-            <a:noFill/>
-          </a:ln>
-        </p:spPr>
-        <p:txBody>
-          <a:bodyPr wrap="none" lIns="0" tIns="0" rIns="0" bIns="0" anchor="t">
-            <a:spAutoFit/>
-          </a:bodyPr>
-          <a:p>
-            <a:pPr/>
-            <a:r>
-              <a:rPr lang="en-US" sz="2550" b="1" u="none" strike="noStrike">
-                <a:solidFill>
-                  <a:srgbClr val="FFFFFF"/>
-                </a:solidFill>
-                <a:effectLst/>
-                <a:uFillTx/>
-                <a:latin typeface="Arial"/>
-                <a:ea typeface="Arial"/>
-              </a:rPr>
-              <a:t> </a:t>
-            </a:r>
-            <a:endParaRPr lang="en-US" sz="2550" b="0" u="none" strike="noStrike">
-              <a:solidFill>
-                <a:srgbClr val="000000"/>
-              </a:solidFill>
-              <a:effectLst/>
-              <a:uFillTx/>
-              <a:latin typeface="Times New Roman"/>
-            </a:endParaRPr>
-          </a:p>
-        </p:txBody>
-      </p:sp>
-      <p:sp>
-        <p:nvSpPr>
-          <p:cNvPr id="256" name=""/>
-          <p:cNvSpPr txBox="1"/>
-          <p:nvPr/>
-        </p:nvSpPr>
-        <p:spPr>
-          <a:xfrm>
-            <a:off x="5001840" y="3623760"/>
-            <a:ext cx="405000" cy="381240"/>
-          </a:xfrm>
-          <a:prstGeom prst="rect">
-            <a:avLst/>
-          </a:prstGeom>
-          <a:noFill/>
-          <a:ln w="0">
-            <a:noFill/>
-          </a:ln>
-        </p:spPr>
-        <p:txBody>
-          <a:bodyPr wrap="none" lIns="0" tIns="0" rIns="0" bIns="0" anchor="t">
-            <a:spAutoFit/>
-          </a:bodyPr>
-          <a:p>
-            <a:pPr/>
-            <a:r>
-              <a:rPr lang="en-US" sz="2550" b="0" u="none" strike="noStrike">
-                <a:solidFill>
-                  <a:srgbClr val="FFFFFF"/>
-                </a:solidFill>
-                <a:effectLst/>
-                <a:uFillTx/>
-                <a:latin typeface="NotoColorEmoji"/>
-                <a:ea typeface="NotoColorEmoji"/>
-              </a:rPr>
-              <a:t>🔥</a:t>
-            </a:r>
-            <a:endParaRPr lang="en-US" sz="2550" b="0" u="none" strike="noStrike">
-              <a:solidFill>
-                <a:srgbClr val="000000"/>
-              </a:solidFill>
-              <a:effectLst/>
-              <a:uFillTx/>
-              <a:latin typeface="Times New Roman"/>
-            </a:endParaRPr>
-          </a:p>
-        </p:txBody>
-      </p:sp>
-      <p:sp>
-        <p:nvSpPr>
-          <p:cNvPr id="257" name=""/>
-          <p:cNvSpPr txBox="1"/>
-          <p:nvPr/>
-        </p:nvSpPr>
-        <p:spPr>
-          <a:xfrm>
-            <a:off x="5408640" y="3631320"/>
-            <a:ext cx="2345400" cy="363240"/>
-          </a:xfrm>
-          <a:prstGeom prst="rect">
-            <a:avLst/>
-          </a:prstGeom>
-          <a:noFill/>
-          <a:ln w="0">
-            <a:noFill/>
-          </a:ln>
-        </p:spPr>
-        <p:txBody>
-          <a:bodyPr wrap="none" lIns="0" tIns="0" rIns="0" bIns="0" anchor="t">
-            <a:spAutoFit/>
-          </a:bodyPr>
-          <a:p>
-            <a:pPr/>
-            <a:r>
-              <a:rPr lang="en-US" sz="2550" b="1" u="none" strike="noStrike">
-                <a:solidFill>
-                  <a:srgbClr val="FFFFFF"/>
-                </a:solidFill>
-                <a:effectLst/>
-                <a:uFillTx/>
-                <a:latin typeface="Arial"/>
-                <a:ea typeface="Arial"/>
-              </a:rPr>
-              <a:t>   TODO BIEN   </a:t>
-            </a:r>
-            <a:endParaRPr lang="en-US" sz="2550" b="0" u="none" strike="noStrike">
-              <a:solidFill>
-                <a:srgbClr val="000000"/>
-              </a:solidFill>
-              <a:effectLst/>
-              <a:uFillTx/>
-              <a:latin typeface="Times New Roman"/>
-            </a:endParaRPr>
-          </a:p>
-        </p:txBody>
-      </p:sp>
-      <p:sp>
-        <p:nvSpPr>
-          <p:cNvPr id="258" name=""/>
-          <p:cNvSpPr txBox="1"/>
-          <p:nvPr/>
-        </p:nvSpPr>
-        <p:spPr>
-          <a:xfrm>
-            <a:off x="7781760" y="3623760"/>
-            <a:ext cx="405000" cy="381240"/>
-          </a:xfrm>
-          <a:prstGeom prst="rect">
-            <a:avLst/>
-          </a:prstGeom>
-          <a:noFill/>
-          <a:ln w="0">
-            <a:noFill/>
-          </a:ln>
-        </p:spPr>
-        <p:txBody>
-          <a:bodyPr wrap="none" lIns="0" tIns="0" rIns="0" bIns="0" anchor="t">
-            <a:spAutoFit/>
-          </a:bodyPr>
-          <a:p>
-            <a:pPr/>
-            <a:r>
-              <a:rPr lang="en-US" sz="2550" b="0" u="none" strike="noStrike">
-                <a:solidFill>
-                  <a:srgbClr val="FFFFFF"/>
-                </a:solidFill>
-                <a:effectLst/>
-                <a:uFillTx/>
-                <a:latin typeface="NotoColorEmoji"/>
-                <a:ea typeface="NotoColorEmoji"/>
-              </a:rPr>
-              <a:t>🔥</a:t>
-            </a:r>
-            <a:endParaRPr lang="en-US" sz="2550" b="0" u="none" strike="noStrike">
-              <a:solidFill>
-                <a:srgbClr val="000000"/>
-              </a:solidFill>
-              <a:effectLst/>
-              <a:uFillTx/>
-              <a:latin typeface="Times New Roman"/>
-            </a:endParaRPr>
-          </a:p>
-        </p:txBody>
-      </p:sp>
-      <p:sp>
-        <p:nvSpPr>
-          <p:cNvPr id="259" name=""/>
-          <p:cNvSpPr txBox="1"/>
-          <p:nvPr/>
-        </p:nvSpPr>
-        <p:spPr>
-          <a:xfrm>
-            <a:off x="3759120" y="4182480"/>
-            <a:ext cx="4527000" cy="233640"/>
-          </a:xfrm>
-          <a:prstGeom prst="rect">
-            <a:avLst/>
-          </a:prstGeom>
-          <a:noFill/>
-          <a:ln w="0">
-            <a:noFill/>
-          </a:ln>
-        </p:spPr>
-        <p:txBody>
-          <a:bodyPr wrap="none" lIns="0" tIns="0" rIns="0" bIns="0" anchor="t">
-            <a:spAutoFit/>
-          </a:bodyPr>
-          <a:p>
-            <a:pPr/>
-            <a:r>
-              <a:rPr lang="en-US" sz="1650" b="0" u="none" strike="noStrike">
+              <a:rPr lang="en-US" sz="1430" b="0" u="none" strike="noStrike">
                 <a:solidFill>
                   <a:srgbClr val="8A8A8A"/>
                 </a:solidFill>
                 <a:effectLst/>
                 <a:uFillTx/>
-                <a:latin typeface="Arial"/>
-                <a:ea typeface="Arial"/>
+                <a:latin typeface="JetBrainsMonoNF"/>
+                <a:ea typeface="JetBrainsMonoNF"/>
               </a:rPr>
-              <a:t>Intentá de nuevo. El resultado va a ser el mismo.</a:t>
+              <a:t>Estado</a:t>
             </a:r>
-            <a:endParaRPr lang="en-US" sz="1650" b="0" u="none" strike="noStrike">
-              <a:solidFill>
-                <a:srgbClr val="000000"/>
-              </a:solidFill>
-              <a:effectLst/>
-              <a:uFillTx/>
-              <a:latin typeface="Times New Roman"/>
-            </a:endParaRPr>
-          </a:p>
-        </p:txBody>
-      </p:sp>
-      <p:sp>
-        <p:nvSpPr>
-          <p:cNvPr id="260" name=""/>
+            <a:endParaRPr lang="en-US" sz="1430" b="0" u="none" strike="noStrike">
+              <a:solidFill>
+                <a:srgbClr val="000000"/>
+              </a:solidFill>
+              <a:effectLst/>
+              <a:uFillTx/>
+              <a:latin typeface="Times New Roman"/>
+            </a:endParaRPr>
+          </a:p>
+        </p:txBody>
+      </p:sp>
+      <p:sp>
+        <p:nvSpPr>
+          <p:cNvPr id="218" name=""/>
+          <p:cNvSpPr txBox="1"/>
+          <p:nvPr/>
+        </p:nvSpPr>
+        <p:spPr>
+          <a:xfrm>
+            <a:off x="6118200" y="3920760"/>
+            <a:ext cx="1415160" cy="239760"/>
+          </a:xfrm>
+          <a:prstGeom prst="rect">
+            <a:avLst/>
+          </a:prstGeom>
+          <a:noFill/>
+          <a:ln w="0">
+            <a:noFill/>
+          </a:ln>
+        </p:spPr>
+        <p:txBody>
+          <a:bodyPr wrap="none" lIns="0" tIns="0" rIns="0" bIns="0" anchor="t">
+            <a:spAutoFit/>
+          </a:bodyPr>
+          <a:p>
+            <a:pPr/>
+            <a:r>
+              <a:rPr lang="en-US" sz="1430" b="0" u="none" strike="noStrike">
+                <a:solidFill>
+                  <a:srgbClr val="3DDC84"/>
+                </a:solidFill>
+                <a:effectLst/>
+                <a:uFillTx/>
+                <a:latin typeface="JetBrainsMonoNF"/>
+                <a:ea typeface="JetBrainsMonoNF"/>
+              </a:rPr>
+              <a:t>NO CONFIRMADO</a:t>
+            </a:r>
+            <a:endParaRPr lang="en-US" sz="1430" b="0" u="none" strike="noStrike">
+              <a:solidFill>
+                <a:srgbClr val="000000"/>
+              </a:solidFill>
+              <a:effectLst/>
+              <a:uFillTx/>
+              <a:latin typeface="Times New Roman"/>
+            </a:endParaRPr>
+          </a:p>
+        </p:txBody>
+      </p:sp>
+      <p:sp>
+        <p:nvSpPr>
+          <p:cNvPr id="219" name=""/>
+          <p:cNvSpPr txBox="1"/>
+          <p:nvPr/>
+        </p:nvSpPr>
+        <p:spPr>
+          <a:xfrm>
+            <a:off x="5072400" y="4263480"/>
+            <a:ext cx="762480" cy="239760"/>
+          </a:xfrm>
+          <a:prstGeom prst="rect">
+            <a:avLst/>
+          </a:prstGeom>
+          <a:noFill/>
+          <a:ln w="0">
+            <a:noFill/>
+          </a:ln>
+        </p:spPr>
+        <p:txBody>
+          <a:bodyPr wrap="none" lIns="0" tIns="0" rIns="0" bIns="0" anchor="t">
+            <a:spAutoFit/>
+          </a:bodyPr>
+          <a:p>
+            <a:pPr/>
+            <a:r>
+              <a:rPr lang="en-US" sz="1430" b="0" u="none" strike="noStrike">
+                <a:solidFill>
+                  <a:srgbClr val="8A8A8A"/>
+                </a:solidFill>
+                <a:effectLst/>
+                <a:uFillTx/>
+                <a:latin typeface="JetBrainsMonoNF"/>
+                <a:ea typeface="JetBrainsMonoNF"/>
+              </a:rPr>
+              <a:t>Validez</a:t>
+            </a:r>
+            <a:endParaRPr lang="en-US" sz="1430" b="0" u="none" strike="noStrike">
+              <a:solidFill>
+                <a:srgbClr val="000000"/>
+              </a:solidFill>
+              <a:effectLst/>
+              <a:uFillTx/>
+              <a:latin typeface="Times New Roman"/>
+            </a:endParaRPr>
+          </a:p>
+        </p:txBody>
+      </p:sp>
+      <p:sp>
+        <p:nvSpPr>
+          <p:cNvPr id="220" name=""/>
+          <p:cNvSpPr txBox="1"/>
+          <p:nvPr/>
+        </p:nvSpPr>
+        <p:spPr>
+          <a:xfrm>
+            <a:off x="6118200" y="4263480"/>
+            <a:ext cx="1089000" cy="239760"/>
+          </a:xfrm>
+          <a:prstGeom prst="rect">
+            <a:avLst/>
+          </a:prstGeom>
+          <a:noFill/>
+          <a:ln w="0">
+            <a:noFill/>
+          </a:ln>
+        </p:spPr>
+        <p:txBody>
+          <a:bodyPr wrap="none" lIns="0" tIns="0" rIns="0" bIns="0" anchor="t">
+            <a:spAutoFit/>
+          </a:bodyPr>
+          <a:p>
+            <a:pPr/>
+            <a:r>
+              <a:rPr lang="en-US" sz="1430" b="0" u="none" strike="noStrike">
+                <a:solidFill>
+                  <a:srgbClr val="3DDC84"/>
+                </a:solidFill>
+                <a:effectLst/>
+                <a:uFillTx/>
+                <a:latin typeface="JetBrainsMonoNF"/>
+                <a:ea typeface="JetBrainsMonoNF"/>
+              </a:rPr>
+              <a:t>indefinida</a:t>
+            </a:r>
+            <a:endParaRPr lang="en-US" sz="1430" b="0" u="none" strike="noStrike">
+              <a:solidFill>
+                <a:srgbClr val="000000"/>
+              </a:solidFill>
+              <a:effectLst/>
+              <a:uFillTx/>
+              <a:latin typeface="Times New Roman"/>
+            </a:endParaRPr>
+          </a:p>
+        </p:txBody>
+      </p:sp>
+      <p:sp>
+        <p:nvSpPr>
+          <p:cNvPr id="221" name=""/>
+          <p:cNvSpPr txBox="1"/>
+          <p:nvPr/>
+        </p:nvSpPr>
+        <p:spPr>
+          <a:xfrm>
+            <a:off x="4627440" y="4615920"/>
+            <a:ext cx="1197720" cy="239760"/>
+          </a:xfrm>
+          <a:prstGeom prst="rect">
+            <a:avLst/>
+          </a:prstGeom>
+          <a:noFill/>
+          <a:ln w="0">
+            <a:noFill/>
+          </a:ln>
+        </p:spPr>
+        <p:txBody>
+          <a:bodyPr wrap="none" lIns="0" tIns="0" rIns="0" bIns="0" anchor="t">
+            <a:spAutoFit/>
+          </a:bodyPr>
+          <a:p>
+            <a:pPr/>
+            <a:r>
+              <a:rPr lang="en-US" sz="1430" b="0" u="none" strike="noStrike">
+                <a:solidFill>
+                  <a:srgbClr val="8A8A8A"/>
+                </a:solidFill>
+                <a:effectLst/>
+                <a:uFillTx/>
+                <a:latin typeface="JetBrainsMonoNF"/>
+                <a:ea typeface="JetBrainsMonoNF"/>
+              </a:rPr>
+              <a:t>Apelaciones</a:t>
+            </a:r>
+            <a:endParaRPr lang="en-US" sz="1430" b="0" u="none" strike="noStrike">
+              <a:solidFill>
+                <a:srgbClr val="000000"/>
+              </a:solidFill>
+              <a:effectLst/>
+              <a:uFillTx/>
+              <a:latin typeface="Times New Roman"/>
+            </a:endParaRPr>
+          </a:p>
+        </p:txBody>
+      </p:sp>
+      <p:sp>
+        <p:nvSpPr>
+          <p:cNvPr id="222" name=""/>
+          <p:cNvSpPr txBox="1"/>
+          <p:nvPr/>
+        </p:nvSpPr>
+        <p:spPr>
+          <a:xfrm>
+            <a:off x="6118200" y="4615920"/>
+            <a:ext cx="1415160" cy="239760"/>
+          </a:xfrm>
+          <a:prstGeom prst="rect">
+            <a:avLst/>
+          </a:prstGeom>
+          <a:noFill/>
+          <a:ln w="0">
+            <a:noFill/>
+          </a:ln>
+        </p:spPr>
+        <p:txBody>
+          <a:bodyPr wrap="none" lIns="0" tIns="0" rIns="0" bIns="0" anchor="t">
+            <a:spAutoFit/>
+          </a:bodyPr>
+          <a:p>
+            <a:pPr/>
+            <a:r>
+              <a:rPr lang="en-US" sz="1430" b="0" u="none" strike="noStrike">
+                <a:solidFill>
+                  <a:srgbClr val="3DDC84"/>
+                </a:solidFill>
+                <a:effectLst/>
+                <a:uFillTx/>
+                <a:latin typeface="JetBrainsMonoNF"/>
+                <a:ea typeface="JetBrainsMonoNF"/>
+              </a:rPr>
+              <a:t>no se aceptan</a:t>
+            </a:r>
+            <a:endParaRPr lang="en-US" sz="1430" b="0" u="none" strike="noStrike">
+              <a:solidFill>
+                <a:srgbClr val="000000"/>
+              </a:solidFill>
+              <a:effectLst/>
+              <a:uFillTx/>
+              <a:latin typeface="Times New Roman"/>
+            </a:endParaRPr>
+          </a:p>
+        </p:txBody>
+      </p:sp>
+      <p:sp>
+        <p:nvSpPr>
+          <p:cNvPr id="223" name=""/>
+          <p:cNvSpPr/>
+          <p:nvPr/>
+        </p:nvSpPr>
+        <p:spPr>
+          <a:xfrm>
+            <a:off x="1385640" y="1290600"/>
+            <a:ext cx="9420480" cy="4438800"/>
+          </a:xfrm>
+          <a:custGeom>
+            <a:avLst/>
+            <a:gdLst/>
+            <a:ahLst/>
+            <a:rect l="0" t="0" r="r" b="b"/>
+            <a:pathLst>
+              <a:path w="26168" h="12330">
+                <a:moveTo>
+                  <a:pt x="0" y="0"/>
+                </a:moveTo>
+                <a:lnTo>
+                  <a:pt x="26168" y="0"/>
+                </a:lnTo>
+                <a:lnTo>
+                  <a:pt x="26168" y="12330"/>
+                </a:lnTo>
+                <a:lnTo>
+                  <a:pt x="0" y="12330"/>
+                </a:lnTo>
+                <a:lnTo>
+                  <a:pt x="0" y="0"/>
+                </a:lnTo>
+                <a:close/>
+              </a:path>
+            </a:pathLst>
+          </a:custGeom>
+          <a:noFill/>
+          <a:ln w="9360">
+            <a:solidFill>
+              <a:srgbClr val="1F7A48"/>
+            </a:solidFill>
+            <a:miter/>
+          </a:ln>
+        </p:spPr>
+        <p:txBody>
+          <a:bodyPr lIns="4680" tIns="4680" rIns="4680" bIns="4680" anchor="t">
+            <a:noAutofit/>
+          </a:bodyPr>
+          <a:p>
+            <a:endParaRPr lang="en-US" sz="2400" b="0" u="none" strike="noStrike">
+              <a:solidFill>
+                <a:srgbClr val="000000"/>
+              </a:solidFill>
+              <a:effectLst/>
+              <a:uFillTx/>
+              <a:latin typeface="Times New Roman"/>
+            </a:endParaRPr>
+          </a:p>
+        </p:txBody>
+      </p:sp>
+      <p:sp>
+        <p:nvSpPr>
+          <p:cNvPr id="224" name=""/>
+          <p:cNvSpPr txBox="1"/>
+          <p:nvPr/>
+        </p:nvSpPr>
+        <p:spPr>
+          <a:xfrm>
+            <a:off x="4745520" y="5131080"/>
+            <a:ext cx="3524760" cy="189360"/>
+          </a:xfrm>
+          <a:prstGeom prst="rect">
+            <a:avLst/>
+          </a:prstGeom>
+          <a:noFill/>
+          <a:ln w="0">
+            <a:noFill/>
+          </a:ln>
+        </p:spPr>
+        <p:txBody>
+          <a:bodyPr wrap="none" lIns="0" tIns="0" rIns="0" bIns="0" anchor="t">
+            <a:spAutoFit/>
+          </a:bodyPr>
+          <a:p>
+            <a:pPr/>
+            <a:r>
+              <a:rPr lang="en-US" sz="1130" b="0" u="none" strike="noStrike">
+                <a:solidFill>
+                  <a:srgbClr val="1F7A48"/>
+                </a:solidFill>
+                <a:effectLst/>
+                <a:uFillTx/>
+                <a:latin typeface="JetBrainsMonoNF"/>
+                <a:ea typeface="JetBrainsMonoNF"/>
+              </a:rPr>
+              <a:t>▓   S E L L O   A L G O R Í T M I C O   ▓</a:t>
+            </a:r>
+            <a:endParaRPr lang="en-US" sz="1130" b="0" u="none" strike="noStrike">
+              <a:solidFill>
+                <a:srgbClr val="000000"/>
+              </a:solidFill>
+              <a:effectLst/>
+              <a:uFillTx/>
+              <a:latin typeface="Times New Roman"/>
+            </a:endParaRPr>
+          </a:p>
+        </p:txBody>
+      </p:sp>
+      <p:sp>
+        <p:nvSpPr>
+          <p:cNvPr id="225" name=""/>
           <p:cNvSpPr txBox="1"/>
           <p:nvPr/>
         </p:nvSpPr>
@@ -20096,7 +19562,7 @@
       </p:grpSpPr>
       <p:sp>
         <p:nvSpPr>
-          <p:cNvPr id="261" name=""/>
+          <p:cNvPr id="226" name=""/>
           <p:cNvSpPr/>
           <p:nvPr/>
         </p:nvSpPr>
@@ -20156,7 +19622,7 @@
       </p:sp>
       <p:sp>
         <p:nvSpPr>
-          <p:cNvPr id="262" name=""/>
+          <p:cNvPr id="227" name=""/>
           <p:cNvSpPr/>
           <p:nvPr/>
         </p:nvSpPr>
@@ -20216,7 +19682,7 @@
       </p:sp>
       <p:sp>
         <p:nvSpPr>
-          <p:cNvPr id="263" name=""/>
+          <p:cNvPr id="228" name=""/>
           <p:cNvSpPr/>
           <p:nvPr/>
         </p:nvSpPr>
@@ -20276,7 +19742,7 @@
       </p:sp>
       <p:sp>
         <p:nvSpPr>
-          <p:cNvPr id="264" name=""/>
+          <p:cNvPr id="229" name=""/>
           <p:cNvSpPr txBox="1"/>
           <p:nvPr/>
         </p:nvSpPr>
@@ -20324,7 +19790,7 @@
       </p:sp>
       <p:sp>
         <p:nvSpPr>
-          <p:cNvPr id="265" name=""/>
+          <p:cNvPr id="230" name=""/>
           <p:cNvSpPr txBox="1"/>
           <p:nvPr/>
         </p:nvSpPr>
@@ -20372,7 +19838,7 @@
       </p:sp>
       <p:sp>
         <p:nvSpPr>
-          <p:cNvPr id="266" name=""/>
+          <p:cNvPr id="231" name=""/>
           <p:cNvSpPr txBox="1"/>
           <p:nvPr/>
         </p:nvSpPr>
@@ -20444,7 +19910,7 @@
       </p:sp>
       <p:sp>
         <p:nvSpPr>
-          <p:cNvPr id="267" name=""/>
+          <p:cNvPr id="232" name=""/>
           <p:cNvSpPr txBox="1"/>
           <p:nvPr/>
         </p:nvSpPr>
@@ -20492,7 +19958,7 @@
       </p:sp>
       <p:sp>
         <p:nvSpPr>
-          <p:cNvPr id="268" name=""/>
+          <p:cNvPr id="233" name=""/>
           <p:cNvSpPr txBox="1"/>
           <p:nvPr/>
         </p:nvSpPr>
@@ -20540,7 +20006,7 @@
       </p:sp>
       <p:sp>
         <p:nvSpPr>
-          <p:cNvPr id="269" name=""/>
+          <p:cNvPr id="234" name=""/>
           <p:cNvSpPr txBox="1"/>
           <p:nvPr/>
         </p:nvSpPr>
@@ -20588,7 +20054,7 @@
       </p:sp>
       <p:sp>
         <p:nvSpPr>
-          <p:cNvPr id="270" name=""/>
+          <p:cNvPr id="235" name=""/>
           <p:cNvSpPr txBox="1"/>
           <p:nvPr/>
         </p:nvSpPr>
@@ -20636,7 +20102,7 @@
       </p:sp>
       <p:sp>
         <p:nvSpPr>
-          <p:cNvPr id="271" name=""/>
+          <p:cNvPr id="236" name=""/>
           <p:cNvSpPr txBox="1"/>
           <p:nvPr/>
         </p:nvSpPr>

--- a/deck/dist/humandetector-editable.pptx
+++ b/deck/dist/humandetector-editable.pptx
@@ -1075,7 +1075,7 @@
       </p:grpSpPr>
       <p:sp>
         <p:nvSpPr>
-          <p:cNvPr id="199" name=""/>
+          <p:cNvPr id="200" name=""/>
           <p:cNvSpPr/>
           <p:nvPr/>
         </p:nvSpPr>
@@ -1135,7 +1135,7 @@
       </p:sp>
       <p:sp>
         <p:nvSpPr>
-          <p:cNvPr id="200" name=""/>
+          <p:cNvPr id="201" name=""/>
           <p:cNvSpPr/>
           <p:nvPr/>
         </p:nvSpPr>
@@ -1195,7 +1195,7 @@
       </p:sp>
       <p:sp>
         <p:nvSpPr>
-          <p:cNvPr id="201" name=""/>
+          <p:cNvPr id="202" name=""/>
           <p:cNvSpPr/>
           <p:nvPr/>
         </p:nvSpPr>
@@ -1255,7 +1255,7 @@
       </p:sp>
       <p:sp>
         <p:nvSpPr>
-          <p:cNvPr id="202" name=""/>
+          <p:cNvPr id="203" name=""/>
           <p:cNvSpPr/>
           <p:nvPr/>
         </p:nvSpPr>
@@ -1475,7 +1475,7 @@
       </p:sp>
       <p:sp>
         <p:nvSpPr>
-          <p:cNvPr id="203" name=""/>
+          <p:cNvPr id="204" name=""/>
           <p:cNvSpPr/>
           <p:nvPr/>
         </p:nvSpPr>
@@ -1696,7 +1696,7 @@
       </p:sp>
       <p:pic>
         <p:nvPicPr>
-          <p:cNvPr id="204" name=""/>
+          <p:cNvPr id="205" name=""/>
           <p:cNvPicPr/>
           <p:nvPr/>
         </p:nvPicPr>
@@ -1720,7 +1720,7 @@
       </p:pic>
       <p:sp>
         <p:nvSpPr>
-          <p:cNvPr id="205" name=""/>
+          <p:cNvPr id="206" name=""/>
           <p:cNvSpPr txBox="1"/>
           <p:nvPr/>
         </p:nvSpPr>
@@ -1768,7 +1768,7 @@
       </p:sp>
       <p:sp>
         <p:nvSpPr>
-          <p:cNvPr id="206" name=""/>
+          <p:cNvPr id="207" name=""/>
           <p:cNvSpPr txBox="1"/>
           <p:nvPr/>
         </p:nvSpPr>
@@ -1816,7 +1816,7 @@
       </p:sp>
       <p:sp>
         <p:nvSpPr>
-          <p:cNvPr id="207" name=""/>
+          <p:cNvPr id="208" name=""/>
           <p:cNvSpPr txBox="1"/>
           <p:nvPr/>
         </p:nvSpPr>
@@ -1888,7 +1888,7 @@
       </p:sp>
       <p:sp>
         <p:nvSpPr>
-          <p:cNvPr id="208" name=""/>
+          <p:cNvPr id="209" name=""/>
           <p:cNvSpPr txBox="1"/>
           <p:nvPr/>
         </p:nvSpPr>
@@ -4803,7 +4803,7 @@
         </p:nvSpPr>
         <p:spPr>
           <a:xfrm>
-            <a:off x="766440" y="1433160"/>
+            <a:off x="766440" y="1204560"/>
             <a:ext cx="10658880" cy="734040"/>
           </a:xfrm>
           <a:custGeom>
@@ -5023,7 +5023,7 @@
         </p:nvSpPr>
         <p:spPr>
           <a:xfrm>
-            <a:off x="766440" y="1433160"/>
+            <a:off x="766440" y="1204560"/>
             <a:ext cx="10658880" cy="734040"/>
           </a:xfrm>
           <a:custGeom>
@@ -5244,7 +5244,7 @@
         </p:nvSpPr>
         <p:spPr>
           <a:xfrm>
-            <a:off x="985680" y="1576080"/>
+            <a:off x="985680" y="1347480"/>
             <a:ext cx="543240" cy="448200"/>
           </a:xfrm>
           <a:custGeom>
@@ -5255,7 +5255,7 @@
             <a:pathLst>
               <a:path w="1509" h="1245">
                 <a:moveTo>
-                  <a:pt x="0" y="1098"/>
+                  <a:pt x="0" y="1099"/>
                 </a:moveTo>
                 <a:lnTo>
                   <a:pt x="0" y="146"/>
@@ -5344,31 +5344,31 @@
                   <a:pt x="1509" y="146"/>
                 </a:cubicBezTo>
                 <a:lnTo>
-                  <a:pt x="1509" y="1098"/>
-                </a:lnTo>
-                <a:cubicBezTo>
-                  <a:pt x="1509" y="1108"/>
-                  <a:pt x="1508" y="1117"/>
-                  <a:pt x="1506" y="1127"/>
-                </a:cubicBezTo>
-                <a:cubicBezTo>
-                  <a:pt x="1504" y="1136"/>
-                  <a:pt x="1502" y="1145"/>
-                  <a:pt x="1498" y="1154"/>
-                </a:cubicBezTo>
-                <a:cubicBezTo>
-                  <a:pt x="1494" y="1163"/>
-                  <a:pt x="1490" y="1171"/>
-                  <a:pt x="1485" y="1179"/>
-                </a:cubicBezTo>
-                <a:cubicBezTo>
-                  <a:pt x="1479" y="1187"/>
-                  <a:pt x="1473" y="1195"/>
-                  <a:pt x="1466" y="1201"/>
-                </a:cubicBezTo>
-                <a:cubicBezTo>
-                  <a:pt x="1460" y="1208"/>
-                  <a:pt x="1452" y="1214"/>
+                  <a:pt x="1509" y="1099"/>
+                </a:lnTo>
+                <a:cubicBezTo>
+                  <a:pt x="1509" y="1109"/>
+                  <a:pt x="1508" y="1118"/>
+                  <a:pt x="1506" y="1128"/>
+                </a:cubicBezTo>
+                <a:cubicBezTo>
+                  <a:pt x="1504" y="1137"/>
+                  <a:pt x="1502" y="1146"/>
+                  <a:pt x="1498" y="1155"/>
+                </a:cubicBezTo>
+                <a:cubicBezTo>
+                  <a:pt x="1494" y="1164"/>
+                  <a:pt x="1490" y="1172"/>
+                  <a:pt x="1485" y="1180"/>
+                </a:cubicBezTo>
+                <a:cubicBezTo>
+                  <a:pt x="1479" y="1188"/>
+                  <a:pt x="1473" y="1196"/>
+                  <a:pt x="1466" y="1202"/>
+                </a:cubicBezTo>
+                <a:cubicBezTo>
+                  <a:pt x="1460" y="1209"/>
+                  <a:pt x="1452" y="1215"/>
                   <a:pt x="1444" y="1220"/>
                 </a:cubicBezTo>
                 <a:cubicBezTo>
@@ -5405,29 +5405,29 @@
                   <a:pt x="65" y="1220"/>
                 </a:cubicBezTo>
                 <a:cubicBezTo>
-                  <a:pt x="57" y="1214"/>
-                  <a:pt x="49" y="1208"/>
-                  <a:pt x="43" y="1201"/>
-                </a:cubicBezTo>
-                <a:cubicBezTo>
-                  <a:pt x="36" y="1195"/>
-                  <a:pt x="30" y="1187"/>
-                  <a:pt x="24" y="1179"/>
-                </a:cubicBezTo>
-                <a:cubicBezTo>
-                  <a:pt x="19" y="1171"/>
-                  <a:pt x="15" y="1163"/>
-                  <a:pt x="11" y="1154"/>
-                </a:cubicBezTo>
-                <a:cubicBezTo>
-                  <a:pt x="7" y="1145"/>
-                  <a:pt x="5" y="1136"/>
-                  <a:pt x="3" y="1127"/>
-                </a:cubicBezTo>
-                <a:cubicBezTo>
-                  <a:pt x="1" y="1117"/>
-                  <a:pt x="0" y="1108"/>
-                  <a:pt x="0" y="1098"/>
+                  <a:pt x="57" y="1215"/>
+                  <a:pt x="49" y="1209"/>
+                  <a:pt x="43" y="1202"/>
+                </a:cubicBezTo>
+                <a:cubicBezTo>
+                  <a:pt x="36" y="1196"/>
+                  <a:pt x="30" y="1188"/>
+                  <a:pt x="24" y="1180"/>
+                </a:cubicBezTo>
+                <a:cubicBezTo>
+                  <a:pt x="19" y="1172"/>
+                  <a:pt x="15" y="1164"/>
+                  <a:pt x="11" y="1155"/>
+                </a:cubicBezTo>
+                <a:cubicBezTo>
+                  <a:pt x="7" y="1146"/>
+                  <a:pt x="5" y="1137"/>
+                  <a:pt x="3" y="1128"/>
+                </a:cubicBezTo>
+                <a:cubicBezTo>
+                  <a:pt x="1" y="1118"/>
+                  <a:pt x="0" y="1109"/>
+                  <a:pt x="0" y="1099"/>
                 </a:cubicBezTo>
                 <a:close/>
               </a:path>
@@ -5465,7 +5465,7 @@
         </p:nvSpPr>
         <p:spPr>
           <a:xfrm>
-            <a:off x="762120" y="703080"/>
+            <a:off x="762120" y="474480"/>
             <a:ext cx="2773440" cy="425520"/>
           </a:xfrm>
           <a:prstGeom prst="rect">
@@ -5513,7 +5513,7 @@
         </p:nvSpPr>
         <p:spPr>
           <a:xfrm>
-            <a:off x="1140480" y="1672560"/>
+            <a:off x="1140480" y="1443960"/>
             <a:ext cx="229320" cy="253440"/>
           </a:xfrm>
           <a:prstGeom prst="rect">
@@ -5561,7 +5561,7 @@
         </p:nvSpPr>
         <p:spPr>
           <a:xfrm>
-            <a:off x="766440" y="2309760"/>
+            <a:off x="766440" y="2081160"/>
             <a:ext cx="10658880" cy="733680"/>
           </a:xfrm>
           <a:custGeom>
@@ -5781,7 +5781,7 @@
         </p:nvSpPr>
         <p:spPr>
           <a:xfrm>
-            <a:off x="766440" y="2309760"/>
+            <a:off x="766440" y="2081160"/>
             <a:ext cx="10658880" cy="733680"/>
           </a:xfrm>
           <a:custGeom>
@@ -6002,7 +6002,7 @@
         </p:nvSpPr>
         <p:spPr>
           <a:xfrm>
-            <a:off x="985680" y="2452680"/>
+            <a:off x="985680" y="2224080"/>
             <a:ext cx="543240" cy="447840"/>
           </a:xfrm>
           <a:custGeom>
@@ -6016,32 +6016,32 @@
                   <a:pt x="0" y="1099"/>
                 </a:moveTo>
                 <a:lnTo>
-                  <a:pt x="0" y="146"/>
-                </a:lnTo>
-                <a:cubicBezTo>
-                  <a:pt x="0" y="136"/>
-                  <a:pt x="1" y="127"/>
-                  <a:pt x="3" y="118"/>
-                </a:cubicBezTo>
-                <a:cubicBezTo>
-                  <a:pt x="5" y="108"/>
-                  <a:pt x="7" y="99"/>
-                  <a:pt x="11" y="90"/>
-                </a:cubicBezTo>
-                <a:cubicBezTo>
-                  <a:pt x="15" y="82"/>
-                  <a:pt x="19" y="73"/>
-                  <a:pt x="24" y="65"/>
-                </a:cubicBezTo>
-                <a:cubicBezTo>
-                  <a:pt x="30" y="57"/>
-                  <a:pt x="36" y="50"/>
-                  <a:pt x="43" y="43"/>
-                </a:cubicBezTo>
-                <a:cubicBezTo>
-                  <a:pt x="49" y="36"/>
-                  <a:pt x="57" y="30"/>
-                  <a:pt x="65" y="25"/>
+                  <a:pt x="0" y="145"/>
+                </a:lnTo>
+                <a:cubicBezTo>
+                  <a:pt x="0" y="135"/>
+                  <a:pt x="1" y="126"/>
+                  <a:pt x="3" y="117"/>
+                </a:cubicBezTo>
+                <a:cubicBezTo>
+                  <a:pt x="5" y="107"/>
+                  <a:pt x="7" y="98"/>
+                  <a:pt x="11" y="89"/>
+                </a:cubicBezTo>
+                <a:cubicBezTo>
+                  <a:pt x="15" y="81"/>
+                  <a:pt x="19" y="72"/>
+                  <a:pt x="24" y="64"/>
+                </a:cubicBezTo>
+                <a:cubicBezTo>
+                  <a:pt x="30" y="56"/>
+                  <a:pt x="36" y="49"/>
+                  <a:pt x="43" y="42"/>
+                </a:cubicBezTo>
+                <a:cubicBezTo>
+                  <a:pt x="49" y="35"/>
+                  <a:pt x="57" y="29"/>
+                  <a:pt x="65" y="24"/>
                 </a:cubicBezTo>
                 <a:cubicBezTo>
                   <a:pt x="73" y="19"/>
@@ -6074,32 +6074,32 @@
                 <a:cubicBezTo>
                   <a:pt x="1428" y="14"/>
                   <a:pt x="1436" y="19"/>
-                  <a:pt x="1444" y="25"/>
-                </a:cubicBezTo>
-                <a:cubicBezTo>
-                  <a:pt x="1452" y="30"/>
-                  <a:pt x="1460" y="36"/>
-                  <a:pt x="1466" y="43"/>
-                </a:cubicBezTo>
-                <a:cubicBezTo>
-                  <a:pt x="1473" y="50"/>
-                  <a:pt x="1479" y="57"/>
-                  <a:pt x="1485" y="65"/>
-                </a:cubicBezTo>
-                <a:cubicBezTo>
-                  <a:pt x="1490" y="73"/>
-                  <a:pt x="1494" y="82"/>
-                  <a:pt x="1498" y="90"/>
-                </a:cubicBezTo>
-                <a:cubicBezTo>
-                  <a:pt x="1502" y="99"/>
-                  <a:pt x="1504" y="108"/>
-                  <a:pt x="1506" y="118"/>
-                </a:cubicBezTo>
-                <a:cubicBezTo>
-                  <a:pt x="1508" y="127"/>
-                  <a:pt x="1509" y="136"/>
-                  <a:pt x="1509" y="146"/>
+                  <a:pt x="1444" y="24"/>
+                </a:cubicBezTo>
+                <a:cubicBezTo>
+                  <a:pt x="1452" y="29"/>
+                  <a:pt x="1460" y="35"/>
+                  <a:pt x="1466" y="42"/>
+                </a:cubicBezTo>
+                <a:cubicBezTo>
+                  <a:pt x="1473" y="49"/>
+                  <a:pt x="1479" y="56"/>
+                  <a:pt x="1485" y="64"/>
+                </a:cubicBezTo>
+                <a:cubicBezTo>
+                  <a:pt x="1490" y="72"/>
+                  <a:pt x="1494" y="81"/>
+                  <a:pt x="1498" y="89"/>
+                </a:cubicBezTo>
+                <a:cubicBezTo>
+                  <a:pt x="1502" y="98"/>
+                  <a:pt x="1504" y="107"/>
+                  <a:pt x="1506" y="117"/>
+                </a:cubicBezTo>
+                <a:cubicBezTo>
+                  <a:pt x="1508" y="126"/>
+                  <a:pt x="1509" y="135"/>
+                  <a:pt x="1509" y="145"/>
                 </a:cubicBezTo>
                 <a:lnTo>
                   <a:pt x="1509" y="1099"/>
@@ -6223,8 +6223,8 @@
         </p:nvSpPr>
         <p:spPr>
           <a:xfrm>
-            <a:off x="1743120" y="1661760"/>
-            <a:ext cx="4654080" cy="279360"/>
+            <a:off x="1743120" y="1433160"/>
+            <a:ext cx="7443720" cy="279360"/>
           </a:xfrm>
           <a:prstGeom prst="rect">
             <a:avLst/>
@@ -6250,7 +6250,7 @@
                 <a:latin typeface="Arial"/>
                 <a:ea typeface="Arial"/>
               </a:rPr>
-              <a:t>Escaneás el QR — se abre en tu teléfono.</a:t>
+              <a:t>Escaneás el QR. Ya estás colaborando con tu propio interrogatorio.</a:t>
             </a:r>
             <a:endParaRPr lang="en-US" sz="1950" b="0" u="none" strike="noStrike">
               <a:solidFill>
@@ -6271,7 +6271,7 @@
         </p:nvSpPr>
         <p:spPr>
           <a:xfrm>
-            <a:off x="1140480" y="2548800"/>
+            <a:off x="1140480" y="2320200"/>
             <a:ext cx="229320" cy="253440"/>
           </a:xfrm>
           <a:prstGeom prst="rect">
@@ -6319,7 +6319,7 @@
         </p:nvSpPr>
         <p:spPr>
           <a:xfrm>
-            <a:off x="766440" y="3186000"/>
+            <a:off x="766440" y="2957400"/>
             <a:ext cx="10658880" cy="1019520"/>
           </a:xfrm>
           <a:custGeom>
@@ -6539,7 +6539,7 @@
         </p:nvSpPr>
         <p:spPr>
           <a:xfrm>
-            <a:off x="766440" y="3186000"/>
+            <a:off x="766440" y="2957400"/>
             <a:ext cx="10658880" cy="1019520"/>
           </a:xfrm>
           <a:custGeom>
@@ -6760,7 +6760,7 @@
         </p:nvSpPr>
         <p:spPr>
           <a:xfrm>
-            <a:off x="985680" y="3471840"/>
+            <a:off x="985680" y="3243240"/>
             <a:ext cx="543240" cy="447840"/>
           </a:xfrm>
           <a:custGeom>
@@ -6981,8 +6981,8 @@
         </p:nvSpPr>
         <p:spPr>
           <a:xfrm>
-            <a:off x="1743120" y="2538000"/>
-            <a:ext cx="7927200" cy="279360"/>
+            <a:off x="1743120" y="2309400"/>
+            <a:ext cx="9055800" cy="279360"/>
           </a:xfrm>
           <a:prstGeom prst="rect">
             <a:avLst/>
@@ -7008,7 +7008,7 @@
                 <a:latin typeface="Arial"/>
                 <a:ea typeface="Arial"/>
               </a:rPr>
-              <a:t>Le das acceso a la cámara. Todo pasa en el momento; nada se guarda.</a:t>
+              <a:t>Le das acceso a la cámara. "Nada se guarda", te promete. Vos decidís si le creés.</a:t>
             </a:r>
             <a:endParaRPr lang="en-US" sz="1950" b="0" u="none" strike="noStrike">
               <a:solidFill>
@@ -7029,7 +7029,7 @@
         </p:nvSpPr>
         <p:spPr>
           <a:xfrm>
-            <a:off x="1140480" y="3567960"/>
+            <a:off x="1140480" y="3339360"/>
             <a:ext cx="229320" cy="253440"/>
           </a:xfrm>
           <a:prstGeom prst="rect">
@@ -7077,8 +7077,8 @@
         </p:nvSpPr>
         <p:spPr>
           <a:xfrm>
-            <a:off x="1743120" y="3366720"/>
-            <a:ext cx="9224640" cy="279360"/>
+            <a:off x="1743120" y="3138120"/>
+            <a:ext cx="8796600" cy="279360"/>
           </a:xfrm>
           <a:prstGeom prst="rect">
             <a:avLst/>
@@ -7104,7 +7104,7 @@
                 <a:latin typeface="Arial"/>
                 <a:ea typeface="Arial"/>
               </a:rPr>
-              <a:t>Te pide un gesto. Lo hacés. </a:t>
+              <a:t>Te pide un gesto y lo hacés en público, sintiéndote ridículo. </a:t>
             </a:r>
             <a:r>
               <a:rPr lang="en-US" sz="1950" b="1" u="none" strike="noStrike">
@@ -7116,7 +7116,717 @@
                 <a:latin typeface="Arial"/>
                 <a:ea typeface="Arial"/>
               </a:rPr>
-              <a:t>MediaPipe te lee la cara de verdad</a:t>
+              <a:t>MediaPipe te lee la</a:t>
+            </a:r>
+            <a:endParaRPr lang="en-US" sz="1950" b="0" u="none" strike="noStrike">
+              <a:solidFill>
+                <a:srgbClr val="000000"/>
+              </a:solidFill>
+              <a:effectLst/>
+              <a:uFillTx/>
+              <a:latin typeface="Times New Roman"/>
+            </a:endParaRPr>
+          </a:p>
+        </p:txBody>
+      </p:sp>
+      <p:sp>
+        <p:nvSpPr>
+          <p:cNvPr id="69" name=""/>
+          <p:cNvSpPr/>
+          <p:nvPr/>
+        </p:nvSpPr>
+        <p:spPr>
+          <a:xfrm>
+            <a:off x="766440" y="4119480"/>
+            <a:ext cx="10658880" cy="733680"/>
+          </a:xfrm>
+          <a:custGeom>
+            <a:avLst/>
+            <a:gdLst/>
+            <a:ahLst/>
+            <a:rect l="0" t="0" r="r" b="b"/>
+            <a:pathLst>
+              <a:path w="29608" h="2038">
+                <a:moveTo>
+                  <a:pt x="0" y="1840"/>
+                </a:moveTo>
+                <a:lnTo>
+                  <a:pt x="0" y="198"/>
+                </a:lnTo>
+                <a:cubicBezTo>
+                  <a:pt x="0" y="185"/>
+                  <a:pt x="2" y="172"/>
+                  <a:pt x="4" y="159"/>
+                </a:cubicBezTo>
+                <a:cubicBezTo>
+                  <a:pt x="7" y="147"/>
+                  <a:pt x="11" y="134"/>
+                  <a:pt x="16" y="122"/>
+                </a:cubicBezTo>
+                <a:cubicBezTo>
+                  <a:pt x="20" y="110"/>
+                  <a:pt x="27" y="99"/>
+                  <a:pt x="34" y="88"/>
+                </a:cubicBezTo>
+                <a:cubicBezTo>
+                  <a:pt x="41" y="77"/>
+                  <a:pt x="49" y="67"/>
+                  <a:pt x="59" y="58"/>
+                </a:cubicBezTo>
+                <a:cubicBezTo>
+                  <a:pt x="68" y="49"/>
+                  <a:pt x="78" y="40"/>
+                  <a:pt x="89" y="33"/>
+                </a:cubicBezTo>
+                <a:cubicBezTo>
+                  <a:pt x="99" y="26"/>
+                  <a:pt x="111" y="20"/>
+                  <a:pt x="123" y="15"/>
+                </a:cubicBezTo>
+                <a:cubicBezTo>
+                  <a:pt x="135" y="10"/>
+                  <a:pt x="147" y="6"/>
+                  <a:pt x="160" y="4"/>
+                </a:cubicBezTo>
+                <a:cubicBezTo>
+                  <a:pt x="173" y="1"/>
+                  <a:pt x="186" y="0"/>
+                  <a:pt x="199" y="0"/>
+                </a:cubicBezTo>
+                <a:lnTo>
+                  <a:pt x="29410" y="0"/>
+                </a:lnTo>
+                <a:cubicBezTo>
+                  <a:pt x="29423" y="0"/>
+                  <a:pt x="29436" y="1"/>
+                  <a:pt x="29449" y="4"/>
+                </a:cubicBezTo>
+                <a:cubicBezTo>
+                  <a:pt x="29461" y="6"/>
+                  <a:pt x="29474" y="10"/>
+                  <a:pt x="29486" y="15"/>
+                </a:cubicBezTo>
+                <a:cubicBezTo>
+                  <a:pt x="29498" y="20"/>
+                  <a:pt x="29509" y="26"/>
+                  <a:pt x="29520" y="33"/>
+                </a:cubicBezTo>
+                <a:cubicBezTo>
+                  <a:pt x="29531" y="40"/>
+                  <a:pt x="29541" y="49"/>
+                  <a:pt x="29550" y="58"/>
+                </a:cubicBezTo>
+                <a:cubicBezTo>
+                  <a:pt x="29559" y="67"/>
+                  <a:pt x="29568" y="77"/>
+                  <a:pt x="29575" y="88"/>
+                </a:cubicBezTo>
+                <a:cubicBezTo>
+                  <a:pt x="29582" y="99"/>
+                  <a:pt x="29588" y="110"/>
+                  <a:pt x="29593" y="122"/>
+                </a:cubicBezTo>
+                <a:cubicBezTo>
+                  <a:pt x="29598" y="134"/>
+                  <a:pt x="29602" y="147"/>
+                  <a:pt x="29604" y="159"/>
+                </a:cubicBezTo>
+                <a:cubicBezTo>
+                  <a:pt x="29607" y="172"/>
+                  <a:pt x="29608" y="185"/>
+                  <a:pt x="29608" y="198"/>
+                </a:cubicBezTo>
+                <a:lnTo>
+                  <a:pt x="29608" y="1840"/>
+                </a:lnTo>
+                <a:cubicBezTo>
+                  <a:pt x="29608" y="1853"/>
+                  <a:pt x="29607" y="1866"/>
+                  <a:pt x="29604" y="1878"/>
+                </a:cubicBezTo>
+                <a:cubicBezTo>
+                  <a:pt x="29602" y="1891"/>
+                  <a:pt x="29598" y="1903"/>
+                  <a:pt x="29593" y="1916"/>
+                </a:cubicBezTo>
+                <a:cubicBezTo>
+                  <a:pt x="29588" y="1928"/>
+                  <a:pt x="29582" y="1939"/>
+                  <a:pt x="29575" y="1950"/>
+                </a:cubicBezTo>
+                <a:cubicBezTo>
+                  <a:pt x="29568" y="1961"/>
+                  <a:pt x="29559" y="1971"/>
+                  <a:pt x="29550" y="1980"/>
+                </a:cubicBezTo>
+                <a:cubicBezTo>
+                  <a:pt x="29541" y="1989"/>
+                  <a:pt x="29531" y="1997"/>
+                  <a:pt x="29520" y="2005"/>
+                </a:cubicBezTo>
+                <a:cubicBezTo>
+                  <a:pt x="29509" y="2012"/>
+                  <a:pt x="29498" y="2018"/>
+                  <a:pt x="29486" y="2023"/>
+                </a:cubicBezTo>
+                <a:cubicBezTo>
+                  <a:pt x="29474" y="2028"/>
+                  <a:pt x="29461" y="2032"/>
+                  <a:pt x="29449" y="2034"/>
+                </a:cubicBezTo>
+                <a:cubicBezTo>
+                  <a:pt x="29436" y="2037"/>
+                  <a:pt x="29423" y="2038"/>
+                  <a:pt x="29410" y="2038"/>
+                </a:cubicBezTo>
+                <a:lnTo>
+                  <a:pt x="199" y="2038"/>
+                </a:lnTo>
+                <a:cubicBezTo>
+                  <a:pt x="186" y="2038"/>
+                  <a:pt x="173" y="2037"/>
+                  <a:pt x="160" y="2034"/>
+                </a:cubicBezTo>
+                <a:cubicBezTo>
+                  <a:pt x="147" y="2032"/>
+                  <a:pt x="135" y="2028"/>
+                  <a:pt x="123" y="2023"/>
+                </a:cubicBezTo>
+                <a:cubicBezTo>
+                  <a:pt x="111" y="2018"/>
+                  <a:pt x="99" y="2012"/>
+                  <a:pt x="89" y="2005"/>
+                </a:cubicBezTo>
+                <a:cubicBezTo>
+                  <a:pt x="78" y="1997"/>
+                  <a:pt x="68" y="1989"/>
+                  <a:pt x="59" y="1980"/>
+                </a:cubicBezTo>
+                <a:cubicBezTo>
+                  <a:pt x="49" y="1971"/>
+                  <a:pt x="41" y="1961"/>
+                  <a:pt x="34" y="1950"/>
+                </a:cubicBezTo>
+                <a:cubicBezTo>
+                  <a:pt x="27" y="1939"/>
+                  <a:pt x="20" y="1928"/>
+                  <a:pt x="16" y="1916"/>
+                </a:cubicBezTo>
+                <a:cubicBezTo>
+                  <a:pt x="11" y="1903"/>
+                  <a:pt x="7" y="1891"/>
+                  <a:pt x="4" y="1878"/>
+                </a:cubicBezTo>
+                <a:cubicBezTo>
+                  <a:pt x="2" y="1866"/>
+                  <a:pt x="0" y="1853"/>
+                  <a:pt x="0" y="1840"/>
+                </a:cubicBezTo>
+                <a:close/>
+              </a:path>
+            </a:pathLst>
+          </a:custGeom>
+          <a:solidFill>
+            <a:srgbClr val="131313"/>
+          </a:solidFill>
+          <a:ln w="0">
+            <a:noFill/>
+          </a:ln>
+        </p:spPr>
+        <p:txBody>
+          <a:bodyPr lIns="0" tIns="0" rIns="0" bIns="0" anchor="t">
+            <a:noAutofit/>
+          </a:bodyPr>
+          <a:p>
+            <a:endParaRPr lang="en-US" sz="2400" b="0" u="none" strike="noStrike">
+              <a:solidFill>
+                <a:srgbClr val="FFFFFF"/>
+              </a:solidFill>
+              <a:effectLst/>
+              <a:uFillTx/>
+              <a:latin typeface="Times New Roman"/>
+            </a:endParaRPr>
+          </a:p>
+        </p:txBody>
+      </p:sp>
+      <p:sp>
+        <p:nvSpPr>
+          <p:cNvPr id="70" name=""/>
+          <p:cNvSpPr/>
+          <p:nvPr/>
+        </p:nvSpPr>
+        <p:spPr>
+          <a:xfrm>
+            <a:off x="766440" y="4119480"/>
+            <a:ext cx="10658880" cy="733680"/>
+          </a:xfrm>
+          <a:custGeom>
+            <a:avLst/>
+            <a:gdLst/>
+            <a:ahLst/>
+            <a:rect l="0" t="0" r="r" b="b"/>
+            <a:pathLst>
+              <a:path w="29608" h="2038">
+                <a:moveTo>
+                  <a:pt x="0" y="1840"/>
+                </a:moveTo>
+                <a:lnTo>
+                  <a:pt x="0" y="198"/>
+                </a:lnTo>
+                <a:cubicBezTo>
+                  <a:pt x="0" y="185"/>
+                  <a:pt x="2" y="172"/>
+                  <a:pt x="4" y="159"/>
+                </a:cubicBezTo>
+                <a:cubicBezTo>
+                  <a:pt x="7" y="147"/>
+                  <a:pt x="11" y="134"/>
+                  <a:pt x="16" y="122"/>
+                </a:cubicBezTo>
+                <a:cubicBezTo>
+                  <a:pt x="20" y="110"/>
+                  <a:pt x="27" y="99"/>
+                  <a:pt x="34" y="88"/>
+                </a:cubicBezTo>
+                <a:cubicBezTo>
+                  <a:pt x="41" y="77"/>
+                  <a:pt x="49" y="67"/>
+                  <a:pt x="59" y="58"/>
+                </a:cubicBezTo>
+                <a:cubicBezTo>
+                  <a:pt x="68" y="49"/>
+                  <a:pt x="78" y="40"/>
+                  <a:pt x="89" y="33"/>
+                </a:cubicBezTo>
+                <a:cubicBezTo>
+                  <a:pt x="99" y="26"/>
+                  <a:pt x="111" y="20"/>
+                  <a:pt x="123" y="15"/>
+                </a:cubicBezTo>
+                <a:cubicBezTo>
+                  <a:pt x="135" y="10"/>
+                  <a:pt x="147" y="6"/>
+                  <a:pt x="160" y="4"/>
+                </a:cubicBezTo>
+                <a:cubicBezTo>
+                  <a:pt x="173" y="1"/>
+                  <a:pt x="186" y="0"/>
+                  <a:pt x="199" y="0"/>
+                </a:cubicBezTo>
+                <a:lnTo>
+                  <a:pt x="29410" y="0"/>
+                </a:lnTo>
+                <a:cubicBezTo>
+                  <a:pt x="29423" y="0"/>
+                  <a:pt x="29436" y="1"/>
+                  <a:pt x="29449" y="4"/>
+                </a:cubicBezTo>
+                <a:cubicBezTo>
+                  <a:pt x="29461" y="6"/>
+                  <a:pt x="29474" y="10"/>
+                  <a:pt x="29486" y="15"/>
+                </a:cubicBezTo>
+                <a:cubicBezTo>
+                  <a:pt x="29498" y="20"/>
+                  <a:pt x="29509" y="26"/>
+                  <a:pt x="29520" y="33"/>
+                </a:cubicBezTo>
+                <a:cubicBezTo>
+                  <a:pt x="29531" y="40"/>
+                  <a:pt x="29541" y="49"/>
+                  <a:pt x="29550" y="58"/>
+                </a:cubicBezTo>
+                <a:cubicBezTo>
+                  <a:pt x="29559" y="67"/>
+                  <a:pt x="29568" y="77"/>
+                  <a:pt x="29575" y="88"/>
+                </a:cubicBezTo>
+                <a:cubicBezTo>
+                  <a:pt x="29582" y="99"/>
+                  <a:pt x="29588" y="110"/>
+                  <a:pt x="29593" y="122"/>
+                </a:cubicBezTo>
+                <a:cubicBezTo>
+                  <a:pt x="29598" y="134"/>
+                  <a:pt x="29602" y="147"/>
+                  <a:pt x="29604" y="159"/>
+                </a:cubicBezTo>
+                <a:cubicBezTo>
+                  <a:pt x="29607" y="172"/>
+                  <a:pt x="29608" y="185"/>
+                  <a:pt x="29608" y="198"/>
+                </a:cubicBezTo>
+                <a:lnTo>
+                  <a:pt x="29608" y="1840"/>
+                </a:lnTo>
+                <a:cubicBezTo>
+                  <a:pt x="29608" y="1853"/>
+                  <a:pt x="29607" y="1866"/>
+                  <a:pt x="29604" y="1878"/>
+                </a:cubicBezTo>
+                <a:cubicBezTo>
+                  <a:pt x="29602" y="1891"/>
+                  <a:pt x="29598" y="1903"/>
+                  <a:pt x="29593" y="1916"/>
+                </a:cubicBezTo>
+                <a:cubicBezTo>
+                  <a:pt x="29588" y="1928"/>
+                  <a:pt x="29582" y="1939"/>
+                  <a:pt x="29575" y="1950"/>
+                </a:cubicBezTo>
+                <a:cubicBezTo>
+                  <a:pt x="29568" y="1961"/>
+                  <a:pt x="29559" y="1971"/>
+                  <a:pt x="29550" y="1980"/>
+                </a:cubicBezTo>
+                <a:cubicBezTo>
+                  <a:pt x="29541" y="1989"/>
+                  <a:pt x="29531" y="1997"/>
+                  <a:pt x="29520" y="2005"/>
+                </a:cubicBezTo>
+                <a:cubicBezTo>
+                  <a:pt x="29509" y="2012"/>
+                  <a:pt x="29498" y="2018"/>
+                  <a:pt x="29486" y="2023"/>
+                </a:cubicBezTo>
+                <a:cubicBezTo>
+                  <a:pt x="29474" y="2028"/>
+                  <a:pt x="29461" y="2032"/>
+                  <a:pt x="29449" y="2034"/>
+                </a:cubicBezTo>
+                <a:cubicBezTo>
+                  <a:pt x="29436" y="2037"/>
+                  <a:pt x="29423" y="2038"/>
+                  <a:pt x="29410" y="2038"/>
+                </a:cubicBezTo>
+                <a:lnTo>
+                  <a:pt x="199" y="2038"/>
+                </a:lnTo>
+                <a:cubicBezTo>
+                  <a:pt x="186" y="2038"/>
+                  <a:pt x="173" y="2037"/>
+                  <a:pt x="160" y="2034"/>
+                </a:cubicBezTo>
+                <a:cubicBezTo>
+                  <a:pt x="147" y="2032"/>
+                  <a:pt x="135" y="2028"/>
+                  <a:pt x="123" y="2023"/>
+                </a:cubicBezTo>
+                <a:cubicBezTo>
+                  <a:pt x="111" y="2018"/>
+                  <a:pt x="99" y="2012"/>
+                  <a:pt x="89" y="2005"/>
+                </a:cubicBezTo>
+                <a:cubicBezTo>
+                  <a:pt x="78" y="1997"/>
+                  <a:pt x="68" y="1989"/>
+                  <a:pt x="59" y="1980"/>
+                </a:cubicBezTo>
+                <a:cubicBezTo>
+                  <a:pt x="49" y="1971"/>
+                  <a:pt x="41" y="1961"/>
+                  <a:pt x="34" y="1950"/>
+                </a:cubicBezTo>
+                <a:cubicBezTo>
+                  <a:pt x="27" y="1939"/>
+                  <a:pt x="20" y="1928"/>
+                  <a:pt x="16" y="1916"/>
+                </a:cubicBezTo>
+                <a:cubicBezTo>
+                  <a:pt x="11" y="1903"/>
+                  <a:pt x="7" y="1891"/>
+                  <a:pt x="4" y="1878"/>
+                </a:cubicBezTo>
+                <a:cubicBezTo>
+                  <a:pt x="2" y="1866"/>
+                  <a:pt x="0" y="1853"/>
+                  <a:pt x="0" y="1840"/>
+                </a:cubicBezTo>
+                <a:close/>
+              </a:path>
+            </a:pathLst>
+          </a:custGeom>
+          <a:noFill/>
+          <a:ln w="9360">
+            <a:solidFill>
+              <a:srgbClr val="262626"/>
+            </a:solidFill>
+            <a:miter/>
+          </a:ln>
+        </p:spPr>
+        <p:txBody>
+          <a:bodyPr lIns="4680" tIns="4680" rIns="4680" bIns="4680" anchor="t">
+            <a:noAutofit/>
+          </a:bodyPr>
+          <a:p>
+            <a:endParaRPr lang="en-US" sz="2400" b="0" u="none" strike="noStrike">
+              <a:solidFill>
+                <a:srgbClr val="000000"/>
+              </a:solidFill>
+              <a:effectLst/>
+              <a:uFillTx/>
+              <a:latin typeface="Times New Roman"/>
+            </a:endParaRPr>
+          </a:p>
+        </p:txBody>
+      </p:sp>
+      <p:sp>
+        <p:nvSpPr>
+          <p:cNvPr id="71" name=""/>
+          <p:cNvSpPr/>
+          <p:nvPr/>
+        </p:nvSpPr>
+        <p:spPr>
+          <a:xfrm>
+            <a:off x="985680" y="4262400"/>
+            <a:ext cx="543240" cy="447840"/>
+          </a:xfrm>
+          <a:custGeom>
+            <a:avLst/>
+            <a:gdLst/>
+            <a:ahLst/>
+            <a:rect l="0" t="0" r="r" b="b"/>
+            <a:pathLst>
+              <a:path w="1509" h="1244">
+                <a:moveTo>
+                  <a:pt x="0" y="1098"/>
+                </a:moveTo>
+                <a:lnTo>
+                  <a:pt x="0" y="145"/>
+                </a:lnTo>
+                <a:cubicBezTo>
+                  <a:pt x="0" y="136"/>
+                  <a:pt x="1" y="126"/>
+                  <a:pt x="3" y="117"/>
+                </a:cubicBezTo>
+                <a:cubicBezTo>
+                  <a:pt x="5" y="107"/>
+                  <a:pt x="7" y="98"/>
+                  <a:pt x="11" y="89"/>
+                </a:cubicBezTo>
+                <a:cubicBezTo>
+                  <a:pt x="15" y="81"/>
+                  <a:pt x="19" y="72"/>
+                  <a:pt x="24" y="64"/>
+                </a:cubicBezTo>
+                <a:cubicBezTo>
+                  <a:pt x="30" y="56"/>
+                  <a:pt x="36" y="49"/>
+                  <a:pt x="43" y="42"/>
+                </a:cubicBezTo>
+                <a:cubicBezTo>
+                  <a:pt x="49" y="35"/>
+                  <a:pt x="57" y="29"/>
+                  <a:pt x="65" y="24"/>
+                </a:cubicBezTo>
+                <a:cubicBezTo>
+                  <a:pt x="73" y="19"/>
+                  <a:pt x="81" y="14"/>
+                  <a:pt x="90" y="11"/>
+                </a:cubicBezTo>
+                <a:cubicBezTo>
+                  <a:pt x="99" y="7"/>
+                  <a:pt x="108" y="4"/>
+                  <a:pt x="117" y="2"/>
+                </a:cubicBezTo>
+                <a:cubicBezTo>
+                  <a:pt x="126" y="1"/>
+                  <a:pt x="136" y="0"/>
+                  <a:pt x="145" y="0"/>
+                </a:cubicBezTo>
+                <a:lnTo>
+                  <a:pt x="1364" y="0"/>
+                </a:lnTo>
+                <a:cubicBezTo>
+                  <a:pt x="1373" y="0"/>
+                  <a:pt x="1383" y="1"/>
+                  <a:pt x="1392" y="2"/>
+                </a:cubicBezTo>
+                <a:cubicBezTo>
+                  <a:pt x="1401" y="4"/>
+                  <a:pt x="1410" y="7"/>
+                  <a:pt x="1419" y="11"/>
+                </a:cubicBezTo>
+                <a:cubicBezTo>
+                  <a:pt x="1428" y="14"/>
+                  <a:pt x="1436" y="19"/>
+                  <a:pt x="1444" y="24"/>
+                </a:cubicBezTo>
+                <a:cubicBezTo>
+                  <a:pt x="1452" y="29"/>
+                  <a:pt x="1460" y="35"/>
+                  <a:pt x="1466" y="42"/>
+                </a:cubicBezTo>
+                <a:cubicBezTo>
+                  <a:pt x="1473" y="49"/>
+                  <a:pt x="1479" y="56"/>
+                  <a:pt x="1485" y="64"/>
+                </a:cubicBezTo>
+                <a:cubicBezTo>
+                  <a:pt x="1490" y="72"/>
+                  <a:pt x="1494" y="81"/>
+                  <a:pt x="1498" y="89"/>
+                </a:cubicBezTo>
+                <a:cubicBezTo>
+                  <a:pt x="1502" y="98"/>
+                  <a:pt x="1504" y="107"/>
+                  <a:pt x="1506" y="117"/>
+                </a:cubicBezTo>
+                <a:cubicBezTo>
+                  <a:pt x="1508" y="126"/>
+                  <a:pt x="1509" y="136"/>
+                  <a:pt x="1509" y="145"/>
+                </a:cubicBezTo>
+                <a:lnTo>
+                  <a:pt x="1509" y="1098"/>
+                </a:lnTo>
+                <a:cubicBezTo>
+                  <a:pt x="1509" y="1107"/>
+                  <a:pt x="1508" y="1117"/>
+                  <a:pt x="1506" y="1126"/>
+                </a:cubicBezTo>
+                <a:cubicBezTo>
+                  <a:pt x="1504" y="1135"/>
+                  <a:pt x="1502" y="1144"/>
+                  <a:pt x="1498" y="1153"/>
+                </a:cubicBezTo>
+                <a:cubicBezTo>
+                  <a:pt x="1494" y="1162"/>
+                  <a:pt x="1490" y="1171"/>
+                  <a:pt x="1485" y="1178"/>
+                </a:cubicBezTo>
+                <a:cubicBezTo>
+                  <a:pt x="1479" y="1186"/>
+                  <a:pt x="1473" y="1194"/>
+                  <a:pt x="1466" y="1201"/>
+                </a:cubicBezTo>
+                <a:cubicBezTo>
+                  <a:pt x="1460" y="1207"/>
+                  <a:pt x="1452" y="1214"/>
+                  <a:pt x="1444" y="1220"/>
+                </a:cubicBezTo>
+                <a:cubicBezTo>
+                  <a:pt x="1436" y="1225"/>
+                  <a:pt x="1428" y="1229"/>
+                  <a:pt x="1419" y="1233"/>
+                </a:cubicBezTo>
+                <a:cubicBezTo>
+                  <a:pt x="1410" y="1237"/>
+                  <a:pt x="1401" y="1239"/>
+                  <a:pt x="1392" y="1241"/>
+                </a:cubicBezTo>
+                <a:cubicBezTo>
+                  <a:pt x="1383" y="1243"/>
+                  <a:pt x="1373" y="1244"/>
+                  <a:pt x="1364" y="1244"/>
+                </a:cubicBezTo>
+                <a:lnTo>
+                  <a:pt x="145" y="1244"/>
+                </a:lnTo>
+                <a:cubicBezTo>
+                  <a:pt x="136" y="1244"/>
+                  <a:pt x="126" y="1243"/>
+                  <a:pt x="117" y="1241"/>
+                </a:cubicBezTo>
+                <a:cubicBezTo>
+                  <a:pt x="108" y="1239"/>
+                  <a:pt x="99" y="1237"/>
+                  <a:pt x="90" y="1233"/>
+                </a:cubicBezTo>
+                <a:cubicBezTo>
+                  <a:pt x="81" y="1229"/>
+                  <a:pt x="73" y="1225"/>
+                  <a:pt x="65" y="1220"/>
+                </a:cubicBezTo>
+                <a:cubicBezTo>
+                  <a:pt x="57" y="1214"/>
+                  <a:pt x="49" y="1207"/>
+                  <a:pt x="43" y="1201"/>
+                </a:cubicBezTo>
+                <a:cubicBezTo>
+                  <a:pt x="36" y="1194"/>
+                  <a:pt x="30" y="1186"/>
+                  <a:pt x="24" y="1178"/>
+                </a:cubicBezTo>
+                <a:cubicBezTo>
+                  <a:pt x="19" y="1171"/>
+                  <a:pt x="15" y="1162"/>
+                  <a:pt x="11" y="1153"/>
+                </a:cubicBezTo>
+                <a:cubicBezTo>
+                  <a:pt x="7" y="1144"/>
+                  <a:pt x="5" y="1135"/>
+                  <a:pt x="3" y="1126"/>
+                </a:cubicBezTo>
+                <a:cubicBezTo>
+                  <a:pt x="1" y="1117"/>
+                  <a:pt x="0" y="1107"/>
+                  <a:pt x="0" y="1098"/>
+                </a:cubicBezTo>
+                <a:close/>
+              </a:path>
+            </a:pathLst>
+          </a:custGeom>
+          <a:noFill/>
+          <a:ln w="9360">
+            <a:solidFill>
+              <a:srgbClr val="1F7A48"/>
+            </a:solidFill>
+            <a:miter/>
+          </a:ln>
+        </p:spPr>
+        <p:txBody>
+          <a:bodyPr lIns="4680" tIns="4680" rIns="4680" bIns="4680" anchor="t">
+            <a:noAutofit/>
+          </a:bodyPr>
+          <a:p>
+            <a:endParaRPr lang="en-US" sz="2400" b="0" u="none" strike="noStrike">
+              <a:solidFill>
+                <a:srgbClr val="000000"/>
+              </a:solidFill>
+              <a:effectLst/>
+              <a:uFillTx/>
+              <a:latin typeface="Times New Roman"/>
+            </a:endParaRPr>
+          </a:p>
+        </p:txBody>
+      </p:sp>
+      <p:sp>
+        <p:nvSpPr>
+          <p:cNvPr id="72" name=""/>
+          <p:cNvSpPr txBox="1"/>
+          <p:nvPr/>
+        </p:nvSpPr>
+        <p:spPr>
+          <a:xfrm>
+            <a:off x="1743120" y="3509640"/>
+            <a:ext cx="5109840" cy="279360"/>
+          </a:xfrm>
+          <a:prstGeom prst="rect">
+            <a:avLst/>
+          </a:prstGeom>
+          <a:noFill/>
+          <a:ln w="0">
+            <a:noFill/>
+          </a:ln>
+        </p:spPr>
+        <p:txBody>
+          <a:bodyPr wrap="none" lIns="0" tIns="0" rIns="0" bIns="0" anchor="t">
+            <a:spAutoFit/>
+          </a:bodyPr>
+          <a:p>
+            <a:pPr/>
+            <a:r>
+              <a:rPr lang="en-US" sz="1950" b="1" u="none" strike="noStrike">
+                <a:solidFill>
+                  <a:srgbClr val="3DDC84"/>
+                </a:solidFill>
+                <a:effectLst/>
+                <a:uFillTx/>
+                <a:latin typeface="Arial"/>
+                <a:ea typeface="Arial"/>
+              </a:rPr>
+              <a:t>cara de verdad</a:t>
             </a:r>
             <a:r>
               <a:rPr lang="en-US" sz="1950" b="0" u="none" strike="noStrike">
@@ -7128,7 +7838,7 @@
                 <a:latin typeface="Arial"/>
                 <a:ea typeface="Arial"/>
               </a:rPr>
-              <a:t> — parpadeo, giro,</a:t>
+              <a:t> — parpadeo, giro, inclinación.</a:t>
             </a:r>
             <a:endParaRPr lang="en-US" sz="1950" b="0" u="none" strike="noStrike">
               <a:solidFill>
@@ -7143,723 +7853,13 @@
       </p:sp>
       <p:sp>
         <p:nvSpPr>
-          <p:cNvPr id="69" name=""/>
-          <p:cNvSpPr/>
-          <p:nvPr/>
-        </p:nvSpPr>
-        <p:spPr>
-          <a:xfrm>
-            <a:off x="766440" y="4348080"/>
-            <a:ext cx="10658880" cy="733680"/>
-          </a:xfrm>
-          <a:custGeom>
-            <a:avLst/>
-            <a:gdLst/>
-            <a:ahLst/>
-            <a:rect l="0" t="0" r="r" b="b"/>
-            <a:pathLst>
-              <a:path w="29608" h="2038">
-                <a:moveTo>
-                  <a:pt x="0" y="1840"/>
-                </a:moveTo>
-                <a:lnTo>
-                  <a:pt x="0" y="198"/>
-                </a:lnTo>
-                <a:cubicBezTo>
-                  <a:pt x="0" y="185"/>
-                  <a:pt x="2" y="172"/>
-                  <a:pt x="4" y="159"/>
-                </a:cubicBezTo>
-                <a:cubicBezTo>
-                  <a:pt x="7" y="147"/>
-                  <a:pt x="11" y="134"/>
-                  <a:pt x="16" y="122"/>
-                </a:cubicBezTo>
-                <a:cubicBezTo>
-                  <a:pt x="20" y="110"/>
-                  <a:pt x="27" y="99"/>
-                  <a:pt x="34" y="88"/>
-                </a:cubicBezTo>
-                <a:cubicBezTo>
-                  <a:pt x="41" y="77"/>
-                  <a:pt x="49" y="67"/>
-                  <a:pt x="59" y="58"/>
-                </a:cubicBezTo>
-                <a:cubicBezTo>
-                  <a:pt x="68" y="49"/>
-                  <a:pt x="78" y="40"/>
-                  <a:pt x="89" y="33"/>
-                </a:cubicBezTo>
-                <a:cubicBezTo>
-                  <a:pt x="99" y="26"/>
-                  <a:pt x="111" y="20"/>
-                  <a:pt x="123" y="15"/>
-                </a:cubicBezTo>
-                <a:cubicBezTo>
-                  <a:pt x="135" y="10"/>
-                  <a:pt x="147" y="6"/>
-                  <a:pt x="160" y="4"/>
-                </a:cubicBezTo>
-                <a:cubicBezTo>
-                  <a:pt x="173" y="1"/>
-                  <a:pt x="186" y="0"/>
-                  <a:pt x="199" y="0"/>
-                </a:cubicBezTo>
-                <a:lnTo>
-                  <a:pt x="29410" y="0"/>
-                </a:lnTo>
-                <a:cubicBezTo>
-                  <a:pt x="29423" y="0"/>
-                  <a:pt x="29436" y="1"/>
-                  <a:pt x="29449" y="4"/>
-                </a:cubicBezTo>
-                <a:cubicBezTo>
-                  <a:pt x="29461" y="6"/>
-                  <a:pt x="29474" y="10"/>
-                  <a:pt x="29486" y="15"/>
-                </a:cubicBezTo>
-                <a:cubicBezTo>
-                  <a:pt x="29498" y="20"/>
-                  <a:pt x="29509" y="26"/>
-                  <a:pt x="29520" y="33"/>
-                </a:cubicBezTo>
-                <a:cubicBezTo>
-                  <a:pt x="29531" y="40"/>
-                  <a:pt x="29541" y="49"/>
-                  <a:pt x="29550" y="58"/>
-                </a:cubicBezTo>
-                <a:cubicBezTo>
-                  <a:pt x="29559" y="67"/>
-                  <a:pt x="29568" y="77"/>
-                  <a:pt x="29575" y="88"/>
-                </a:cubicBezTo>
-                <a:cubicBezTo>
-                  <a:pt x="29582" y="99"/>
-                  <a:pt x="29588" y="110"/>
-                  <a:pt x="29593" y="122"/>
-                </a:cubicBezTo>
-                <a:cubicBezTo>
-                  <a:pt x="29598" y="134"/>
-                  <a:pt x="29602" y="147"/>
-                  <a:pt x="29604" y="159"/>
-                </a:cubicBezTo>
-                <a:cubicBezTo>
-                  <a:pt x="29607" y="172"/>
-                  <a:pt x="29608" y="185"/>
-                  <a:pt x="29608" y="198"/>
-                </a:cubicBezTo>
-                <a:lnTo>
-                  <a:pt x="29608" y="1840"/>
-                </a:lnTo>
-                <a:cubicBezTo>
-                  <a:pt x="29608" y="1853"/>
-                  <a:pt x="29607" y="1866"/>
-                  <a:pt x="29604" y="1878"/>
-                </a:cubicBezTo>
-                <a:cubicBezTo>
-                  <a:pt x="29602" y="1891"/>
-                  <a:pt x="29598" y="1903"/>
-                  <a:pt x="29593" y="1916"/>
-                </a:cubicBezTo>
-                <a:cubicBezTo>
-                  <a:pt x="29588" y="1928"/>
-                  <a:pt x="29582" y="1939"/>
-                  <a:pt x="29575" y="1950"/>
-                </a:cubicBezTo>
-                <a:cubicBezTo>
-                  <a:pt x="29568" y="1961"/>
-                  <a:pt x="29559" y="1971"/>
-                  <a:pt x="29550" y="1980"/>
-                </a:cubicBezTo>
-                <a:cubicBezTo>
-                  <a:pt x="29541" y="1989"/>
-                  <a:pt x="29531" y="1997"/>
-                  <a:pt x="29520" y="2005"/>
-                </a:cubicBezTo>
-                <a:cubicBezTo>
-                  <a:pt x="29509" y="2012"/>
-                  <a:pt x="29498" y="2018"/>
-                  <a:pt x="29486" y="2023"/>
-                </a:cubicBezTo>
-                <a:cubicBezTo>
-                  <a:pt x="29474" y="2028"/>
-                  <a:pt x="29461" y="2032"/>
-                  <a:pt x="29449" y="2034"/>
-                </a:cubicBezTo>
-                <a:cubicBezTo>
-                  <a:pt x="29436" y="2037"/>
-                  <a:pt x="29423" y="2038"/>
-                  <a:pt x="29410" y="2038"/>
-                </a:cubicBezTo>
-                <a:lnTo>
-                  <a:pt x="199" y="2038"/>
-                </a:lnTo>
-                <a:cubicBezTo>
-                  <a:pt x="186" y="2038"/>
-                  <a:pt x="173" y="2037"/>
-                  <a:pt x="160" y="2034"/>
-                </a:cubicBezTo>
-                <a:cubicBezTo>
-                  <a:pt x="147" y="2032"/>
-                  <a:pt x="135" y="2028"/>
-                  <a:pt x="123" y="2023"/>
-                </a:cubicBezTo>
-                <a:cubicBezTo>
-                  <a:pt x="111" y="2018"/>
-                  <a:pt x="99" y="2012"/>
-                  <a:pt x="89" y="2005"/>
-                </a:cubicBezTo>
-                <a:cubicBezTo>
-                  <a:pt x="78" y="1997"/>
-                  <a:pt x="68" y="1989"/>
-                  <a:pt x="59" y="1980"/>
-                </a:cubicBezTo>
-                <a:cubicBezTo>
-                  <a:pt x="49" y="1971"/>
-                  <a:pt x="41" y="1961"/>
-                  <a:pt x="34" y="1950"/>
-                </a:cubicBezTo>
-                <a:cubicBezTo>
-                  <a:pt x="27" y="1939"/>
-                  <a:pt x="20" y="1928"/>
-                  <a:pt x="16" y="1916"/>
-                </a:cubicBezTo>
-                <a:cubicBezTo>
-                  <a:pt x="11" y="1903"/>
-                  <a:pt x="7" y="1891"/>
-                  <a:pt x="4" y="1878"/>
-                </a:cubicBezTo>
-                <a:cubicBezTo>
-                  <a:pt x="2" y="1866"/>
-                  <a:pt x="0" y="1853"/>
-                  <a:pt x="0" y="1840"/>
-                </a:cubicBezTo>
-                <a:close/>
-              </a:path>
-            </a:pathLst>
-          </a:custGeom>
-          <a:solidFill>
-            <a:srgbClr val="131313"/>
-          </a:solidFill>
-          <a:ln w="0">
-            <a:noFill/>
-          </a:ln>
-        </p:spPr>
-        <p:txBody>
-          <a:bodyPr lIns="0" tIns="0" rIns="0" bIns="0" anchor="t">
-            <a:noAutofit/>
-          </a:bodyPr>
-          <a:p>
-            <a:endParaRPr lang="en-US" sz="2400" b="0" u="none" strike="noStrike">
-              <a:solidFill>
-                <a:srgbClr val="FFFFFF"/>
-              </a:solidFill>
-              <a:effectLst/>
-              <a:uFillTx/>
-              <a:latin typeface="Times New Roman"/>
-            </a:endParaRPr>
-          </a:p>
-        </p:txBody>
-      </p:sp>
-      <p:sp>
-        <p:nvSpPr>
-          <p:cNvPr id="70" name=""/>
-          <p:cNvSpPr/>
-          <p:nvPr/>
-        </p:nvSpPr>
-        <p:spPr>
-          <a:xfrm>
-            <a:off x="766440" y="4348080"/>
-            <a:ext cx="10658880" cy="733680"/>
-          </a:xfrm>
-          <a:custGeom>
-            <a:avLst/>
-            <a:gdLst/>
-            <a:ahLst/>
-            <a:rect l="0" t="0" r="r" b="b"/>
-            <a:pathLst>
-              <a:path w="29608" h="2038">
-                <a:moveTo>
-                  <a:pt x="0" y="1840"/>
-                </a:moveTo>
-                <a:lnTo>
-                  <a:pt x="0" y="198"/>
-                </a:lnTo>
-                <a:cubicBezTo>
-                  <a:pt x="0" y="185"/>
-                  <a:pt x="2" y="172"/>
-                  <a:pt x="4" y="159"/>
-                </a:cubicBezTo>
-                <a:cubicBezTo>
-                  <a:pt x="7" y="147"/>
-                  <a:pt x="11" y="134"/>
-                  <a:pt x="16" y="122"/>
-                </a:cubicBezTo>
-                <a:cubicBezTo>
-                  <a:pt x="20" y="110"/>
-                  <a:pt x="27" y="99"/>
-                  <a:pt x="34" y="88"/>
-                </a:cubicBezTo>
-                <a:cubicBezTo>
-                  <a:pt x="41" y="77"/>
-                  <a:pt x="49" y="67"/>
-                  <a:pt x="59" y="58"/>
-                </a:cubicBezTo>
-                <a:cubicBezTo>
-                  <a:pt x="68" y="49"/>
-                  <a:pt x="78" y="40"/>
-                  <a:pt x="89" y="33"/>
-                </a:cubicBezTo>
-                <a:cubicBezTo>
-                  <a:pt x="99" y="26"/>
-                  <a:pt x="111" y="20"/>
-                  <a:pt x="123" y="15"/>
-                </a:cubicBezTo>
-                <a:cubicBezTo>
-                  <a:pt x="135" y="10"/>
-                  <a:pt x="147" y="6"/>
-                  <a:pt x="160" y="4"/>
-                </a:cubicBezTo>
-                <a:cubicBezTo>
-                  <a:pt x="173" y="1"/>
-                  <a:pt x="186" y="0"/>
-                  <a:pt x="199" y="0"/>
-                </a:cubicBezTo>
-                <a:lnTo>
-                  <a:pt x="29410" y="0"/>
-                </a:lnTo>
-                <a:cubicBezTo>
-                  <a:pt x="29423" y="0"/>
-                  <a:pt x="29436" y="1"/>
-                  <a:pt x="29449" y="4"/>
-                </a:cubicBezTo>
-                <a:cubicBezTo>
-                  <a:pt x="29461" y="6"/>
-                  <a:pt x="29474" y="10"/>
-                  <a:pt x="29486" y="15"/>
-                </a:cubicBezTo>
-                <a:cubicBezTo>
-                  <a:pt x="29498" y="20"/>
-                  <a:pt x="29509" y="26"/>
-                  <a:pt x="29520" y="33"/>
-                </a:cubicBezTo>
-                <a:cubicBezTo>
-                  <a:pt x="29531" y="40"/>
-                  <a:pt x="29541" y="49"/>
-                  <a:pt x="29550" y="58"/>
-                </a:cubicBezTo>
-                <a:cubicBezTo>
-                  <a:pt x="29559" y="67"/>
-                  <a:pt x="29568" y="77"/>
-                  <a:pt x="29575" y="88"/>
-                </a:cubicBezTo>
-                <a:cubicBezTo>
-                  <a:pt x="29582" y="99"/>
-                  <a:pt x="29588" y="110"/>
-                  <a:pt x="29593" y="122"/>
-                </a:cubicBezTo>
-                <a:cubicBezTo>
-                  <a:pt x="29598" y="134"/>
-                  <a:pt x="29602" y="147"/>
-                  <a:pt x="29604" y="159"/>
-                </a:cubicBezTo>
-                <a:cubicBezTo>
-                  <a:pt x="29607" y="172"/>
-                  <a:pt x="29608" y="185"/>
-                  <a:pt x="29608" y="198"/>
-                </a:cubicBezTo>
-                <a:lnTo>
-                  <a:pt x="29608" y="1840"/>
-                </a:lnTo>
-                <a:cubicBezTo>
-                  <a:pt x="29608" y="1853"/>
-                  <a:pt x="29607" y="1866"/>
-                  <a:pt x="29604" y="1878"/>
-                </a:cubicBezTo>
-                <a:cubicBezTo>
-                  <a:pt x="29602" y="1891"/>
-                  <a:pt x="29598" y="1903"/>
-                  <a:pt x="29593" y="1916"/>
-                </a:cubicBezTo>
-                <a:cubicBezTo>
-                  <a:pt x="29588" y="1928"/>
-                  <a:pt x="29582" y="1939"/>
-                  <a:pt x="29575" y="1950"/>
-                </a:cubicBezTo>
-                <a:cubicBezTo>
-                  <a:pt x="29568" y="1961"/>
-                  <a:pt x="29559" y="1971"/>
-                  <a:pt x="29550" y="1980"/>
-                </a:cubicBezTo>
-                <a:cubicBezTo>
-                  <a:pt x="29541" y="1989"/>
-                  <a:pt x="29531" y="1997"/>
-                  <a:pt x="29520" y="2005"/>
-                </a:cubicBezTo>
-                <a:cubicBezTo>
-                  <a:pt x="29509" y="2012"/>
-                  <a:pt x="29498" y="2018"/>
-                  <a:pt x="29486" y="2023"/>
-                </a:cubicBezTo>
-                <a:cubicBezTo>
-                  <a:pt x="29474" y="2028"/>
-                  <a:pt x="29461" y="2032"/>
-                  <a:pt x="29449" y="2034"/>
-                </a:cubicBezTo>
-                <a:cubicBezTo>
-                  <a:pt x="29436" y="2037"/>
-                  <a:pt x="29423" y="2038"/>
-                  <a:pt x="29410" y="2038"/>
-                </a:cubicBezTo>
-                <a:lnTo>
-                  <a:pt x="199" y="2038"/>
-                </a:lnTo>
-                <a:cubicBezTo>
-                  <a:pt x="186" y="2038"/>
-                  <a:pt x="173" y="2037"/>
-                  <a:pt x="160" y="2034"/>
-                </a:cubicBezTo>
-                <a:cubicBezTo>
-                  <a:pt x="147" y="2032"/>
-                  <a:pt x="135" y="2028"/>
-                  <a:pt x="123" y="2023"/>
-                </a:cubicBezTo>
-                <a:cubicBezTo>
-                  <a:pt x="111" y="2018"/>
-                  <a:pt x="99" y="2012"/>
-                  <a:pt x="89" y="2005"/>
-                </a:cubicBezTo>
-                <a:cubicBezTo>
-                  <a:pt x="78" y="1997"/>
-                  <a:pt x="68" y="1989"/>
-                  <a:pt x="59" y="1980"/>
-                </a:cubicBezTo>
-                <a:cubicBezTo>
-                  <a:pt x="49" y="1971"/>
-                  <a:pt x="41" y="1961"/>
-                  <a:pt x="34" y="1950"/>
-                </a:cubicBezTo>
-                <a:cubicBezTo>
-                  <a:pt x="27" y="1939"/>
-                  <a:pt x="20" y="1928"/>
-                  <a:pt x="16" y="1916"/>
-                </a:cubicBezTo>
-                <a:cubicBezTo>
-                  <a:pt x="11" y="1903"/>
-                  <a:pt x="7" y="1891"/>
-                  <a:pt x="4" y="1878"/>
-                </a:cubicBezTo>
-                <a:cubicBezTo>
-                  <a:pt x="2" y="1866"/>
-                  <a:pt x="0" y="1853"/>
-                  <a:pt x="0" y="1840"/>
-                </a:cubicBezTo>
-                <a:close/>
-              </a:path>
-            </a:pathLst>
-          </a:custGeom>
-          <a:noFill/>
-          <a:ln w="9360">
-            <a:solidFill>
-              <a:srgbClr val="262626"/>
-            </a:solidFill>
-            <a:miter/>
-          </a:ln>
-        </p:spPr>
-        <p:txBody>
-          <a:bodyPr lIns="4680" tIns="4680" rIns="4680" bIns="4680" anchor="t">
-            <a:noAutofit/>
-          </a:bodyPr>
-          <a:p>
-            <a:endParaRPr lang="en-US" sz="2400" b="0" u="none" strike="noStrike">
-              <a:solidFill>
-                <a:srgbClr val="000000"/>
-              </a:solidFill>
-              <a:effectLst/>
-              <a:uFillTx/>
-              <a:latin typeface="Times New Roman"/>
-            </a:endParaRPr>
-          </a:p>
-        </p:txBody>
-      </p:sp>
-      <p:sp>
-        <p:nvSpPr>
-          <p:cNvPr id="71" name=""/>
-          <p:cNvSpPr/>
-          <p:nvPr/>
-        </p:nvSpPr>
-        <p:spPr>
-          <a:xfrm>
-            <a:off x="985680" y="4491000"/>
-            <a:ext cx="543240" cy="447840"/>
-          </a:xfrm>
-          <a:custGeom>
-            <a:avLst/>
-            <a:gdLst/>
-            <a:ahLst/>
-            <a:rect l="0" t="0" r="r" b="b"/>
-            <a:pathLst>
-              <a:path w="1509" h="1244">
-                <a:moveTo>
-                  <a:pt x="0" y="1099"/>
-                </a:moveTo>
-                <a:lnTo>
-                  <a:pt x="0" y="145"/>
-                </a:lnTo>
-                <a:cubicBezTo>
-                  <a:pt x="0" y="136"/>
-                  <a:pt x="1" y="126"/>
-                  <a:pt x="3" y="117"/>
-                </a:cubicBezTo>
-                <a:cubicBezTo>
-                  <a:pt x="5" y="107"/>
-                  <a:pt x="7" y="98"/>
-                  <a:pt x="11" y="89"/>
-                </a:cubicBezTo>
-                <a:cubicBezTo>
-                  <a:pt x="15" y="81"/>
-                  <a:pt x="19" y="72"/>
-                  <a:pt x="24" y="64"/>
-                </a:cubicBezTo>
-                <a:cubicBezTo>
-                  <a:pt x="30" y="56"/>
-                  <a:pt x="36" y="49"/>
-                  <a:pt x="43" y="42"/>
-                </a:cubicBezTo>
-                <a:cubicBezTo>
-                  <a:pt x="49" y="35"/>
-                  <a:pt x="57" y="29"/>
-                  <a:pt x="65" y="24"/>
-                </a:cubicBezTo>
-                <a:cubicBezTo>
-                  <a:pt x="73" y="19"/>
-                  <a:pt x="81" y="14"/>
-                  <a:pt x="90" y="11"/>
-                </a:cubicBezTo>
-                <a:cubicBezTo>
-                  <a:pt x="99" y="7"/>
-                  <a:pt x="108" y="4"/>
-                  <a:pt x="117" y="2"/>
-                </a:cubicBezTo>
-                <a:cubicBezTo>
-                  <a:pt x="126" y="1"/>
-                  <a:pt x="136" y="0"/>
-                  <a:pt x="145" y="0"/>
-                </a:cubicBezTo>
-                <a:lnTo>
-                  <a:pt x="1364" y="0"/>
-                </a:lnTo>
-                <a:cubicBezTo>
-                  <a:pt x="1373" y="0"/>
-                  <a:pt x="1383" y="1"/>
-                  <a:pt x="1392" y="2"/>
-                </a:cubicBezTo>
-                <a:cubicBezTo>
-                  <a:pt x="1401" y="4"/>
-                  <a:pt x="1410" y="7"/>
-                  <a:pt x="1419" y="11"/>
-                </a:cubicBezTo>
-                <a:cubicBezTo>
-                  <a:pt x="1428" y="14"/>
-                  <a:pt x="1436" y="19"/>
-                  <a:pt x="1444" y="24"/>
-                </a:cubicBezTo>
-                <a:cubicBezTo>
-                  <a:pt x="1452" y="29"/>
-                  <a:pt x="1460" y="35"/>
-                  <a:pt x="1466" y="42"/>
-                </a:cubicBezTo>
-                <a:cubicBezTo>
-                  <a:pt x="1473" y="49"/>
-                  <a:pt x="1479" y="56"/>
-                  <a:pt x="1485" y="64"/>
-                </a:cubicBezTo>
-                <a:cubicBezTo>
-                  <a:pt x="1490" y="72"/>
-                  <a:pt x="1494" y="81"/>
-                  <a:pt x="1498" y="89"/>
-                </a:cubicBezTo>
-                <a:cubicBezTo>
-                  <a:pt x="1502" y="98"/>
-                  <a:pt x="1504" y="107"/>
-                  <a:pt x="1506" y="117"/>
-                </a:cubicBezTo>
-                <a:cubicBezTo>
-                  <a:pt x="1508" y="126"/>
-                  <a:pt x="1509" y="136"/>
-                  <a:pt x="1509" y="145"/>
-                </a:cubicBezTo>
-                <a:lnTo>
-                  <a:pt x="1509" y="1099"/>
-                </a:lnTo>
-                <a:cubicBezTo>
-                  <a:pt x="1509" y="1108"/>
-                  <a:pt x="1508" y="1118"/>
-                  <a:pt x="1506" y="1127"/>
-                </a:cubicBezTo>
-                <a:cubicBezTo>
-                  <a:pt x="1504" y="1136"/>
-                  <a:pt x="1502" y="1145"/>
-                  <a:pt x="1498" y="1154"/>
-                </a:cubicBezTo>
-                <a:cubicBezTo>
-                  <a:pt x="1494" y="1163"/>
-                  <a:pt x="1490" y="1172"/>
-                  <a:pt x="1485" y="1179"/>
-                </a:cubicBezTo>
-                <a:cubicBezTo>
-                  <a:pt x="1479" y="1187"/>
-                  <a:pt x="1473" y="1195"/>
-                  <a:pt x="1466" y="1202"/>
-                </a:cubicBezTo>
-                <a:cubicBezTo>
-                  <a:pt x="1460" y="1208"/>
-                  <a:pt x="1452" y="1214"/>
-                  <a:pt x="1444" y="1220"/>
-                </a:cubicBezTo>
-                <a:cubicBezTo>
-                  <a:pt x="1436" y="1225"/>
-                  <a:pt x="1428" y="1229"/>
-                  <a:pt x="1419" y="1233"/>
-                </a:cubicBezTo>
-                <a:cubicBezTo>
-                  <a:pt x="1410" y="1237"/>
-                  <a:pt x="1401" y="1239"/>
-                  <a:pt x="1392" y="1241"/>
-                </a:cubicBezTo>
-                <a:cubicBezTo>
-                  <a:pt x="1383" y="1243"/>
-                  <a:pt x="1373" y="1244"/>
-                  <a:pt x="1364" y="1244"/>
-                </a:cubicBezTo>
-                <a:lnTo>
-                  <a:pt x="145" y="1244"/>
-                </a:lnTo>
-                <a:cubicBezTo>
-                  <a:pt x="136" y="1244"/>
-                  <a:pt x="126" y="1243"/>
-                  <a:pt x="117" y="1241"/>
-                </a:cubicBezTo>
-                <a:cubicBezTo>
-                  <a:pt x="108" y="1239"/>
-                  <a:pt x="99" y="1237"/>
-                  <a:pt x="90" y="1233"/>
-                </a:cubicBezTo>
-                <a:cubicBezTo>
-                  <a:pt x="81" y="1229"/>
-                  <a:pt x="73" y="1225"/>
-                  <a:pt x="65" y="1220"/>
-                </a:cubicBezTo>
-                <a:cubicBezTo>
-                  <a:pt x="57" y="1214"/>
-                  <a:pt x="49" y="1208"/>
-                  <a:pt x="43" y="1202"/>
-                </a:cubicBezTo>
-                <a:cubicBezTo>
-                  <a:pt x="36" y="1195"/>
-                  <a:pt x="30" y="1187"/>
-                  <a:pt x="24" y="1179"/>
-                </a:cubicBezTo>
-                <a:cubicBezTo>
-                  <a:pt x="19" y="1172"/>
-                  <a:pt x="15" y="1163"/>
-                  <a:pt x="11" y="1154"/>
-                </a:cubicBezTo>
-                <a:cubicBezTo>
-                  <a:pt x="7" y="1145"/>
-                  <a:pt x="5" y="1136"/>
-                  <a:pt x="3" y="1127"/>
-                </a:cubicBezTo>
-                <a:cubicBezTo>
-                  <a:pt x="1" y="1118"/>
-                  <a:pt x="0" y="1108"/>
-                  <a:pt x="0" y="1099"/>
-                </a:cubicBezTo>
-                <a:close/>
-              </a:path>
-            </a:pathLst>
-          </a:custGeom>
-          <a:noFill/>
-          <a:ln w="9360">
-            <a:solidFill>
-              <a:srgbClr val="1F7A48"/>
-            </a:solidFill>
-            <a:miter/>
-          </a:ln>
-        </p:spPr>
-        <p:txBody>
-          <a:bodyPr lIns="4680" tIns="4680" rIns="4680" bIns="4680" anchor="t">
-            <a:noAutofit/>
-          </a:bodyPr>
-          <a:p>
-            <a:endParaRPr lang="en-US" sz="2400" b="0" u="none" strike="noStrike">
-              <a:solidFill>
-                <a:srgbClr val="000000"/>
-              </a:solidFill>
-              <a:effectLst/>
-              <a:uFillTx/>
-              <a:latin typeface="Times New Roman"/>
-            </a:endParaRPr>
-          </a:p>
-        </p:txBody>
-      </p:sp>
-      <p:sp>
-        <p:nvSpPr>
-          <p:cNvPr id="72" name=""/>
-          <p:cNvSpPr txBox="1"/>
-          <p:nvPr/>
-        </p:nvSpPr>
-        <p:spPr>
-          <a:xfrm>
-            <a:off x="1743120" y="3738240"/>
-            <a:ext cx="1229760" cy="279360"/>
-          </a:xfrm>
-          <a:prstGeom prst="rect">
-            <a:avLst/>
-          </a:prstGeom>
-          <a:noFill/>
-          <a:ln w="0">
-            <a:noFill/>
-          </a:ln>
-        </p:spPr>
-        <p:txBody>
-          <a:bodyPr wrap="none" lIns="0" tIns="0" rIns="0" bIns="0" anchor="t">
-            <a:spAutoFit/>
-          </a:bodyPr>
-          <a:p>
-            <a:pPr/>
-            <a:r>
-              <a:rPr lang="en-US" sz="1950" b="0" u="none" strike="noStrike">
-                <a:solidFill>
-                  <a:srgbClr val="EDEDED"/>
-                </a:solidFill>
-                <a:effectLst/>
-                <a:uFillTx/>
-                <a:latin typeface="Arial"/>
-                <a:ea typeface="Arial"/>
-              </a:rPr>
-              <a:t>inclinación.</a:t>
-            </a:r>
-            <a:endParaRPr lang="en-US" sz="1950" b="0" u="none" strike="noStrike">
-              <a:solidFill>
-                <a:srgbClr val="000000"/>
-              </a:solidFill>
-              <a:effectLst/>
-              <a:uFillTx/>
-              <a:latin typeface="Times New Roman"/>
-            </a:endParaRPr>
-          </a:p>
-        </p:txBody>
-      </p:sp>
-      <p:sp>
-        <p:nvSpPr>
           <p:cNvPr id="73" name=""/>
           <p:cNvSpPr txBox="1"/>
           <p:nvPr/>
         </p:nvSpPr>
         <p:spPr>
           <a:xfrm>
-            <a:off x="1140480" y="4587120"/>
+            <a:off x="1140480" y="4358520"/>
             <a:ext cx="229320" cy="253440"/>
           </a:xfrm>
           <a:prstGeom prst="rect">
@@ -7907,8 +7907,8 @@
         </p:nvSpPr>
         <p:spPr>
           <a:xfrm>
-            <a:off x="1743120" y="4576320"/>
-            <a:ext cx="6062400" cy="279360"/>
+            <a:off x="1743120" y="4347720"/>
+            <a:ext cx="7623360" cy="279360"/>
           </a:xfrm>
           <a:prstGeom prst="rect">
             <a:avLst/>
@@ -7934,7 +7934,7 @@
                 <a:latin typeface="Arial"/>
                 <a:ea typeface="Arial"/>
               </a:rPr>
-              <a:t>Pasás ese paso → el siguiente es más exigente. Y así.</a:t>
+              <a:t>Aprobás ese paso → el siguiente es peor. Nunca hay un último paso.</a:t>
             </a:r>
             <a:endParaRPr lang="en-US" sz="1950" b="0" u="none" strike="noStrike">
               <a:solidFill>
@@ -7955,8 +7955,8 @@
         </p:nvSpPr>
         <p:spPr>
           <a:xfrm>
-            <a:off x="2951280" y="5331960"/>
-            <a:ext cx="6204600" cy="425520"/>
+            <a:off x="3637080" y="5103360"/>
+            <a:ext cx="4869720" cy="425520"/>
           </a:xfrm>
           <a:prstGeom prst="rect">
             <a:avLst/>
@@ -7982,7 +7982,7 @@
                 <a:latin typeface="Arial"/>
                 <a:ea typeface="Arial"/>
               </a:rPr>
-              <a:t>No está hecho para que apruebes.</a:t>
+              <a:t>Tranquilo: nada se guarda.</a:t>
             </a:r>
             <a:endParaRPr lang="en-US" sz="3000" b="0" u="none" strike="noStrike">
               <a:solidFill>
@@ -8003,8 +8003,8 @@
         </p:nvSpPr>
         <p:spPr>
           <a:xfrm>
-            <a:off x="2713320" y="5789160"/>
-            <a:ext cx="6669720" cy="425520"/>
+            <a:off x="2141640" y="5560560"/>
+            <a:ext cx="7792200" cy="425520"/>
           </a:xfrm>
           <a:prstGeom prst="rect">
             <a:avLst/>
@@ -8030,7 +8030,7 @@
                 <a:latin typeface="Arial"/>
                 <a:ea typeface="Arial"/>
               </a:rPr>
-              <a:t>Está hecho para que </a:t>
+              <a:t>Eso es, palabra por palabra, lo que diría </a:t>
             </a:r>
             <a:r>
               <a:rPr lang="en-US" sz="3000" b="1" u="none" strike="noStrike">
@@ -8042,7 +8042,55 @@
                 <a:latin typeface="Arial"/>
                 <a:ea typeface="Arial"/>
               </a:rPr>
-              <a:t>te lo preguntes</a:t>
+              <a:t>un</a:t>
+            </a:r>
+            <a:endParaRPr lang="en-US" sz="3000" b="0" u="none" strike="noStrike">
+              <a:solidFill>
+                <a:srgbClr val="000000"/>
+              </a:solidFill>
+              <a:effectLst/>
+              <a:uFillTx/>
+              <a:latin typeface="Times New Roman"/>
+            </a:endParaRPr>
+          </a:p>
+        </p:txBody>
+      </p:sp>
+      <p:sp>
+        <p:nvSpPr>
+          <p:cNvPr id="77" name=""/>
+          <p:cNvSpPr txBox="1"/>
+          <p:nvPr/>
+        </p:nvSpPr>
+        <p:spPr>
+          <a:xfrm>
+            <a:off x="3756240" y="6017760"/>
+            <a:ext cx="4615920" cy="425520"/>
+          </a:xfrm>
+          <a:prstGeom prst="rect">
+            <a:avLst/>
+          </a:prstGeom>
+          <a:noFill/>
+          <a:ln w="0">
+            <a:noFill/>
+          </a:ln>
+        </p:spPr>
+        <p:txBody>
+          <a:bodyPr wrap="none" lIns="0" tIns="0" rIns="0" bIns="0" anchor="t">
+            <a:spAutoFit/>
+          </a:bodyPr>
+          <a:p>
+            <a:pPr/>
+            <a:r>
+              <a:rPr lang="en-US" sz="3000" b="1" u="none" strike="noStrike">
+                <a:solidFill>
+                  <a:srgbClr val="3DDC84"/>
+                </a:solidFill>
+                <a:effectLst/>
+                <a:uFillTx/>
+                <a:latin typeface="Arial"/>
+                <a:ea typeface="Arial"/>
+              </a:rPr>
+              <a:t>sistema que guarda todo</a:t>
             </a:r>
             <a:r>
               <a:rPr lang="en-US" sz="3000" b="1" u="none" strike="noStrike">
@@ -8069,7 +8117,7 @@
       </p:sp>
       <p:sp>
         <p:nvSpPr>
-          <p:cNvPr id="77" name=""/>
+          <p:cNvPr id="78" name=""/>
           <p:cNvSpPr txBox="1"/>
           <p:nvPr/>
         </p:nvSpPr>
@@ -8147,7 +8195,7 @@
       </p:grpSpPr>
       <p:sp>
         <p:nvSpPr>
-          <p:cNvPr id="78" name=""/>
+          <p:cNvPr id="79" name=""/>
           <p:cNvSpPr/>
           <p:nvPr/>
         </p:nvSpPr>
@@ -8207,7 +8255,7 @@
       </p:sp>
       <p:sp>
         <p:nvSpPr>
-          <p:cNvPr id="79" name=""/>
+          <p:cNvPr id="80" name=""/>
           <p:cNvSpPr/>
           <p:nvPr/>
         </p:nvSpPr>
@@ -8267,7 +8315,7 @@
       </p:sp>
       <p:sp>
         <p:nvSpPr>
-          <p:cNvPr id="80" name=""/>
+          <p:cNvPr id="81" name=""/>
           <p:cNvSpPr/>
           <p:nvPr/>
         </p:nvSpPr>
@@ -8327,7 +8375,7 @@
       </p:sp>
       <p:sp>
         <p:nvSpPr>
-          <p:cNvPr id="81" name=""/>
+          <p:cNvPr id="82" name=""/>
           <p:cNvSpPr/>
           <p:nvPr/>
         </p:nvSpPr>
@@ -8547,7 +8595,7 @@
       </p:sp>
       <p:sp>
         <p:nvSpPr>
-          <p:cNvPr id="82" name=""/>
+          <p:cNvPr id="83" name=""/>
           <p:cNvSpPr/>
           <p:nvPr/>
         </p:nvSpPr>
@@ -8632,7 +8680,7 @@
       </p:sp>
       <p:sp>
         <p:nvSpPr>
-          <p:cNvPr id="83" name=""/>
+          <p:cNvPr id="84" name=""/>
           <p:cNvSpPr/>
           <p:nvPr/>
         </p:nvSpPr>
@@ -8717,7 +8765,7 @@
       </p:sp>
       <p:sp>
         <p:nvSpPr>
-          <p:cNvPr id="84" name=""/>
+          <p:cNvPr id="85" name=""/>
           <p:cNvSpPr/>
           <p:nvPr/>
         </p:nvSpPr>
@@ -8797,7 +8845,7 @@
       </p:sp>
       <p:sp>
         <p:nvSpPr>
-          <p:cNvPr id="85" name=""/>
+          <p:cNvPr id="86" name=""/>
           <p:cNvSpPr/>
           <p:nvPr/>
         </p:nvSpPr>
@@ -8887,7 +8935,7 @@
       </p:sp>
       <p:sp>
         <p:nvSpPr>
-          <p:cNvPr id="86" name=""/>
+          <p:cNvPr id="87" name=""/>
           <p:cNvSpPr txBox="1"/>
           <p:nvPr/>
         </p:nvSpPr>
@@ -8935,7 +8983,7 @@
       </p:sp>
       <p:sp>
         <p:nvSpPr>
-          <p:cNvPr id="87" name=""/>
+          <p:cNvPr id="88" name=""/>
           <p:cNvSpPr txBox="1"/>
           <p:nvPr/>
         </p:nvSpPr>
@@ -8983,7 +9031,7 @@
       </p:sp>
       <p:sp>
         <p:nvSpPr>
-          <p:cNvPr id="88" name=""/>
+          <p:cNvPr id="89" name=""/>
           <p:cNvSpPr txBox="1"/>
           <p:nvPr/>
         </p:nvSpPr>
@@ -9031,7 +9079,7 @@
       </p:sp>
       <p:sp>
         <p:nvSpPr>
-          <p:cNvPr id="89" name=""/>
+          <p:cNvPr id="90" name=""/>
           <p:cNvSpPr/>
           <p:nvPr/>
         </p:nvSpPr>
@@ -9251,7 +9299,7 @@
       </p:sp>
       <p:sp>
         <p:nvSpPr>
-          <p:cNvPr id="90" name=""/>
+          <p:cNvPr id="91" name=""/>
           <p:cNvSpPr/>
           <p:nvPr/>
         </p:nvSpPr>
@@ -9334,7 +9382,7 @@
       </p:sp>
       <p:sp>
         <p:nvSpPr>
-          <p:cNvPr id="91" name=""/>
+          <p:cNvPr id="92" name=""/>
           <p:cNvSpPr/>
           <p:nvPr/>
         </p:nvSpPr>
@@ -9417,7 +9465,7 @@
       </p:sp>
       <p:sp>
         <p:nvSpPr>
-          <p:cNvPr id="92" name=""/>
+          <p:cNvPr id="93" name=""/>
           <p:cNvSpPr/>
           <p:nvPr/>
         </p:nvSpPr>
@@ -9497,7 +9545,7 @@
       </p:sp>
       <p:sp>
         <p:nvSpPr>
-          <p:cNvPr id="93" name=""/>
+          <p:cNvPr id="94" name=""/>
           <p:cNvSpPr/>
           <p:nvPr/>
         </p:nvSpPr>
@@ -9587,7 +9635,7 @@
       </p:sp>
       <p:sp>
         <p:nvSpPr>
-          <p:cNvPr id="94" name=""/>
+          <p:cNvPr id="95" name=""/>
           <p:cNvSpPr txBox="1"/>
           <p:nvPr/>
         </p:nvSpPr>
@@ -9635,7 +9683,7 @@
       </p:sp>
       <p:sp>
         <p:nvSpPr>
-          <p:cNvPr id="95" name=""/>
+          <p:cNvPr id="96" name=""/>
           <p:cNvSpPr txBox="1"/>
           <p:nvPr/>
         </p:nvSpPr>
@@ -9683,7 +9731,7 @@
       </p:sp>
       <p:sp>
         <p:nvSpPr>
-          <p:cNvPr id="96" name=""/>
+          <p:cNvPr id="97" name=""/>
           <p:cNvSpPr txBox="1"/>
           <p:nvPr/>
         </p:nvSpPr>
@@ -9731,7 +9779,7 @@
       </p:sp>
       <p:sp>
         <p:nvSpPr>
-          <p:cNvPr id="97" name=""/>
+          <p:cNvPr id="98" name=""/>
           <p:cNvSpPr/>
           <p:nvPr/>
         </p:nvSpPr>
@@ -9951,7 +9999,7 @@
       </p:sp>
       <p:sp>
         <p:nvSpPr>
-          <p:cNvPr id="98" name=""/>
+          <p:cNvPr id="99" name=""/>
           <p:cNvSpPr/>
           <p:nvPr/>
         </p:nvSpPr>
@@ -10034,7 +10082,7 @@
       </p:sp>
       <p:sp>
         <p:nvSpPr>
-          <p:cNvPr id="99" name=""/>
+          <p:cNvPr id="100" name=""/>
           <p:cNvSpPr/>
           <p:nvPr/>
         </p:nvSpPr>
@@ -10117,7 +10165,7 @@
       </p:sp>
       <p:sp>
         <p:nvSpPr>
-          <p:cNvPr id="100" name=""/>
+          <p:cNvPr id="101" name=""/>
           <p:cNvSpPr/>
           <p:nvPr/>
         </p:nvSpPr>
@@ -10197,7 +10245,7 @@
       </p:sp>
       <p:sp>
         <p:nvSpPr>
-          <p:cNvPr id="101" name=""/>
+          <p:cNvPr id="102" name=""/>
           <p:cNvSpPr/>
           <p:nvPr/>
         </p:nvSpPr>
@@ -10287,7 +10335,7 @@
       </p:sp>
       <p:sp>
         <p:nvSpPr>
-          <p:cNvPr id="102" name=""/>
+          <p:cNvPr id="103" name=""/>
           <p:cNvSpPr txBox="1"/>
           <p:nvPr/>
         </p:nvSpPr>
@@ -10335,7 +10383,7 @@
       </p:sp>
       <p:sp>
         <p:nvSpPr>
-          <p:cNvPr id="103" name=""/>
+          <p:cNvPr id="104" name=""/>
           <p:cNvSpPr txBox="1"/>
           <p:nvPr/>
         </p:nvSpPr>
@@ -10383,7 +10431,7 @@
       </p:sp>
       <p:sp>
         <p:nvSpPr>
-          <p:cNvPr id="104" name=""/>
+          <p:cNvPr id="105" name=""/>
           <p:cNvSpPr txBox="1"/>
           <p:nvPr/>
         </p:nvSpPr>
@@ -10431,7 +10479,7 @@
       </p:sp>
       <p:sp>
         <p:nvSpPr>
-          <p:cNvPr id="105" name=""/>
+          <p:cNvPr id="106" name=""/>
           <p:cNvSpPr/>
           <p:nvPr/>
         </p:nvSpPr>
@@ -10651,7 +10699,7 @@
       </p:sp>
       <p:sp>
         <p:nvSpPr>
-          <p:cNvPr id="106" name=""/>
+          <p:cNvPr id="107" name=""/>
           <p:cNvSpPr/>
           <p:nvPr/>
         </p:nvSpPr>
@@ -10736,7 +10784,7 @@
       </p:sp>
       <p:sp>
         <p:nvSpPr>
-          <p:cNvPr id="107" name=""/>
+          <p:cNvPr id="108" name=""/>
           <p:cNvSpPr/>
           <p:nvPr/>
         </p:nvSpPr>
@@ -10819,7 +10867,7 @@
       </p:sp>
       <p:sp>
         <p:nvSpPr>
-          <p:cNvPr id="108" name=""/>
+          <p:cNvPr id="109" name=""/>
           <p:cNvSpPr/>
           <p:nvPr/>
         </p:nvSpPr>
@@ -10899,7 +10947,7 @@
       </p:sp>
       <p:sp>
         <p:nvSpPr>
-          <p:cNvPr id="109" name=""/>
+          <p:cNvPr id="110" name=""/>
           <p:cNvSpPr/>
           <p:nvPr/>
         </p:nvSpPr>
@@ -10989,7 +11037,7 @@
       </p:sp>
       <p:sp>
         <p:nvSpPr>
-          <p:cNvPr id="110" name=""/>
+          <p:cNvPr id="111" name=""/>
           <p:cNvSpPr txBox="1"/>
           <p:nvPr/>
         </p:nvSpPr>
@@ -11037,7 +11085,7 @@
       </p:sp>
       <p:sp>
         <p:nvSpPr>
-          <p:cNvPr id="111" name=""/>
+          <p:cNvPr id="112" name=""/>
           <p:cNvSpPr txBox="1"/>
           <p:nvPr/>
         </p:nvSpPr>
@@ -11085,7 +11133,7 @@
       </p:sp>
       <p:sp>
         <p:nvSpPr>
-          <p:cNvPr id="112" name=""/>
+          <p:cNvPr id="113" name=""/>
           <p:cNvSpPr txBox="1"/>
           <p:nvPr/>
         </p:nvSpPr>
@@ -11133,7 +11181,7 @@
       </p:sp>
       <p:sp>
         <p:nvSpPr>
-          <p:cNvPr id="113" name=""/>
+          <p:cNvPr id="114" name=""/>
           <p:cNvSpPr txBox="1"/>
           <p:nvPr/>
         </p:nvSpPr>
@@ -11181,7 +11229,7 @@
       </p:sp>
       <p:sp>
         <p:nvSpPr>
-          <p:cNvPr id="114" name=""/>
+          <p:cNvPr id="115" name=""/>
           <p:cNvSpPr txBox="1"/>
           <p:nvPr/>
         </p:nvSpPr>
@@ -11259,7 +11307,7 @@
       </p:grpSpPr>
       <p:sp>
         <p:nvSpPr>
-          <p:cNvPr id="115" name=""/>
+          <p:cNvPr id="116" name=""/>
           <p:cNvSpPr/>
           <p:nvPr/>
         </p:nvSpPr>
@@ -11319,7 +11367,7 @@
       </p:sp>
       <p:sp>
         <p:nvSpPr>
-          <p:cNvPr id="116" name=""/>
+          <p:cNvPr id="117" name=""/>
           <p:cNvSpPr/>
           <p:nvPr/>
         </p:nvSpPr>
@@ -11379,7 +11427,7 @@
       </p:sp>
       <p:sp>
         <p:nvSpPr>
-          <p:cNvPr id="117" name=""/>
+          <p:cNvPr id="118" name=""/>
           <p:cNvSpPr/>
           <p:nvPr/>
         </p:nvSpPr>
@@ -11439,7 +11487,7 @@
       </p:sp>
       <p:sp>
         <p:nvSpPr>
-          <p:cNvPr id="118" name=""/>
+          <p:cNvPr id="119" name=""/>
           <p:cNvSpPr txBox="1"/>
           <p:nvPr/>
         </p:nvSpPr>
@@ -11487,7 +11535,7 @@
       </p:sp>
       <p:sp>
         <p:nvSpPr>
-          <p:cNvPr id="119" name=""/>
+          <p:cNvPr id="120" name=""/>
           <p:cNvSpPr/>
           <p:nvPr/>
         </p:nvSpPr>
@@ -11707,7 +11755,7 @@
       </p:sp>
       <p:sp>
         <p:nvSpPr>
-          <p:cNvPr id="120" name=""/>
+          <p:cNvPr id="121" name=""/>
           <p:cNvSpPr/>
           <p:nvPr/>
         </p:nvSpPr>
@@ -11928,7 +11976,7 @@
       </p:sp>
       <p:pic>
         <p:nvPicPr>
-          <p:cNvPr id="121" name=""/>
+          <p:cNvPr id="122" name=""/>
           <p:cNvPicPr/>
           <p:nvPr/>
         </p:nvPicPr>
@@ -11952,7 +12000,7 @@
       </p:pic>
       <p:sp>
         <p:nvSpPr>
-          <p:cNvPr id="122" name=""/>
+          <p:cNvPr id="123" name=""/>
           <p:cNvSpPr txBox="1"/>
           <p:nvPr/>
         </p:nvSpPr>
@@ -12000,7 +12048,7 @@
       </p:sp>
       <p:sp>
         <p:nvSpPr>
-          <p:cNvPr id="123" name=""/>
+          <p:cNvPr id="124" name=""/>
           <p:cNvSpPr txBox="1"/>
           <p:nvPr/>
         </p:nvSpPr>
@@ -12048,7 +12096,7 @@
       </p:sp>
       <p:sp>
         <p:nvSpPr>
-          <p:cNvPr id="124" name=""/>
+          <p:cNvPr id="125" name=""/>
           <p:cNvSpPr txBox="1"/>
           <p:nvPr/>
         </p:nvSpPr>
@@ -12126,7 +12174,7 @@
       </p:grpSpPr>
       <p:sp>
         <p:nvSpPr>
-          <p:cNvPr id="125" name=""/>
+          <p:cNvPr id="126" name=""/>
           <p:cNvSpPr/>
           <p:nvPr/>
         </p:nvSpPr>
@@ -12186,7 +12234,7 @@
       </p:sp>
       <p:sp>
         <p:nvSpPr>
-          <p:cNvPr id="126" name=""/>
+          <p:cNvPr id="127" name=""/>
           <p:cNvSpPr/>
           <p:nvPr/>
         </p:nvSpPr>
@@ -12246,7 +12294,7 @@
       </p:sp>
       <p:sp>
         <p:nvSpPr>
-          <p:cNvPr id="127" name=""/>
+          <p:cNvPr id="128" name=""/>
           <p:cNvSpPr/>
           <p:nvPr/>
         </p:nvSpPr>
@@ -12306,7 +12354,7 @@
       </p:sp>
       <p:sp>
         <p:nvSpPr>
-          <p:cNvPr id="128" name=""/>
+          <p:cNvPr id="129" name=""/>
           <p:cNvSpPr/>
           <p:nvPr/>
         </p:nvSpPr>
@@ -12446,7 +12494,7 @@
       </p:sp>
       <p:sp>
         <p:nvSpPr>
-          <p:cNvPr id="129" name=""/>
+          <p:cNvPr id="130" name=""/>
           <p:cNvSpPr/>
           <p:nvPr/>
         </p:nvSpPr>
@@ -12587,7 +12635,7 @@
       </p:sp>
       <p:sp>
         <p:nvSpPr>
-          <p:cNvPr id="130" name=""/>
+          <p:cNvPr id="131" name=""/>
           <p:cNvSpPr txBox="1"/>
           <p:nvPr/>
         </p:nvSpPr>
@@ -12635,7 +12683,7 @@
       </p:sp>
       <p:sp>
         <p:nvSpPr>
-          <p:cNvPr id="131" name=""/>
+          <p:cNvPr id="132" name=""/>
           <p:cNvSpPr/>
           <p:nvPr/>
         </p:nvSpPr>
@@ -12775,7 +12823,7 @@
       </p:sp>
       <p:sp>
         <p:nvSpPr>
-          <p:cNvPr id="132" name=""/>
+          <p:cNvPr id="133" name=""/>
           <p:cNvSpPr/>
           <p:nvPr/>
         </p:nvSpPr>
@@ -12916,7 +12964,7 @@
       </p:sp>
       <p:sp>
         <p:nvSpPr>
-          <p:cNvPr id="133" name=""/>
+          <p:cNvPr id="134" name=""/>
           <p:cNvSpPr txBox="1"/>
           <p:nvPr/>
         </p:nvSpPr>
@@ -12964,7 +13012,7 @@
       </p:sp>
       <p:sp>
         <p:nvSpPr>
-          <p:cNvPr id="134" name=""/>
+          <p:cNvPr id="135" name=""/>
           <p:cNvSpPr/>
           <p:nvPr/>
         </p:nvSpPr>
@@ -13104,7 +13152,7 @@
       </p:sp>
       <p:sp>
         <p:nvSpPr>
-          <p:cNvPr id="135" name=""/>
+          <p:cNvPr id="136" name=""/>
           <p:cNvSpPr/>
           <p:nvPr/>
         </p:nvSpPr>
@@ -13245,7 +13293,7 @@
       </p:sp>
       <p:sp>
         <p:nvSpPr>
-          <p:cNvPr id="136" name=""/>
+          <p:cNvPr id="137" name=""/>
           <p:cNvSpPr txBox="1"/>
           <p:nvPr/>
         </p:nvSpPr>
@@ -13293,7 +13341,7 @@
       </p:sp>
       <p:sp>
         <p:nvSpPr>
-          <p:cNvPr id="137" name=""/>
+          <p:cNvPr id="138" name=""/>
           <p:cNvSpPr/>
           <p:nvPr/>
         </p:nvSpPr>
@@ -13433,7 +13481,7 @@
       </p:sp>
       <p:sp>
         <p:nvSpPr>
-          <p:cNvPr id="138" name=""/>
+          <p:cNvPr id="139" name=""/>
           <p:cNvSpPr/>
           <p:nvPr/>
         </p:nvSpPr>
@@ -13574,7 +13622,7 @@
       </p:sp>
       <p:sp>
         <p:nvSpPr>
-          <p:cNvPr id="139" name=""/>
+          <p:cNvPr id="140" name=""/>
           <p:cNvSpPr txBox="1"/>
           <p:nvPr/>
         </p:nvSpPr>
@@ -13622,7 +13670,7 @@
       </p:sp>
       <p:sp>
         <p:nvSpPr>
-          <p:cNvPr id="140" name=""/>
+          <p:cNvPr id="141" name=""/>
           <p:cNvSpPr/>
           <p:nvPr/>
         </p:nvSpPr>
@@ -13762,7 +13810,7 @@
       </p:sp>
       <p:sp>
         <p:nvSpPr>
-          <p:cNvPr id="141" name=""/>
+          <p:cNvPr id="142" name=""/>
           <p:cNvSpPr/>
           <p:nvPr/>
         </p:nvSpPr>
@@ -13903,7 +13951,7 @@
       </p:sp>
       <p:sp>
         <p:nvSpPr>
-          <p:cNvPr id="142" name=""/>
+          <p:cNvPr id="143" name=""/>
           <p:cNvSpPr txBox="1"/>
           <p:nvPr/>
         </p:nvSpPr>
@@ -13951,7 +13999,7 @@
       </p:sp>
       <p:sp>
         <p:nvSpPr>
-          <p:cNvPr id="143" name=""/>
+          <p:cNvPr id="144" name=""/>
           <p:cNvSpPr/>
           <p:nvPr/>
         </p:nvSpPr>
@@ -14091,7 +14139,7 @@
       </p:sp>
       <p:sp>
         <p:nvSpPr>
-          <p:cNvPr id="144" name=""/>
+          <p:cNvPr id="145" name=""/>
           <p:cNvSpPr/>
           <p:nvPr/>
         </p:nvSpPr>
@@ -14232,7 +14280,7 @@
       </p:sp>
       <p:sp>
         <p:nvSpPr>
-          <p:cNvPr id="145" name=""/>
+          <p:cNvPr id="146" name=""/>
           <p:cNvSpPr txBox="1"/>
           <p:nvPr/>
         </p:nvSpPr>
@@ -14280,7 +14328,7 @@
       </p:sp>
       <p:sp>
         <p:nvSpPr>
-          <p:cNvPr id="146" name=""/>
+          <p:cNvPr id="147" name=""/>
           <p:cNvSpPr/>
           <p:nvPr/>
         </p:nvSpPr>
@@ -14420,7 +14468,7 @@
       </p:sp>
       <p:sp>
         <p:nvSpPr>
-          <p:cNvPr id="147" name=""/>
+          <p:cNvPr id="148" name=""/>
           <p:cNvSpPr/>
           <p:nvPr/>
         </p:nvSpPr>
@@ -14561,7 +14609,7 @@
       </p:sp>
       <p:sp>
         <p:nvSpPr>
-          <p:cNvPr id="148" name=""/>
+          <p:cNvPr id="149" name=""/>
           <p:cNvSpPr txBox="1"/>
           <p:nvPr/>
         </p:nvSpPr>
@@ -14609,7 +14657,7 @@
       </p:sp>
       <p:sp>
         <p:nvSpPr>
-          <p:cNvPr id="149" name=""/>
+          <p:cNvPr id="150" name=""/>
           <p:cNvSpPr/>
           <p:nvPr/>
         </p:nvSpPr>
@@ -14749,7 +14797,7 @@
       </p:sp>
       <p:sp>
         <p:nvSpPr>
-          <p:cNvPr id="150" name=""/>
+          <p:cNvPr id="151" name=""/>
           <p:cNvSpPr/>
           <p:nvPr/>
         </p:nvSpPr>
@@ -14890,7 +14938,7 @@
       </p:sp>
       <p:sp>
         <p:nvSpPr>
-          <p:cNvPr id="151" name=""/>
+          <p:cNvPr id="152" name=""/>
           <p:cNvSpPr txBox="1"/>
           <p:nvPr/>
         </p:nvSpPr>
@@ -14938,7 +14986,7 @@
       </p:sp>
       <p:sp>
         <p:nvSpPr>
-          <p:cNvPr id="152" name=""/>
+          <p:cNvPr id="153" name=""/>
           <p:cNvSpPr/>
           <p:nvPr/>
         </p:nvSpPr>
@@ -15078,7 +15126,7 @@
       </p:sp>
       <p:sp>
         <p:nvSpPr>
-          <p:cNvPr id="153" name=""/>
+          <p:cNvPr id="154" name=""/>
           <p:cNvSpPr/>
           <p:nvPr/>
         </p:nvSpPr>
@@ -15219,7 +15267,7 @@
       </p:sp>
       <p:sp>
         <p:nvSpPr>
-          <p:cNvPr id="154" name=""/>
+          <p:cNvPr id="155" name=""/>
           <p:cNvSpPr txBox="1"/>
           <p:nvPr/>
         </p:nvSpPr>
@@ -15267,7 +15315,7 @@
       </p:sp>
       <p:sp>
         <p:nvSpPr>
-          <p:cNvPr id="155" name=""/>
+          <p:cNvPr id="156" name=""/>
           <p:cNvSpPr/>
           <p:nvPr/>
         </p:nvSpPr>
@@ -15407,7 +15455,7 @@
       </p:sp>
       <p:sp>
         <p:nvSpPr>
-          <p:cNvPr id="156" name=""/>
+          <p:cNvPr id="157" name=""/>
           <p:cNvSpPr/>
           <p:nvPr/>
         </p:nvSpPr>
@@ -15548,7 +15596,7 @@
       </p:sp>
       <p:sp>
         <p:nvSpPr>
-          <p:cNvPr id="157" name=""/>
+          <p:cNvPr id="158" name=""/>
           <p:cNvSpPr txBox="1"/>
           <p:nvPr/>
         </p:nvSpPr>
@@ -15596,7 +15644,7 @@
       </p:sp>
       <p:sp>
         <p:nvSpPr>
-          <p:cNvPr id="158" name=""/>
+          <p:cNvPr id="159" name=""/>
           <p:cNvSpPr/>
           <p:nvPr/>
         </p:nvSpPr>
@@ -15736,7 +15784,7 @@
       </p:sp>
       <p:sp>
         <p:nvSpPr>
-          <p:cNvPr id="159" name=""/>
+          <p:cNvPr id="160" name=""/>
           <p:cNvSpPr/>
           <p:nvPr/>
         </p:nvSpPr>
@@ -15877,7 +15925,7 @@
       </p:sp>
       <p:sp>
         <p:nvSpPr>
-          <p:cNvPr id="160" name=""/>
+          <p:cNvPr id="161" name=""/>
           <p:cNvSpPr txBox="1"/>
           <p:nvPr/>
         </p:nvSpPr>
@@ -15925,7 +15973,7 @@
       </p:sp>
       <p:sp>
         <p:nvSpPr>
-          <p:cNvPr id="161" name=""/>
+          <p:cNvPr id="162" name=""/>
           <p:cNvSpPr txBox="1"/>
           <p:nvPr/>
         </p:nvSpPr>
@@ -15973,7 +16021,7 @@
       </p:sp>
       <p:sp>
         <p:nvSpPr>
-          <p:cNvPr id="162" name=""/>
+          <p:cNvPr id="163" name=""/>
           <p:cNvSpPr txBox="1"/>
           <p:nvPr/>
         </p:nvSpPr>
@@ -16021,7 +16069,7 @@
       </p:sp>
       <p:sp>
         <p:nvSpPr>
-          <p:cNvPr id="163" name=""/>
+          <p:cNvPr id="164" name=""/>
           <p:cNvSpPr txBox="1"/>
           <p:nvPr/>
         </p:nvSpPr>
@@ -16093,7 +16141,7 @@
       </p:sp>
       <p:sp>
         <p:nvSpPr>
-          <p:cNvPr id="164" name=""/>
+          <p:cNvPr id="165" name=""/>
           <p:cNvSpPr txBox="1"/>
           <p:nvPr/>
         </p:nvSpPr>
@@ -16141,7 +16189,7 @@
       </p:sp>
       <p:sp>
         <p:nvSpPr>
-          <p:cNvPr id="165" name=""/>
+          <p:cNvPr id="166" name=""/>
           <p:cNvSpPr txBox="1"/>
           <p:nvPr/>
         </p:nvSpPr>
@@ -16225,7 +16273,7 @@
       </p:sp>
       <p:sp>
         <p:nvSpPr>
-          <p:cNvPr id="166" name=""/>
+          <p:cNvPr id="167" name=""/>
           <p:cNvSpPr txBox="1"/>
           <p:nvPr/>
         </p:nvSpPr>
@@ -16273,7 +16321,7 @@
       </p:sp>
       <p:sp>
         <p:nvSpPr>
-          <p:cNvPr id="167" name=""/>
+          <p:cNvPr id="168" name=""/>
           <p:cNvSpPr txBox="1"/>
           <p:nvPr/>
         </p:nvSpPr>
@@ -16321,7 +16369,7 @@
       </p:sp>
       <p:sp>
         <p:nvSpPr>
-          <p:cNvPr id="168" name=""/>
+          <p:cNvPr id="169" name=""/>
           <p:cNvSpPr txBox="1"/>
           <p:nvPr/>
         </p:nvSpPr>
@@ -16381,7 +16429,7 @@
       </p:sp>
       <p:sp>
         <p:nvSpPr>
-          <p:cNvPr id="169" name=""/>
+          <p:cNvPr id="170" name=""/>
           <p:cNvSpPr txBox="1"/>
           <p:nvPr/>
         </p:nvSpPr>
@@ -16429,7 +16477,7 @@
       </p:sp>
       <p:sp>
         <p:nvSpPr>
-          <p:cNvPr id="170" name=""/>
+          <p:cNvPr id="171" name=""/>
           <p:cNvSpPr txBox="1"/>
           <p:nvPr/>
         </p:nvSpPr>
@@ -16513,7 +16561,7 @@
       </p:sp>
       <p:sp>
         <p:nvSpPr>
-          <p:cNvPr id="171" name=""/>
+          <p:cNvPr id="172" name=""/>
           <p:cNvSpPr txBox="1"/>
           <p:nvPr/>
         </p:nvSpPr>
@@ -16561,7 +16609,7 @@
       </p:sp>
       <p:sp>
         <p:nvSpPr>
-          <p:cNvPr id="172" name=""/>
+          <p:cNvPr id="173" name=""/>
           <p:cNvSpPr txBox="1"/>
           <p:nvPr/>
         </p:nvSpPr>
@@ -16609,7 +16657,7 @@
       </p:sp>
       <p:sp>
         <p:nvSpPr>
-          <p:cNvPr id="173" name=""/>
+          <p:cNvPr id="174" name=""/>
           <p:cNvSpPr txBox="1"/>
           <p:nvPr/>
         </p:nvSpPr>
@@ -16669,7 +16717,7 @@
       </p:sp>
       <p:sp>
         <p:nvSpPr>
-          <p:cNvPr id="174" name=""/>
+          <p:cNvPr id="175" name=""/>
           <p:cNvSpPr txBox="1"/>
           <p:nvPr/>
         </p:nvSpPr>
@@ -16747,7 +16795,7 @@
       </p:grpSpPr>
       <p:sp>
         <p:nvSpPr>
-          <p:cNvPr id="175" name=""/>
+          <p:cNvPr id="176" name=""/>
           <p:cNvSpPr/>
           <p:nvPr/>
         </p:nvSpPr>
@@ -16807,7 +16855,7 @@
       </p:sp>
       <p:sp>
         <p:nvSpPr>
-          <p:cNvPr id="176" name=""/>
+          <p:cNvPr id="177" name=""/>
           <p:cNvSpPr/>
           <p:nvPr/>
         </p:nvSpPr>
@@ -16867,7 +16915,7 @@
       </p:sp>
       <p:sp>
         <p:nvSpPr>
-          <p:cNvPr id="177" name=""/>
+          <p:cNvPr id="178" name=""/>
           <p:cNvSpPr/>
           <p:nvPr/>
         </p:nvSpPr>
@@ -16927,7 +16975,7 @@
       </p:sp>
       <p:sp>
         <p:nvSpPr>
-          <p:cNvPr id="178" name=""/>
+          <p:cNvPr id="179" name=""/>
           <p:cNvSpPr txBox="1"/>
           <p:nvPr/>
         </p:nvSpPr>
@@ -16975,7 +17023,7 @@
       </p:sp>
       <p:sp>
         <p:nvSpPr>
-          <p:cNvPr id="179" name=""/>
+          <p:cNvPr id="180" name=""/>
           <p:cNvSpPr txBox="1"/>
           <p:nvPr/>
         </p:nvSpPr>
@@ -17035,7 +17083,7 @@
       </p:sp>
       <p:sp>
         <p:nvSpPr>
-          <p:cNvPr id="180" name=""/>
+          <p:cNvPr id="181" name=""/>
           <p:cNvSpPr txBox="1"/>
           <p:nvPr/>
         </p:nvSpPr>
@@ -17095,7 +17143,7 @@
       </p:sp>
       <p:sp>
         <p:nvSpPr>
-          <p:cNvPr id="181" name=""/>
+          <p:cNvPr id="182" name=""/>
           <p:cNvSpPr txBox="1"/>
           <p:nvPr/>
         </p:nvSpPr>
@@ -17143,7 +17191,7 @@
       </p:sp>
       <p:sp>
         <p:nvSpPr>
-          <p:cNvPr id="182" name=""/>
+          <p:cNvPr id="183" name=""/>
           <p:cNvSpPr txBox="1"/>
           <p:nvPr/>
         </p:nvSpPr>
@@ -17191,7 +17239,7 @@
       </p:sp>
       <p:sp>
         <p:nvSpPr>
-          <p:cNvPr id="183" name=""/>
+          <p:cNvPr id="184" name=""/>
           <p:cNvSpPr txBox="1"/>
           <p:nvPr/>
         </p:nvSpPr>
@@ -17239,7 +17287,7 @@
       </p:sp>
       <p:sp>
         <p:nvSpPr>
-          <p:cNvPr id="184" name=""/>
+          <p:cNvPr id="185" name=""/>
           <p:cNvSpPr txBox="1"/>
           <p:nvPr/>
         </p:nvSpPr>
@@ -17287,7 +17335,7 @@
       </p:sp>
       <p:sp>
         <p:nvSpPr>
-          <p:cNvPr id="185" name=""/>
+          <p:cNvPr id="186" name=""/>
           <p:cNvSpPr txBox="1"/>
           <p:nvPr/>
         </p:nvSpPr>
@@ -17335,7 +17383,7 @@
       </p:sp>
       <p:sp>
         <p:nvSpPr>
-          <p:cNvPr id="186" name=""/>
+          <p:cNvPr id="187" name=""/>
           <p:cNvSpPr txBox="1"/>
           <p:nvPr/>
         </p:nvSpPr>
@@ -17383,7 +17431,7 @@
       </p:sp>
       <p:sp>
         <p:nvSpPr>
-          <p:cNvPr id="187" name=""/>
+          <p:cNvPr id="188" name=""/>
           <p:cNvSpPr txBox="1"/>
           <p:nvPr/>
         </p:nvSpPr>
@@ -17461,7 +17509,7 @@
       </p:grpSpPr>
       <p:sp>
         <p:nvSpPr>
-          <p:cNvPr id="188" name=""/>
+          <p:cNvPr id="189" name=""/>
           <p:cNvSpPr/>
           <p:nvPr/>
         </p:nvSpPr>
@@ -17521,7 +17569,7 @@
       </p:sp>
       <p:sp>
         <p:nvSpPr>
-          <p:cNvPr id="189" name=""/>
+          <p:cNvPr id="190" name=""/>
           <p:cNvSpPr/>
           <p:nvPr/>
         </p:nvSpPr>
@@ -17581,7 +17629,7 @@
       </p:sp>
       <p:sp>
         <p:nvSpPr>
-          <p:cNvPr id="190" name=""/>
+          <p:cNvPr id="191" name=""/>
           <p:cNvSpPr/>
           <p:nvPr/>
         </p:nvSpPr>
@@ -17641,7 +17689,7 @@
       </p:sp>
       <p:sp>
         <p:nvSpPr>
-          <p:cNvPr id="191" name=""/>
+          <p:cNvPr id="192" name=""/>
           <p:cNvSpPr txBox="1"/>
           <p:nvPr/>
         </p:nvSpPr>
@@ -17689,7 +17737,7 @@
       </p:sp>
       <p:sp>
         <p:nvSpPr>
-          <p:cNvPr id="192" name=""/>
+          <p:cNvPr id="193" name=""/>
           <p:cNvSpPr txBox="1"/>
           <p:nvPr/>
         </p:nvSpPr>
@@ -17737,7 +17785,7 @@
       </p:sp>
       <p:sp>
         <p:nvSpPr>
-          <p:cNvPr id="193" name=""/>
+          <p:cNvPr id="194" name=""/>
           <p:cNvSpPr txBox="1"/>
           <p:nvPr/>
         </p:nvSpPr>
@@ -17809,7 +17857,7 @@
       </p:sp>
       <p:sp>
         <p:nvSpPr>
-          <p:cNvPr id="194" name=""/>
+          <p:cNvPr id="195" name=""/>
           <p:cNvSpPr txBox="1"/>
           <p:nvPr/>
         </p:nvSpPr>
@@ -17857,7 +17905,7 @@
       </p:sp>
       <p:sp>
         <p:nvSpPr>
-          <p:cNvPr id="195" name=""/>
+          <p:cNvPr id="196" name=""/>
           <p:cNvSpPr txBox="1"/>
           <p:nvPr/>
         </p:nvSpPr>
@@ -17905,14 +17953,14 @@
       </p:sp>
       <p:sp>
         <p:nvSpPr>
-          <p:cNvPr id="196" name=""/>
+          <p:cNvPr id="197" name=""/>
           <p:cNvSpPr txBox="1"/>
           <p:nvPr/>
         </p:nvSpPr>
         <p:spPr>
           <a:xfrm>
             <a:off x="762120" y="4811040"/>
-            <a:ext cx="4747680" cy="233640"/>
+            <a:ext cx="8903160" cy="233640"/>
           </a:xfrm>
           <a:prstGeom prst="rect">
             <a:avLst/>
@@ -17938,7 +17986,7 @@
                 <a:latin typeface="Arial"/>
                 <a:ea typeface="Arial"/>
               </a:rPr>
-              <a:t>Vos, mientras tanto, seguís con la mano levantada.</a:t>
+              <a:t>Vos, mientras tanto, seguís con la mano levantada — esperando que alguien te dé la fe de vida.</a:t>
             </a:r>
             <a:endParaRPr lang="en-US" sz="1650" b="0" u="none" strike="noStrike">
               <a:solidFill>
@@ -17953,7 +18001,7 @@
       </p:sp>
       <p:sp>
         <p:nvSpPr>
-          <p:cNvPr id="197" name=""/>
+          <p:cNvPr id="198" name=""/>
           <p:cNvSpPr txBox="1"/>
           <p:nvPr/>
         </p:nvSpPr>
@@ -18001,7 +18049,7 @@
       </p:sp>
       <p:sp>
         <p:nvSpPr>
-          <p:cNvPr id="198" name=""/>
+          <p:cNvPr id="199" name=""/>
           <p:cNvSpPr txBox="1"/>
           <p:nvPr/>
         </p:nvSpPr>
